--- a/RFP/IoTeye - Arc Mercer Pitch.pptx
+++ b/RFP/IoTeye - Arc Mercer Pitch.pptx
@@ -3403,7 +3403,7 @@
               </a:defRPr>
             </a:pPr>
             <a:r>
-              <a:t>Rewards Marketplace</a:t>
+              <a:t>Rewards Marketplace — Digital, Café &amp; In-Person Store</a:t>
             </a:r>
           </a:p>
         </p:txBody>
@@ -3453,7 +3453,7 @@
         <p:spPr>
           <a:xfrm>
             <a:off x="365760" y="1691640"/>
-            <a:ext cx="5029200" cy="2011680"/>
+            <a:ext cx="5029200" cy="1371600"/>
           </a:xfrm>
           <a:prstGeom prst="rect">
             <a:avLst/>
@@ -3468,7 +3468,7 @@
           <a:p>
             <a:pPr algn="l">
               <a:spcAft>
-                <a:spcPts val="800"/>
+                <a:spcPts val="600"/>
               </a:spcAft>
               <a:defRPr sz="1400" b="0">
                 <a:solidFill>
@@ -3484,7 +3484,7 @@
           <a:p>
             <a:pPr>
               <a:spcAft>
-                <a:spcPts val="800"/>
+                <a:spcPts val="600"/>
               </a:spcAft>
               <a:defRPr sz="1400">
                 <a:solidFill>
@@ -3500,7 +3500,7 @@
           <a:p>
             <a:pPr>
               <a:spcAft>
-                <a:spcPts val="800"/>
+                <a:spcPts val="600"/>
               </a:spcAft>
               <a:defRPr sz="1400">
                 <a:solidFill>
@@ -3516,7 +3516,7 @@
           <a:p>
             <a:pPr>
               <a:spcAft>
-                <a:spcPts val="800"/>
+                <a:spcPts val="600"/>
               </a:spcAft>
               <a:defRPr sz="1400">
                 <a:solidFill>
@@ -3529,10 +3529,85 @@
               <a:t>• One-tap redemption with confirmation</a:t>
             </a:r>
           </a:p>
+        </p:txBody>
+      </p:sp>
+      <p:sp>
+        <p:nvSpPr>
+          <p:cNvPr id="6" name="TextBox 5"/>
+          <p:cNvSpPr txBox="1"/>
+          <p:nvPr/>
+        </p:nvSpPr>
+        <p:spPr>
+          <a:xfrm>
+            <a:off x="365760" y="3063240"/>
+            <a:ext cx="5029200" cy="411480"/>
+          </a:xfrm>
+          <a:prstGeom prst="rect">
+            <a:avLst/>
+          </a:prstGeom>
+          <a:noFill/>
+        </p:spPr>
+        <p:txBody>
+          <a:bodyPr wrap="square">
+            <a:spAutoFit/>
+          </a:bodyPr>
+          <a:lstStyle/>
+          <a:p>
+            <a:pPr algn="l">
+              <a:defRPr sz="2200" b="1">
+                <a:solidFill>
+                  <a:srgbClr val="2E86C1"/>
+                </a:solidFill>
+                <a:latin typeface="Calibri"/>
+              </a:defRPr>
+            </a:pPr>
+            <a:r>
+              <a:t>Café Cashier Redemption Screen</a:t>
+            </a:r>
+          </a:p>
+        </p:txBody>
+      </p:sp>
+      <p:sp>
+        <p:nvSpPr>
+          <p:cNvPr id="7" name="TextBox 6"/>
+          <p:cNvSpPr txBox="1"/>
+          <p:nvPr/>
+        </p:nvSpPr>
+        <p:spPr>
+          <a:xfrm>
+            <a:off x="365760" y="3520440"/>
+            <a:ext cx="5029200" cy="1188720"/>
+          </a:xfrm>
+          <a:prstGeom prst="rect">
+            <a:avLst/>
+          </a:prstGeom>
+          <a:noFill/>
+        </p:spPr>
+        <p:txBody>
+          <a:bodyPr wrap="square">
+            <a:spAutoFit/>
+          </a:bodyPr>
+          <a:lstStyle/>
+          <a:p>
+            <a:pPr algn="l">
+              <a:spcAft>
+                <a:spcPts val="600"/>
+              </a:spcAft>
+              <a:defRPr sz="1400" b="0">
+                <a:solidFill>
+                  <a:srgbClr val="333333"/>
+                </a:solidFill>
+                <a:latin typeface="Calibri"/>
+              </a:defRPr>
+            </a:pPr>
+            <a:r>
+              <a:t>• Tablet-friendly cashier interface for meal redemptions</a:t>
+            </a:r>
+          </a:p>
           <a:p>
             <a:pPr>
               <a:spcAft>
-                <a:spcPts val="800"/>
+                <a:spcPts val="600"/>
               </a:spcAft>
               <a:defRPr sz="1400">
                 <a:solidFill>
@@ -3542,20 +3617,52 @@
               </a:defRPr>
             </a:pPr>
             <a:r>
-              <a:t>• Order history for employees</a:t>
-            </a:r>
-          </a:p>
-        </p:txBody>
-      </p:sp>
-      <p:sp>
-        <p:nvSpPr>
-          <p:cNvPr id="6" name="TextBox 5"/>
-          <p:cNvSpPr txBox="1"/>
-          <p:nvPr/>
-        </p:nvSpPr>
-        <p:spPr>
-          <a:xfrm>
-            <a:off x="365760" y="3749039"/>
+              <a:t>• Employee lookup by name, badge ID, or QR code</a:t>
+            </a:r>
+          </a:p>
+          <a:p>
+            <a:pPr>
+              <a:spcAft>
+                <a:spcPts val="600"/>
+              </a:spcAft>
+              <a:defRPr sz="1400">
+                <a:solidFill>
+                  <a:srgbClr val="333333"/>
+                </a:solidFill>
+                <a:latin typeface="Calibri"/>
+              </a:defRPr>
+            </a:pPr>
+            <a:r>
+              <a:t>• Balance display → meal selection → point deduction</a:t>
+            </a:r>
+          </a:p>
+          <a:p>
+            <a:pPr>
+              <a:spcAft>
+                <a:spcPts val="600"/>
+              </a:spcAft>
+              <a:defRPr sz="1400">
+                <a:solidFill>
+                  <a:srgbClr val="333333"/>
+                </a:solidFill>
+                <a:latin typeface="Calibri"/>
+              </a:defRPr>
+            </a:pPr>
+            <a:r>
+              <a:t>• No POS integration required — standalone operation</a:t>
+            </a:r>
+          </a:p>
+        </p:txBody>
+      </p:sp>
+      <p:sp>
+        <p:nvSpPr>
+          <p:cNvPr id="8" name="TextBox 7"/>
+          <p:cNvSpPr txBox="1"/>
+          <p:nvPr/>
+        </p:nvSpPr>
+        <p:spPr>
+          <a:xfrm>
+            <a:off x="365760" y="4709160"/>
             <a:ext cx="5029200" cy="411480"/>
           </a:xfrm>
           <a:prstGeom prst="rect">
@@ -3578,21 +3685,21 @@
               </a:defRPr>
             </a:pPr>
             <a:r>
-              <a:t>Admin Fulfillment Tools</a:t>
-            </a:r>
-          </a:p>
-        </p:txBody>
-      </p:sp>
-      <p:sp>
-        <p:nvSpPr>
-          <p:cNvPr id="7" name="TextBox 6"/>
-          <p:cNvSpPr txBox="1"/>
-          <p:nvPr/>
-        </p:nvSpPr>
-        <p:spPr>
-          <a:xfrm>
-            <a:off x="365760" y="4206240"/>
-            <a:ext cx="5029200" cy="2286000"/>
+              <a:t>In-Person Store &amp; QR Redemption</a:t>
+            </a:r>
+          </a:p>
+        </p:txBody>
+      </p:sp>
+      <p:sp>
+        <p:nvSpPr>
+          <p:cNvPr id="9" name="TextBox 8"/>
+          <p:cNvSpPr txBox="1"/>
+          <p:nvPr/>
+        </p:nvSpPr>
+        <p:spPr>
+          <a:xfrm>
+            <a:off x="365760" y="5166360"/>
+            <a:ext cx="5029200" cy="1188720"/>
           </a:xfrm>
           <a:prstGeom prst="rect">
             <a:avLst/>
@@ -3607,7 +3714,7 @@
           <a:p>
             <a:pPr algn="l">
               <a:spcAft>
-                <a:spcPts val="800"/>
+                <a:spcPts val="600"/>
               </a:spcAft>
               <a:defRPr sz="1400" b="0">
                 <a:solidFill>
@@ -3617,13 +3724,13 @@
               </a:defRPr>
             </a:pPr>
             <a:r>
-              <a:t>• Inventory management (add/edit items, stock levels)</a:t>
+              <a:t>• Employee QR code on profile / home screen</a:t>
             </a:r>
           </a:p>
           <a:p>
             <a:pPr>
               <a:spcAft>
-                <a:spcPts val="800"/>
+                <a:spcPts val="600"/>
               </a:spcAft>
               <a:defRPr sz="1400">
                 <a:solidFill>
@@ -3633,13 +3740,13 @@
               </a:defRPr>
             </a:pPr>
             <a:r>
-              <a:t>• Low-stock alerts, out-of-stock auto-hiding</a:t>
+              <a:t>• Store attendant scans QR → select item → confirm</a:t>
             </a:r>
           </a:p>
           <a:p>
             <a:pPr>
               <a:spcAft>
-                <a:spcPts val="800"/>
+                <a:spcPts val="600"/>
               </a:spcAft>
               <a:defRPr sz="1400">
                 <a:solidFill>
@@ -3649,46 +3756,14 @@
               </a:defRPr>
             </a:pPr>
             <a:r>
-              <a:t>• Order queue: Pending → Processing → Fulfilled</a:t>
-            </a:r>
-          </a:p>
-          <a:p>
-            <a:pPr>
-              <a:spcAft>
-                <a:spcPts val="800"/>
-              </a:spcAft>
-              <a:defRPr sz="1400">
-                <a:solidFill>
-                  <a:srgbClr val="333333"/>
-                </a:solidFill>
-                <a:latin typeface="Calibri"/>
-              </a:defRPr>
-            </a:pPr>
-            <a:r>
-              <a:t>• Digital gift card: API-based instant delivery</a:t>
-            </a:r>
-          </a:p>
-          <a:p>
-            <a:pPr>
-              <a:spcAft>
-                <a:spcPts val="800"/>
-              </a:spcAft>
-              <a:defRPr sz="1400">
-                <a:solidFill>
-                  <a:srgbClr val="333333"/>
-                </a:solidFill>
-                <a:latin typeface="Calibri"/>
-              </a:defRPr>
-            </a:pPr>
-            <a:r>
-              <a:t>• Gift card fees: 3-5% vendor markup (pass-through)</a:t>
+              <a:t>• Inventory sync: physical store + digital storefront</a:t>
             </a:r>
           </a:p>
         </p:txBody>
       </p:sp>
       <p:pic>
         <p:nvPicPr>
-          <p:cNvPr id="8" name="Picture 7" descr="reward_4.png"/>
+          <p:cNvPr id="10" name="Picture 9" descr="reward_4.png"/>
           <p:cNvPicPr>
             <a:picLocks noChangeAspect="1"/>
           </p:cNvPicPr>
@@ -3810,7 +3885,7 @@
               </a:defRPr>
             </a:pPr>
             <a:r>
-              <a:t>Paycom Integration &amp; SSO</a:t>
+              <a:t>Paycom Integration &amp; Authentication</a:t>
             </a:r>
           </a:p>
         </p:txBody>
@@ -4096,21 +4171,100 @@
               </a:defRPr>
             </a:pPr>
             <a:r>
-              <a:t>Single Sign-On (SSO)</a:t>
-            </a:r>
-          </a:p>
-        </p:txBody>
-      </p:sp>
-      <p:sp>
-        <p:nvSpPr>
-          <p:cNvPr id="9" name="TextBox 8"/>
-          <p:cNvSpPr txBox="1"/>
+              <a:t>Three Login Paths</a:t>
+            </a:r>
+          </a:p>
+        </p:txBody>
+      </p:sp>
+      <p:sp>
+        <p:nvSpPr>
+          <p:cNvPr id="9" name="Rectangle 8"/>
+          <p:cNvSpPr/>
           <p:nvPr/>
         </p:nvSpPr>
         <p:spPr>
           <a:xfrm>
             <a:off x="6400800" y="1828800"/>
-            <a:ext cx="5029200" cy="4114800"/>
+            <a:ext cx="5029200" cy="1234440"/>
+          </a:xfrm>
+          <a:prstGeom prst="rect">
+            <a:avLst/>
+          </a:prstGeom>
+          <a:solidFill>
+            <a:srgbClr val="D6EAF8"/>
+          </a:solidFill>
+          <a:ln>
+            <a:noFill/>
+          </a:ln>
+        </p:spPr>
+        <p:style>
+          <a:lnRef idx="1">
+            <a:schemeClr val="accent1"/>
+          </a:lnRef>
+          <a:fillRef idx="3">
+            <a:schemeClr val="accent1"/>
+          </a:fillRef>
+          <a:effectRef idx="2">
+            <a:schemeClr val="accent1"/>
+          </a:effectRef>
+          <a:fontRef idx="minor">
+            <a:schemeClr val="lt1"/>
+          </a:fontRef>
+        </p:style>
+        <p:txBody>
+          <a:bodyPr rtlCol="0" anchor="ctr"/>
+          <a:lstStyle/>
+          <a:p>
+            <a:pPr algn="ctr"/>
+          </a:p>
+        </p:txBody>
+      </p:sp>
+      <p:sp>
+        <p:nvSpPr>
+          <p:cNvPr id="10" name="TextBox 9"/>
+          <p:cNvSpPr txBox="1"/>
+          <p:nvPr/>
+        </p:nvSpPr>
+        <p:spPr>
+          <a:xfrm>
+            <a:off x="6537960" y="1874519"/>
+            <a:ext cx="4754880" cy="320040"/>
+          </a:xfrm>
+          <a:prstGeom prst="rect">
+            <a:avLst/>
+          </a:prstGeom>
+          <a:noFill/>
+        </p:spPr>
+        <p:txBody>
+          <a:bodyPr wrap="square">
+            <a:spAutoFit/>
+          </a:bodyPr>
+          <a:lstStyle/>
+          <a:p>
+            <a:pPr algn="l">
+              <a:defRPr sz="1600" b="1">
+                <a:solidFill>
+                  <a:srgbClr val="1B2A4A"/>
+                </a:solidFill>
+                <a:latin typeface="Calibri"/>
+              </a:defRPr>
+            </a:pPr>
+            <a:r>
+              <a:t>➀  Badge ID + PIN (Frontline Staff)</a:t>
+            </a:r>
+          </a:p>
+        </p:txBody>
+      </p:sp>
+      <p:sp>
+        <p:nvSpPr>
+          <p:cNvPr id="11" name="TextBox 10"/>
+          <p:cNvSpPr txBox="1"/>
+          <p:nvPr/>
+        </p:nvSpPr>
+        <p:spPr>
+          <a:xfrm>
+            <a:off x="6537960" y="2194560"/>
+            <a:ext cx="4754880" cy="822960"/>
           </a:xfrm>
           <a:prstGeom prst="rect">
             <a:avLst/>
@@ -4125,97 +4279,381 @@
           <a:p>
             <a:pPr algn="l">
               <a:spcAft>
-                <a:spcPts val="1000"/>
+                <a:spcPts val="400"/>
               </a:spcAft>
-              <a:defRPr sz="1500" b="0">
-                <a:solidFill>
-                  <a:srgbClr val="333333"/>
-                </a:solidFill>
-                <a:latin typeface="Calibri"/>
-              </a:defRPr>
-            </a:pPr>
-            <a:r>
-              <a:t>• Supabase Auth: SAML 2.0, OAuth 2.0, OIDC</a:t>
+              <a:defRPr sz="1300" b="0">
+                <a:solidFill>
+                  <a:srgbClr val="333333"/>
+                </a:solidFill>
+                <a:latin typeface="Calibri"/>
+              </a:defRPr>
+            </a:pPr>
+            <a:r>
+              <a:t>• Paycom badge ID — the ID they already carry daily</a:t>
             </a:r>
           </a:p>
           <a:p>
             <a:pPr>
               <a:spcAft>
-                <a:spcPts val="1000"/>
+                <a:spcPts val="400"/>
               </a:spcAft>
-              <a:defRPr sz="1500">
-                <a:solidFill>
-                  <a:srgbClr val="333333"/>
-                </a:solidFill>
-                <a:latin typeface="Calibri"/>
-              </a:defRPr>
-            </a:pPr>
-            <a:r>
-              <a:t>• Initial: Google Workspace SSO (current provider)</a:t>
+              <a:defRPr sz="1300">
+                <a:solidFill>
+                  <a:srgbClr val="333333"/>
+                </a:solidFill>
+                <a:latin typeface="Calibri"/>
+              </a:defRPr>
+            </a:pPr>
+            <a:r>
+              <a:t>• Self-set 4–6 digit PIN, no email required</a:t>
             </a:r>
           </a:p>
           <a:p>
             <a:pPr>
               <a:spcAft>
-                <a:spcPts val="1000"/>
+                <a:spcPts val="400"/>
               </a:spcAft>
-              <a:defRPr sz="1500">
-                <a:solidFill>
-                  <a:srgbClr val="333333"/>
-                </a:solidFill>
-                <a:latin typeface="Calibri"/>
-              </a:defRPr>
-            </a:pPr>
-            <a:r>
-              <a:t>• Future: Microsoft Entra ID — zero-downtime migration</a:t>
+              <a:defRPr sz="1300">
+                <a:solidFill>
+                  <a:srgbClr val="333333"/>
+                </a:solidFill>
+                <a:latin typeface="Calibri"/>
+              </a:defRPr>
+            </a:pPr>
+            <a:r>
+              <a:t>• Hashed/salted PINs, lockout after 5 failed attempts</a:t>
+            </a:r>
+          </a:p>
+        </p:txBody>
+      </p:sp>
+      <p:sp>
+        <p:nvSpPr>
+          <p:cNvPr id="12" name="Rectangle 11"/>
+          <p:cNvSpPr/>
+          <p:nvPr/>
+        </p:nvSpPr>
+        <p:spPr>
+          <a:xfrm>
+            <a:off x="6400800" y="3200400"/>
+            <a:ext cx="5029200" cy="1097280"/>
+          </a:xfrm>
+          <a:prstGeom prst="rect">
+            <a:avLst/>
+          </a:prstGeom>
+          <a:solidFill>
+            <a:srgbClr val="F2F2F2"/>
+          </a:solidFill>
+          <a:ln>
+            <a:noFill/>
+          </a:ln>
+        </p:spPr>
+        <p:style>
+          <a:lnRef idx="1">
+            <a:schemeClr val="accent1"/>
+          </a:lnRef>
+          <a:fillRef idx="3">
+            <a:schemeClr val="accent1"/>
+          </a:fillRef>
+          <a:effectRef idx="2">
+            <a:schemeClr val="accent1"/>
+          </a:effectRef>
+          <a:fontRef idx="minor">
+            <a:schemeClr val="lt1"/>
+          </a:fontRef>
+        </p:style>
+        <p:txBody>
+          <a:bodyPr rtlCol="0" anchor="ctr"/>
+          <a:lstStyle/>
+          <a:p>
+            <a:pPr algn="ctr"/>
+          </a:p>
+        </p:txBody>
+      </p:sp>
+      <p:sp>
+        <p:nvSpPr>
+          <p:cNvPr id="13" name="TextBox 12"/>
+          <p:cNvSpPr txBox="1"/>
+          <p:nvPr/>
+        </p:nvSpPr>
+        <p:spPr>
+          <a:xfrm>
+            <a:off x="6537960" y="3246120"/>
+            <a:ext cx="4754880" cy="320040"/>
+          </a:xfrm>
+          <a:prstGeom prst="rect">
+            <a:avLst/>
+          </a:prstGeom>
+          <a:noFill/>
+        </p:spPr>
+        <p:txBody>
+          <a:bodyPr wrap="square">
+            <a:spAutoFit/>
+          </a:bodyPr>
+          <a:lstStyle/>
+          <a:p>
+            <a:pPr algn="l">
+              <a:defRPr sz="1600" b="1">
+                <a:solidFill>
+                  <a:srgbClr val="1B2A4A"/>
+                </a:solidFill>
+                <a:latin typeface="Calibri"/>
+              </a:defRPr>
+            </a:pPr>
+            <a:r>
+              <a:t>➁  Google Workspace SSO (Admin &amp; Mgmt)</a:t>
+            </a:r>
+          </a:p>
+        </p:txBody>
+      </p:sp>
+      <p:sp>
+        <p:nvSpPr>
+          <p:cNvPr id="14" name="TextBox 13"/>
+          <p:cNvSpPr txBox="1"/>
+          <p:nvPr/>
+        </p:nvSpPr>
+        <p:spPr>
+          <a:xfrm>
+            <a:off x="6537960" y="3566160"/>
+            <a:ext cx="4754880" cy="640080"/>
+          </a:xfrm>
+          <a:prstGeom prst="rect">
+            <a:avLst/>
+          </a:prstGeom>
+          <a:noFill/>
+        </p:spPr>
+        <p:txBody>
+          <a:bodyPr wrap="square">
+            <a:spAutoFit/>
+          </a:bodyPr>
+          <a:lstStyle/>
+          <a:p>
+            <a:pPr algn="l">
+              <a:spcAft>
+                <a:spcPts val="400"/>
+              </a:spcAft>
+              <a:defRPr sz="1300" b="0">
+                <a:solidFill>
+                  <a:srgbClr val="333333"/>
+                </a:solidFill>
+                <a:latin typeface="Calibri"/>
+              </a:defRPr>
+            </a:pPr>
+            <a:r>
+              <a:t>• Supabase Auth: SAML 2.0, OAuth 2.0, OIDC</a:t>
             </a:r>
           </a:p>
           <a:p>
             <a:pPr>
               <a:spcAft>
-                <a:spcPts val="1000"/>
+                <a:spcPts val="400"/>
               </a:spcAft>
-              <a:defRPr sz="1500">
-                <a:solidFill>
-                  <a:srgbClr val="333333"/>
-                </a:solidFill>
-                <a:latin typeface="Calibri"/>
-              </a:defRPr>
-            </a:pPr>
-            <a:r>
-              <a:t>• Both providers can run in parallel during transition</a:t>
-            </a:r>
-          </a:p>
-          <a:p>
-            <a:pPr>
-              <a:spcAft>
-                <a:spcPts val="1000"/>
-              </a:spcAft>
-              <a:defRPr sz="1500">
-                <a:solidFill>
-                  <a:srgbClr val="333333"/>
-                </a:solidFill>
-                <a:latin typeface="Calibri"/>
-              </a:defRPr>
-            </a:pPr>
-            <a:r>
-              <a:t>• Fallback: email/password for part-time staff</a:t>
-            </a:r>
-          </a:p>
-          <a:p>
-            <a:pPr>
-              <a:spcAft>
-                <a:spcPts val="1000"/>
-              </a:spcAft>
-              <a:defRPr sz="1500">
-                <a:solidFill>
-                  <a:srgbClr val="333333"/>
-                </a:solidFill>
-                <a:latin typeface="Calibri"/>
-              </a:defRPr>
-            </a:pPr>
-            <a:r>
-              <a:t>• Employee clicks 'Sign In' → Google login → done</a:t>
+              <a:defRPr sz="1300">
+                <a:solidFill>
+                  <a:srgbClr val="333333"/>
+                </a:solidFill>
+                <a:latin typeface="Calibri"/>
+              </a:defRPr>
+            </a:pPr>
+            <a:r>
+              <a:t>• Future: Microsoft Entra ID — zero-downtime migration</a:t>
+            </a:r>
+          </a:p>
+        </p:txBody>
+      </p:sp>
+      <p:sp>
+        <p:nvSpPr>
+          <p:cNvPr id="15" name="Rectangle 14"/>
+          <p:cNvSpPr/>
+          <p:nvPr/>
+        </p:nvSpPr>
+        <p:spPr>
+          <a:xfrm>
+            <a:off x="6400800" y="4434840"/>
+            <a:ext cx="5029200" cy="640080"/>
+          </a:xfrm>
+          <a:prstGeom prst="rect">
+            <a:avLst/>
+          </a:prstGeom>
+          <a:solidFill>
+            <a:srgbClr val="F2F2F2"/>
+          </a:solidFill>
+          <a:ln>
+            <a:noFill/>
+          </a:ln>
+        </p:spPr>
+        <p:style>
+          <a:lnRef idx="1">
+            <a:schemeClr val="accent1"/>
+          </a:lnRef>
+          <a:fillRef idx="3">
+            <a:schemeClr val="accent1"/>
+          </a:fillRef>
+          <a:effectRef idx="2">
+            <a:schemeClr val="accent1"/>
+          </a:effectRef>
+          <a:fontRef idx="minor">
+            <a:schemeClr val="lt1"/>
+          </a:fontRef>
+        </p:style>
+        <p:txBody>
+          <a:bodyPr rtlCol="0" anchor="ctr"/>
+          <a:lstStyle/>
+          <a:p>
+            <a:pPr algn="ctr"/>
+          </a:p>
+        </p:txBody>
+      </p:sp>
+      <p:sp>
+        <p:nvSpPr>
+          <p:cNvPr id="16" name="TextBox 15"/>
+          <p:cNvSpPr txBox="1"/>
+          <p:nvPr/>
+        </p:nvSpPr>
+        <p:spPr>
+          <a:xfrm>
+            <a:off x="6537960" y="4480560"/>
+            <a:ext cx="4754880" cy="320040"/>
+          </a:xfrm>
+          <a:prstGeom prst="rect">
+            <a:avLst/>
+          </a:prstGeom>
+          <a:noFill/>
+        </p:spPr>
+        <p:txBody>
+          <a:bodyPr wrap="square">
+            <a:spAutoFit/>
+          </a:bodyPr>
+          <a:lstStyle/>
+          <a:p>
+            <a:pPr algn="l">
+              <a:defRPr sz="1600" b="1">
+                <a:solidFill>
+                  <a:srgbClr val="1B2A4A"/>
+                </a:solidFill>
+                <a:latin typeface="Calibri"/>
+              </a:defRPr>
+            </a:pPr>
+            <a:r>
+              <a:t>➂  Email / Password Fallback</a:t>
+            </a:r>
+          </a:p>
+        </p:txBody>
+      </p:sp>
+      <p:sp>
+        <p:nvSpPr>
+          <p:cNvPr id="17" name="TextBox 16"/>
+          <p:cNvSpPr txBox="1"/>
+          <p:nvPr/>
+        </p:nvSpPr>
+        <p:spPr>
+          <a:xfrm>
+            <a:off x="6537960" y="4800600"/>
+            <a:ext cx="4754880" cy="274320"/>
+          </a:xfrm>
+          <a:prstGeom prst="rect">
+            <a:avLst/>
+          </a:prstGeom>
+          <a:noFill/>
+        </p:spPr>
+        <p:txBody>
+          <a:bodyPr wrap="square">
+            <a:spAutoFit/>
+          </a:bodyPr>
+          <a:lstStyle/>
+          <a:p>
+            <a:pPr algn="l">
+              <a:defRPr sz="1300" b="0">
+                <a:solidFill>
+                  <a:srgbClr val="333333"/>
+                </a:solidFill>
+                <a:latin typeface="Calibri"/>
+              </a:defRPr>
+            </a:pPr>
+            <a:r>
+              <a:t>For part-time or seasonal staff with email but not on SSO</a:t>
+            </a:r>
+          </a:p>
+        </p:txBody>
+      </p:sp>
+      <p:sp>
+        <p:nvSpPr>
+          <p:cNvPr id="18" name="Rectangle 17"/>
+          <p:cNvSpPr/>
+          <p:nvPr/>
+        </p:nvSpPr>
+        <p:spPr>
+          <a:xfrm>
+            <a:off x="6400800" y="5303520"/>
+            <a:ext cx="5029200" cy="731520"/>
+          </a:xfrm>
+          <a:prstGeom prst="rect">
+            <a:avLst/>
+          </a:prstGeom>
+          <a:solidFill>
+            <a:srgbClr val="27AE60"/>
+          </a:solidFill>
+          <a:ln>
+            <a:noFill/>
+          </a:ln>
+        </p:spPr>
+        <p:style>
+          <a:lnRef idx="1">
+            <a:schemeClr val="accent1"/>
+          </a:lnRef>
+          <a:fillRef idx="3">
+            <a:schemeClr val="accent1"/>
+          </a:fillRef>
+          <a:effectRef idx="2">
+            <a:schemeClr val="accent1"/>
+          </a:effectRef>
+          <a:fontRef idx="minor">
+            <a:schemeClr val="lt1"/>
+          </a:fontRef>
+        </p:style>
+        <p:txBody>
+          <a:bodyPr rtlCol="0" anchor="ctr"/>
+          <a:lstStyle/>
+          <a:p>
+            <a:pPr algn="ctr"/>
+          </a:p>
+        </p:txBody>
+      </p:sp>
+      <p:sp>
+        <p:nvSpPr>
+          <p:cNvPr id="19" name="TextBox 18"/>
+          <p:cNvSpPr txBox="1"/>
+          <p:nvPr/>
+        </p:nvSpPr>
+        <p:spPr>
+          <a:xfrm>
+            <a:off x="6537960" y="5349240"/>
+            <a:ext cx="4754880" cy="594360"/>
+          </a:xfrm>
+          <a:prstGeom prst="rect">
+            <a:avLst/>
+          </a:prstGeom>
+          <a:noFill/>
+        </p:spPr>
+        <p:txBody>
+          <a:bodyPr wrap="square">
+            <a:spAutoFit/>
+          </a:bodyPr>
+          <a:lstStyle/>
+          <a:p>
+            <a:pPr algn="l">
+              <a:defRPr sz="1400" b="1">
+                <a:solidFill>
+                  <a:srgbClr val="FFFFFF"/>
+                </a:solidFill>
+                <a:latin typeface="Calibri"/>
+              </a:defRPr>
+            </a:pPr>
+            <a:r>
+              <a:t>★ Every employee can access the platform —</a:t>
+            </a:r>
+            <a:br/>
+            <a:r>
+              <a:t>no matter their tech level or email situation</a:t>
             </a:r>
           </a:p>
         </p:txBody>
@@ -4320,7 +4758,7 @@
               </a:defRPr>
             </a:pPr>
             <a:r>
-              <a:t>Accessibility &amp; Mobile-First Design</a:t>
+              <a:t>Accessibility, Dark Mode &amp; Mobile-First Design</a:t>
             </a:r>
           </a:p>
         </p:txBody>
@@ -4634,7 +5072,7 @@
               </a:defRPr>
             </a:pPr>
             <a:r>
-              <a:t>• Bottom nav: Home, Nominate, Store, Points, Profile</a:t>
+              <a:t>• Dark mode / light mode toggle for night shifts</a:t>
             </a:r>
           </a:p>
           <a:p>
@@ -4650,7 +5088,7 @@
               </a:defRPr>
             </a:pPr>
             <a:r>
-              <a:t>• Touch-optimized: swipe, pull-to-refresh</a:t>
+              <a:t>• System preference detection, persisted per user</a:t>
             </a:r>
           </a:p>
           <a:p>
@@ -5475,7 +5913,7 @@
               </a:defRPr>
             </a:pPr>
             <a:r>
-              <a:t>• QA queue (approve/return/decline)</a:t>
+              <a:t>• Selection committee ranked-choice voting</a:t>
             </a:r>
           </a:p>
           <a:p>
@@ -5491,7 +5929,7 @@
               </a:defRPr>
             </a:pPr>
             <a:r>
-              <a:t>• Paycom SFTP sync</a:t>
+              <a:t>• QA queue + revise-and-resubmit workflow</a:t>
             </a:r>
           </a:p>
           <a:p>
@@ -5507,7 +5945,7 @@
               </a:defRPr>
             </a:pPr>
             <a:r>
-              <a:t>• Google Workspace SSO</a:t>
+              <a:t>• Paycom SFTP sync</a:t>
             </a:r>
           </a:p>
           <a:p>
@@ -5523,82 +5961,7 @@
               </a:defRPr>
             </a:pPr>
             <a:r>
-              <a:t>• Manual point bestowal + audit trail</a:t>
-            </a:r>
-          </a:p>
-        </p:txBody>
-      </p:sp>
-      <p:sp>
-        <p:nvSpPr>
-          <p:cNvPr id="12" name="TextBox 11"/>
-          <p:cNvSpPr txBox="1"/>
-          <p:nvPr/>
-        </p:nvSpPr>
-        <p:spPr>
-          <a:xfrm>
-            <a:off x="4572000" y="4389120"/>
-            <a:ext cx="3474720" cy="365760"/>
-          </a:xfrm>
-          <a:prstGeom prst="rect">
-            <a:avLst/>
-          </a:prstGeom>
-          <a:noFill/>
-        </p:spPr>
-        <p:txBody>
-          <a:bodyPr wrap="square">
-            <a:spAutoFit/>
-          </a:bodyPr>
-          <a:lstStyle/>
-          <a:p>
-            <a:pPr algn="l">
-              <a:defRPr sz="1600" b="1">
-                <a:solidFill>
-                  <a:srgbClr val="14735A"/>
-                </a:solidFill>
-                <a:latin typeface="Calibri"/>
-              </a:defRPr>
-            </a:pPr>
-            <a:r>
-              <a:t>Phase 2 Deliverables</a:t>
-            </a:r>
-          </a:p>
-        </p:txBody>
-      </p:sp>
-      <p:sp>
-        <p:nvSpPr>
-          <p:cNvPr id="13" name="TextBox 12"/>
-          <p:cNvSpPr txBox="1"/>
-          <p:nvPr/>
-        </p:nvSpPr>
-        <p:spPr>
-          <a:xfrm>
-            <a:off x="4572000" y="4754880"/>
-            <a:ext cx="3474720" cy="2286000"/>
-          </a:xfrm>
-          <a:prstGeom prst="rect">
-            <a:avLst/>
-          </a:prstGeom>
-          <a:noFill/>
-        </p:spPr>
-        <p:txBody>
-          <a:bodyPr wrap="square">
-            <a:spAutoFit/>
-          </a:bodyPr>
-          <a:lstStyle/>
-          <a:p>
-            <a:pPr algn="l">
-              <a:spcAft>
-                <a:spcPts val="400"/>
-              </a:spcAft>
-              <a:defRPr sz="1300" b="0">
-                <a:solidFill>
-                  <a:srgbClr val="333333"/>
-                </a:solidFill>
-                <a:latin typeface="Calibri"/>
-              </a:defRPr>
-            </a:pPr>
-            <a:r>
-              <a:t>• Employee dashboards</a:t>
+              <a:t>• Badge ID + PIN auth (frontline staff)</a:t>
             </a:r>
           </a:p>
           <a:p>
@@ -5614,7 +5977,7 @@
               </a:defRPr>
             </a:pPr>
             <a:r>
-              <a:t>• Leadership analytics</a:t>
+              <a:t>• Google Workspace SSO</a:t>
             </a:r>
           </a:p>
           <a:p>
@@ -5630,7 +5993,82 @@
               </a:defRPr>
             </a:pPr>
             <a:r>
-              <a:t>• Automated birthday/anniversary awards</a:t>
+              <a:t>• Manual point bestowal + audit trail</a:t>
+            </a:r>
+          </a:p>
+        </p:txBody>
+      </p:sp>
+      <p:sp>
+        <p:nvSpPr>
+          <p:cNvPr id="12" name="TextBox 11"/>
+          <p:cNvSpPr txBox="1"/>
+          <p:nvPr/>
+        </p:nvSpPr>
+        <p:spPr>
+          <a:xfrm>
+            <a:off x="4572000" y="4389120"/>
+            <a:ext cx="3474720" cy="365760"/>
+          </a:xfrm>
+          <a:prstGeom prst="rect">
+            <a:avLst/>
+          </a:prstGeom>
+          <a:noFill/>
+        </p:spPr>
+        <p:txBody>
+          <a:bodyPr wrap="square">
+            <a:spAutoFit/>
+          </a:bodyPr>
+          <a:lstStyle/>
+          <a:p>
+            <a:pPr algn="l">
+              <a:defRPr sz="1600" b="1">
+                <a:solidFill>
+                  <a:srgbClr val="14735A"/>
+                </a:solidFill>
+                <a:latin typeface="Calibri"/>
+              </a:defRPr>
+            </a:pPr>
+            <a:r>
+              <a:t>Phase 2 Deliverables</a:t>
+            </a:r>
+          </a:p>
+        </p:txBody>
+      </p:sp>
+      <p:sp>
+        <p:nvSpPr>
+          <p:cNvPr id="13" name="TextBox 12"/>
+          <p:cNvSpPr txBox="1"/>
+          <p:nvPr/>
+        </p:nvSpPr>
+        <p:spPr>
+          <a:xfrm>
+            <a:off x="4572000" y="4754880"/>
+            <a:ext cx="3474720" cy="2286000"/>
+          </a:xfrm>
+          <a:prstGeom prst="rect">
+            <a:avLst/>
+          </a:prstGeom>
+          <a:noFill/>
+        </p:spPr>
+        <p:txBody>
+          <a:bodyPr wrap="square">
+            <a:spAutoFit/>
+          </a:bodyPr>
+          <a:lstStyle/>
+          <a:p>
+            <a:pPr algn="l">
+              <a:spcAft>
+                <a:spcPts val="400"/>
+              </a:spcAft>
+              <a:defRPr sz="1300" b="0">
+                <a:solidFill>
+                  <a:srgbClr val="333333"/>
+                </a:solidFill>
+                <a:latin typeface="Calibri"/>
+              </a:defRPr>
+            </a:pPr>
+            <a:r>
+              <a:t>• Employee &amp; leadership dashboards</a:t>
             </a:r>
           </a:p>
           <a:p>
@@ -5646,7 +6084,7 @@
               </a:defRPr>
             </a:pPr>
             <a:r>
-              <a:t>• TAC attendance &amp; trivia tracking</a:t>
+              <a:t>• Dark mode / light mode toggle</a:t>
             </a:r>
           </a:p>
           <a:p>
@@ -5662,82 +6100,7 @@
               </a:defRPr>
             </a:pPr>
             <a:r>
-              <a:t>• Push/email notifications</a:t>
-            </a:r>
-          </a:p>
-        </p:txBody>
-      </p:sp>
-      <p:sp>
-        <p:nvSpPr>
-          <p:cNvPr id="14" name="TextBox 13"/>
-          <p:cNvSpPr txBox="1"/>
-          <p:nvPr/>
-        </p:nvSpPr>
-        <p:spPr>
-          <a:xfrm>
-            <a:off x="8412480" y="4389120"/>
-            <a:ext cx="3474720" cy="365760"/>
-          </a:xfrm>
-          <a:prstGeom prst="rect">
-            <a:avLst/>
-          </a:prstGeom>
-          <a:noFill/>
-        </p:spPr>
-        <p:txBody>
-          <a:bodyPr wrap="square">
-            <a:spAutoFit/>
-          </a:bodyPr>
-          <a:lstStyle/>
-          <a:p>
-            <a:pPr algn="l">
-              <a:defRPr sz="1600" b="1">
-                <a:solidFill>
-                  <a:srgbClr val="E67E22"/>
-                </a:solidFill>
-                <a:latin typeface="Calibri"/>
-              </a:defRPr>
-            </a:pPr>
-            <a:r>
-              <a:t>Phase 3 Deliverables</a:t>
-            </a:r>
-          </a:p>
-        </p:txBody>
-      </p:sp>
-      <p:sp>
-        <p:nvSpPr>
-          <p:cNvPr id="15" name="TextBox 14"/>
-          <p:cNvSpPr txBox="1"/>
-          <p:nvPr/>
-        </p:nvSpPr>
-        <p:spPr>
-          <a:xfrm>
-            <a:off x="8412480" y="4754880"/>
-            <a:ext cx="3474720" cy="2286000"/>
-          </a:xfrm>
-          <a:prstGeom prst="rect">
-            <a:avLst/>
-          </a:prstGeom>
-          <a:noFill/>
-        </p:spPr>
-        <p:txBody>
-          <a:bodyPr wrap="square">
-            <a:spAutoFit/>
-          </a:bodyPr>
-          <a:lstStyle/>
-          <a:p>
-            <a:pPr algn="l">
-              <a:spcAft>
-                <a:spcPts val="400"/>
-              </a:spcAft>
-              <a:defRPr sz="1300" b="0">
-                <a:solidFill>
-                  <a:srgbClr val="333333"/>
-                </a:solidFill>
-                <a:latin typeface="Calibri"/>
-              </a:defRPr>
-            </a:pPr>
-            <a:r>
-              <a:t>• Digital rewards storefront</a:t>
+              <a:t>• TAC RSVP &amp; role sign-ups</a:t>
             </a:r>
           </a:p>
           <a:p>
@@ -5753,7 +6116,7 @@
               </a:defRPr>
             </a:pPr>
             <a:r>
-              <a:t>• Physical &amp; digital fulfillment</a:t>
+              <a:t>• Culture groups, volunteer forms</a:t>
             </a:r>
           </a:p>
           <a:p>
@@ -5769,7 +6132,7 @@
               </a:defRPr>
             </a:pPr>
             <a:r>
-              <a:t>• Gift card instant delivery</a:t>
+              <a:t>• Social media engagement (screenshot)</a:t>
             </a:r>
           </a:p>
           <a:p>
@@ -5785,7 +6148,82 @@
               </a:defRPr>
             </a:pPr>
             <a:r>
-              <a:t>• Inventory management</a:t>
+              <a:t>• Push/email notifications</a:t>
+            </a:r>
+          </a:p>
+        </p:txBody>
+      </p:sp>
+      <p:sp>
+        <p:nvSpPr>
+          <p:cNvPr id="14" name="TextBox 13"/>
+          <p:cNvSpPr txBox="1"/>
+          <p:nvPr/>
+        </p:nvSpPr>
+        <p:spPr>
+          <a:xfrm>
+            <a:off x="8412480" y="4389120"/>
+            <a:ext cx="3474720" cy="365760"/>
+          </a:xfrm>
+          <a:prstGeom prst="rect">
+            <a:avLst/>
+          </a:prstGeom>
+          <a:noFill/>
+        </p:spPr>
+        <p:txBody>
+          <a:bodyPr wrap="square">
+            <a:spAutoFit/>
+          </a:bodyPr>
+          <a:lstStyle/>
+          <a:p>
+            <a:pPr algn="l">
+              <a:defRPr sz="1600" b="1">
+                <a:solidFill>
+                  <a:srgbClr val="E67E22"/>
+                </a:solidFill>
+                <a:latin typeface="Calibri"/>
+              </a:defRPr>
+            </a:pPr>
+            <a:r>
+              <a:t>Phase 3 Deliverables</a:t>
+            </a:r>
+          </a:p>
+        </p:txBody>
+      </p:sp>
+      <p:sp>
+        <p:nvSpPr>
+          <p:cNvPr id="15" name="TextBox 14"/>
+          <p:cNvSpPr txBox="1"/>
+          <p:nvPr/>
+        </p:nvSpPr>
+        <p:spPr>
+          <a:xfrm>
+            <a:off x="8412480" y="4754880"/>
+            <a:ext cx="3474720" cy="2286000"/>
+          </a:xfrm>
+          <a:prstGeom prst="rect">
+            <a:avLst/>
+          </a:prstGeom>
+          <a:noFill/>
+        </p:spPr>
+        <p:txBody>
+          <a:bodyPr wrap="square">
+            <a:spAutoFit/>
+          </a:bodyPr>
+          <a:lstStyle/>
+          <a:p>
+            <a:pPr algn="l">
+              <a:spcAft>
+                <a:spcPts val="400"/>
+              </a:spcAft>
+              <a:defRPr sz="1300" b="0">
+                <a:solidFill>
+                  <a:srgbClr val="333333"/>
+                </a:solidFill>
+                <a:latin typeface="Calibri"/>
+              </a:defRPr>
+            </a:pPr>
+            <a:r>
+              <a:t>• Digital rewards storefront</a:t>
             </a:r>
           </a:p>
           <a:p>
@@ -5801,7 +6239,55 @@
               </a:defRPr>
             </a:pPr>
             <a:r>
-              <a:t>• Complete platform go-live</a:t>
+              <a:t>• Café cashier redemption screen</a:t>
+            </a:r>
+          </a:p>
+          <a:p>
+            <a:pPr>
+              <a:spcAft>
+                <a:spcPts val="400"/>
+              </a:spcAft>
+              <a:defRPr sz="1300">
+                <a:solidFill>
+                  <a:srgbClr val="333333"/>
+                </a:solidFill>
+                <a:latin typeface="Calibri"/>
+              </a:defRPr>
+            </a:pPr>
+            <a:r>
+              <a:t>• In-person store QR code scanning</a:t>
+            </a:r>
+          </a:p>
+          <a:p>
+            <a:pPr>
+              <a:spcAft>
+                <a:spcPts val="400"/>
+              </a:spcAft>
+              <a:defRPr sz="1300">
+                <a:solidFill>
+                  <a:srgbClr val="333333"/>
+                </a:solidFill>
+                <a:latin typeface="Calibri"/>
+              </a:defRPr>
+            </a:pPr>
+            <a:r>
+              <a:t>• Gift card instant delivery</a:t>
+            </a:r>
+          </a:p>
+          <a:p>
+            <a:pPr>
+              <a:spcAft>
+                <a:spcPts val="400"/>
+              </a:spcAft>
+              <a:defRPr sz="1300">
+                <a:solidFill>
+                  <a:srgbClr val="333333"/>
+                </a:solidFill>
+                <a:latin typeface="Calibri"/>
+              </a:defRPr>
+            </a:pPr>
+            <a:r>
+              <a:t>• Inventory management &amp; fulfillment</a:t>
             </a:r>
           </a:p>
         </p:txBody>
@@ -6258,7 +6744,7 @@
               </a:defRPr>
             </a:pPr>
             <a:r>
-              <a:t>Phase 1: Nominations, Paycom, SSO, Infrastructure</a:t>
+              <a:t>Phase 1: Nominations, Voting, Paycom, Badge ID Auth, SSO</a:t>
             </a:r>
           </a:p>
         </p:txBody>
@@ -6495,7 +6981,7 @@
               </a:defRPr>
             </a:pPr>
             <a:r>
-              <a:t>Phase 2: Dashboards, Tracking, Notifications</a:t>
+              <a:t>Phase 2: Dashboards, Engagement Modules, Dark Mode, Notifications</a:t>
             </a:r>
           </a:p>
         </p:txBody>
@@ -6732,7 +7218,7 @@
               </a:defRPr>
             </a:pPr>
             <a:r>
-              <a:t>Phase 3: Marketplace, Gift Cards, Fulfillment</a:t>
+              <a:t>Phase 3: Marketplace, Café Redemption, QR Store, Gift Cards</a:t>
             </a:r>
           </a:p>
         </p:txBody>
@@ -9646,7 +10132,7 @@
           <a:p>
             <a:pPr algn="l">
               <a:spcAft>
-                <a:spcPts val="800"/>
+                <a:spcPts val="700"/>
               </a:spcAft>
               <a:defRPr sz="1400" b="0">
                 <a:solidFill>
@@ -9662,7 +10148,7 @@
           <a:p>
             <a:pPr>
               <a:spcAft>
-                <a:spcPts val="800"/>
+                <a:spcPts val="700"/>
               </a:spcAft>
               <a:defRPr sz="1400">
                 <a:solidFill>
@@ -9678,7 +10164,7 @@
           <a:p>
             <a:pPr>
               <a:spcAft>
-                <a:spcPts val="800"/>
+                <a:spcPts val="700"/>
               </a:spcAft>
               <a:defRPr sz="1400">
                 <a:solidFill>
@@ -9694,7 +10180,7 @@
           <a:p>
             <a:pPr>
               <a:spcAft>
-                <a:spcPts val="800"/>
+                <a:spcPts val="700"/>
               </a:spcAft>
               <a:defRPr sz="1400">
                 <a:solidFill>
@@ -9704,13 +10190,13 @@
               </a:defRPr>
             </a:pPr>
             <a:r>
-              <a:t>• Production platforms: SpringBoard, BrainBook, Guardian, BrainClaw</a:t>
+              <a:t>• Badge ID + PIN login for frontline staff without email</a:t>
             </a:r>
           </a:p>
           <a:p>
             <a:pPr>
               <a:spcAft>
-                <a:spcPts val="800"/>
+                <a:spcPts val="700"/>
               </a:spcAft>
               <a:defRPr sz="1400">
                 <a:solidFill>
@@ -9720,13 +10206,13 @@
               </a:defRPr>
             </a:pPr>
             <a:r>
-              <a:t>• Same tech stack (React, Supabase, Python, AWS) — proven</a:t>
+              <a:t>• Ranked-choice committee voting — matching your current process</a:t>
             </a:r>
           </a:p>
           <a:p>
             <a:pPr>
               <a:spcAft>
-                <a:spcPts val="800"/>
+                <a:spcPts val="700"/>
               </a:spcAft>
               <a:defRPr sz="1400">
                 <a:solidFill>
@@ -9736,13 +10222,13 @@
               </a:defRPr>
             </a:pPr>
             <a:r>
-              <a:t>• Mobile-first, accessible design as a core competency</a:t>
+              <a:t>• Full engagement suite: TAC RSVP, culture groups, volunteering</a:t>
             </a:r>
           </a:p>
           <a:p>
             <a:pPr>
               <a:spcAft>
-                <a:spcPts val="800"/>
+                <a:spcPts val="700"/>
               </a:spcAft>
               <a:defRPr sz="1400">
                 <a:solidFill>
@@ -9752,13 +10238,13 @@
               </a:defRPr>
             </a:pPr>
             <a:r>
-              <a:t>• All add-ons FREE — pay only AI LLM usage (pass-through)</a:t>
+              <a:t>• Café cashier screen + in-person store QR redemption</a:t>
             </a:r>
           </a:p>
           <a:p>
             <a:pPr>
               <a:spcAft>
-                <a:spcPts val="800"/>
+                <a:spcPts val="700"/>
               </a:spcAft>
               <a:defRPr sz="1400">
                 <a:solidFill>
@@ -9768,7 +10254,39 @@
               </a:defRPr>
             </a:pPr>
             <a:r>
-              <a:t>• Flexible pricing: own the code or pay-as-you-go SaaS</a:t>
+              <a:t>• Dark mode for night-shift staff at group homes</a:t>
+            </a:r>
+          </a:p>
+          <a:p>
+            <a:pPr>
+              <a:spcAft>
+                <a:spcPts val="700"/>
+              </a:spcAft>
+              <a:defRPr sz="1400">
+                <a:solidFill>
+                  <a:srgbClr val="FFFFFF"/>
+                </a:solidFill>
+                <a:latin typeface="Calibri"/>
+              </a:defRPr>
+            </a:pPr>
+            <a:r>
+              <a:t>• WCAG AAA accessibility — 7:1 contrast, screen reader tested</a:t>
+            </a:r>
+          </a:p>
+          <a:p>
+            <a:pPr>
+              <a:spcAft>
+                <a:spcPts val="700"/>
+              </a:spcAft>
+              <a:defRPr sz="1400">
+                <a:solidFill>
+                  <a:srgbClr val="FFFFFF"/>
+                </a:solidFill>
+                <a:latin typeface="Calibri"/>
+              </a:defRPr>
+            </a:pPr>
+            <a:r>
+              <a:t>• All add-ons FREE — pay only AI LLM usage (pass-through)</a:t>
             </a:r>
           </a:p>
         </p:txBody>
@@ -9891,7 +10409,7 @@
               </a:defRPr>
             </a:pPr>
             <a:r>
-              <a:t>• Configure Google Workspace SSO</a:t>
+              <a:t>• Configure Google Workspace SSO + Badge ID mapping</a:t>
             </a:r>
           </a:p>
           <a:p>
@@ -10278,7 +10796,7 @@
               </a:defRPr>
             </a:pPr>
             <a:r>
-              <a:t>5.  Key Features Deep Dive</a:t>
+              <a:t>5.  Nominations, Voting &amp; QA Engine</a:t>
             </a:r>
           </a:p>
           <a:p>
@@ -10294,7 +10812,7 @@
               </a:defRPr>
             </a:pPr>
             <a:r>
-              <a:t>6.  Paycom Integration &amp; SSO</a:t>
+              <a:t>6.  Points, Engagement &amp; Community Modules</a:t>
             </a:r>
           </a:p>
           <a:p>
@@ -10310,7 +10828,7 @@
               </a:defRPr>
             </a:pPr>
             <a:r>
-              <a:t>7.  Accessibility &amp; Mobile-First Design</a:t>
+              <a:t>7.  Rewards Marketplace — Digital, Café &amp; In-Person Store</a:t>
             </a:r>
           </a:p>
           <a:p>
@@ -10326,7 +10844,7 @@
               </a:defRPr>
             </a:pPr>
             <a:r>
-              <a:t>8.  Phased Implementation Timeline</a:t>
+              <a:t>8.  Paycom Integration &amp; Authentication (SSO + Badge ID)</a:t>
             </a:r>
           </a:p>
           <a:p>
@@ -10342,7 +10860,7 @@
               </a:defRPr>
             </a:pPr>
             <a:r>
-              <a:t>9.  Pricing Options</a:t>
+              <a:t>9.  Accessibility, Dark Mode &amp; Mobile-First Design</a:t>
             </a:r>
           </a:p>
           <a:p>
@@ -10358,7 +10876,55 @@
               </a:defRPr>
             </a:pPr>
             <a:r>
-              <a:t>10. Why IoTeye — Next Steps</a:t>
+              <a:t>10. Dashboards — Employee &amp; Leadership</a:t>
+            </a:r>
+          </a:p>
+          <a:p>
+            <a:pPr>
+              <a:spcAft>
+                <a:spcPts val="1000"/>
+              </a:spcAft>
+              <a:defRPr sz="2200">
+                <a:solidFill>
+                  <a:srgbClr val="333333"/>
+                </a:solidFill>
+                <a:latin typeface="Calibri"/>
+              </a:defRPr>
+            </a:pPr>
+            <a:r>
+              <a:t>11. Phased Implementation Timeline</a:t>
+            </a:r>
+          </a:p>
+          <a:p>
+            <a:pPr>
+              <a:spcAft>
+                <a:spcPts val="1000"/>
+              </a:spcAft>
+              <a:defRPr sz="2200">
+                <a:solidFill>
+                  <a:srgbClr val="333333"/>
+                </a:solidFill>
+                <a:latin typeface="Calibri"/>
+              </a:defRPr>
+            </a:pPr>
+            <a:r>
+              <a:t>12. Pricing Options</a:t>
+            </a:r>
+          </a:p>
+          <a:p>
+            <a:pPr>
+              <a:spcAft>
+                <a:spcPts val="1000"/>
+              </a:spcAft>
+              <a:defRPr sz="2200">
+                <a:solidFill>
+                  <a:srgbClr val="333333"/>
+                </a:solidFill>
+                <a:latin typeface="Calibri"/>
+              </a:defRPr>
+            </a:pPr>
+            <a:r>
+              <a:t>13. Why IoTeye — Next Steps</a:t>
             </a:r>
           </a:p>
         </p:txBody>
@@ -12284,7 +12850,7 @@
               </a:defRPr>
             </a:pPr>
             <a:r>
-              <a:t>• No centralized system for nominations or point tracking</a:t>
+              <a:t>• Many frontline DSPs lack company email addresses</a:t>
             </a:r>
           </a:p>
           <a:p>
@@ -12300,82 +12866,7 @@
               </a:defRPr>
             </a:pPr>
             <a:r>
-              <a:t>• No connection to Paycom HRIS for employee data</a:t>
-            </a:r>
-          </a:p>
-        </p:txBody>
-      </p:sp>
-      <p:sp>
-        <p:nvSpPr>
-          <p:cNvPr id="6" name="TextBox 5"/>
-          <p:cNvSpPr txBox="1"/>
-          <p:nvPr/>
-        </p:nvSpPr>
-        <p:spPr>
-          <a:xfrm>
-            <a:off x="6400800" y="1280160"/>
-            <a:ext cx="5029200" cy="457200"/>
-          </a:xfrm>
-          <a:prstGeom prst="rect">
-            <a:avLst/>
-          </a:prstGeom>
-          <a:noFill/>
-        </p:spPr>
-        <p:txBody>
-          <a:bodyPr wrap="square">
-            <a:spAutoFit/>
-          </a:bodyPr>
-          <a:lstStyle/>
-          <a:p>
-            <a:pPr algn="l">
-              <a:defRPr sz="2400" b="1">
-                <a:solidFill>
-                  <a:srgbClr val="2E86C1"/>
-                </a:solidFill>
-                <a:latin typeface="Calibri"/>
-              </a:defRPr>
-            </a:pPr>
-            <a:r>
-              <a:t>What You Need</a:t>
-            </a:r>
-          </a:p>
-        </p:txBody>
-      </p:sp>
-      <p:sp>
-        <p:nvSpPr>
-          <p:cNvPr id="7" name="TextBox 6"/>
-          <p:cNvSpPr txBox="1"/>
-          <p:nvPr/>
-        </p:nvSpPr>
-        <p:spPr>
-          <a:xfrm>
-            <a:off x="6400800" y="1920240"/>
-            <a:ext cx="5029200" cy="3657600"/>
-          </a:xfrm>
-          <a:prstGeom prst="rect">
-            <a:avLst/>
-          </a:prstGeom>
-          <a:noFill/>
-        </p:spPr>
-        <p:txBody>
-          <a:bodyPr wrap="square">
-            <a:spAutoFit/>
-          </a:bodyPr>
-          <a:lstStyle/>
-          <a:p>
-            <a:pPr algn="l">
-              <a:spcAft>
-                <a:spcPts val="1000"/>
-              </a:spcAft>
-              <a:defRPr sz="1600" b="0">
-                <a:solidFill>
-                  <a:srgbClr val="333333"/>
-                </a:solidFill>
-                <a:latin typeface="Calibri"/>
-              </a:defRPr>
-            </a:pPr>
-            <a:r>
-              <a:t>• Centralized, web-based recognition platform</a:t>
+              <a:t>• Selection committee uses ranked-choice voting — no digital tool</a:t>
             </a:r>
           </a:p>
           <a:p>
@@ -12391,7 +12882,7 @@
               </a:defRPr>
             </a:pPr>
             <a:r>
-              <a:t>• Program-based competition engine</a:t>
+              <a:t>• No centralized system for nominations or point tracking</a:t>
             </a:r>
           </a:p>
           <a:p>
@@ -12407,7 +12898,82 @@
               </a:defRPr>
             </a:pPr>
             <a:r>
-              <a:t>• Multi-stream point system with audit trails</a:t>
+              <a:t>• No connection to Paycom HRIS for employee data</a:t>
+            </a:r>
+          </a:p>
+        </p:txBody>
+      </p:sp>
+      <p:sp>
+        <p:nvSpPr>
+          <p:cNvPr id="6" name="TextBox 5"/>
+          <p:cNvSpPr txBox="1"/>
+          <p:nvPr/>
+        </p:nvSpPr>
+        <p:spPr>
+          <a:xfrm>
+            <a:off x="6400800" y="1280160"/>
+            <a:ext cx="5029200" cy="457200"/>
+          </a:xfrm>
+          <a:prstGeom prst="rect">
+            <a:avLst/>
+          </a:prstGeom>
+          <a:noFill/>
+        </p:spPr>
+        <p:txBody>
+          <a:bodyPr wrap="square">
+            <a:spAutoFit/>
+          </a:bodyPr>
+          <a:lstStyle/>
+          <a:p>
+            <a:pPr algn="l">
+              <a:defRPr sz="2400" b="1">
+                <a:solidFill>
+                  <a:srgbClr val="2E86C1"/>
+                </a:solidFill>
+                <a:latin typeface="Calibri"/>
+              </a:defRPr>
+            </a:pPr>
+            <a:r>
+              <a:t>What You Need</a:t>
+            </a:r>
+          </a:p>
+        </p:txBody>
+      </p:sp>
+      <p:sp>
+        <p:nvSpPr>
+          <p:cNvPr id="7" name="TextBox 6"/>
+          <p:cNvSpPr txBox="1"/>
+          <p:nvPr/>
+        </p:nvSpPr>
+        <p:spPr>
+          <a:xfrm>
+            <a:off x="6400800" y="1920240"/>
+            <a:ext cx="5029200" cy="3657600"/>
+          </a:xfrm>
+          <a:prstGeom prst="rect">
+            <a:avLst/>
+          </a:prstGeom>
+          <a:noFill/>
+        </p:spPr>
+        <p:txBody>
+          <a:bodyPr wrap="square">
+            <a:spAutoFit/>
+          </a:bodyPr>
+          <a:lstStyle/>
+          <a:p>
+            <a:pPr algn="l">
+              <a:spcAft>
+                <a:spcPts val="1000"/>
+              </a:spcAft>
+              <a:defRPr sz="1600" b="0">
+                <a:solidFill>
+                  <a:srgbClr val="333333"/>
+                </a:solidFill>
+                <a:latin typeface="Calibri"/>
+              </a:defRPr>
+            </a:pPr>
+            <a:r>
+              <a:t>• Centralized, web-based recognition platform</a:t>
             </a:r>
           </a:p>
           <a:p>
@@ -12423,7 +12989,7 @@
               </a:defRPr>
             </a:pPr>
             <a:r>
-              <a:t>• Rewards marketplace for merchandise &amp; gift cards</a:t>
+              <a:t>• Program-based competition engine with committee voting</a:t>
             </a:r>
           </a:p>
           <a:p>
@@ -12439,7 +13005,7 @@
               </a:defRPr>
             </a:pPr>
             <a:r>
-              <a:t>• Paycom integration &amp; SSO</a:t>
+              <a:t>• Multi-stream point system with audit trails</a:t>
             </a:r>
           </a:p>
           <a:p>
@@ -12455,7 +13021,55 @@
               </a:defRPr>
             </a:pPr>
             <a:r>
-              <a:t>• Mobile-first, accessible to all staff</a:t>
+              <a:t>• Rewards marketplace — digital, café, and in-person store</a:t>
+            </a:r>
+          </a:p>
+          <a:p>
+            <a:pPr>
+              <a:spcAft>
+                <a:spcPts val="1000"/>
+              </a:spcAft>
+              <a:defRPr sz="1600">
+                <a:solidFill>
+                  <a:srgbClr val="333333"/>
+                </a:solidFill>
+                <a:latin typeface="Calibri"/>
+              </a:defRPr>
+            </a:pPr>
+            <a:r>
+              <a:t>• Paycom integration &amp; flexible auth (SSO + Badge ID + PIN)</a:t>
+            </a:r>
+          </a:p>
+          <a:p>
+            <a:pPr>
+              <a:spcAft>
+                <a:spcPts val="1000"/>
+              </a:spcAft>
+              <a:defRPr sz="1600">
+                <a:solidFill>
+                  <a:srgbClr val="333333"/>
+                </a:solidFill>
+                <a:latin typeface="Calibri"/>
+              </a:defRPr>
+            </a:pPr>
+            <a:r>
+              <a:t>• Community engagement: TAC, culture groups, volunteering</a:t>
+            </a:r>
+          </a:p>
+          <a:p>
+            <a:pPr>
+              <a:spcAft>
+                <a:spcPts val="1000"/>
+              </a:spcAft>
+              <a:defRPr sz="1600">
+                <a:solidFill>
+                  <a:srgbClr val="333333"/>
+                </a:solidFill>
+                <a:latin typeface="Calibri"/>
+              </a:defRPr>
+            </a:pPr>
+            <a:r>
+              <a:t>• Mobile-first, accessible to all staff (incl. dark mode)</a:t>
             </a:r>
           </a:p>
         </p:txBody>
@@ -13197,7 +13811,7 @@
               </a:defRPr>
             </a:pPr>
             <a:r>
-              <a:t>Program-Based Competition Engine</a:t>
+              <a:t>Nominations, Voting &amp; QA Engine</a:t>
             </a:r>
           </a:p>
         </p:txBody>
@@ -13247,7 +13861,7 @@
         <p:spPr>
           <a:xfrm>
             <a:off x="365760" y="1691640"/>
-            <a:ext cx="5029200" cy="2011680"/>
+            <a:ext cx="5029200" cy="1463040"/>
           </a:xfrm>
           <a:prstGeom prst="rect">
             <a:avLst/>
@@ -13262,7 +13876,7 @@
           <a:p>
             <a:pPr algn="l">
               <a:spcAft>
-                <a:spcPts val="800"/>
+                <a:spcPts val="600"/>
               </a:spcAft>
               <a:defRPr sz="1400" b="0">
                 <a:solidFill>
@@ -13278,7 +13892,7 @@
           <a:p>
             <a:pPr>
               <a:spcAft>
-                <a:spcPts val="800"/>
+                <a:spcPts val="600"/>
               </a:spcAft>
               <a:defRPr sz="1400">
                 <a:solidFill>
@@ -13294,7 +13908,7 @@
           <a:p>
             <a:pPr>
               <a:spcAft>
-                <a:spcPts val="800"/>
+                <a:spcPts val="600"/>
               </a:spcAft>
               <a:defRPr sz="1400">
                 <a:solidFill>
@@ -13307,10 +13921,85 @@
               <a:t>• 1 nomination per candidate/month, 5 total/month</a:t>
             </a:r>
           </a:p>
+        </p:txBody>
+      </p:sp>
+      <p:sp>
+        <p:nvSpPr>
+          <p:cNvPr id="6" name="TextBox 5"/>
+          <p:cNvSpPr txBox="1"/>
+          <p:nvPr/>
+        </p:nvSpPr>
+        <p:spPr>
+          <a:xfrm>
+            <a:off x="365760" y="3108960"/>
+            <a:ext cx="5029200" cy="411480"/>
+          </a:xfrm>
+          <a:prstGeom prst="rect">
+            <a:avLst/>
+          </a:prstGeom>
+          <a:noFill/>
+        </p:spPr>
+        <p:txBody>
+          <a:bodyPr wrap="square">
+            <a:spAutoFit/>
+          </a:bodyPr>
+          <a:lstStyle/>
+          <a:p>
+            <a:pPr algn="l">
+              <a:defRPr sz="2200" b="1">
+                <a:solidFill>
+                  <a:srgbClr val="2E86C1"/>
+                </a:solidFill>
+                <a:latin typeface="Calibri"/>
+              </a:defRPr>
+            </a:pPr>
+            <a:r>
+              <a:t>Selection Committee Voting</a:t>
+            </a:r>
+          </a:p>
+        </p:txBody>
+      </p:sp>
+      <p:sp>
+        <p:nvSpPr>
+          <p:cNvPr id="7" name="TextBox 6"/>
+          <p:cNvSpPr txBox="1"/>
+          <p:nvPr/>
+        </p:nvSpPr>
+        <p:spPr>
+          <a:xfrm>
+            <a:off x="365760" y="3566160"/>
+            <a:ext cx="5029200" cy="1371600"/>
+          </a:xfrm>
+          <a:prstGeom prst="rect">
+            <a:avLst/>
+          </a:prstGeom>
+          <a:noFill/>
+        </p:spPr>
+        <p:txBody>
+          <a:bodyPr wrap="square">
+            <a:spAutoFit/>
+          </a:bodyPr>
+          <a:lstStyle/>
+          <a:p>
+            <a:pPr algn="l">
+              <a:spcAft>
+                <a:spcPts val="600"/>
+              </a:spcAft>
+              <a:defRPr sz="1400" b="0">
+                <a:solidFill>
+                  <a:srgbClr val="333333"/>
+                </a:solidFill>
+                <a:latin typeface="Calibri"/>
+              </a:defRPr>
+            </a:pPr>
+            <a:r>
+              <a:t>• Ranked-choice drag-and-drop voting interface</a:t>
+            </a:r>
+          </a:p>
           <a:p>
             <a:pPr>
               <a:spcAft>
-                <a:spcPts val="800"/>
+                <a:spcPts val="600"/>
               </a:spcAft>
               <a:defRPr sz="1400">
                 <a:solidFill>
@@ -13320,20 +14009,52 @@
               </a:defRPr>
             </a:pPr>
             <a:r>
-              <a:t>• Friendly feedback when limits reached</a:t>
-            </a:r>
-          </a:p>
-        </p:txBody>
-      </p:sp>
-      <p:sp>
-        <p:nvSpPr>
-          <p:cNvPr id="6" name="TextBox 5"/>
-          <p:cNvSpPr txBox="1"/>
-          <p:nvPr/>
-        </p:nvSpPr>
-        <p:spPr>
-          <a:xfrm>
-            <a:off x="365760" y="3749039"/>
+              <a:t>• Private ballots — not visible until window closes</a:t>
+            </a:r>
+          </a:p>
+          <a:p>
+            <a:pPr>
+              <a:spcAft>
+                <a:spcPts val="600"/>
+              </a:spcAft>
+              <a:defRPr sz="1400">
+                <a:solidFill>
+                  <a:srgbClr val="333333"/>
+                </a:solidFill>
+                <a:latin typeface="Calibri"/>
+              </a:defRPr>
+            </a:pPr>
+            <a:r>
+              <a:t>• Automated tally (Borda count / weighted rank)</a:t>
+            </a:r>
+          </a:p>
+          <a:p>
+            <a:pPr>
+              <a:spcAft>
+                <a:spcPts val="600"/>
+              </a:spcAft>
+              <a:defRPr sz="1400">
+                <a:solidFill>
+                  <a:srgbClr val="333333"/>
+                </a:solidFill>
+                <a:latin typeface="Calibri"/>
+              </a:defRPr>
+            </a:pPr>
+            <a:r>
+              <a:t>• Per-voter audit trail &amp; historical ballot archive</a:t>
+            </a:r>
+          </a:p>
+        </p:txBody>
+      </p:sp>
+      <p:sp>
+        <p:nvSpPr>
+          <p:cNvPr id="8" name="TextBox 7"/>
+          <p:cNvSpPr txBox="1"/>
+          <p:nvPr/>
+        </p:nvSpPr>
+        <p:spPr>
+          <a:xfrm>
+            <a:off x="365760" y="4937760"/>
             <a:ext cx="5029200" cy="411480"/>
           </a:xfrm>
           <a:prstGeom prst="rect">
@@ -13356,21 +14077,21 @@
               </a:defRPr>
             </a:pPr>
             <a:r>
-              <a:t>QA Queue &amp; Programs</a:t>
-            </a:r>
-          </a:p>
-        </p:txBody>
-      </p:sp>
-      <p:sp>
-        <p:nvSpPr>
-          <p:cNvPr id="7" name="TextBox 6"/>
-          <p:cNvSpPr txBox="1"/>
-          <p:nvPr/>
-        </p:nvSpPr>
-        <p:spPr>
-          <a:xfrm>
-            <a:off x="365760" y="4206240"/>
-            <a:ext cx="5029200" cy="2286000"/>
+              <a:t>QA Queue &amp; Revise-Resubmit</a:t>
+            </a:r>
+          </a:p>
+        </p:txBody>
+      </p:sp>
+      <p:sp>
+        <p:nvSpPr>
+          <p:cNvPr id="9" name="TextBox 8"/>
+          <p:cNvSpPr txBox="1"/>
+          <p:nvPr/>
+        </p:nvSpPr>
+        <p:spPr>
+          <a:xfrm>
+            <a:off x="365760" y="5394960"/>
+            <a:ext cx="5029200" cy="1280160"/>
           </a:xfrm>
           <a:prstGeom prst="rect">
             <a:avLst/>
@@ -13385,7 +14106,7 @@
           <a:p>
             <a:pPr algn="l">
               <a:spcAft>
-                <a:spcPts val="800"/>
+                <a:spcPts val="600"/>
               </a:spcAft>
               <a:defRPr sz="1400" b="0">
                 <a:solidFill>
@@ -13395,13 +14116,13 @@
               </a:defRPr>
             </a:pPr>
             <a:r>
-              <a:t>• Approve / Return for Edits / Decline</a:t>
+              <a:t>• Approve / Return for Edits / Decline with batch operations</a:t>
             </a:r>
           </a:p>
           <a:p>
             <a:pPr>
               <a:spcAft>
-                <a:spcPts val="800"/>
+                <a:spcPts val="600"/>
               </a:spcAft>
               <a:defRPr sz="1400">
                 <a:solidFill>
@@ -13411,13 +14132,13 @@
               </a:defRPr>
             </a:pPr>
             <a:r>
-              <a:t>• Points awarded only upon admin approval</a:t>
+              <a:t>• Formal resubmission loop: status tracking through full cycle</a:t>
             </a:r>
           </a:p>
           <a:p>
             <a:pPr>
               <a:spcAft>
-                <a:spcPts val="800"/>
+                <a:spcPts val="600"/>
               </a:spcAft>
               <a:defRPr sz="1400">
                 <a:solidFill>
@@ -13427,30 +14148,14 @@
               </a:defRPr>
             </a:pPr>
             <a:r>
-              <a:t>• Filter by program, award type, date, status</a:t>
-            </a:r>
-          </a:p>
-          <a:p>
-            <a:pPr>
-              <a:spcAft>
-                <a:spcPts val="800"/>
-              </a:spcAft>
-              <a:defRPr sz="1400">
-                <a:solidFill>
-                  <a:srgbClr val="333333"/>
-                </a:solidFill>
-                <a:latin typeface="Calibri"/>
-              </a:defRPr>
-            </a:pPr>
-            <a:r>
-              <a:t>• Programs synced from Paycom automatically</a:t>
+              <a:t>• Admin comments → nominator notification → edit &amp; resubmit</a:t>
             </a:r>
           </a:p>
         </p:txBody>
       </p:sp>
       <p:pic>
         <p:nvPicPr>
-          <p:cNvPr id="8" name="Picture 7" descr="reward_2.png"/>
+          <p:cNvPr id="10" name="Picture 9" descr="reward_2.png"/>
           <p:cNvPicPr>
             <a:picLocks noChangeAspect="1"/>
           </p:cNvPicPr>
@@ -13572,7 +14277,7 @@
               </a:defRPr>
             </a:pPr>
             <a:r>
-              <a:t>Point Allocation &amp; Engagement Tracking</a:t>
+              <a:t>Points, Engagement &amp; Community Modules</a:t>
             </a:r>
           </a:p>
         </p:txBody>
@@ -13622,7 +14327,7 @@
         <p:spPr>
           <a:xfrm>
             <a:off x="731520" y="1828800"/>
-            <a:ext cx="6400800" cy="411480"/>
+            <a:ext cx="6400800" cy="347472"/>
           </a:xfrm>
           <a:prstGeom prst="rect">
             <a:avLst/>
@@ -13664,22 +14369,22 @@
         </p:nvSpPr>
         <p:spPr>
           <a:xfrm>
-            <a:off x="822960" y="1847088"/>
-            <a:ext cx="4114800" cy="365760"/>
-          </a:xfrm>
-          <a:prstGeom prst="rect">
-            <a:avLst/>
-          </a:prstGeom>
-          <a:noFill/>
-        </p:spPr>
-        <p:txBody>
-          <a:bodyPr wrap="square">
-            <a:spAutoFit/>
-          </a:bodyPr>
-          <a:lstStyle/>
-          <a:p>
-            <a:pPr algn="l">
-              <a:defRPr sz="1300" b="1">
+            <a:off x="822960" y="1837944"/>
+            <a:ext cx="4114800" cy="320040"/>
+          </a:xfrm>
+          <a:prstGeom prst="rect">
+            <a:avLst/>
+          </a:prstGeom>
+          <a:noFill/>
+        </p:spPr>
+        <p:txBody>
+          <a:bodyPr wrap="square">
+            <a:spAutoFit/>
+          </a:bodyPr>
+          <a:lstStyle/>
+          <a:p>
+            <a:pPr algn="l">
+              <a:defRPr sz="1200" b="1">
                 <a:solidFill>
                   <a:srgbClr val="FFFFFF"/>
                 </a:solidFill>
@@ -13700,22 +14405,22 @@
         </p:nvSpPr>
         <p:spPr>
           <a:xfrm>
-            <a:off x="5029200" y="1847088"/>
-            <a:ext cx="2011680" cy="365760"/>
-          </a:xfrm>
-          <a:prstGeom prst="rect">
-            <a:avLst/>
-          </a:prstGeom>
-          <a:noFill/>
-        </p:spPr>
-        <p:txBody>
-          <a:bodyPr wrap="square">
-            <a:spAutoFit/>
-          </a:bodyPr>
-          <a:lstStyle/>
-          <a:p>
-            <a:pPr algn="l">
-              <a:defRPr sz="1300" b="1">
+            <a:off x="5029200" y="1837944"/>
+            <a:ext cx="2011680" cy="320040"/>
+          </a:xfrm>
+          <a:prstGeom prst="rect">
+            <a:avLst/>
+          </a:prstGeom>
+          <a:noFill/>
+        </p:spPr>
+        <p:txBody>
+          <a:bodyPr wrap="square">
+            <a:spAutoFit/>
+          </a:bodyPr>
+          <a:lstStyle/>
+          <a:p>
+            <a:pPr algn="l">
+              <a:defRPr sz="1200" b="1">
                 <a:solidFill>
                   <a:srgbClr val="FFFFFF"/>
                 </a:solidFill>
@@ -13736,8 +14441,8 @@
         </p:nvSpPr>
         <p:spPr>
           <a:xfrm>
-            <a:off x="731520" y="2240280"/>
-            <a:ext cx="6400800" cy="411480"/>
+            <a:off x="731520" y="2176272"/>
+            <a:ext cx="6400800" cy="347472"/>
           </a:xfrm>
           <a:prstGeom prst="rect">
             <a:avLst/>
@@ -13779,22 +14484,22 @@
         </p:nvSpPr>
         <p:spPr>
           <a:xfrm>
-            <a:off x="822960" y="2258568"/>
-            <a:ext cx="4114800" cy="365760"/>
-          </a:xfrm>
-          <a:prstGeom prst="rect">
-            <a:avLst/>
-          </a:prstGeom>
-          <a:noFill/>
-        </p:spPr>
-        <p:txBody>
-          <a:bodyPr wrap="square">
-            <a:spAutoFit/>
-          </a:bodyPr>
-          <a:lstStyle/>
-          <a:p>
-            <a:pPr algn="l">
-              <a:defRPr sz="1300" b="0">
+            <a:off x="822960" y="2185416"/>
+            <a:ext cx="4114800" cy="320040"/>
+          </a:xfrm>
+          <a:prstGeom prst="rect">
+            <a:avLst/>
+          </a:prstGeom>
+          <a:noFill/>
+        </p:spPr>
+        <p:txBody>
+          <a:bodyPr wrap="square">
+            <a:spAutoFit/>
+          </a:bodyPr>
+          <a:lstStyle/>
+          <a:p>
+            <a:pPr algn="l">
+              <a:defRPr sz="1200" b="0">
                 <a:solidFill>
                   <a:srgbClr val="333333"/>
                 </a:solidFill>
@@ -13815,22 +14520,22 @@
         </p:nvSpPr>
         <p:spPr>
           <a:xfrm>
-            <a:off x="5029200" y="2258568"/>
-            <a:ext cx="2011680" cy="365760"/>
-          </a:xfrm>
-          <a:prstGeom prst="rect">
-            <a:avLst/>
-          </a:prstGeom>
-          <a:noFill/>
-        </p:spPr>
-        <p:txBody>
-          <a:bodyPr wrap="square">
-            <a:spAutoFit/>
-          </a:bodyPr>
-          <a:lstStyle/>
-          <a:p>
-            <a:pPr algn="l">
-              <a:defRPr sz="1300" b="0">
+            <a:off x="5029200" y="2185416"/>
+            <a:ext cx="2011680" cy="320040"/>
+          </a:xfrm>
+          <a:prstGeom prst="rect">
+            <a:avLst/>
+          </a:prstGeom>
+          <a:noFill/>
+        </p:spPr>
+        <p:txBody>
+          <a:bodyPr wrap="square">
+            <a:spAutoFit/>
+          </a:bodyPr>
+          <a:lstStyle/>
+          <a:p>
+            <a:pPr algn="l">
+              <a:defRPr sz="1200" b="0">
                 <a:solidFill>
                   <a:srgbClr val="333333"/>
                 </a:solidFill>
@@ -13851,8 +14556,8 @@
         </p:nvSpPr>
         <p:spPr>
           <a:xfrm>
-            <a:off x="731520" y="2651760"/>
-            <a:ext cx="6400800" cy="411480"/>
+            <a:off x="731520" y="2523744"/>
+            <a:ext cx="6400800" cy="347472"/>
           </a:xfrm>
           <a:prstGeom prst="rect">
             <a:avLst/>
@@ -13894,22 +14599,22 @@
         </p:nvSpPr>
         <p:spPr>
           <a:xfrm>
-            <a:off x="822960" y="2670048"/>
-            <a:ext cx="4114800" cy="365760"/>
-          </a:xfrm>
-          <a:prstGeom prst="rect">
-            <a:avLst/>
-          </a:prstGeom>
-          <a:noFill/>
-        </p:spPr>
-        <p:txBody>
-          <a:bodyPr wrap="square">
-            <a:spAutoFit/>
-          </a:bodyPr>
-          <a:lstStyle/>
-          <a:p>
-            <a:pPr algn="l">
-              <a:defRPr sz="1300" b="0">
+            <a:off x="822960" y="2532888"/>
+            <a:ext cx="4114800" cy="320040"/>
+          </a:xfrm>
+          <a:prstGeom prst="rect">
+            <a:avLst/>
+          </a:prstGeom>
+          <a:noFill/>
+        </p:spPr>
+        <p:txBody>
+          <a:bodyPr wrap="square">
+            <a:spAutoFit/>
+          </a:bodyPr>
+          <a:lstStyle/>
+          <a:p>
+            <a:pPr algn="l">
+              <a:defRPr sz="1200" b="0">
                 <a:solidFill>
                   <a:srgbClr val="333333"/>
                 </a:solidFill>
@@ -13930,22 +14635,22 @@
         </p:nvSpPr>
         <p:spPr>
           <a:xfrm>
-            <a:off x="5029200" y="2670048"/>
-            <a:ext cx="2011680" cy="365760"/>
-          </a:xfrm>
-          <a:prstGeom prst="rect">
-            <a:avLst/>
-          </a:prstGeom>
-          <a:noFill/>
-        </p:spPr>
-        <p:txBody>
-          <a:bodyPr wrap="square">
-            <a:spAutoFit/>
-          </a:bodyPr>
-          <a:lstStyle/>
-          <a:p>
-            <a:pPr algn="l">
-              <a:defRPr sz="1300" b="0">
+            <a:off x="5029200" y="2532888"/>
+            <a:ext cx="2011680" cy="320040"/>
+          </a:xfrm>
+          <a:prstGeom prst="rect">
+            <a:avLst/>
+          </a:prstGeom>
+          <a:noFill/>
+        </p:spPr>
+        <p:txBody>
+          <a:bodyPr wrap="square">
+            <a:spAutoFit/>
+          </a:bodyPr>
+          <a:lstStyle/>
+          <a:p>
+            <a:pPr algn="l">
+              <a:defRPr sz="1200" b="0">
                 <a:solidFill>
                   <a:srgbClr val="333333"/>
                 </a:solidFill>
@@ -13966,8 +14671,8 @@
         </p:nvSpPr>
         <p:spPr>
           <a:xfrm>
-            <a:off x="731520" y="3063240"/>
-            <a:ext cx="6400800" cy="411480"/>
+            <a:off x="731520" y="2871216"/>
+            <a:ext cx="6400800" cy="347472"/>
           </a:xfrm>
           <a:prstGeom prst="rect">
             <a:avLst/>
@@ -14009,30 +14714,30 @@
         </p:nvSpPr>
         <p:spPr>
           <a:xfrm>
-            <a:off x="822960" y="3081528"/>
-            <a:ext cx="4114800" cy="365760"/>
-          </a:xfrm>
-          <a:prstGeom prst="rect">
-            <a:avLst/>
-          </a:prstGeom>
-          <a:noFill/>
-        </p:spPr>
-        <p:txBody>
-          <a:bodyPr wrap="square">
-            <a:spAutoFit/>
-          </a:bodyPr>
-          <a:lstStyle/>
-          <a:p>
-            <a:pPr algn="l">
-              <a:defRPr sz="1300" b="0">
-                <a:solidFill>
-                  <a:srgbClr val="333333"/>
-                </a:solidFill>
-                <a:latin typeface="Calibri"/>
-              </a:defRPr>
-            </a:pPr>
-            <a:r>
-              <a:t>Newsletter Trivia</a:t>
+            <a:off x="822960" y="2880360"/>
+            <a:ext cx="4114800" cy="320040"/>
+          </a:xfrm>
+          <a:prstGeom prst="rect">
+            <a:avLst/>
+          </a:prstGeom>
+          <a:noFill/>
+        </p:spPr>
+        <p:txBody>
+          <a:bodyPr wrap="square">
+            <a:spAutoFit/>
+          </a:bodyPr>
+          <a:lstStyle/>
+          <a:p>
+            <a:pPr algn="l">
+              <a:defRPr sz="1200" b="0">
+                <a:solidFill>
+                  <a:srgbClr val="333333"/>
+                </a:solidFill>
+                <a:latin typeface="Calibri"/>
+              </a:defRPr>
+            </a:pPr>
+            <a:r>
+              <a:t>TAC Meeting Role Completion</a:t>
             </a:r>
           </a:p>
         </p:txBody>
@@ -14045,30 +14750,30 @@
         </p:nvSpPr>
         <p:spPr>
           <a:xfrm>
-            <a:off x="5029200" y="3081528"/>
-            <a:ext cx="2011680" cy="365760"/>
-          </a:xfrm>
-          <a:prstGeom prst="rect">
-            <a:avLst/>
-          </a:prstGeom>
-          <a:noFill/>
-        </p:spPr>
-        <p:txBody>
-          <a:bodyPr wrap="square">
-            <a:spAutoFit/>
-          </a:bodyPr>
-          <a:lstStyle/>
-          <a:p>
-            <a:pPr algn="l">
-              <a:defRPr sz="1300" b="0">
-                <a:solidFill>
-                  <a:srgbClr val="333333"/>
-                </a:solidFill>
-                <a:latin typeface="Calibri"/>
-              </a:defRPr>
-            </a:pPr>
-            <a:r>
-              <a:t>Correct answer</a:t>
+            <a:off x="5029200" y="2880360"/>
+            <a:ext cx="2011680" cy="320040"/>
+          </a:xfrm>
+          <a:prstGeom prst="rect">
+            <a:avLst/>
+          </a:prstGeom>
+          <a:noFill/>
+        </p:spPr>
+        <p:txBody>
+          <a:bodyPr wrap="square">
+            <a:spAutoFit/>
+          </a:bodyPr>
+          <a:lstStyle/>
+          <a:p>
+            <a:pPr algn="l">
+              <a:defRPr sz="1200" b="0">
+                <a:solidFill>
+                  <a:srgbClr val="333333"/>
+                </a:solidFill>
+                <a:latin typeface="Calibri"/>
+              </a:defRPr>
+            </a:pPr>
+            <a:r>
+              <a:t>Role fulfilled</a:t>
             </a:r>
           </a:p>
         </p:txBody>
@@ -14081,8 +14786,8 @@
         </p:nvSpPr>
         <p:spPr>
           <a:xfrm>
-            <a:off x="731520" y="3474720"/>
-            <a:ext cx="6400800" cy="411480"/>
+            <a:off x="731520" y="3218688"/>
+            <a:ext cx="6400800" cy="347472"/>
           </a:xfrm>
           <a:prstGeom prst="rect">
             <a:avLst/>
@@ -14124,30 +14829,30 @@
         </p:nvSpPr>
         <p:spPr>
           <a:xfrm>
-            <a:off x="822960" y="3493008"/>
-            <a:ext cx="4114800" cy="365760"/>
-          </a:xfrm>
-          <a:prstGeom prst="rect">
-            <a:avLst/>
-          </a:prstGeom>
-          <a:noFill/>
-        </p:spPr>
-        <p:txBody>
-          <a:bodyPr wrap="square">
-            <a:spAutoFit/>
-          </a:bodyPr>
-          <a:lstStyle/>
-          <a:p>
-            <a:pPr algn="l">
-              <a:defRPr sz="1300" b="0">
-                <a:solidFill>
-                  <a:srgbClr val="333333"/>
-                </a:solidFill>
-                <a:latin typeface="Calibri"/>
-              </a:defRPr>
-            </a:pPr>
-            <a:r>
-              <a:t>Birthday / Anniversary</a:t>
+            <a:off x="822960" y="3227832"/>
+            <a:ext cx="4114800" cy="320040"/>
+          </a:xfrm>
+          <a:prstGeom prst="rect">
+            <a:avLst/>
+          </a:prstGeom>
+          <a:noFill/>
+        </p:spPr>
+        <p:txBody>
+          <a:bodyPr wrap="square">
+            <a:spAutoFit/>
+          </a:bodyPr>
+          <a:lstStyle/>
+          <a:p>
+            <a:pPr algn="l">
+              <a:defRPr sz="1200" b="0">
+                <a:solidFill>
+                  <a:srgbClr val="333333"/>
+                </a:solidFill>
+                <a:latin typeface="Calibri"/>
+              </a:defRPr>
+            </a:pPr>
+            <a:r>
+              <a:t>Culture Group Participation</a:t>
             </a:r>
           </a:p>
         </p:txBody>
@@ -14160,30 +14865,30 @@
         </p:nvSpPr>
         <p:spPr>
           <a:xfrm>
-            <a:off x="5029200" y="3493008"/>
-            <a:ext cx="2011680" cy="365760"/>
-          </a:xfrm>
-          <a:prstGeom prst="rect">
-            <a:avLst/>
-          </a:prstGeom>
-          <a:noFill/>
-        </p:spPr>
-        <p:txBody>
-          <a:bodyPr wrap="square">
-            <a:spAutoFit/>
-          </a:bodyPr>
-          <a:lstStyle/>
-          <a:p>
-            <a:pPr algn="l">
-              <a:defRPr sz="1300" b="0">
-                <a:solidFill>
-                  <a:srgbClr val="333333"/>
-                </a:solidFill>
-                <a:latin typeface="Calibri"/>
-              </a:defRPr>
-            </a:pPr>
-            <a:r>
-              <a:t>Automated (Paycom sync)</a:t>
+            <a:off x="5029200" y="3227832"/>
+            <a:ext cx="2011680" cy="320040"/>
+          </a:xfrm>
+          <a:prstGeom prst="rect">
+            <a:avLst/>
+          </a:prstGeom>
+          <a:noFill/>
+        </p:spPr>
+        <p:txBody>
+          <a:bodyPr wrap="square">
+            <a:spAutoFit/>
+          </a:bodyPr>
+          <a:lstStyle/>
+          <a:p>
+            <a:pPr algn="l">
+              <a:defRPr sz="1200" b="0">
+                <a:solidFill>
+                  <a:srgbClr val="333333"/>
+                </a:solidFill>
+                <a:latin typeface="Calibri"/>
+              </a:defRPr>
+            </a:pPr>
+            <a:r>
+              <a:t>Leader/admin log</a:t>
             </a:r>
           </a:p>
         </p:txBody>
@@ -14196,8 +14901,8 @@
         </p:nvSpPr>
         <p:spPr>
           <a:xfrm>
-            <a:off x="731520" y="3886200"/>
-            <a:ext cx="6400800" cy="411480"/>
+            <a:off x="731520" y="3566160"/>
+            <a:ext cx="6400800" cy="347472"/>
           </a:xfrm>
           <a:prstGeom prst="rect">
             <a:avLst/>
@@ -14239,22 +14944,482 @@
         </p:nvSpPr>
         <p:spPr>
           <a:xfrm>
-            <a:off x="822960" y="3904488"/>
-            <a:ext cx="4114800" cy="365760"/>
-          </a:xfrm>
-          <a:prstGeom prst="rect">
-            <a:avLst/>
-          </a:prstGeom>
-          <a:noFill/>
-        </p:spPr>
-        <p:txBody>
-          <a:bodyPr wrap="square">
-            <a:spAutoFit/>
-          </a:bodyPr>
-          <a:lstStyle/>
-          <a:p>
-            <a:pPr algn="l">
-              <a:defRPr sz="1300" b="0">
+            <a:off x="822960" y="3575304"/>
+            <a:ext cx="4114800" cy="320040"/>
+          </a:xfrm>
+          <a:prstGeom prst="rect">
+            <a:avLst/>
+          </a:prstGeom>
+          <a:noFill/>
+        </p:spPr>
+        <p:txBody>
+          <a:bodyPr wrap="square">
+            <a:spAutoFit/>
+          </a:bodyPr>
+          <a:lstStyle/>
+          <a:p>
+            <a:pPr algn="l">
+              <a:defRPr sz="1200" b="0">
+                <a:solidFill>
+                  <a:srgbClr val="333333"/>
+                </a:solidFill>
+                <a:latin typeface="Calibri"/>
+              </a:defRPr>
+            </a:pPr>
+            <a:r>
+              <a:t>Volunteer / Event Help</a:t>
+            </a:r>
+          </a:p>
+        </p:txBody>
+      </p:sp>
+      <p:sp>
+        <p:nvSpPr>
+          <p:cNvPr id="22" name="TextBox 21"/>
+          <p:cNvSpPr txBox="1"/>
+          <p:nvPr/>
+        </p:nvSpPr>
+        <p:spPr>
+          <a:xfrm>
+            <a:off x="5029200" y="3575304"/>
+            <a:ext cx="2011680" cy="320040"/>
+          </a:xfrm>
+          <a:prstGeom prst="rect">
+            <a:avLst/>
+          </a:prstGeom>
+          <a:noFill/>
+        </p:spPr>
+        <p:txBody>
+          <a:bodyPr wrap="square">
+            <a:spAutoFit/>
+          </a:bodyPr>
+          <a:lstStyle/>
+          <a:p>
+            <a:pPr algn="l">
+              <a:defRPr sz="1200" b="0">
+                <a:solidFill>
+                  <a:srgbClr val="333333"/>
+                </a:solidFill>
+                <a:latin typeface="Calibri"/>
+              </a:defRPr>
+            </a:pPr>
+            <a:r>
+              <a:t>Post-event confirmation</a:t>
+            </a:r>
+          </a:p>
+        </p:txBody>
+      </p:sp>
+      <p:sp>
+        <p:nvSpPr>
+          <p:cNvPr id="23" name="Rectangle 22"/>
+          <p:cNvSpPr/>
+          <p:nvPr/>
+        </p:nvSpPr>
+        <p:spPr>
+          <a:xfrm>
+            <a:off x="731520" y="3913632"/>
+            <a:ext cx="6400800" cy="347472"/>
+          </a:xfrm>
+          <a:prstGeom prst="rect">
+            <a:avLst/>
+          </a:prstGeom>
+          <a:solidFill>
+            <a:srgbClr val="F2F2F2"/>
+          </a:solidFill>
+          <a:ln>
+            <a:noFill/>
+          </a:ln>
+        </p:spPr>
+        <p:style>
+          <a:lnRef idx="1">
+            <a:schemeClr val="accent1"/>
+          </a:lnRef>
+          <a:fillRef idx="3">
+            <a:schemeClr val="accent1"/>
+          </a:fillRef>
+          <a:effectRef idx="2">
+            <a:schemeClr val="accent1"/>
+          </a:effectRef>
+          <a:fontRef idx="minor">
+            <a:schemeClr val="lt1"/>
+          </a:fontRef>
+        </p:style>
+        <p:txBody>
+          <a:bodyPr rtlCol="0" anchor="ctr"/>
+          <a:lstStyle/>
+          <a:p>
+            <a:pPr algn="ctr"/>
+          </a:p>
+        </p:txBody>
+      </p:sp>
+      <p:sp>
+        <p:nvSpPr>
+          <p:cNvPr id="24" name="TextBox 23"/>
+          <p:cNvSpPr txBox="1"/>
+          <p:nvPr/>
+        </p:nvSpPr>
+        <p:spPr>
+          <a:xfrm>
+            <a:off x="822960" y="3922776"/>
+            <a:ext cx="4114800" cy="320040"/>
+          </a:xfrm>
+          <a:prstGeom prst="rect">
+            <a:avLst/>
+          </a:prstGeom>
+          <a:noFill/>
+        </p:spPr>
+        <p:txBody>
+          <a:bodyPr wrap="square">
+            <a:spAutoFit/>
+          </a:bodyPr>
+          <a:lstStyle/>
+          <a:p>
+            <a:pPr algn="l">
+              <a:defRPr sz="1200" b="0">
+                <a:solidFill>
+                  <a:srgbClr val="333333"/>
+                </a:solidFill>
+                <a:latin typeface="Calibri"/>
+              </a:defRPr>
+            </a:pPr>
+            <a:r>
+              <a:t>Social Media Engagement</a:t>
+            </a:r>
+          </a:p>
+        </p:txBody>
+      </p:sp>
+      <p:sp>
+        <p:nvSpPr>
+          <p:cNvPr id="25" name="TextBox 24"/>
+          <p:cNvSpPr txBox="1"/>
+          <p:nvPr/>
+        </p:nvSpPr>
+        <p:spPr>
+          <a:xfrm>
+            <a:off x="5029200" y="3922776"/>
+            <a:ext cx="2011680" cy="320040"/>
+          </a:xfrm>
+          <a:prstGeom prst="rect">
+            <a:avLst/>
+          </a:prstGeom>
+          <a:noFill/>
+        </p:spPr>
+        <p:txBody>
+          <a:bodyPr wrap="square">
+            <a:spAutoFit/>
+          </a:bodyPr>
+          <a:lstStyle/>
+          <a:p>
+            <a:pPr algn="l">
+              <a:defRPr sz="1200" b="0">
+                <a:solidFill>
+                  <a:srgbClr val="333333"/>
+                </a:solidFill>
+                <a:latin typeface="Calibri"/>
+              </a:defRPr>
+            </a:pPr>
+            <a:r>
+              <a:t>Screenshot review</a:t>
+            </a:r>
+          </a:p>
+        </p:txBody>
+      </p:sp>
+      <p:sp>
+        <p:nvSpPr>
+          <p:cNvPr id="26" name="Rectangle 25"/>
+          <p:cNvSpPr/>
+          <p:nvPr/>
+        </p:nvSpPr>
+        <p:spPr>
+          <a:xfrm>
+            <a:off x="731520" y="4261104"/>
+            <a:ext cx="6400800" cy="347472"/>
+          </a:xfrm>
+          <a:prstGeom prst="rect">
+            <a:avLst/>
+          </a:prstGeom>
+          <a:solidFill>
+            <a:srgbClr val="FFFFFF"/>
+          </a:solidFill>
+          <a:ln>
+            <a:noFill/>
+          </a:ln>
+        </p:spPr>
+        <p:style>
+          <a:lnRef idx="1">
+            <a:schemeClr val="accent1"/>
+          </a:lnRef>
+          <a:fillRef idx="3">
+            <a:schemeClr val="accent1"/>
+          </a:fillRef>
+          <a:effectRef idx="2">
+            <a:schemeClr val="accent1"/>
+          </a:effectRef>
+          <a:fontRef idx="minor">
+            <a:schemeClr val="lt1"/>
+          </a:fontRef>
+        </p:style>
+        <p:txBody>
+          <a:bodyPr rtlCol="0" anchor="ctr"/>
+          <a:lstStyle/>
+          <a:p>
+            <a:pPr algn="ctr"/>
+          </a:p>
+        </p:txBody>
+      </p:sp>
+      <p:sp>
+        <p:nvSpPr>
+          <p:cNvPr id="27" name="TextBox 26"/>
+          <p:cNvSpPr txBox="1"/>
+          <p:nvPr/>
+        </p:nvSpPr>
+        <p:spPr>
+          <a:xfrm>
+            <a:off x="822960" y="4270248"/>
+            <a:ext cx="4114800" cy="320040"/>
+          </a:xfrm>
+          <a:prstGeom prst="rect">
+            <a:avLst/>
+          </a:prstGeom>
+          <a:noFill/>
+        </p:spPr>
+        <p:txBody>
+          <a:bodyPr wrap="square">
+            <a:spAutoFit/>
+          </a:bodyPr>
+          <a:lstStyle/>
+          <a:p>
+            <a:pPr algn="l">
+              <a:defRPr sz="1200" b="0">
+                <a:solidFill>
+                  <a:srgbClr val="333333"/>
+                </a:solidFill>
+                <a:latin typeface="Calibri"/>
+              </a:defRPr>
+            </a:pPr>
+            <a:r>
+              <a:t>Newsletter Trivia</a:t>
+            </a:r>
+          </a:p>
+        </p:txBody>
+      </p:sp>
+      <p:sp>
+        <p:nvSpPr>
+          <p:cNvPr id="28" name="TextBox 27"/>
+          <p:cNvSpPr txBox="1"/>
+          <p:nvPr/>
+        </p:nvSpPr>
+        <p:spPr>
+          <a:xfrm>
+            <a:off x="5029200" y="4270248"/>
+            <a:ext cx="2011680" cy="320040"/>
+          </a:xfrm>
+          <a:prstGeom prst="rect">
+            <a:avLst/>
+          </a:prstGeom>
+          <a:noFill/>
+        </p:spPr>
+        <p:txBody>
+          <a:bodyPr wrap="square">
+            <a:spAutoFit/>
+          </a:bodyPr>
+          <a:lstStyle/>
+          <a:p>
+            <a:pPr algn="l">
+              <a:defRPr sz="1200" b="0">
+                <a:solidFill>
+                  <a:srgbClr val="333333"/>
+                </a:solidFill>
+                <a:latin typeface="Calibri"/>
+              </a:defRPr>
+            </a:pPr>
+            <a:r>
+              <a:t>Correct answer</a:t>
+            </a:r>
+          </a:p>
+        </p:txBody>
+      </p:sp>
+      <p:sp>
+        <p:nvSpPr>
+          <p:cNvPr id="29" name="Rectangle 28"/>
+          <p:cNvSpPr/>
+          <p:nvPr/>
+        </p:nvSpPr>
+        <p:spPr>
+          <a:xfrm>
+            <a:off x="731520" y="4608576"/>
+            <a:ext cx="6400800" cy="347472"/>
+          </a:xfrm>
+          <a:prstGeom prst="rect">
+            <a:avLst/>
+          </a:prstGeom>
+          <a:solidFill>
+            <a:srgbClr val="F2F2F2"/>
+          </a:solidFill>
+          <a:ln>
+            <a:noFill/>
+          </a:ln>
+        </p:spPr>
+        <p:style>
+          <a:lnRef idx="1">
+            <a:schemeClr val="accent1"/>
+          </a:lnRef>
+          <a:fillRef idx="3">
+            <a:schemeClr val="accent1"/>
+          </a:fillRef>
+          <a:effectRef idx="2">
+            <a:schemeClr val="accent1"/>
+          </a:effectRef>
+          <a:fontRef idx="minor">
+            <a:schemeClr val="lt1"/>
+          </a:fontRef>
+        </p:style>
+        <p:txBody>
+          <a:bodyPr rtlCol="0" anchor="ctr"/>
+          <a:lstStyle/>
+          <a:p>
+            <a:pPr algn="ctr"/>
+          </a:p>
+        </p:txBody>
+      </p:sp>
+      <p:sp>
+        <p:nvSpPr>
+          <p:cNvPr id="30" name="TextBox 29"/>
+          <p:cNvSpPr txBox="1"/>
+          <p:nvPr/>
+        </p:nvSpPr>
+        <p:spPr>
+          <a:xfrm>
+            <a:off x="822960" y="4617720"/>
+            <a:ext cx="4114800" cy="320040"/>
+          </a:xfrm>
+          <a:prstGeom prst="rect">
+            <a:avLst/>
+          </a:prstGeom>
+          <a:noFill/>
+        </p:spPr>
+        <p:txBody>
+          <a:bodyPr wrap="square">
+            <a:spAutoFit/>
+          </a:bodyPr>
+          <a:lstStyle/>
+          <a:p>
+            <a:pPr algn="l">
+              <a:defRPr sz="1200" b="0">
+                <a:solidFill>
+                  <a:srgbClr val="333333"/>
+                </a:solidFill>
+                <a:latin typeface="Calibri"/>
+              </a:defRPr>
+            </a:pPr>
+            <a:r>
+              <a:t>Birthday / Anniversary</a:t>
+            </a:r>
+          </a:p>
+        </p:txBody>
+      </p:sp>
+      <p:sp>
+        <p:nvSpPr>
+          <p:cNvPr id="31" name="TextBox 30"/>
+          <p:cNvSpPr txBox="1"/>
+          <p:nvPr/>
+        </p:nvSpPr>
+        <p:spPr>
+          <a:xfrm>
+            <a:off x="5029200" y="4617720"/>
+            <a:ext cx="2011680" cy="320040"/>
+          </a:xfrm>
+          <a:prstGeom prst="rect">
+            <a:avLst/>
+          </a:prstGeom>
+          <a:noFill/>
+        </p:spPr>
+        <p:txBody>
+          <a:bodyPr wrap="square">
+            <a:spAutoFit/>
+          </a:bodyPr>
+          <a:lstStyle/>
+          <a:p>
+            <a:pPr algn="l">
+              <a:defRPr sz="1200" b="0">
+                <a:solidFill>
+                  <a:srgbClr val="333333"/>
+                </a:solidFill>
+                <a:latin typeface="Calibri"/>
+              </a:defRPr>
+            </a:pPr>
+            <a:r>
+              <a:t>Automated (Paycom)</a:t>
+            </a:r>
+          </a:p>
+        </p:txBody>
+      </p:sp>
+      <p:sp>
+        <p:nvSpPr>
+          <p:cNvPr id="32" name="Rectangle 31"/>
+          <p:cNvSpPr/>
+          <p:nvPr/>
+        </p:nvSpPr>
+        <p:spPr>
+          <a:xfrm>
+            <a:off x="731520" y="4956048"/>
+            <a:ext cx="6400800" cy="347472"/>
+          </a:xfrm>
+          <a:prstGeom prst="rect">
+            <a:avLst/>
+          </a:prstGeom>
+          <a:solidFill>
+            <a:srgbClr val="FFFFFF"/>
+          </a:solidFill>
+          <a:ln>
+            <a:noFill/>
+          </a:ln>
+        </p:spPr>
+        <p:style>
+          <a:lnRef idx="1">
+            <a:schemeClr val="accent1"/>
+          </a:lnRef>
+          <a:fillRef idx="3">
+            <a:schemeClr val="accent1"/>
+          </a:fillRef>
+          <a:effectRef idx="2">
+            <a:schemeClr val="accent1"/>
+          </a:effectRef>
+          <a:fontRef idx="minor">
+            <a:schemeClr val="lt1"/>
+          </a:fontRef>
+        </p:style>
+        <p:txBody>
+          <a:bodyPr rtlCol="0" anchor="ctr"/>
+          <a:lstStyle/>
+          <a:p>
+            <a:pPr algn="ctr"/>
+          </a:p>
+        </p:txBody>
+      </p:sp>
+      <p:sp>
+        <p:nvSpPr>
+          <p:cNvPr id="33" name="TextBox 32"/>
+          <p:cNvSpPr txBox="1"/>
+          <p:nvPr/>
+        </p:nvSpPr>
+        <p:spPr>
+          <a:xfrm>
+            <a:off x="822960" y="4965192"/>
+            <a:ext cx="4114800" cy="320040"/>
+          </a:xfrm>
+          <a:prstGeom prst="rect">
+            <a:avLst/>
+          </a:prstGeom>
+          <a:noFill/>
+        </p:spPr>
+        <p:txBody>
+          <a:bodyPr wrap="square">
+            <a:spAutoFit/>
+          </a:bodyPr>
+          <a:lstStyle/>
+          <a:p>
+            <a:pPr algn="l">
+              <a:defRPr sz="1200" b="0">
                 <a:solidFill>
                   <a:srgbClr val="333333"/>
                 </a:solidFill>
@@ -14269,28 +15434,28 @@
       </p:sp>
       <p:sp>
         <p:nvSpPr>
-          <p:cNvPr id="22" name="TextBox 21"/>
-          <p:cNvSpPr txBox="1"/>
-          <p:nvPr/>
-        </p:nvSpPr>
-        <p:spPr>
-          <a:xfrm>
-            <a:off x="5029200" y="3904488"/>
-            <a:ext cx="2011680" cy="365760"/>
-          </a:xfrm>
-          <a:prstGeom prst="rect">
-            <a:avLst/>
-          </a:prstGeom>
-          <a:noFill/>
-        </p:spPr>
-        <p:txBody>
-          <a:bodyPr wrap="square">
-            <a:spAutoFit/>
-          </a:bodyPr>
-          <a:lstStyle/>
-          <a:p>
-            <a:pPr algn="l">
-              <a:defRPr sz="1300" b="0">
+          <p:cNvPr id="34" name="TextBox 33"/>
+          <p:cNvSpPr txBox="1"/>
+          <p:nvPr/>
+        </p:nvSpPr>
+        <p:spPr>
+          <a:xfrm>
+            <a:off x="5029200" y="4965192"/>
+            <a:ext cx="2011680" cy="320040"/>
+          </a:xfrm>
+          <a:prstGeom prst="rect">
+            <a:avLst/>
+          </a:prstGeom>
+          <a:noFill/>
+        </p:spPr>
+        <p:txBody>
+          <a:bodyPr wrap="square">
+            <a:spAutoFit/>
+          </a:bodyPr>
+          <a:lstStyle/>
+          <a:p>
+            <a:pPr algn="l">
+              <a:defRPr sz="1200" b="0">
                 <a:solidFill>
                   <a:srgbClr val="333333"/>
                 </a:solidFill>
@@ -14305,13 +15470,13 @@
       </p:sp>
       <p:sp>
         <p:nvSpPr>
-          <p:cNvPr id="23" name="TextBox 22"/>
-          <p:cNvSpPr txBox="1"/>
-          <p:nvPr/>
-        </p:nvSpPr>
-        <p:spPr>
-          <a:xfrm>
-            <a:off x="731520" y="4480560"/>
+          <p:cNvPr id="35" name="TextBox 34"/>
+          <p:cNvSpPr txBox="1"/>
+          <p:nvPr/>
+        </p:nvSpPr>
+        <p:spPr>
+          <a:xfrm>
+            <a:off x="731520" y="5440680"/>
             <a:ext cx="6400800" cy="365760"/>
           </a:xfrm>
           <a:prstGeom prst="rect">
@@ -14341,7 +15506,7 @@
       </p:sp>
       <p:sp>
         <p:nvSpPr>
-          <p:cNvPr id="24" name="TextBox 23"/>
+          <p:cNvPr id="36" name="TextBox 35"/>
           <p:cNvSpPr txBox="1"/>
           <p:nvPr/>
         </p:nvSpPr>
@@ -14370,21 +15535,21 @@
               </a:defRPr>
             </a:pPr>
             <a:r>
-              <a:t>Audit &amp; Transparency</a:t>
-            </a:r>
-          </a:p>
-        </p:txBody>
-      </p:sp>
-      <p:sp>
-        <p:nvSpPr>
-          <p:cNvPr id="25" name="TextBox 24"/>
+              <a:t>Community Engagement</a:t>
+            </a:r>
+          </a:p>
+        </p:txBody>
+      </p:sp>
+      <p:sp>
+        <p:nvSpPr>
+          <p:cNvPr id="37" name="TextBox 36"/>
           <p:cNvSpPr txBox="1"/>
           <p:nvPr/>
         </p:nvSpPr>
         <p:spPr>
           <a:xfrm>
             <a:off x="7772400" y="1828800"/>
-            <a:ext cx="4114800" cy="3657600"/>
+            <a:ext cx="4114800" cy="4572000"/>
           </a:xfrm>
           <a:prstGeom prst="rect">
             <a:avLst/>
@@ -14401,15 +15566,30 @@
               <a:spcAft>
                 <a:spcPts val="1000"/>
               </a:spcAft>
-              <a:defRPr sz="1500" b="0">
-                <a:solidFill>
-                  <a:srgbClr val="333333"/>
-                </a:solidFill>
-                <a:latin typeface="Calibri"/>
-              </a:defRPr>
-            </a:pPr>
-            <a:r>
-              <a:t>• Immutable transaction log for every point change</a:t>
+              <a:defRPr sz="1300" b="0">
+                <a:solidFill>
+                  <a:srgbClr val="333333"/>
+                </a:solidFill>
+                <a:latin typeface="Calibri"/>
+              </a:defRPr>
+            </a:pPr>
+            <a:r>
+              <a:rPr sz="1300" b="1">
+                <a:solidFill>
+                  <a:srgbClr val="333333"/>
+                </a:solidFill>
+                <a:latin typeface="Calibri"/>
+              </a:rPr>
+              <a:t>• TAC RSVP &amp; Role Sign-Ups: </a:t>
+            </a:r>
+            <a:r>
+              <a:rPr sz="1300" b="0">
+                <a:solidFill>
+                  <a:srgbClr val="333333"/>
+                </a:solidFill>
+                <a:latin typeface="Calibri"/>
+              </a:rPr>
+              <a:t>RSVP workflow, role selection (setup, check-in, cleanup), automated reminders</a:t>
             </a:r>
           </a:p>
           <a:p>
@@ -14417,15 +15597,25 @@
               <a:spcAft>
                 <a:spcPts val="1000"/>
               </a:spcAft>
-              <a:defRPr sz="1500">
-                <a:solidFill>
-                  <a:srgbClr val="333333"/>
-                </a:solidFill>
-                <a:latin typeface="Calibri"/>
-              </a:defRPr>
-            </a:pPr>
-            <a:r>
-              <a:t>• Timestamp, actor, action, amount, reason</a:t>
+              <a:defRPr sz="1300"/>
+            </a:pPr>
+            <a:r>
+              <a:rPr sz="1300" b="1">
+                <a:solidFill>
+                  <a:srgbClr val="333333"/>
+                </a:solidFill>
+                <a:latin typeface="Calibri"/>
+              </a:rPr>
+              <a:t>• Culture Groups: </a:t>
+            </a:r>
+            <a:r>
+              <a:rPr sz="1300" b="0">
+                <a:solidFill>
+                  <a:srgbClr val="333333"/>
+                </a:solidFill>
+                <a:latin typeface="Calibri"/>
+              </a:rPr>
+              <a:t>Self-service directory, one-tap sign-up, attendance tracking, participation points</a:t>
             </a:r>
           </a:p>
           <a:p>
@@ -14433,15 +15623,25 @@
               <a:spcAft>
                 <a:spcPts val="1000"/>
               </a:spcAft>
-              <a:defRPr sz="1500">
-                <a:solidFill>
-                  <a:srgbClr val="333333"/>
-                </a:solidFill>
-                <a:latin typeface="Calibri"/>
-              </a:defRPr>
-            </a:pPr>
-            <a:r>
-              <a:t>• Filterable by employee, program, date, type</a:t>
+              <a:defRPr sz="1300"/>
+            </a:pPr>
+            <a:r>
+              <a:rPr sz="1300" b="1">
+                <a:solidFill>
+                  <a:srgbClr val="333333"/>
+                </a:solidFill>
+                <a:latin typeface="Calibri"/>
+              </a:rPr>
+              <a:t>• Volunteer Forms: </a:t>
+            </a:r>
+            <a:r>
+              <a:rPr sz="1300" b="0">
+                <a:solidFill>
+                  <a:srgbClr val="333333"/>
+                </a:solidFill>
+                <a:latin typeface="Calibri"/>
+              </a:rPr>
+              <a:t>Event help board, volunteer slots, completion tracking, engagement score</a:t>
             </a:r>
           </a:p>
           <a:p>
@@ -14449,15 +15649,25 @@
               <a:spcAft>
                 <a:spcPts val="1000"/>
               </a:spcAft>
-              <a:defRPr sz="1500">
-                <a:solidFill>
-                  <a:srgbClr val="333333"/>
-                </a:solidFill>
-                <a:latin typeface="Calibri"/>
-              </a:defRPr>
-            </a:pPr>
-            <a:r>
-              <a:t>• Export to CSV for external review</a:t>
+              <a:defRPr sz="1300"/>
+            </a:pPr>
+            <a:r>
+              <a:rPr sz="1300" b="1">
+                <a:solidFill>
+                  <a:srgbClr val="333333"/>
+                </a:solidFill>
+                <a:latin typeface="Calibri"/>
+              </a:rPr>
+              <a:t>• Social Media: </a:t>
+            </a:r>
+            <a:r>
+              <a:rPr sz="1300" b="0">
+                <a:solidFill>
+                  <a:srgbClr val="333333"/>
+                </a:solidFill>
+                <a:latin typeface="Calibri"/>
+              </a:rPr>
+              <a:t>Screenshot upload, admin review queue, campaign tracking</a:t>
             </a:r>
           </a:p>
           <a:p>
@@ -14465,31 +15675,25 @@
               <a:spcAft>
                 <a:spcPts val="1000"/>
               </a:spcAft>
-              <a:defRPr sz="1500">
-                <a:solidFill>
-                  <a:srgbClr val="333333"/>
-                </a:solidFill>
-                <a:latin typeface="Calibri"/>
-              </a:defRPr>
-            </a:pPr>
-            <a:r>
-              <a:t>• Anomaly highlighting for oversight</a:t>
-            </a:r>
-          </a:p>
-          <a:p>
-            <a:pPr>
-              <a:spcAft>
-                <a:spcPts val="1000"/>
-              </a:spcAft>
-              <a:defRPr sz="1500">
-                <a:solidFill>
-                  <a:srgbClr val="333333"/>
-                </a:solidFill>
-                <a:latin typeface="Calibri"/>
-              </a:defRPr>
-            </a:pPr>
-            <a:r>
-              <a:t>• Top-down bestowal with instant notifications</a:t>
+              <a:defRPr sz="1300"/>
+            </a:pPr>
+            <a:r>
+              <a:rPr sz="1300" b="1">
+                <a:solidFill>
+                  <a:srgbClr val="333333"/>
+                </a:solidFill>
+                <a:latin typeface="Calibri"/>
+              </a:rPr>
+              <a:t>• Audit &amp; Transparency: </a:t>
+            </a:r>
+            <a:r>
+              <a:rPr sz="1300" b="0">
+                <a:solidFill>
+                  <a:srgbClr val="333333"/>
+                </a:solidFill>
+                <a:latin typeface="Calibri"/>
+              </a:rPr>
+              <a:t>Immutable transaction log, anomaly detection, CSV export</a:t>
             </a:r>
           </a:p>
         </p:txBody>

--- a/RFP/IoTeye - Arc Mercer Pitch.pptx
+++ b/RFP/IoTeye - Arc Mercer Pitch.pptx
@@ -5,25 +5,26 @@
     <p:sldMasterId id="2147483648" r:id="rId1"/>
   </p:sldMasterIdLst>
   <p:sldIdLst>
-    <p:sldId id="256" r:id="rId7"/>
-    <p:sldId id="257" r:id="rId8"/>
-    <p:sldId id="258" r:id="rId9"/>
-    <p:sldId id="259" r:id="rId10"/>
-    <p:sldId id="260" r:id="rId11"/>
-    <p:sldId id="261" r:id="rId12"/>
-    <p:sldId id="262" r:id="rId13"/>
-    <p:sldId id="263" r:id="rId14"/>
-    <p:sldId id="264" r:id="rId15"/>
-    <p:sldId id="265" r:id="rId16"/>
-    <p:sldId id="266" r:id="rId17"/>
-    <p:sldId id="267" r:id="rId18"/>
-    <p:sldId id="268" r:id="rId19"/>
-    <p:sldId id="269" r:id="rId20"/>
-    <p:sldId id="270" r:id="rId21"/>
-    <p:sldId id="271" r:id="rId22"/>
-    <p:sldId id="272" r:id="rId23"/>
+    <p:sldId id="256" r:id="rId2"/>
+    <p:sldId id="257" r:id="rId3"/>
+    <p:sldId id="258" r:id="rId4"/>
+    <p:sldId id="259" r:id="rId5"/>
+    <p:sldId id="260" r:id="rId6"/>
+    <p:sldId id="261" r:id="rId7"/>
+    <p:sldId id="262" r:id="rId8"/>
+    <p:sldId id="263" r:id="rId9"/>
+    <p:sldId id="264" r:id="rId10"/>
+    <p:sldId id="265" r:id="rId11"/>
+    <p:sldId id="266" r:id="rId12"/>
+    <p:sldId id="267" r:id="rId13"/>
+    <p:sldId id="268" r:id="rId14"/>
+    <p:sldId id="269" r:id="rId15"/>
+    <p:sldId id="270" r:id="rId16"/>
+    <p:sldId id="271" r:id="rId17"/>
+    <p:sldId id="272" r:id="rId18"/>
+    <p:sldId id="273" r:id="rId19"/>
   </p:sldIdLst>
-  <p:sldSz cx="12191695" cy="6858000" type="screen4x3"/>
+  <p:sldSz cx="12192000" cy="6858000"/>
   <p:notesSz cx="6858000" cy="9144000"/>
   <p:defaultTextStyle>
     <a:defPPr>
@@ -120,6 +121,22 @@
       </a:defRPr>
     </a:lvl9pPr>
   </p:defaultTextStyle>
+  <p:extLst>
+    <p:ext uri="{EFAFB233-063F-42B5-8137-9DF3F51BA10A}">
+      <p15:sldGuideLst xmlns:p15="http://schemas.microsoft.com/office/powerpoint/2012/main">
+        <p15:guide id="1" orient="horz" pos="2160">
+          <p15:clr>
+            <a:srgbClr val="A4A3A4"/>
+          </p15:clr>
+        </p15:guide>
+        <p15:guide id="2" pos="2880">
+          <p15:clr>
+            <a:srgbClr val="A4A3A4"/>
+          </p15:clr>
+        </p15:guide>
+      </p15:sldGuideLst>
+    </p:ext>
+  </p:extLst>
 </p:presentation>
 </file>
 
@@ -161,10 +178,9 @@
           <a:lstStyle/>
           <a:p>
             <a:r>
-              <a:rPr lang="en-US" smtClean="0"/>
+              <a:rPr lang="en-US"/>
               <a:t>Click to edit Master title style</a:t>
             </a:r>
-            <a:endParaRPr lang="en-US"/>
           </a:p>
         </p:txBody>
       </p:sp>
@@ -280,10 +296,9 @@
           </a:lstStyle>
           <a:p>
             <a:r>
-              <a:rPr lang="en-US" smtClean="0"/>
+              <a:rPr lang="en-US"/>
               <a:t>Click to edit Master subtitle style</a:t>
             </a:r>
-            <a:endParaRPr lang="en-US"/>
           </a:p>
         </p:txBody>
       </p:sp>
@@ -304,7 +319,7 @@
           <a:p>
             <a:fld id="{5BCAD085-E8A6-8845-BD4E-CB4CCA059FC4}" type="datetimeFigureOut">
               <a:rPr lang="en-US" smtClean="0"/>
-              <a:t>1/27/13</a:t>
+              <a:t>4/14/26</a:t>
             </a:fld>
             <a:endParaRPr lang="en-US"/>
           </a:p>
@@ -398,10 +413,9 @@
           <a:lstStyle/>
           <a:p>
             <a:r>
-              <a:rPr lang="en-US" smtClean="0"/>
+              <a:rPr lang="en-US"/>
               <a:t>Click to edit Master title style</a:t>
             </a:r>
-            <a:endParaRPr lang="en-US"/>
           </a:p>
         </p:txBody>
       </p:sp>
@@ -422,38 +436,37 @@
           <a:p>
             <a:pPr lvl="0"/>
             <a:r>
-              <a:rPr lang="en-US" smtClean="0"/>
+              <a:rPr lang="en-US"/>
               <a:t>Click to edit Master text styles</a:t>
             </a:r>
           </a:p>
           <a:p>
             <a:pPr lvl="1"/>
             <a:r>
-              <a:rPr lang="en-US" smtClean="0"/>
+              <a:rPr lang="en-US"/>
               <a:t>Second level</a:t>
             </a:r>
           </a:p>
           <a:p>
             <a:pPr lvl="2"/>
             <a:r>
-              <a:rPr lang="en-US" smtClean="0"/>
+              <a:rPr lang="en-US"/>
               <a:t>Third level</a:t>
             </a:r>
           </a:p>
           <a:p>
             <a:pPr lvl="3"/>
             <a:r>
-              <a:rPr lang="en-US" smtClean="0"/>
+              <a:rPr lang="en-US"/>
               <a:t>Fourth level</a:t>
             </a:r>
           </a:p>
           <a:p>
             <a:pPr lvl="4"/>
             <a:r>
-              <a:rPr lang="en-US" smtClean="0"/>
+              <a:rPr lang="en-US"/>
               <a:t>Fifth level</a:t>
             </a:r>
-            <a:endParaRPr lang="en-US"/>
           </a:p>
         </p:txBody>
       </p:sp>
@@ -474,7 +487,7 @@
           <a:p>
             <a:fld id="{5BCAD085-E8A6-8845-BD4E-CB4CCA059FC4}" type="datetimeFigureOut">
               <a:rPr lang="en-US" smtClean="0"/>
-              <a:t>1/27/13</a:t>
+              <a:t>4/14/26</a:t>
             </a:fld>
             <a:endParaRPr lang="en-US"/>
           </a:p>
@@ -573,10 +586,9 @@
           <a:lstStyle/>
           <a:p>
             <a:r>
-              <a:rPr lang="en-US" smtClean="0"/>
+              <a:rPr lang="en-US"/>
               <a:t>Click to edit Master title style</a:t>
             </a:r>
-            <a:endParaRPr lang="en-US"/>
           </a:p>
         </p:txBody>
       </p:sp>
@@ -602,38 +614,37 @@
           <a:p>
             <a:pPr lvl="0"/>
             <a:r>
-              <a:rPr lang="en-US" smtClean="0"/>
+              <a:rPr lang="en-US"/>
               <a:t>Click to edit Master text styles</a:t>
             </a:r>
           </a:p>
           <a:p>
             <a:pPr lvl="1"/>
             <a:r>
-              <a:rPr lang="en-US" smtClean="0"/>
+              <a:rPr lang="en-US"/>
               <a:t>Second level</a:t>
             </a:r>
           </a:p>
           <a:p>
             <a:pPr lvl="2"/>
             <a:r>
-              <a:rPr lang="en-US" smtClean="0"/>
+              <a:rPr lang="en-US"/>
               <a:t>Third level</a:t>
             </a:r>
           </a:p>
           <a:p>
             <a:pPr lvl="3"/>
             <a:r>
-              <a:rPr lang="en-US" smtClean="0"/>
+              <a:rPr lang="en-US"/>
               <a:t>Fourth level</a:t>
             </a:r>
           </a:p>
           <a:p>
             <a:pPr lvl="4"/>
             <a:r>
-              <a:rPr lang="en-US" smtClean="0"/>
+              <a:rPr lang="en-US"/>
               <a:t>Fifth level</a:t>
             </a:r>
-            <a:endParaRPr lang="en-US"/>
           </a:p>
         </p:txBody>
       </p:sp>
@@ -654,7 +665,7 @@
           <a:p>
             <a:fld id="{5BCAD085-E8A6-8845-BD4E-CB4CCA059FC4}" type="datetimeFigureOut">
               <a:rPr lang="en-US" smtClean="0"/>
-              <a:t>1/27/13</a:t>
+              <a:t>4/14/26</a:t>
             </a:fld>
             <a:endParaRPr lang="en-US"/>
           </a:p>
@@ -748,10 +759,9 @@
           <a:lstStyle/>
           <a:p>
             <a:r>
-              <a:rPr lang="en-US" smtClean="0"/>
+              <a:rPr lang="en-US"/>
               <a:t>Click to edit Master title style</a:t>
             </a:r>
-            <a:endParaRPr lang="en-US"/>
           </a:p>
         </p:txBody>
       </p:sp>
@@ -772,38 +782,37 @@
           <a:p>
             <a:pPr lvl="0"/>
             <a:r>
-              <a:rPr lang="en-US" smtClean="0"/>
+              <a:rPr lang="en-US"/>
               <a:t>Click to edit Master text styles</a:t>
             </a:r>
           </a:p>
           <a:p>
             <a:pPr lvl="1"/>
             <a:r>
-              <a:rPr lang="en-US" smtClean="0"/>
+              <a:rPr lang="en-US"/>
               <a:t>Second level</a:t>
             </a:r>
           </a:p>
           <a:p>
             <a:pPr lvl="2"/>
             <a:r>
-              <a:rPr lang="en-US" smtClean="0"/>
+              <a:rPr lang="en-US"/>
               <a:t>Third level</a:t>
             </a:r>
           </a:p>
           <a:p>
             <a:pPr lvl="3"/>
             <a:r>
-              <a:rPr lang="en-US" smtClean="0"/>
+              <a:rPr lang="en-US"/>
               <a:t>Fourth level</a:t>
             </a:r>
           </a:p>
           <a:p>
             <a:pPr lvl="4"/>
             <a:r>
-              <a:rPr lang="en-US" smtClean="0"/>
+              <a:rPr lang="en-US"/>
               <a:t>Fifth level</a:t>
             </a:r>
-            <a:endParaRPr lang="en-US"/>
           </a:p>
         </p:txBody>
       </p:sp>
@@ -824,7 +833,7 @@
           <a:p>
             <a:fld id="{5BCAD085-E8A6-8845-BD4E-CB4CCA059FC4}" type="datetimeFigureOut">
               <a:rPr lang="en-US" smtClean="0"/>
-              <a:t>1/27/13</a:t>
+              <a:t>4/14/26</a:t>
             </a:fld>
             <a:endParaRPr lang="en-US"/>
           </a:p>
@@ -927,10 +936,9 @@
           </a:lstStyle>
           <a:p>
             <a:r>
-              <a:rPr lang="en-US" smtClean="0"/>
+              <a:rPr lang="en-US"/>
               <a:t>Click to edit Master title style</a:t>
             </a:r>
-            <a:endParaRPr lang="en-US"/>
           </a:p>
         </p:txBody>
       </p:sp>
@@ -1047,7 +1055,7 @@
           <a:p>
             <a:pPr lvl="0"/>
             <a:r>
-              <a:rPr lang="en-US" smtClean="0"/>
+              <a:rPr lang="en-US"/>
               <a:t>Click to edit Master text styles</a:t>
             </a:r>
           </a:p>
@@ -1070,7 +1078,7 @@
           <a:p>
             <a:fld id="{5BCAD085-E8A6-8845-BD4E-CB4CCA059FC4}" type="datetimeFigureOut">
               <a:rPr lang="en-US" smtClean="0"/>
-              <a:t>1/27/13</a:t>
+              <a:t>4/14/26</a:t>
             </a:fld>
             <a:endParaRPr lang="en-US"/>
           </a:p>
@@ -1164,10 +1172,9 @@
           <a:lstStyle/>
           <a:p>
             <a:r>
-              <a:rPr lang="en-US" smtClean="0"/>
+              <a:rPr lang="en-US"/>
               <a:t>Click to edit Master title style</a:t>
             </a:r>
-            <a:endParaRPr lang="en-US"/>
           </a:p>
         </p:txBody>
       </p:sp>
@@ -1221,38 +1228,37 @@
           <a:p>
             <a:pPr lvl="0"/>
             <a:r>
-              <a:rPr lang="en-US" smtClean="0"/>
+              <a:rPr lang="en-US"/>
               <a:t>Click to edit Master text styles</a:t>
             </a:r>
           </a:p>
           <a:p>
             <a:pPr lvl="1"/>
             <a:r>
-              <a:rPr lang="en-US" smtClean="0"/>
+              <a:rPr lang="en-US"/>
               <a:t>Second level</a:t>
             </a:r>
           </a:p>
           <a:p>
             <a:pPr lvl="2"/>
             <a:r>
-              <a:rPr lang="en-US" smtClean="0"/>
+              <a:rPr lang="en-US"/>
               <a:t>Third level</a:t>
             </a:r>
           </a:p>
           <a:p>
             <a:pPr lvl="3"/>
             <a:r>
-              <a:rPr lang="en-US" smtClean="0"/>
+              <a:rPr lang="en-US"/>
               <a:t>Fourth level</a:t>
             </a:r>
           </a:p>
           <a:p>
             <a:pPr lvl="4"/>
             <a:r>
-              <a:rPr lang="en-US" smtClean="0"/>
+              <a:rPr lang="en-US"/>
               <a:t>Fifth level</a:t>
             </a:r>
-            <a:endParaRPr lang="en-US"/>
           </a:p>
         </p:txBody>
       </p:sp>
@@ -1306,38 +1312,37 @@
           <a:p>
             <a:pPr lvl="0"/>
             <a:r>
-              <a:rPr lang="en-US" smtClean="0"/>
+              <a:rPr lang="en-US"/>
               <a:t>Click to edit Master text styles</a:t>
             </a:r>
           </a:p>
           <a:p>
             <a:pPr lvl="1"/>
             <a:r>
-              <a:rPr lang="en-US" smtClean="0"/>
+              <a:rPr lang="en-US"/>
               <a:t>Second level</a:t>
             </a:r>
           </a:p>
           <a:p>
             <a:pPr lvl="2"/>
             <a:r>
-              <a:rPr lang="en-US" smtClean="0"/>
+              <a:rPr lang="en-US"/>
               <a:t>Third level</a:t>
             </a:r>
           </a:p>
           <a:p>
             <a:pPr lvl="3"/>
             <a:r>
-              <a:rPr lang="en-US" smtClean="0"/>
+              <a:rPr lang="en-US"/>
               <a:t>Fourth level</a:t>
             </a:r>
           </a:p>
           <a:p>
             <a:pPr lvl="4"/>
             <a:r>
-              <a:rPr lang="en-US" smtClean="0"/>
+              <a:rPr lang="en-US"/>
               <a:t>Fifth level</a:t>
             </a:r>
-            <a:endParaRPr lang="en-US"/>
           </a:p>
         </p:txBody>
       </p:sp>
@@ -1358,7 +1363,7 @@
           <a:p>
             <a:fld id="{5BCAD085-E8A6-8845-BD4E-CB4CCA059FC4}" type="datetimeFigureOut">
               <a:rPr lang="en-US" smtClean="0"/>
-              <a:t>1/27/13</a:t>
+              <a:t>4/14/26</a:t>
             </a:fld>
             <a:endParaRPr lang="en-US"/>
           </a:p>
@@ -1456,10 +1461,9 @@
           </a:lstStyle>
           <a:p>
             <a:r>
-              <a:rPr lang="en-US" smtClean="0"/>
+              <a:rPr lang="en-US"/>
               <a:t>Click to edit Master title style</a:t>
             </a:r>
-            <a:endParaRPr lang="en-US"/>
           </a:p>
         </p:txBody>
       </p:sp>
@@ -1522,7 +1526,7 @@
           <a:p>
             <a:pPr lvl="0"/>
             <a:r>
-              <a:rPr lang="en-US" smtClean="0"/>
+              <a:rPr lang="en-US"/>
               <a:t>Click to edit Master text styles</a:t>
             </a:r>
           </a:p>
@@ -1578,38 +1582,37 @@
           <a:p>
             <a:pPr lvl="0"/>
             <a:r>
-              <a:rPr lang="en-US" smtClean="0"/>
+              <a:rPr lang="en-US"/>
               <a:t>Click to edit Master text styles</a:t>
             </a:r>
           </a:p>
           <a:p>
             <a:pPr lvl="1"/>
             <a:r>
-              <a:rPr lang="en-US" smtClean="0"/>
+              <a:rPr lang="en-US"/>
               <a:t>Second level</a:t>
             </a:r>
           </a:p>
           <a:p>
             <a:pPr lvl="2"/>
             <a:r>
-              <a:rPr lang="en-US" smtClean="0"/>
+              <a:rPr lang="en-US"/>
               <a:t>Third level</a:t>
             </a:r>
           </a:p>
           <a:p>
             <a:pPr lvl="3"/>
             <a:r>
-              <a:rPr lang="en-US" smtClean="0"/>
+              <a:rPr lang="en-US"/>
               <a:t>Fourth level</a:t>
             </a:r>
           </a:p>
           <a:p>
             <a:pPr lvl="4"/>
             <a:r>
-              <a:rPr lang="en-US" smtClean="0"/>
+              <a:rPr lang="en-US"/>
               <a:t>Fifth level</a:t>
             </a:r>
-            <a:endParaRPr lang="en-US"/>
           </a:p>
         </p:txBody>
       </p:sp>
@@ -1672,7 +1675,7 @@
           <a:p>
             <a:pPr lvl="0"/>
             <a:r>
-              <a:rPr lang="en-US" smtClean="0"/>
+              <a:rPr lang="en-US"/>
               <a:t>Click to edit Master text styles</a:t>
             </a:r>
           </a:p>
@@ -1728,38 +1731,37 @@
           <a:p>
             <a:pPr lvl="0"/>
             <a:r>
-              <a:rPr lang="en-US" smtClean="0"/>
+              <a:rPr lang="en-US"/>
               <a:t>Click to edit Master text styles</a:t>
             </a:r>
           </a:p>
           <a:p>
             <a:pPr lvl="1"/>
             <a:r>
-              <a:rPr lang="en-US" smtClean="0"/>
+              <a:rPr lang="en-US"/>
               <a:t>Second level</a:t>
             </a:r>
           </a:p>
           <a:p>
             <a:pPr lvl="2"/>
             <a:r>
-              <a:rPr lang="en-US" smtClean="0"/>
+              <a:rPr lang="en-US"/>
               <a:t>Third level</a:t>
             </a:r>
           </a:p>
           <a:p>
             <a:pPr lvl="3"/>
             <a:r>
-              <a:rPr lang="en-US" smtClean="0"/>
+              <a:rPr lang="en-US"/>
               <a:t>Fourth level</a:t>
             </a:r>
           </a:p>
           <a:p>
             <a:pPr lvl="4"/>
             <a:r>
-              <a:rPr lang="en-US" smtClean="0"/>
+              <a:rPr lang="en-US"/>
               <a:t>Fifth level</a:t>
             </a:r>
-            <a:endParaRPr lang="en-US"/>
           </a:p>
         </p:txBody>
       </p:sp>
@@ -1780,7 +1782,7 @@
           <a:p>
             <a:fld id="{5BCAD085-E8A6-8845-BD4E-CB4CCA059FC4}" type="datetimeFigureOut">
               <a:rPr lang="en-US" smtClean="0"/>
-              <a:t>1/27/13</a:t>
+              <a:t>4/14/26</a:t>
             </a:fld>
             <a:endParaRPr lang="en-US"/>
           </a:p>
@@ -1874,10 +1876,9 @@
           <a:lstStyle/>
           <a:p>
             <a:r>
-              <a:rPr lang="en-US" smtClean="0"/>
+              <a:rPr lang="en-US"/>
               <a:t>Click to edit Master title style</a:t>
             </a:r>
-            <a:endParaRPr lang="en-US"/>
           </a:p>
         </p:txBody>
       </p:sp>
@@ -1898,7 +1899,7 @@
           <a:p>
             <a:fld id="{5BCAD085-E8A6-8845-BD4E-CB4CCA059FC4}" type="datetimeFigureOut">
               <a:rPr lang="en-US" smtClean="0"/>
-              <a:t>1/27/13</a:t>
+              <a:t>4/14/26</a:t>
             </a:fld>
             <a:endParaRPr lang="en-US"/>
           </a:p>
@@ -1993,7 +1994,7 @@
           <a:p>
             <a:fld id="{5BCAD085-E8A6-8845-BD4E-CB4CCA059FC4}" type="datetimeFigureOut">
               <a:rPr lang="en-US" smtClean="0"/>
-              <a:t>1/27/13</a:t>
+              <a:t>4/14/26</a:t>
             </a:fld>
             <a:endParaRPr lang="en-US"/>
           </a:p>
@@ -2096,10 +2097,9 @@
           </a:lstStyle>
           <a:p>
             <a:r>
-              <a:rPr lang="en-US" smtClean="0"/>
+              <a:rPr lang="en-US"/>
               <a:t>Click to edit Master title style</a:t>
             </a:r>
-            <a:endParaRPr lang="en-US"/>
           </a:p>
         </p:txBody>
       </p:sp>
@@ -2153,38 +2153,37 @@
           <a:p>
             <a:pPr lvl="0"/>
             <a:r>
-              <a:rPr lang="en-US" smtClean="0"/>
+              <a:rPr lang="en-US"/>
               <a:t>Click to edit Master text styles</a:t>
             </a:r>
           </a:p>
           <a:p>
             <a:pPr lvl="1"/>
             <a:r>
-              <a:rPr lang="en-US" smtClean="0"/>
+              <a:rPr lang="en-US"/>
               <a:t>Second level</a:t>
             </a:r>
           </a:p>
           <a:p>
             <a:pPr lvl="2"/>
             <a:r>
-              <a:rPr lang="en-US" smtClean="0"/>
+              <a:rPr lang="en-US"/>
               <a:t>Third level</a:t>
             </a:r>
           </a:p>
           <a:p>
             <a:pPr lvl="3"/>
             <a:r>
-              <a:rPr lang="en-US" smtClean="0"/>
+              <a:rPr lang="en-US"/>
               <a:t>Fourth level</a:t>
             </a:r>
           </a:p>
           <a:p>
             <a:pPr lvl="4"/>
             <a:r>
-              <a:rPr lang="en-US" smtClean="0"/>
+              <a:rPr lang="en-US"/>
               <a:t>Fifth level</a:t>
             </a:r>
-            <a:endParaRPr lang="en-US"/>
           </a:p>
         </p:txBody>
       </p:sp>
@@ -2247,7 +2246,7 @@
           <a:p>
             <a:pPr lvl="0"/>
             <a:r>
-              <a:rPr lang="en-US" smtClean="0"/>
+              <a:rPr lang="en-US"/>
               <a:t>Click to edit Master text styles</a:t>
             </a:r>
           </a:p>
@@ -2270,7 +2269,7 @@
           <a:p>
             <a:fld id="{5BCAD085-E8A6-8845-BD4E-CB4CCA059FC4}" type="datetimeFigureOut">
               <a:rPr lang="en-US" smtClean="0"/>
-              <a:t>1/27/13</a:t>
+              <a:t>4/14/26</a:t>
             </a:fld>
             <a:endParaRPr lang="en-US"/>
           </a:p>
@@ -2373,10 +2372,9 @@
           </a:lstStyle>
           <a:p>
             <a:r>
-              <a:rPr lang="en-US" smtClean="0"/>
+              <a:rPr lang="en-US"/>
               <a:t>Click to edit Master title style</a:t>
             </a:r>
-            <a:endParaRPr lang="en-US"/>
           </a:p>
         </p:txBody>
       </p:sp>
@@ -2500,7 +2498,7 @@
           <a:p>
             <a:pPr lvl="0"/>
             <a:r>
-              <a:rPr lang="en-US" smtClean="0"/>
+              <a:rPr lang="en-US"/>
               <a:t>Click to edit Master text styles</a:t>
             </a:r>
           </a:p>
@@ -2523,7 +2521,7 @@
           <a:p>
             <a:fld id="{5BCAD085-E8A6-8845-BD4E-CB4CCA059FC4}" type="datetimeFigureOut">
               <a:rPr lang="en-US" smtClean="0"/>
-              <a:t>1/27/13</a:t>
+              <a:t>4/14/26</a:t>
             </a:fld>
             <a:endParaRPr lang="en-US"/>
           </a:p>
@@ -2632,10 +2630,9 @@
           <a:lstStyle/>
           <a:p>
             <a:r>
-              <a:rPr lang="en-US" smtClean="0"/>
+              <a:rPr lang="en-US"/>
               <a:t>Click to edit Master title style</a:t>
             </a:r>
-            <a:endParaRPr lang="en-US"/>
           </a:p>
         </p:txBody>
       </p:sp>
@@ -2666,38 +2663,37 @@
           <a:p>
             <a:pPr lvl="0"/>
             <a:r>
-              <a:rPr lang="en-US" smtClean="0"/>
+              <a:rPr lang="en-US"/>
               <a:t>Click to edit Master text styles</a:t>
             </a:r>
           </a:p>
           <a:p>
             <a:pPr lvl="1"/>
             <a:r>
-              <a:rPr lang="en-US" smtClean="0"/>
+              <a:rPr lang="en-US"/>
               <a:t>Second level</a:t>
             </a:r>
           </a:p>
           <a:p>
             <a:pPr lvl="2"/>
             <a:r>
-              <a:rPr lang="en-US" smtClean="0"/>
+              <a:rPr lang="en-US"/>
               <a:t>Third level</a:t>
             </a:r>
           </a:p>
           <a:p>
             <a:pPr lvl="3"/>
             <a:r>
-              <a:rPr lang="en-US" smtClean="0"/>
+              <a:rPr lang="en-US"/>
               <a:t>Fourth level</a:t>
             </a:r>
           </a:p>
           <a:p>
             <a:pPr lvl="4"/>
             <a:r>
-              <a:rPr lang="en-US" smtClean="0"/>
+              <a:rPr lang="en-US"/>
               <a:t>Fifth level</a:t>
             </a:r>
-            <a:endParaRPr lang="en-US"/>
           </a:p>
         </p:txBody>
       </p:sp>
@@ -2736,7 +2732,7 @@
           <a:p>
             <a:fld id="{5BCAD085-E8A6-8845-BD4E-CB4CCA059FC4}" type="datetimeFigureOut">
               <a:rPr lang="en-US" smtClean="0"/>
-              <a:t>1/27/13</a:t>
+              <a:t>4/14/26</a:t>
             </a:fld>
             <a:endParaRPr lang="en-US"/>
           </a:p>
@@ -3095,7 +3091,7 @@
 </file>
 
 <file path=ppt/slides/slide1.xml><?xml version="1.0" encoding="utf-8"?>
-<p:sld xmlns:a="http://schemas.openxmlformats.org/drawingml/2006/main" xmlns:p="http://schemas.openxmlformats.org/presentationml/2006/main" xmlns:r="http://schemas.openxmlformats.org/officeDocument/2006/relationships">
+<p:sld xmlns:a="http://schemas.openxmlformats.org/drawingml/2006/main" xmlns:r="http://schemas.openxmlformats.org/officeDocument/2006/relationships" xmlns:p="http://schemas.openxmlformats.org/presentationml/2006/main">
   <p:cSld>
     <p:bg>
       <p:bgPr>
@@ -3111,7 +3107,14 @@
         <p:cNvGrpSpPr/>
         <p:nvPr/>
       </p:nvGrpSpPr>
-      <p:grpSpPr/>
+      <p:grpSpPr>
+        <a:xfrm>
+          <a:off x="0" y="0"/>
+          <a:ext cx="0" cy="0"/>
+          <a:chOff x="0" y="0"/>
+          <a:chExt cx="0" cy="0"/>
+        </a:xfrm>
+      </p:grpSpPr>
       <p:sp>
         <p:nvSpPr>
           <p:cNvPr id="2" name="Rectangle 1"/>
@@ -3152,6 +3155,7 @@
           <a:lstStyle/>
           <a:p>
             <a:pPr algn="ctr"/>
+            <a:endParaRPr/>
           </a:p>
         </p:txBody>
       </p:sp>
@@ -3312,7 +3316,7 @@
 </file>
 
 <file path=ppt/slides/slide10.xml><?xml version="1.0" encoding="utf-8"?>
-<p:sld xmlns:a="http://schemas.openxmlformats.org/drawingml/2006/main" xmlns:p="http://schemas.openxmlformats.org/presentationml/2006/main" xmlns:r="http://schemas.openxmlformats.org/officeDocument/2006/relationships">
+<p:sld xmlns:a="http://schemas.openxmlformats.org/drawingml/2006/main" xmlns:r="http://schemas.openxmlformats.org/officeDocument/2006/relationships" xmlns:p="http://schemas.openxmlformats.org/presentationml/2006/main">
   <p:cSld>
     <p:bg>
       <p:bgPr>
@@ -3328,7 +3332,14 @@
         <p:cNvGrpSpPr/>
         <p:nvPr/>
       </p:nvGrpSpPr>
-      <p:grpSpPr/>
+      <p:grpSpPr>
+        <a:xfrm>
+          <a:off x="0" y="0"/>
+          <a:ext cx="0" cy="0"/>
+          <a:chOff x="0" y="0"/>
+          <a:chExt cx="0" cy="0"/>
+        </a:xfrm>
+      </p:grpSpPr>
       <p:sp>
         <p:nvSpPr>
           <p:cNvPr id="2" name="Rectangle 1"/>
@@ -3369,6 +3380,7 @@
           <a:lstStyle/>
           <a:p>
             <a:pPr algn="ctr"/>
+            <a:endParaRPr/>
           </a:p>
         </p:txBody>
       </p:sp>
@@ -3794,7 +3806,7 @@
 </file>
 
 <file path=ppt/slides/slide11.xml><?xml version="1.0" encoding="utf-8"?>
-<p:sld xmlns:a="http://schemas.openxmlformats.org/drawingml/2006/main" xmlns:p="http://schemas.openxmlformats.org/presentationml/2006/main" xmlns:r="http://schemas.openxmlformats.org/officeDocument/2006/relationships">
+<p:sld xmlns:a="http://schemas.openxmlformats.org/drawingml/2006/main" xmlns:r="http://schemas.openxmlformats.org/officeDocument/2006/relationships" xmlns:p="http://schemas.openxmlformats.org/presentationml/2006/main">
   <p:cSld>
     <p:bg>
       <p:bgPr>
@@ -3810,7 +3822,14 @@
         <p:cNvGrpSpPr/>
         <p:nvPr/>
       </p:nvGrpSpPr>
-      <p:grpSpPr/>
+      <p:grpSpPr>
+        <a:xfrm>
+          <a:off x="0" y="0"/>
+          <a:ext cx="0" cy="0"/>
+          <a:chOff x="0" y="0"/>
+          <a:chExt cx="0" cy="0"/>
+        </a:xfrm>
+      </p:grpSpPr>
       <p:sp>
         <p:nvSpPr>
           <p:cNvPr id="2" name="Rectangle 1"/>
@@ -3851,6 +3870,7 @@
           <a:lstStyle/>
           <a:p>
             <a:pPr algn="ctr"/>
+            <a:endParaRPr/>
           </a:p>
         </p:txBody>
       </p:sp>
@@ -4085,6 +4105,7 @@
           <a:lstStyle/>
           <a:p>
             <a:pPr algn="ctr"/>
+            <a:endParaRPr/>
           </a:p>
         </p:txBody>
       </p:sp>
@@ -4216,6 +4237,7 @@
           <a:lstStyle/>
           <a:p>
             <a:pPr algn="ctr"/>
+            <a:endParaRPr/>
           </a:p>
         </p:txBody>
       </p:sp>
@@ -4366,6 +4388,7 @@
           <a:lstStyle/>
           <a:p>
             <a:pPr algn="ctr"/>
+            <a:endParaRPr/>
           </a:p>
         </p:txBody>
       </p:sp>
@@ -4500,6 +4523,7 @@
           <a:lstStyle/>
           <a:p>
             <a:pPr algn="ctr"/>
+            <a:endParaRPr/>
           </a:p>
         </p:txBody>
       </p:sp>
@@ -4615,6 +4639,7 @@
           <a:lstStyle/>
           <a:p>
             <a:pPr algn="ctr"/>
+            <a:endParaRPr/>
           </a:p>
         </p:txBody>
       </p:sp>
@@ -4667,7 +4692,7 @@
 </file>
 
 <file path=ppt/slides/slide12.xml><?xml version="1.0" encoding="utf-8"?>
-<p:sld xmlns:a="http://schemas.openxmlformats.org/drawingml/2006/main" xmlns:p="http://schemas.openxmlformats.org/presentationml/2006/main" xmlns:r="http://schemas.openxmlformats.org/officeDocument/2006/relationships">
+<p:sld xmlns:a="http://schemas.openxmlformats.org/drawingml/2006/main" xmlns:r="http://schemas.openxmlformats.org/officeDocument/2006/relationships" xmlns:p="http://schemas.openxmlformats.org/presentationml/2006/main">
   <p:cSld>
     <p:bg>
       <p:bgPr>
@@ -4683,7 +4708,14 @@
         <p:cNvGrpSpPr/>
         <p:nvPr/>
       </p:nvGrpSpPr>
-      <p:grpSpPr/>
+      <p:grpSpPr>
+        <a:xfrm>
+          <a:off x="0" y="0"/>
+          <a:ext cx="0" cy="0"/>
+          <a:chOff x="0" y="0"/>
+          <a:chExt cx="0" cy="0"/>
+        </a:xfrm>
+      </p:grpSpPr>
       <p:sp>
         <p:nvSpPr>
           <p:cNvPr id="2" name="Rectangle 1"/>
@@ -4724,6 +4756,7 @@
           <a:lstStyle/>
           <a:p>
             <a:pPr algn="ctr"/>
+            <a:endParaRPr/>
           </a:p>
         </p:txBody>
       </p:sp>
@@ -5118,7 +5151,7 @@
 </file>
 
 <file path=ppt/slides/slide13.xml><?xml version="1.0" encoding="utf-8"?>
-<p:sld xmlns:a="http://schemas.openxmlformats.org/drawingml/2006/main" xmlns:p="http://schemas.openxmlformats.org/presentationml/2006/main" xmlns:r="http://schemas.openxmlformats.org/officeDocument/2006/relationships">
+<p:sld xmlns:a="http://schemas.openxmlformats.org/drawingml/2006/main" xmlns:r="http://schemas.openxmlformats.org/officeDocument/2006/relationships" xmlns:p="http://schemas.openxmlformats.org/presentationml/2006/main">
   <p:cSld>
     <p:bg>
       <p:bgPr>
@@ -5134,7 +5167,14 @@
         <p:cNvGrpSpPr/>
         <p:nvPr/>
       </p:nvGrpSpPr>
-      <p:grpSpPr/>
+      <p:grpSpPr>
+        <a:xfrm>
+          <a:off x="0" y="0"/>
+          <a:ext cx="0" cy="0"/>
+          <a:chOff x="0" y="0"/>
+          <a:chExt cx="0" cy="0"/>
+        </a:xfrm>
+      </p:grpSpPr>
       <p:sp>
         <p:nvSpPr>
           <p:cNvPr id="2" name="Rectangle 1"/>
@@ -5175,6 +5215,7 @@
           <a:lstStyle/>
           <a:p>
             <a:pPr algn="ctr"/>
+            <a:endParaRPr/>
           </a:p>
         </p:txBody>
       </p:sp>
@@ -5446,6 +5487,7 @@
           <a:lstStyle/>
           <a:p>
             <a:pPr algn="ctr"/>
+            <a:endParaRPr/>
           </a:p>
         </p:txBody>
       </p:sp>
@@ -5494,7 +5536,7 @@
 </file>
 
 <file path=ppt/slides/slide14.xml><?xml version="1.0" encoding="utf-8"?>
-<p:sld xmlns:a="http://schemas.openxmlformats.org/drawingml/2006/main" xmlns:p="http://schemas.openxmlformats.org/presentationml/2006/main" xmlns:r="http://schemas.openxmlformats.org/officeDocument/2006/relationships">
+<p:sld xmlns:a="http://schemas.openxmlformats.org/drawingml/2006/main" xmlns:r="http://schemas.openxmlformats.org/officeDocument/2006/relationships" xmlns:p="http://schemas.openxmlformats.org/presentationml/2006/main">
   <p:cSld>
     <p:bg>
       <p:bgPr>
@@ -5510,7 +5552,14 @@
         <p:cNvGrpSpPr/>
         <p:nvPr/>
       </p:nvGrpSpPr>
-      <p:grpSpPr/>
+      <p:grpSpPr>
+        <a:xfrm>
+          <a:off x="0" y="0"/>
+          <a:ext cx="0" cy="0"/>
+          <a:chOff x="0" y="0"/>
+          <a:chExt cx="0" cy="0"/>
+        </a:xfrm>
+      </p:grpSpPr>
       <p:sp>
         <p:nvSpPr>
           <p:cNvPr id="2" name="Rectangle 1"/>
@@ -5551,6 +5600,7 @@
           <a:lstStyle/>
           <a:p>
             <a:pPr algn="ctr"/>
+            <a:endParaRPr/>
           </a:p>
         </p:txBody>
       </p:sp>
@@ -5630,6 +5680,7 @@
           <a:lstStyle/>
           <a:p>
             <a:pPr algn="ctr"/>
+            <a:endParaRPr/>
           </a:p>
         </p:txBody>
       </p:sp>
@@ -5709,6 +5760,7 @@
           <a:lstStyle/>
           <a:p>
             <a:pPr algn="ctr"/>
+            <a:endParaRPr/>
           </a:p>
         </p:txBody>
       </p:sp>
@@ -5788,6 +5840,7 @@
           <a:lstStyle/>
           <a:p>
             <a:pPr algn="ctr"/>
+            <a:endParaRPr/>
           </a:p>
         </p:txBody>
       </p:sp>
@@ -5897,7 +5950,7 @@
               </a:defRPr>
             </a:pPr>
             <a:r>
-              <a:t>• Nomination portal (3 award types)</a:t>
+              <a:t>• Nomination engine + ranked-choice committee voting</a:t>
             </a:r>
           </a:p>
           <a:p>
@@ -5913,7 +5966,7 @@
               </a:defRPr>
             </a:pPr>
             <a:r>
-              <a:t>• Selection committee ranked-choice voting</a:t>
+              <a:t>• QA queue with revise-and-resubmit workflow</a:t>
             </a:r>
           </a:p>
           <a:p>
@@ -5929,7 +5982,7 @@
               </a:defRPr>
             </a:pPr>
             <a:r>
-              <a:t>• QA queue + revise-and-resubmit workflow</a:t>
+              <a:t>• Paycom SFTP sync + audit trail</a:t>
             </a:r>
           </a:p>
           <a:p>
@@ -5945,7 +5998,82 @@
               </a:defRPr>
             </a:pPr>
             <a:r>
-              <a:t>• Paycom SFTP sync</a:t>
+              <a:t>• Auth: Badge ID + PIN, Google SSO, email fallback</a:t>
+            </a:r>
+          </a:p>
+        </p:txBody>
+      </p:sp>
+      <p:sp>
+        <p:nvSpPr>
+          <p:cNvPr id="12" name="TextBox 11"/>
+          <p:cNvSpPr txBox="1"/>
+          <p:nvPr/>
+        </p:nvSpPr>
+        <p:spPr>
+          <a:xfrm>
+            <a:off x="4572000" y="4389120"/>
+            <a:ext cx="3474720" cy="365760"/>
+          </a:xfrm>
+          <a:prstGeom prst="rect">
+            <a:avLst/>
+          </a:prstGeom>
+          <a:noFill/>
+        </p:spPr>
+        <p:txBody>
+          <a:bodyPr wrap="square">
+            <a:spAutoFit/>
+          </a:bodyPr>
+          <a:lstStyle/>
+          <a:p>
+            <a:pPr algn="l">
+              <a:defRPr sz="1600" b="1">
+                <a:solidFill>
+                  <a:srgbClr val="14735A"/>
+                </a:solidFill>
+                <a:latin typeface="Calibri"/>
+              </a:defRPr>
+            </a:pPr>
+            <a:r>
+              <a:t>Phase 2 Deliverables</a:t>
+            </a:r>
+          </a:p>
+        </p:txBody>
+      </p:sp>
+      <p:sp>
+        <p:nvSpPr>
+          <p:cNvPr id="13" name="TextBox 12"/>
+          <p:cNvSpPr txBox="1"/>
+          <p:nvPr/>
+        </p:nvSpPr>
+        <p:spPr>
+          <a:xfrm>
+            <a:off x="4572000" y="4754880"/>
+            <a:ext cx="3474720" cy="2286000"/>
+          </a:xfrm>
+          <a:prstGeom prst="rect">
+            <a:avLst/>
+          </a:prstGeom>
+          <a:noFill/>
+        </p:spPr>
+        <p:txBody>
+          <a:bodyPr wrap="square">
+            <a:spAutoFit/>
+          </a:bodyPr>
+          <a:lstStyle/>
+          <a:p>
+            <a:pPr algn="l">
+              <a:spcAft>
+                <a:spcPts val="400"/>
+              </a:spcAft>
+              <a:defRPr sz="1300" b="0">
+                <a:solidFill>
+                  <a:srgbClr val="333333"/>
+                </a:solidFill>
+                <a:latin typeface="Calibri"/>
+              </a:defRPr>
+            </a:pPr>
+            <a:r>
+              <a:t>• Employee &amp; leadership dashboards</a:t>
             </a:r>
           </a:p>
           <a:p>
@@ -5961,7 +6089,7 @@
               </a:defRPr>
             </a:pPr>
             <a:r>
-              <a:t>• Badge ID + PIN auth (frontline staff)</a:t>
+              <a:t>• Dark mode / light mode toggle</a:t>
             </a:r>
           </a:p>
           <a:p>
@@ -5977,146 +6105,7 @@
               </a:defRPr>
             </a:pPr>
             <a:r>
-              <a:t>• Google Workspace SSO</a:t>
-            </a:r>
-          </a:p>
-          <a:p>
-            <a:pPr>
-              <a:spcAft>
-                <a:spcPts val="400"/>
-              </a:spcAft>
-              <a:defRPr sz="1300">
-                <a:solidFill>
-                  <a:srgbClr val="333333"/>
-                </a:solidFill>
-                <a:latin typeface="Calibri"/>
-              </a:defRPr>
-            </a:pPr>
-            <a:r>
-              <a:t>• Manual point bestowal + audit trail</a:t>
-            </a:r>
-          </a:p>
-        </p:txBody>
-      </p:sp>
-      <p:sp>
-        <p:nvSpPr>
-          <p:cNvPr id="12" name="TextBox 11"/>
-          <p:cNvSpPr txBox="1"/>
-          <p:nvPr/>
-        </p:nvSpPr>
-        <p:spPr>
-          <a:xfrm>
-            <a:off x="4572000" y="4389120"/>
-            <a:ext cx="3474720" cy="365760"/>
-          </a:xfrm>
-          <a:prstGeom prst="rect">
-            <a:avLst/>
-          </a:prstGeom>
-          <a:noFill/>
-        </p:spPr>
-        <p:txBody>
-          <a:bodyPr wrap="square">
-            <a:spAutoFit/>
-          </a:bodyPr>
-          <a:lstStyle/>
-          <a:p>
-            <a:pPr algn="l">
-              <a:defRPr sz="1600" b="1">
-                <a:solidFill>
-                  <a:srgbClr val="14735A"/>
-                </a:solidFill>
-                <a:latin typeface="Calibri"/>
-              </a:defRPr>
-            </a:pPr>
-            <a:r>
-              <a:t>Phase 2 Deliverables</a:t>
-            </a:r>
-          </a:p>
-        </p:txBody>
-      </p:sp>
-      <p:sp>
-        <p:nvSpPr>
-          <p:cNvPr id="13" name="TextBox 12"/>
-          <p:cNvSpPr txBox="1"/>
-          <p:nvPr/>
-        </p:nvSpPr>
-        <p:spPr>
-          <a:xfrm>
-            <a:off x="4572000" y="4754880"/>
-            <a:ext cx="3474720" cy="2286000"/>
-          </a:xfrm>
-          <a:prstGeom prst="rect">
-            <a:avLst/>
-          </a:prstGeom>
-          <a:noFill/>
-        </p:spPr>
-        <p:txBody>
-          <a:bodyPr wrap="square">
-            <a:spAutoFit/>
-          </a:bodyPr>
-          <a:lstStyle/>
-          <a:p>
-            <a:pPr algn="l">
-              <a:spcAft>
-                <a:spcPts val="400"/>
-              </a:spcAft>
-              <a:defRPr sz="1300" b="0">
-                <a:solidFill>
-                  <a:srgbClr val="333333"/>
-                </a:solidFill>
-                <a:latin typeface="Calibri"/>
-              </a:defRPr>
-            </a:pPr>
-            <a:r>
-              <a:t>• Employee &amp; leadership dashboards</a:t>
-            </a:r>
-          </a:p>
-          <a:p>
-            <a:pPr>
-              <a:spcAft>
-                <a:spcPts val="400"/>
-              </a:spcAft>
-              <a:defRPr sz="1300">
-                <a:solidFill>
-                  <a:srgbClr val="333333"/>
-                </a:solidFill>
-                <a:latin typeface="Calibri"/>
-              </a:defRPr>
-            </a:pPr>
-            <a:r>
-              <a:t>• Dark mode / light mode toggle</a:t>
-            </a:r>
-          </a:p>
-          <a:p>
-            <a:pPr>
-              <a:spcAft>
-                <a:spcPts val="400"/>
-              </a:spcAft>
-              <a:defRPr sz="1300">
-                <a:solidFill>
-                  <a:srgbClr val="333333"/>
-                </a:solidFill>
-                <a:latin typeface="Calibri"/>
-              </a:defRPr>
-            </a:pPr>
-            <a:r>
-              <a:t>• TAC RSVP &amp; role sign-ups</a:t>
-            </a:r>
-          </a:p>
-          <a:p>
-            <a:pPr>
-              <a:spcAft>
-                <a:spcPts val="400"/>
-              </a:spcAft>
-              <a:defRPr sz="1300">
-                <a:solidFill>
-                  <a:srgbClr val="333333"/>
-                </a:solidFill>
-                <a:latin typeface="Calibri"/>
-              </a:defRPr>
-            </a:pPr>
-            <a:r>
-              <a:t>• Culture groups, volunteer forms</a:t>
+              <a:t>• TAC RSVP, culture groups, volunteer forms</a:t>
             </a:r>
           </a:p>
           <a:p>
@@ -6301,7 +6290,7 @@
 </file>
 
 <file path=ppt/slides/slide15.xml><?xml version="1.0" encoding="utf-8"?>
-<p:sld xmlns:a="http://schemas.openxmlformats.org/drawingml/2006/main" xmlns:p="http://schemas.openxmlformats.org/presentationml/2006/main" xmlns:r="http://schemas.openxmlformats.org/officeDocument/2006/relationships">
+<p:sld xmlns:a="http://schemas.openxmlformats.org/drawingml/2006/main" xmlns:r="http://schemas.openxmlformats.org/officeDocument/2006/relationships" xmlns:p="http://schemas.openxmlformats.org/presentationml/2006/main">
   <p:cSld>
     <p:bg>
       <p:bgPr>
@@ -6317,7 +6306,14 @@
         <p:cNvGrpSpPr/>
         <p:nvPr/>
       </p:nvGrpSpPr>
-      <p:grpSpPr/>
+      <p:grpSpPr>
+        <a:xfrm>
+          <a:off x="0" y="0"/>
+          <a:ext cx="0" cy="0"/>
+          <a:chOff x="0" y="0"/>
+          <a:chExt cx="0" cy="0"/>
+        </a:xfrm>
+      </p:grpSpPr>
       <p:sp>
         <p:nvSpPr>
           <p:cNvPr id="2" name="Rectangle 1"/>
@@ -6358,6 +6354,7 @@
           <a:lstStyle/>
           <a:p>
             <a:pPr algn="ctr"/>
+            <a:endParaRPr/>
           </a:p>
         </p:txBody>
       </p:sp>
@@ -6473,6 +6470,7 @@
           <a:lstStyle/>
           <a:p>
             <a:pPr algn="ctr"/>
+            <a:endParaRPr/>
           </a:p>
         </p:txBody>
       </p:sp>
@@ -6552,6 +6550,7 @@
           <a:lstStyle/>
           <a:p>
             <a:pPr algn="ctr"/>
+            <a:endParaRPr/>
           </a:p>
         </p:txBody>
       </p:sp>
@@ -6631,6 +6630,7 @@
           <a:lstStyle/>
           <a:p>
             <a:pPr algn="ctr"/>
+            <a:endParaRPr/>
           </a:p>
         </p:txBody>
       </p:sp>
@@ -6710,6 +6710,7 @@
           <a:lstStyle/>
           <a:p>
             <a:pPr algn="ctr"/>
+            <a:endParaRPr/>
           </a:p>
         </p:txBody>
       </p:sp>
@@ -6721,7 +6722,7 @@
         </p:nvSpPr>
         <p:spPr>
           <a:xfrm>
-            <a:off x="1463040" y="2167128"/>
+            <a:off x="1463040" y="2121408"/>
             <a:ext cx="3474720" cy="365760"/>
           </a:xfrm>
           <a:prstGeom prst="rect">
@@ -6744,6 +6745,7 @@
               </a:defRPr>
             </a:pPr>
             <a:r>
+              <a:rPr dirty="0"/>
               <a:t>Phase 1: Nominations, Voting, Paycom, Badge ID Auth, SSO</a:t>
             </a:r>
           </a:p>
@@ -6789,6 +6791,7 @@
           <a:lstStyle/>
           <a:p>
             <a:pPr algn="ctr"/>
+            <a:endParaRPr/>
           </a:p>
         </p:txBody>
       </p:sp>
@@ -6868,6 +6871,7 @@
           <a:lstStyle/>
           <a:p>
             <a:pPr algn="ctr"/>
+            <a:endParaRPr/>
           </a:p>
         </p:txBody>
       </p:sp>
@@ -6947,6 +6951,7 @@
           <a:lstStyle/>
           <a:p>
             <a:pPr algn="ctr"/>
+            <a:endParaRPr/>
           </a:p>
         </p:txBody>
       </p:sp>
@@ -6958,7 +6963,7 @@
         </p:nvSpPr>
         <p:spPr>
           <a:xfrm>
-            <a:off x="1463040" y="2578608"/>
+            <a:off x="1463040" y="2542032"/>
             <a:ext cx="3474720" cy="365760"/>
           </a:xfrm>
           <a:prstGeom prst="rect">
@@ -6981,6 +6986,7 @@
               </a:defRPr>
             </a:pPr>
             <a:r>
+              <a:rPr dirty="0"/>
               <a:t>Phase 2: Dashboards, Engagement Modules, Dark Mode, Notifications</a:t>
             </a:r>
           </a:p>
@@ -7026,6 +7032,7 @@
           <a:lstStyle/>
           <a:p>
             <a:pPr algn="ctr"/>
+            <a:endParaRPr/>
           </a:p>
         </p:txBody>
       </p:sp>
@@ -7105,6 +7112,7 @@
           <a:lstStyle/>
           <a:p>
             <a:pPr algn="ctr"/>
+            <a:endParaRPr/>
           </a:p>
         </p:txBody>
       </p:sp>
@@ -7184,6 +7192,7 @@
           <a:lstStyle/>
           <a:p>
             <a:pPr algn="ctr"/>
+            <a:endParaRPr/>
           </a:p>
         </p:txBody>
       </p:sp>
@@ -7195,7 +7204,7 @@
         </p:nvSpPr>
         <p:spPr>
           <a:xfrm>
-            <a:off x="1463040" y="2990088"/>
+            <a:off x="1463040" y="2944720"/>
             <a:ext cx="3474720" cy="365760"/>
           </a:xfrm>
           <a:prstGeom prst="rect">
@@ -7218,6 +7227,7 @@
               </a:defRPr>
             </a:pPr>
             <a:r>
+              <a:rPr dirty="0"/>
               <a:t>Phase 3: Marketplace, Café Redemption, QR Store, Gift Cards</a:t>
             </a:r>
           </a:p>
@@ -7263,6 +7273,7 @@
           <a:lstStyle/>
           <a:p>
             <a:pPr algn="ctr"/>
+            <a:endParaRPr/>
           </a:p>
         </p:txBody>
       </p:sp>
@@ -7342,6 +7353,7 @@
           <a:lstStyle/>
           <a:p>
             <a:pPr algn="ctr"/>
+            <a:endParaRPr/>
           </a:p>
         </p:txBody>
       </p:sp>
@@ -7421,6 +7433,7 @@
           <a:lstStyle/>
           <a:p>
             <a:pPr algn="ctr"/>
+            <a:endParaRPr/>
           </a:p>
         </p:txBody>
       </p:sp>
@@ -7500,6 +7513,7 @@
           <a:lstStyle/>
           <a:p>
             <a:pPr algn="ctr"/>
+            <a:endParaRPr/>
           </a:p>
         </p:txBody>
       </p:sp>
@@ -7579,6 +7593,7 @@
           <a:lstStyle/>
           <a:p>
             <a:pPr algn="ctr"/>
+            <a:endParaRPr/>
           </a:p>
         </p:txBody>
       </p:sp>
@@ -7833,6 +7848,7 @@
           <a:lstStyle/>
           <a:p>
             <a:pPr algn="ctr"/>
+            <a:endParaRPr/>
           </a:p>
         </p:txBody>
       </p:sp>
@@ -7948,6 +7964,7 @@
           <a:lstStyle/>
           <a:p>
             <a:pPr algn="ctr"/>
+            <a:endParaRPr/>
           </a:p>
         </p:txBody>
       </p:sp>
@@ -7996,7 +8013,7 @@
 </file>
 
 <file path=ppt/slides/slide16.xml><?xml version="1.0" encoding="utf-8"?>
-<p:sld xmlns:a="http://schemas.openxmlformats.org/drawingml/2006/main" xmlns:p="http://schemas.openxmlformats.org/presentationml/2006/main" xmlns:r="http://schemas.openxmlformats.org/officeDocument/2006/relationships">
+<p:sld xmlns:a="http://schemas.openxmlformats.org/drawingml/2006/main" xmlns:r="http://schemas.openxmlformats.org/officeDocument/2006/relationships" xmlns:p="http://schemas.openxmlformats.org/presentationml/2006/main">
   <p:cSld>
     <p:bg>
       <p:bgPr>
@@ -8012,7 +8029,14 @@
         <p:cNvGrpSpPr/>
         <p:nvPr/>
       </p:nvGrpSpPr>
-      <p:grpSpPr/>
+      <p:grpSpPr>
+        <a:xfrm>
+          <a:off x="0" y="0"/>
+          <a:ext cx="0" cy="0"/>
+          <a:chOff x="0" y="0"/>
+          <a:chExt cx="0" cy="0"/>
+        </a:xfrm>
+      </p:grpSpPr>
       <p:sp>
         <p:nvSpPr>
           <p:cNvPr id="2" name="Rectangle 1"/>
@@ -8053,6 +8077,7 @@
           <a:lstStyle/>
           <a:p>
             <a:pPr algn="ctr"/>
+            <a:endParaRPr/>
           </a:p>
         </p:txBody>
       </p:sp>
@@ -8168,6 +8193,7 @@
           <a:lstStyle/>
           <a:p>
             <a:pPr algn="ctr"/>
+            <a:endParaRPr/>
           </a:p>
         </p:txBody>
       </p:sp>
@@ -8334,6 +8360,7 @@
           <a:lstStyle/>
           <a:p>
             <a:pPr algn="ctr"/>
+            <a:endParaRPr/>
           </a:p>
         </p:txBody>
       </p:sp>
@@ -8516,6 +8543,7 @@
           <a:lstStyle/>
           <a:p>
             <a:pPr algn="ctr"/>
+            <a:endParaRPr/>
           </a:p>
         </p:txBody>
       </p:sp>
@@ -8631,6 +8659,7 @@
           <a:lstStyle/>
           <a:p>
             <a:pPr algn="ctr"/>
+            <a:endParaRPr/>
           </a:p>
         </p:txBody>
       </p:sp>
@@ -8664,6 +8693,7 @@
                 <a:latin typeface="Calibri"/>
               </a:defRPr>
             </a:pPr>
+            <a:endParaRPr/>
           </a:p>
         </p:txBody>
       </p:sp>
@@ -8707,6 +8737,7 @@
           <a:lstStyle/>
           <a:p>
             <a:pPr algn="ctr"/>
+            <a:endParaRPr/>
           </a:p>
         </p:txBody>
       </p:sp>
@@ -8786,6 +8817,7 @@
           <a:lstStyle/>
           <a:p>
             <a:pPr algn="ctr"/>
+            <a:endParaRPr/>
           </a:p>
         </p:txBody>
       </p:sp>
@@ -8865,6 +8897,7 @@
           <a:lstStyle/>
           <a:p>
             <a:pPr algn="ctr"/>
+            <a:endParaRPr/>
           </a:p>
         </p:txBody>
       </p:sp>
@@ -8944,6 +8977,7 @@
           <a:lstStyle/>
           <a:p>
             <a:pPr algn="ctr"/>
+            <a:endParaRPr/>
           </a:p>
         </p:txBody>
       </p:sp>
@@ -9023,6 +9057,7 @@
           <a:lstStyle/>
           <a:p>
             <a:pPr algn="ctr"/>
+            <a:endParaRPr/>
           </a:p>
         </p:txBody>
       </p:sp>
@@ -9102,6 +9137,7 @@
           <a:lstStyle/>
           <a:p>
             <a:pPr algn="ctr"/>
+            <a:endParaRPr/>
           </a:p>
         </p:txBody>
       </p:sp>
@@ -9181,6 +9217,7 @@
           <a:lstStyle/>
           <a:p>
             <a:pPr algn="ctr"/>
+            <a:endParaRPr/>
           </a:p>
         </p:txBody>
       </p:sp>
@@ -9260,6 +9297,7 @@
           <a:lstStyle/>
           <a:p>
             <a:pPr algn="ctr"/>
+            <a:endParaRPr/>
           </a:p>
         </p:txBody>
       </p:sp>
@@ -9339,6 +9377,7 @@
           <a:lstStyle/>
           <a:p>
             <a:pPr algn="ctr"/>
+            <a:endParaRPr/>
           </a:p>
         </p:txBody>
       </p:sp>
@@ -9418,6 +9457,7 @@
           <a:lstStyle/>
           <a:p>
             <a:pPr algn="ctr"/>
+            <a:endParaRPr/>
           </a:p>
         </p:txBody>
       </p:sp>
@@ -9497,6 +9537,7 @@
           <a:lstStyle/>
           <a:p>
             <a:pPr algn="ctr"/>
+            <a:endParaRPr/>
           </a:p>
         </p:txBody>
       </p:sp>
@@ -9576,6 +9617,7 @@
           <a:lstStyle/>
           <a:p>
             <a:pPr algn="ctr"/>
+            <a:endParaRPr/>
           </a:p>
         </p:txBody>
       </p:sp>
@@ -9655,6 +9697,7 @@
           <a:lstStyle/>
           <a:p>
             <a:pPr algn="ctr"/>
+            <a:endParaRPr/>
           </a:p>
         </p:txBody>
       </p:sp>
@@ -9734,6 +9777,7 @@
           <a:lstStyle/>
           <a:p>
             <a:pPr algn="ctr"/>
+            <a:endParaRPr/>
           </a:p>
         </p:txBody>
       </p:sp>
@@ -9813,6 +9857,7 @@
           <a:lstStyle/>
           <a:p>
             <a:pPr algn="ctr"/>
+            <a:endParaRPr/>
           </a:p>
         </p:txBody>
       </p:sp>
@@ -9892,6 +9937,7 @@
           <a:lstStyle/>
           <a:p>
             <a:pPr algn="ctr"/>
+            <a:endParaRPr/>
           </a:p>
         </p:txBody>
       </p:sp>
@@ -9971,6 +10017,7 @@
           <a:lstStyle/>
           <a:p>
             <a:pPr algn="ctr"/>
+            <a:endParaRPr/>
           </a:p>
         </p:txBody>
       </p:sp>
@@ -10019,7 +10066,3347 @@
 </file>
 
 <file path=ppt/slides/slide17.xml><?xml version="1.0" encoding="utf-8"?>
-<p:sld xmlns:a="http://schemas.openxmlformats.org/drawingml/2006/main" xmlns:p="http://schemas.openxmlformats.org/presentationml/2006/main" xmlns:r="http://schemas.openxmlformats.org/officeDocument/2006/relationships">
+<p:sld xmlns:a="http://schemas.openxmlformats.org/drawingml/2006/main" xmlns:r="http://schemas.openxmlformats.org/officeDocument/2006/relationships" xmlns:p="http://schemas.openxmlformats.org/presentationml/2006/main">
+  <p:cSld>
+    <p:bg>
+      <p:bgPr>
+        <a:solidFill>
+          <a:srgbClr val="FFFFFF"/>
+        </a:solidFill>
+        <a:effectLst/>
+      </p:bgPr>
+    </p:bg>
+    <p:spTree>
+      <p:nvGrpSpPr>
+        <p:cNvPr id="1" name=""/>
+        <p:cNvGrpSpPr/>
+        <p:nvPr/>
+      </p:nvGrpSpPr>
+      <p:grpSpPr>
+        <a:xfrm>
+          <a:off x="0" y="0"/>
+          <a:ext cx="0" cy="0"/>
+          <a:chOff x="0" y="0"/>
+          <a:chExt cx="0" cy="0"/>
+        </a:xfrm>
+      </p:grpSpPr>
+      <p:sp>
+        <p:nvSpPr>
+          <p:cNvPr id="2" name="Rectangle 1"/>
+          <p:cNvSpPr/>
+          <p:nvPr/>
+        </p:nvSpPr>
+        <p:spPr>
+          <a:xfrm>
+            <a:off x="0" y="0"/>
+            <a:ext cx="12191695" cy="1005840"/>
+          </a:xfrm>
+          <a:prstGeom prst="rect">
+            <a:avLst/>
+          </a:prstGeom>
+          <a:solidFill>
+            <a:srgbClr val="1B2A4A"/>
+          </a:solidFill>
+          <a:ln>
+            <a:noFill/>
+          </a:ln>
+        </p:spPr>
+        <p:style>
+          <a:lnRef idx="1">
+            <a:schemeClr val="accent1"/>
+          </a:lnRef>
+          <a:fillRef idx="3">
+            <a:schemeClr val="accent1"/>
+          </a:fillRef>
+          <a:effectRef idx="2">
+            <a:schemeClr val="accent1"/>
+          </a:effectRef>
+          <a:fontRef idx="minor">
+            <a:schemeClr val="lt1"/>
+          </a:fontRef>
+        </p:style>
+        <p:txBody>
+          <a:bodyPr rtlCol="0" anchor="ctr"/>
+          <a:lstStyle/>
+          <a:p>
+            <a:pPr algn="ctr"/>
+            <a:endParaRPr/>
+          </a:p>
+        </p:txBody>
+      </p:sp>
+      <p:sp>
+        <p:nvSpPr>
+          <p:cNvPr id="3" name="TextBox 2"/>
+          <p:cNvSpPr txBox="1"/>
+          <p:nvPr/>
+        </p:nvSpPr>
+        <p:spPr>
+          <a:xfrm>
+            <a:off x="731520" y="182880"/>
+            <a:ext cx="10058400" cy="640080"/>
+          </a:xfrm>
+          <a:prstGeom prst="rect">
+            <a:avLst/>
+          </a:prstGeom>
+          <a:noFill/>
+        </p:spPr>
+        <p:txBody>
+          <a:bodyPr wrap="square">
+            <a:spAutoFit/>
+          </a:bodyPr>
+          <a:lstStyle/>
+          <a:p>
+            <a:pPr algn="l">
+              <a:defRPr sz="3200" b="1">
+                <a:solidFill>
+                  <a:srgbClr val="FFFFFF"/>
+                </a:solidFill>
+                <a:latin typeface="Calibri"/>
+              </a:defRPr>
+            </a:pPr>
+            <a:r>
+              <a:t>Feature Comparison — How We Stack Up</a:t>
+            </a:r>
+          </a:p>
+        </p:txBody>
+      </p:sp>
+      <p:sp>
+        <p:nvSpPr>
+          <p:cNvPr id="4" name="TextBox 3"/>
+          <p:cNvSpPr txBox="1"/>
+          <p:nvPr/>
+        </p:nvSpPr>
+        <p:spPr>
+          <a:xfrm>
+            <a:off x="731520" y="1143000"/>
+            <a:ext cx="7315200" cy="411480"/>
+          </a:xfrm>
+          <a:prstGeom prst="rect">
+            <a:avLst/>
+          </a:prstGeom>
+          <a:noFill/>
+        </p:spPr>
+        <p:txBody>
+          <a:bodyPr wrap="square">
+            <a:spAutoFit/>
+          </a:bodyPr>
+          <a:lstStyle/>
+          <a:p>
+            <a:pPr algn="l">
+              <a:defRPr sz="1600" b="0">
+                <a:solidFill>
+                  <a:srgbClr val="666666"/>
+                </a:solidFill>
+                <a:latin typeface="Calibri"/>
+              </a:defRPr>
+            </a:pPr>
+            <a:r>
+              <a:t>37 features evaluated across all 3 proposals submitted for this RFP</a:t>
+            </a:r>
+          </a:p>
+        </p:txBody>
+      </p:sp>
+      <p:sp>
+        <p:nvSpPr>
+          <p:cNvPr id="5" name="Rectangle 4"/>
+          <p:cNvSpPr/>
+          <p:nvPr/>
+        </p:nvSpPr>
+        <p:spPr>
+          <a:xfrm>
+            <a:off x="548640" y="1645920"/>
+            <a:ext cx="3474720" cy="384048"/>
+          </a:xfrm>
+          <a:prstGeom prst="rect">
+            <a:avLst/>
+          </a:prstGeom>
+          <a:solidFill>
+            <a:srgbClr val="1B2A4A"/>
+          </a:solidFill>
+          <a:ln>
+            <a:noFill/>
+          </a:ln>
+        </p:spPr>
+        <p:style>
+          <a:lnRef idx="1">
+            <a:schemeClr val="accent1"/>
+          </a:lnRef>
+          <a:fillRef idx="3">
+            <a:schemeClr val="accent1"/>
+          </a:fillRef>
+          <a:effectRef idx="2">
+            <a:schemeClr val="accent1"/>
+          </a:effectRef>
+          <a:fontRef idx="minor">
+            <a:schemeClr val="lt1"/>
+          </a:fontRef>
+        </p:style>
+        <p:txBody>
+          <a:bodyPr rtlCol="0" anchor="ctr"/>
+          <a:lstStyle/>
+          <a:p>
+            <a:pPr algn="ctr"/>
+            <a:endParaRPr/>
+          </a:p>
+        </p:txBody>
+      </p:sp>
+      <p:sp>
+        <p:nvSpPr>
+          <p:cNvPr id="6" name="TextBox 5"/>
+          <p:cNvSpPr txBox="1"/>
+          <p:nvPr/>
+        </p:nvSpPr>
+        <p:spPr>
+          <a:xfrm>
+            <a:off x="640080" y="1664208"/>
+            <a:ext cx="3291840" cy="347472"/>
+          </a:xfrm>
+          <a:prstGeom prst="rect">
+            <a:avLst/>
+          </a:prstGeom>
+          <a:noFill/>
+        </p:spPr>
+        <p:txBody>
+          <a:bodyPr wrap="square">
+            <a:spAutoFit/>
+          </a:bodyPr>
+          <a:lstStyle/>
+          <a:p>
+            <a:pPr algn="l">
+              <a:defRPr sz="1300" b="1">
+                <a:solidFill>
+                  <a:srgbClr val="FFFFFF"/>
+                </a:solidFill>
+                <a:latin typeface="Calibri"/>
+              </a:defRPr>
+            </a:pPr>
+            <a:r>
+              <a:t>Category</a:t>
+            </a:r>
+          </a:p>
+        </p:txBody>
+      </p:sp>
+      <p:sp>
+        <p:nvSpPr>
+          <p:cNvPr id="7" name="Rectangle 6"/>
+          <p:cNvSpPr/>
+          <p:nvPr/>
+        </p:nvSpPr>
+        <p:spPr>
+          <a:xfrm>
+            <a:off x="4023360" y="1645920"/>
+            <a:ext cx="1097280" cy="384048"/>
+          </a:xfrm>
+          <a:prstGeom prst="rect">
+            <a:avLst/>
+          </a:prstGeom>
+          <a:solidFill>
+            <a:srgbClr val="1B2A4A"/>
+          </a:solidFill>
+          <a:ln>
+            <a:noFill/>
+          </a:ln>
+        </p:spPr>
+        <p:style>
+          <a:lnRef idx="1">
+            <a:schemeClr val="accent1"/>
+          </a:lnRef>
+          <a:fillRef idx="3">
+            <a:schemeClr val="accent1"/>
+          </a:fillRef>
+          <a:effectRef idx="2">
+            <a:schemeClr val="accent1"/>
+          </a:effectRef>
+          <a:fontRef idx="minor">
+            <a:schemeClr val="lt1"/>
+          </a:fontRef>
+        </p:style>
+        <p:txBody>
+          <a:bodyPr rtlCol="0" anchor="ctr"/>
+          <a:lstStyle/>
+          <a:p>
+            <a:pPr algn="ctr"/>
+            <a:endParaRPr/>
+          </a:p>
+        </p:txBody>
+      </p:sp>
+      <p:sp>
+        <p:nvSpPr>
+          <p:cNvPr id="8" name="TextBox 7"/>
+          <p:cNvSpPr txBox="1"/>
+          <p:nvPr/>
+        </p:nvSpPr>
+        <p:spPr>
+          <a:xfrm>
+            <a:off x="4114800" y="1664208"/>
+            <a:ext cx="914400" cy="347472"/>
+          </a:xfrm>
+          <a:prstGeom prst="rect">
+            <a:avLst/>
+          </a:prstGeom>
+          <a:noFill/>
+        </p:spPr>
+        <p:txBody>
+          <a:bodyPr wrap="square">
+            <a:spAutoFit/>
+          </a:bodyPr>
+          <a:lstStyle/>
+          <a:p>
+            <a:pPr algn="l">
+              <a:defRPr sz="1300" b="1">
+                <a:solidFill>
+                  <a:srgbClr val="FFFFFF"/>
+                </a:solidFill>
+                <a:latin typeface="Calibri"/>
+              </a:defRPr>
+            </a:pPr>
+            <a:r>
+              <a:t>IoTeye</a:t>
+            </a:r>
+          </a:p>
+        </p:txBody>
+      </p:sp>
+      <p:sp>
+        <p:nvSpPr>
+          <p:cNvPr id="9" name="Rectangle 8"/>
+          <p:cNvSpPr/>
+          <p:nvPr/>
+        </p:nvSpPr>
+        <p:spPr>
+          <a:xfrm>
+            <a:off x="5120640" y="1645920"/>
+            <a:ext cx="1280160" cy="384048"/>
+          </a:xfrm>
+          <a:prstGeom prst="rect">
+            <a:avLst/>
+          </a:prstGeom>
+          <a:solidFill>
+            <a:srgbClr val="1B2A4A"/>
+          </a:solidFill>
+          <a:ln>
+            <a:noFill/>
+          </a:ln>
+        </p:spPr>
+        <p:style>
+          <a:lnRef idx="1">
+            <a:schemeClr val="accent1"/>
+          </a:lnRef>
+          <a:fillRef idx="3">
+            <a:schemeClr val="accent1"/>
+          </a:fillRef>
+          <a:effectRef idx="2">
+            <a:schemeClr val="accent1"/>
+          </a:effectRef>
+          <a:fontRef idx="minor">
+            <a:schemeClr val="lt1"/>
+          </a:fontRef>
+        </p:style>
+        <p:txBody>
+          <a:bodyPr rtlCol="0" anchor="ctr"/>
+          <a:lstStyle/>
+          <a:p>
+            <a:pPr algn="ctr"/>
+            <a:endParaRPr/>
+          </a:p>
+        </p:txBody>
+      </p:sp>
+      <p:sp>
+        <p:nvSpPr>
+          <p:cNvPr id="10" name="TextBox 9"/>
+          <p:cNvSpPr txBox="1"/>
+          <p:nvPr/>
+        </p:nvSpPr>
+        <p:spPr>
+          <a:xfrm>
+            <a:off x="5212080" y="1664208"/>
+            <a:ext cx="1097280" cy="347472"/>
+          </a:xfrm>
+          <a:prstGeom prst="rect">
+            <a:avLst/>
+          </a:prstGeom>
+          <a:noFill/>
+        </p:spPr>
+        <p:txBody>
+          <a:bodyPr wrap="square">
+            <a:spAutoFit/>
+          </a:bodyPr>
+          <a:lstStyle/>
+          <a:p>
+            <a:pPr algn="l">
+              <a:defRPr sz="1300" b="1">
+                <a:solidFill>
+                  <a:srgbClr val="FFFFFF"/>
+                </a:solidFill>
+                <a:latin typeface="Calibri"/>
+              </a:defRPr>
+            </a:pPr>
+            <a:r>
+              <a:t>Proposal 1</a:t>
+            </a:r>
+          </a:p>
+        </p:txBody>
+      </p:sp>
+      <p:sp>
+        <p:nvSpPr>
+          <p:cNvPr id="11" name="Rectangle 10"/>
+          <p:cNvSpPr/>
+          <p:nvPr/>
+        </p:nvSpPr>
+        <p:spPr>
+          <a:xfrm>
+            <a:off x="6400800" y="1645920"/>
+            <a:ext cx="1280160" cy="384048"/>
+          </a:xfrm>
+          <a:prstGeom prst="rect">
+            <a:avLst/>
+          </a:prstGeom>
+          <a:solidFill>
+            <a:srgbClr val="1B2A4A"/>
+          </a:solidFill>
+          <a:ln>
+            <a:noFill/>
+          </a:ln>
+        </p:spPr>
+        <p:style>
+          <a:lnRef idx="1">
+            <a:schemeClr val="accent1"/>
+          </a:lnRef>
+          <a:fillRef idx="3">
+            <a:schemeClr val="accent1"/>
+          </a:fillRef>
+          <a:effectRef idx="2">
+            <a:schemeClr val="accent1"/>
+          </a:effectRef>
+          <a:fontRef idx="minor">
+            <a:schemeClr val="lt1"/>
+          </a:fontRef>
+        </p:style>
+        <p:txBody>
+          <a:bodyPr rtlCol="0" anchor="ctr"/>
+          <a:lstStyle/>
+          <a:p>
+            <a:pPr algn="ctr"/>
+            <a:endParaRPr/>
+          </a:p>
+        </p:txBody>
+      </p:sp>
+      <p:sp>
+        <p:nvSpPr>
+          <p:cNvPr id="12" name="TextBox 11"/>
+          <p:cNvSpPr txBox="1"/>
+          <p:nvPr/>
+        </p:nvSpPr>
+        <p:spPr>
+          <a:xfrm>
+            <a:off x="6492240" y="1664208"/>
+            <a:ext cx="1097280" cy="347472"/>
+          </a:xfrm>
+          <a:prstGeom prst="rect">
+            <a:avLst/>
+          </a:prstGeom>
+          <a:noFill/>
+        </p:spPr>
+        <p:txBody>
+          <a:bodyPr wrap="square">
+            <a:spAutoFit/>
+          </a:bodyPr>
+          <a:lstStyle/>
+          <a:p>
+            <a:pPr algn="l">
+              <a:defRPr sz="1300" b="1">
+                <a:solidFill>
+                  <a:srgbClr val="FFFFFF"/>
+                </a:solidFill>
+                <a:latin typeface="Calibri"/>
+              </a:defRPr>
+            </a:pPr>
+            <a:r>
+              <a:t>Proposal 2</a:t>
+            </a:r>
+          </a:p>
+        </p:txBody>
+      </p:sp>
+      <p:sp>
+        <p:nvSpPr>
+          <p:cNvPr id="13" name="Rectangle 12"/>
+          <p:cNvSpPr/>
+          <p:nvPr/>
+        </p:nvSpPr>
+        <p:spPr>
+          <a:xfrm>
+            <a:off x="548640" y="2029968"/>
+            <a:ext cx="3474720" cy="384048"/>
+          </a:xfrm>
+          <a:prstGeom prst="rect">
+            <a:avLst/>
+          </a:prstGeom>
+          <a:solidFill>
+            <a:srgbClr val="F2F2F2"/>
+          </a:solidFill>
+          <a:ln>
+            <a:noFill/>
+          </a:ln>
+        </p:spPr>
+        <p:style>
+          <a:lnRef idx="1">
+            <a:schemeClr val="accent1"/>
+          </a:lnRef>
+          <a:fillRef idx="3">
+            <a:schemeClr val="accent1"/>
+          </a:fillRef>
+          <a:effectRef idx="2">
+            <a:schemeClr val="accent1"/>
+          </a:effectRef>
+          <a:fontRef idx="minor">
+            <a:schemeClr val="lt1"/>
+          </a:fontRef>
+        </p:style>
+        <p:txBody>
+          <a:bodyPr rtlCol="0" anchor="ctr"/>
+          <a:lstStyle/>
+          <a:p>
+            <a:pPr algn="ctr"/>
+            <a:endParaRPr/>
+          </a:p>
+        </p:txBody>
+      </p:sp>
+      <p:sp>
+        <p:nvSpPr>
+          <p:cNvPr id="14" name="TextBox 13"/>
+          <p:cNvSpPr txBox="1"/>
+          <p:nvPr/>
+        </p:nvSpPr>
+        <p:spPr>
+          <a:xfrm>
+            <a:off x="640080" y="2048256"/>
+            <a:ext cx="3291840" cy="347472"/>
+          </a:xfrm>
+          <a:prstGeom prst="rect">
+            <a:avLst/>
+          </a:prstGeom>
+          <a:noFill/>
+        </p:spPr>
+        <p:txBody>
+          <a:bodyPr wrap="square">
+            <a:spAutoFit/>
+          </a:bodyPr>
+          <a:lstStyle/>
+          <a:p>
+            <a:pPr algn="l">
+              <a:defRPr sz="1200" b="0">
+                <a:solidFill>
+                  <a:srgbClr val="333333"/>
+                </a:solidFill>
+                <a:latin typeface="Calibri"/>
+              </a:defRPr>
+            </a:pPr>
+            <a:r>
+              <a:t>Nomination &amp; Recognition (6)</a:t>
+            </a:r>
+          </a:p>
+        </p:txBody>
+      </p:sp>
+      <p:sp>
+        <p:nvSpPr>
+          <p:cNvPr id="15" name="Rectangle 14"/>
+          <p:cNvSpPr/>
+          <p:nvPr/>
+        </p:nvSpPr>
+        <p:spPr>
+          <a:xfrm>
+            <a:off x="4023360" y="2029968"/>
+            <a:ext cx="1097280" cy="384048"/>
+          </a:xfrm>
+          <a:prstGeom prst="rect">
+            <a:avLst/>
+          </a:prstGeom>
+          <a:solidFill>
+            <a:srgbClr val="E8F5E9"/>
+          </a:solidFill>
+          <a:ln>
+            <a:noFill/>
+          </a:ln>
+        </p:spPr>
+        <p:style>
+          <a:lnRef idx="1">
+            <a:schemeClr val="accent1"/>
+          </a:lnRef>
+          <a:fillRef idx="3">
+            <a:schemeClr val="accent1"/>
+          </a:fillRef>
+          <a:effectRef idx="2">
+            <a:schemeClr val="accent1"/>
+          </a:effectRef>
+          <a:fontRef idx="minor">
+            <a:schemeClr val="lt1"/>
+          </a:fontRef>
+        </p:style>
+        <p:txBody>
+          <a:bodyPr rtlCol="0" anchor="ctr"/>
+          <a:lstStyle/>
+          <a:p>
+            <a:pPr algn="ctr"/>
+            <a:endParaRPr/>
+          </a:p>
+        </p:txBody>
+      </p:sp>
+      <p:sp>
+        <p:nvSpPr>
+          <p:cNvPr id="16" name="TextBox 15"/>
+          <p:cNvSpPr txBox="1"/>
+          <p:nvPr/>
+        </p:nvSpPr>
+        <p:spPr>
+          <a:xfrm>
+            <a:off x="4114800" y="2048256"/>
+            <a:ext cx="914400" cy="347472"/>
+          </a:xfrm>
+          <a:prstGeom prst="rect">
+            <a:avLst/>
+          </a:prstGeom>
+          <a:noFill/>
+        </p:spPr>
+        <p:txBody>
+          <a:bodyPr wrap="square">
+            <a:spAutoFit/>
+          </a:bodyPr>
+          <a:lstStyle/>
+          <a:p>
+            <a:pPr algn="ctr">
+              <a:defRPr sz="1300" b="1">
+                <a:solidFill>
+                  <a:srgbClr val="1B7A43"/>
+                </a:solidFill>
+                <a:latin typeface="Calibri"/>
+              </a:defRPr>
+            </a:pPr>
+            <a:r>
+              <a:t>6</a:t>
+            </a:r>
+          </a:p>
+        </p:txBody>
+      </p:sp>
+      <p:sp>
+        <p:nvSpPr>
+          <p:cNvPr id="17" name="Rectangle 16"/>
+          <p:cNvSpPr/>
+          <p:nvPr/>
+        </p:nvSpPr>
+        <p:spPr>
+          <a:xfrm>
+            <a:off x="5120640" y="2029968"/>
+            <a:ext cx="1280160" cy="384048"/>
+          </a:xfrm>
+          <a:prstGeom prst="rect">
+            <a:avLst/>
+          </a:prstGeom>
+          <a:solidFill>
+            <a:srgbClr val="F2F2F2"/>
+          </a:solidFill>
+          <a:ln>
+            <a:noFill/>
+          </a:ln>
+        </p:spPr>
+        <p:style>
+          <a:lnRef idx="1">
+            <a:schemeClr val="accent1"/>
+          </a:lnRef>
+          <a:fillRef idx="3">
+            <a:schemeClr val="accent1"/>
+          </a:fillRef>
+          <a:effectRef idx="2">
+            <a:schemeClr val="accent1"/>
+          </a:effectRef>
+          <a:fontRef idx="minor">
+            <a:schemeClr val="lt1"/>
+          </a:fontRef>
+        </p:style>
+        <p:txBody>
+          <a:bodyPr rtlCol="0" anchor="ctr"/>
+          <a:lstStyle/>
+          <a:p>
+            <a:pPr algn="ctr"/>
+            <a:endParaRPr/>
+          </a:p>
+        </p:txBody>
+      </p:sp>
+      <p:sp>
+        <p:nvSpPr>
+          <p:cNvPr id="18" name="TextBox 17"/>
+          <p:cNvSpPr txBox="1"/>
+          <p:nvPr/>
+        </p:nvSpPr>
+        <p:spPr>
+          <a:xfrm>
+            <a:off x="5212080" y="2048256"/>
+            <a:ext cx="1097280" cy="347472"/>
+          </a:xfrm>
+          <a:prstGeom prst="rect">
+            <a:avLst/>
+          </a:prstGeom>
+          <a:noFill/>
+        </p:spPr>
+        <p:txBody>
+          <a:bodyPr wrap="square">
+            <a:spAutoFit/>
+          </a:bodyPr>
+          <a:lstStyle/>
+          <a:p>
+            <a:pPr algn="ctr">
+              <a:defRPr sz="1200" b="0">
+                <a:solidFill>
+                  <a:srgbClr val="333333"/>
+                </a:solidFill>
+                <a:latin typeface="Calibri"/>
+              </a:defRPr>
+            </a:pPr>
+            <a:r>
+              <a:t>5</a:t>
+            </a:r>
+          </a:p>
+        </p:txBody>
+      </p:sp>
+      <p:sp>
+        <p:nvSpPr>
+          <p:cNvPr id="19" name="Rectangle 18"/>
+          <p:cNvSpPr/>
+          <p:nvPr/>
+        </p:nvSpPr>
+        <p:spPr>
+          <a:xfrm>
+            <a:off x="6400800" y="2029968"/>
+            <a:ext cx="1280160" cy="384048"/>
+          </a:xfrm>
+          <a:prstGeom prst="rect">
+            <a:avLst/>
+          </a:prstGeom>
+          <a:solidFill>
+            <a:srgbClr val="F2F2F2"/>
+          </a:solidFill>
+          <a:ln>
+            <a:noFill/>
+          </a:ln>
+        </p:spPr>
+        <p:style>
+          <a:lnRef idx="1">
+            <a:schemeClr val="accent1"/>
+          </a:lnRef>
+          <a:fillRef idx="3">
+            <a:schemeClr val="accent1"/>
+          </a:fillRef>
+          <a:effectRef idx="2">
+            <a:schemeClr val="accent1"/>
+          </a:effectRef>
+          <a:fontRef idx="minor">
+            <a:schemeClr val="lt1"/>
+          </a:fontRef>
+        </p:style>
+        <p:txBody>
+          <a:bodyPr rtlCol="0" anchor="ctr"/>
+          <a:lstStyle/>
+          <a:p>
+            <a:pPr algn="ctr"/>
+            <a:endParaRPr/>
+          </a:p>
+        </p:txBody>
+      </p:sp>
+      <p:sp>
+        <p:nvSpPr>
+          <p:cNvPr id="20" name="TextBox 19"/>
+          <p:cNvSpPr txBox="1"/>
+          <p:nvPr/>
+        </p:nvSpPr>
+        <p:spPr>
+          <a:xfrm>
+            <a:off x="6492240" y="2048256"/>
+            <a:ext cx="1097280" cy="347472"/>
+          </a:xfrm>
+          <a:prstGeom prst="rect">
+            <a:avLst/>
+          </a:prstGeom>
+          <a:noFill/>
+        </p:spPr>
+        <p:txBody>
+          <a:bodyPr wrap="square">
+            <a:spAutoFit/>
+          </a:bodyPr>
+          <a:lstStyle/>
+          <a:p>
+            <a:pPr algn="ctr">
+              <a:defRPr sz="1200" b="0">
+                <a:solidFill>
+                  <a:srgbClr val="333333"/>
+                </a:solidFill>
+                <a:latin typeface="Calibri"/>
+              </a:defRPr>
+            </a:pPr>
+            <a:r>
+              <a:t>4</a:t>
+            </a:r>
+          </a:p>
+        </p:txBody>
+      </p:sp>
+      <p:sp>
+        <p:nvSpPr>
+          <p:cNvPr id="21" name="Rectangle 20"/>
+          <p:cNvSpPr/>
+          <p:nvPr/>
+        </p:nvSpPr>
+        <p:spPr>
+          <a:xfrm>
+            <a:off x="548640" y="2414016"/>
+            <a:ext cx="3474720" cy="384048"/>
+          </a:xfrm>
+          <a:prstGeom prst="rect">
+            <a:avLst/>
+          </a:prstGeom>
+          <a:solidFill>
+            <a:srgbClr val="FFFFFF"/>
+          </a:solidFill>
+          <a:ln>
+            <a:noFill/>
+          </a:ln>
+        </p:spPr>
+        <p:style>
+          <a:lnRef idx="1">
+            <a:schemeClr val="accent1"/>
+          </a:lnRef>
+          <a:fillRef idx="3">
+            <a:schemeClr val="accent1"/>
+          </a:fillRef>
+          <a:effectRef idx="2">
+            <a:schemeClr val="accent1"/>
+          </a:effectRef>
+          <a:fontRef idx="minor">
+            <a:schemeClr val="lt1"/>
+          </a:fontRef>
+        </p:style>
+        <p:txBody>
+          <a:bodyPr rtlCol="0" anchor="ctr"/>
+          <a:lstStyle/>
+          <a:p>
+            <a:pPr algn="ctr"/>
+            <a:endParaRPr/>
+          </a:p>
+        </p:txBody>
+      </p:sp>
+      <p:sp>
+        <p:nvSpPr>
+          <p:cNvPr id="22" name="TextBox 21"/>
+          <p:cNvSpPr txBox="1"/>
+          <p:nvPr/>
+        </p:nvSpPr>
+        <p:spPr>
+          <a:xfrm>
+            <a:off x="640080" y="2432304"/>
+            <a:ext cx="3291840" cy="347472"/>
+          </a:xfrm>
+          <a:prstGeom prst="rect">
+            <a:avLst/>
+          </a:prstGeom>
+          <a:noFill/>
+        </p:spPr>
+        <p:txBody>
+          <a:bodyPr wrap="square">
+            <a:spAutoFit/>
+          </a:bodyPr>
+          <a:lstStyle/>
+          <a:p>
+            <a:pPr algn="l">
+              <a:defRPr sz="1200" b="0">
+                <a:solidFill>
+                  <a:srgbClr val="333333"/>
+                </a:solidFill>
+                <a:latin typeface="Calibri"/>
+              </a:defRPr>
+            </a:pPr>
+            <a:r>
+              <a:t>Selection &amp; Voting (3)</a:t>
+            </a:r>
+          </a:p>
+        </p:txBody>
+      </p:sp>
+      <p:sp>
+        <p:nvSpPr>
+          <p:cNvPr id="23" name="Rectangle 22"/>
+          <p:cNvSpPr/>
+          <p:nvPr/>
+        </p:nvSpPr>
+        <p:spPr>
+          <a:xfrm>
+            <a:off x="4023360" y="2414016"/>
+            <a:ext cx="1097280" cy="384048"/>
+          </a:xfrm>
+          <a:prstGeom prst="rect">
+            <a:avLst/>
+          </a:prstGeom>
+          <a:solidFill>
+            <a:srgbClr val="E8F5E9"/>
+          </a:solidFill>
+          <a:ln>
+            <a:noFill/>
+          </a:ln>
+        </p:spPr>
+        <p:style>
+          <a:lnRef idx="1">
+            <a:schemeClr val="accent1"/>
+          </a:lnRef>
+          <a:fillRef idx="3">
+            <a:schemeClr val="accent1"/>
+          </a:fillRef>
+          <a:effectRef idx="2">
+            <a:schemeClr val="accent1"/>
+          </a:effectRef>
+          <a:fontRef idx="minor">
+            <a:schemeClr val="lt1"/>
+          </a:fontRef>
+        </p:style>
+        <p:txBody>
+          <a:bodyPr rtlCol="0" anchor="ctr"/>
+          <a:lstStyle/>
+          <a:p>
+            <a:pPr algn="ctr"/>
+            <a:endParaRPr/>
+          </a:p>
+        </p:txBody>
+      </p:sp>
+      <p:sp>
+        <p:nvSpPr>
+          <p:cNvPr id="24" name="TextBox 23"/>
+          <p:cNvSpPr txBox="1"/>
+          <p:nvPr/>
+        </p:nvSpPr>
+        <p:spPr>
+          <a:xfrm>
+            <a:off x="4114800" y="2432304"/>
+            <a:ext cx="914400" cy="347472"/>
+          </a:xfrm>
+          <a:prstGeom prst="rect">
+            <a:avLst/>
+          </a:prstGeom>
+          <a:noFill/>
+        </p:spPr>
+        <p:txBody>
+          <a:bodyPr wrap="square">
+            <a:spAutoFit/>
+          </a:bodyPr>
+          <a:lstStyle/>
+          <a:p>
+            <a:pPr algn="ctr">
+              <a:defRPr sz="1300" b="1">
+                <a:solidFill>
+                  <a:srgbClr val="1B7A43"/>
+                </a:solidFill>
+                <a:latin typeface="Calibri"/>
+              </a:defRPr>
+            </a:pPr>
+            <a:r>
+              <a:t>3</a:t>
+            </a:r>
+          </a:p>
+        </p:txBody>
+      </p:sp>
+      <p:sp>
+        <p:nvSpPr>
+          <p:cNvPr id="25" name="Rectangle 24"/>
+          <p:cNvSpPr/>
+          <p:nvPr/>
+        </p:nvSpPr>
+        <p:spPr>
+          <a:xfrm>
+            <a:off x="5120640" y="2414016"/>
+            <a:ext cx="1280160" cy="384048"/>
+          </a:xfrm>
+          <a:prstGeom prst="rect">
+            <a:avLst/>
+          </a:prstGeom>
+          <a:solidFill>
+            <a:srgbClr val="FFFFFF"/>
+          </a:solidFill>
+          <a:ln>
+            <a:noFill/>
+          </a:ln>
+        </p:spPr>
+        <p:style>
+          <a:lnRef idx="1">
+            <a:schemeClr val="accent1"/>
+          </a:lnRef>
+          <a:fillRef idx="3">
+            <a:schemeClr val="accent1"/>
+          </a:fillRef>
+          <a:effectRef idx="2">
+            <a:schemeClr val="accent1"/>
+          </a:effectRef>
+          <a:fontRef idx="minor">
+            <a:schemeClr val="lt1"/>
+          </a:fontRef>
+        </p:style>
+        <p:txBody>
+          <a:bodyPr rtlCol="0" anchor="ctr"/>
+          <a:lstStyle/>
+          <a:p>
+            <a:pPr algn="ctr"/>
+            <a:endParaRPr/>
+          </a:p>
+        </p:txBody>
+      </p:sp>
+      <p:sp>
+        <p:nvSpPr>
+          <p:cNvPr id="26" name="TextBox 25"/>
+          <p:cNvSpPr txBox="1"/>
+          <p:nvPr/>
+        </p:nvSpPr>
+        <p:spPr>
+          <a:xfrm>
+            <a:off x="5212080" y="2432304"/>
+            <a:ext cx="1097280" cy="347472"/>
+          </a:xfrm>
+          <a:prstGeom prst="rect">
+            <a:avLst/>
+          </a:prstGeom>
+          <a:noFill/>
+        </p:spPr>
+        <p:txBody>
+          <a:bodyPr wrap="square">
+            <a:spAutoFit/>
+          </a:bodyPr>
+          <a:lstStyle/>
+          <a:p>
+            <a:pPr algn="ctr">
+              <a:defRPr sz="1200" b="0">
+                <a:solidFill>
+                  <a:srgbClr val="333333"/>
+                </a:solidFill>
+                <a:latin typeface="Calibri"/>
+              </a:defRPr>
+            </a:pPr>
+            <a:r>
+              <a:t>2</a:t>
+            </a:r>
+          </a:p>
+        </p:txBody>
+      </p:sp>
+      <p:sp>
+        <p:nvSpPr>
+          <p:cNvPr id="27" name="Rectangle 26"/>
+          <p:cNvSpPr/>
+          <p:nvPr/>
+        </p:nvSpPr>
+        <p:spPr>
+          <a:xfrm>
+            <a:off x="6400800" y="2414016"/>
+            <a:ext cx="1280160" cy="384048"/>
+          </a:xfrm>
+          <a:prstGeom prst="rect">
+            <a:avLst/>
+          </a:prstGeom>
+          <a:solidFill>
+            <a:srgbClr val="FFFFFF"/>
+          </a:solidFill>
+          <a:ln>
+            <a:noFill/>
+          </a:ln>
+        </p:spPr>
+        <p:style>
+          <a:lnRef idx="1">
+            <a:schemeClr val="accent1"/>
+          </a:lnRef>
+          <a:fillRef idx="3">
+            <a:schemeClr val="accent1"/>
+          </a:fillRef>
+          <a:effectRef idx="2">
+            <a:schemeClr val="accent1"/>
+          </a:effectRef>
+          <a:fontRef idx="minor">
+            <a:schemeClr val="lt1"/>
+          </a:fontRef>
+        </p:style>
+        <p:txBody>
+          <a:bodyPr rtlCol="0" anchor="ctr"/>
+          <a:lstStyle/>
+          <a:p>
+            <a:pPr algn="ctr"/>
+            <a:endParaRPr/>
+          </a:p>
+        </p:txBody>
+      </p:sp>
+      <p:sp>
+        <p:nvSpPr>
+          <p:cNvPr id="28" name="TextBox 27"/>
+          <p:cNvSpPr txBox="1"/>
+          <p:nvPr/>
+        </p:nvSpPr>
+        <p:spPr>
+          <a:xfrm>
+            <a:off x="6492240" y="2432304"/>
+            <a:ext cx="1097280" cy="347472"/>
+          </a:xfrm>
+          <a:prstGeom prst="rect">
+            <a:avLst/>
+          </a:prstGeom>
+          <a:noFill/>
+        </p:spPr>
+        <p:txBody>
+          <a:bodyPr wrap="square">
+            <a:spAutoFit/>
+          </a:bodyPr>
+          <a:lstStyle/>
+          <a:p>
+            <a:pPr algn="ctr">
+              <a:defRPr sz="1200" b="0">
+                <a:solidFill>
+                  <a:srgbClr val="333333"/>
+                </a:solidFill>
+                <a:latin typeface="Calibri"/>
+              </a:defRPr>
+            </a:pPr>
+            <a:r>
+              <a:t>3</a:t>
+            </a:r>
+          </a:p>
+        </p:txBody>
+      </p:sp>
+      <p:sp>
+        <p:nvSpPr>
+          <p:cNvPr id="29" name="Rectangle 28"/>
+          <p:cNvSpPr/>
+          <p:nvPr/>
+        </p:nvSpPr>
+        <p:spPr>
+          <a:xfrm>
+            <a:off x="548640" y="2798064"/>
+            <a:ext cx="3474720" cy="384048"/>
+          </a:xfrm>
+          <a:prstGeom prst="rect">
+            <a:avLst/>
+          </a:prstGeom>
+          <a:solidFill>
+            <a:srgbClr val="F2F2F2"/>
+          </a:solidFill>
+          <a:ln>
+            <a:noFill/>
+          </a:ln>
+        </p:spPr>
+        <p:style>
+          <a:lnRef idx="1">
+            <a:schemeClr val="accent1"/>
+          </a:lnRef>
+          <a:fillRef idx="3">
+            <a:schemeClr val="accent1"/>
+          </a:fillRef>
+          <a:effectRef idx="2">
+            <a:schemeClr val="accent1"/>
+          </a:effectRef>
+          <a:fontRef idx="minor">
+            <a:schemeClr val="lt1"/>
+          </a:fontRef>
+        </p:style>
+        <p:txBody>
+          <a:bodyPr rtlCol="0" anchor="ctr"/>
+          <a:lstStyle/>
+          <a:p>
+            <a:pPr algn="ctr"/>
+            <a:endParaRPr/>
+          </a:p>
+        </p:txBody>
+      </p:sp>
+      <p:sp>
+        <p:nvSpPr>
+          <p:cNvPr id="30" name="TextBox 29"/>
+          <p:cNvSpPr txBox="1"/>
+          <p:nvPr/>
+        </p:nvSpPr>
+        <p:spPr>
+          <a:xfrm>
+            <a:off x="640080" y="2816352"/>
+            <a:ext cx="3291840" cy="347472"/>
+          </a:xfrm>
+          <a:prstGeom prst="rect">
+            <a:avLst/>
+          </a:prstGeom>
+          <a:noFill/>
+        </p:spPr>
+        <p:txBody>
+          <a:bodyPr wrap="square">
+            <a:spAutoFit/>
+          </a:bodyPr>
+          <a:lstStyle/>
+          <a:p>
+            <a:pPr algn="l">
+              <a:defRPr sz="1200" b="0">
+                <a:solidFill>
+                  <a:srgbClr val="333333"/>
+                </a:solidFill>
+                <a:latin typeface="Calibri"/>
+              </a:defRPr>
+            </a:pPr>
+            <a:r>
+              <a:t>Authentication &amp; Access (5)</a:t>
+            </a:r>
+          </a:p>
+        </p:txBody>
+      </p:sp>
+      <p:sp>
+        <p:nvSpPr>
+          <p:cNvPr id="31" name="Rectangle 30"/>
+          <p:cNvSpPr/>
+          <p:nvPr/>
+        </p:nvSpPr>
+        <p:spPr>
+          <a:xfrm>
+            <a:off x="4023360" y="2798064"/>
+            <a:ext cx="1097280" cy="384048"/>
+          </a:xfrm>
+          <a:prstGeom prst="rect">
+            <a:avLst/>
+          </a:prstGeom>
+          <a:solidFill>
+            <a:srgbClr val="E8F5E9"/>
+          </a:solidFill>
+          <a:ln>
+            <a:noFill/>
+          </a:ln>
+        </p:spPr>
+        <p:style>
+          <a:lnRef idx="1">
+            <a:schemeClr val="accent1"/>
+          </a:lnRef>
+          <a:fillRef idx="3">
+            <a:schemeClr val="accent1"/>
+          </a:fillRef>
+          <a:effectRef idx="2">
+            <a:schemeClr val="accent1"/>
+          </a:effectRef>
+          <a:fontRef idx="minor">
+            <a:schemeClr val="lt1"/>
+          </a:fontRef>
+        </p:style>
+        <p:txBody>
+          <a:bodyPr rtlCol="0" anchor="ctr"/>
+          <a:lstStyle/>
+          <a:p>
+            <a:pPr algn="ctr"/>
+            <a:endParaRPr/>
+          </a:p>
+        </p:txBody>
+      </p:sp>
+      <p:sp>
+        <p:nvSpPr>
+          <p:cNvPr id="32" name="TextBox 31"/>
+          <p:cNvSpPr txBox="1"/>
+          <p:nvPr/>
+        </p:nvSpPr>
+        <p:spPr>
+          <a:xfrm>
+            <a:off x="4114800" y="2816352"/>
+            <a:ext cx="914400" cy="347472"/>
+          </a:xfrm>
+          <a:prstGeom prst="rect">
+            <a:avLst/>
+          </a:prstGeom>
+          <a:noFill/>
+        </p:spPr>
+        <p:txBody>
+          <a:bodyPr wrap="square">
+            <a:spAutoFit/>
+          </a:bodyPr>
+          <a:lstStyle/>
+          <a:p>
+            <a:pPr algn="ctr">
+              <a:defRPr sz="1300" b="1">
+                <a:solidFill>
+                  <a:srgbClr val="1B7A43"/>
+                </a:solidFill>
+                <a:latin typeface="Calibri"/>
+              </a:defRPr>
+            </a:pPr>
+            <a:r>
+              <a:t>4</a:t>
+            </a:r>
+          </a:p>
+        </p:txBody>
+      </p:sp>
+      <p:sp>
+        <p:nvSpPr>
+          <p:cNvPr id="33" name="Rectangle 32"/>
+          <p:cNvSpPr/>
+          <p:nvPr/>
+        </p:nvSpPr>
+        <p:spPr>
+          <a:xfrm>
+            <a:off x="5120640" y="2798064"/>
+            <a:ext cx="1280160" cy="384048"/>
+          </a:xfrm>
+          <a:prstGeom prst="rect">
+            <a:avLst/>
+          </a:prstGeom>
+          <a:solidFill>
+            <a:srgbClr val="F2F2F2"/>
+          </a:solidFill>
+          <a:ln>
+            <a:noFill/>
+          </a:ln>
+        </p:spPr>
+        <p:style>
+          <a:lnRef idx="1">
+            <a:schemeClr val="accent1"/>
+          </a:lnRef>
+          <a:fillRef idx="3">
+            <a:schemeClr val="accent1"/>
+          </a:fillRef>
+          <a:effectRef idx="2">
+            <a:schemeClr val="accent1"/>
+          </a:effectRef>
+          <a:fontRef idx="minor">
+            <a:schemeClr val="lt1"/>
+          </a:fontRef>
+        </p:style>
+        <p:txBody>
+          <a:bodyPr rtlCol="0" anchor="ctr"/>
+          <a:lstStyle/>
+          <a:p>
+            <a:pPr algn="ctr"/>
+            <a:endParaRPr/>
+          </a:p>
+        </p:txBody>
+      </p:sp>
+      <p:sp>
+        <p:nvSpPr>
+          <p:cNvPr id="34" name="TextBox 33"/>
+          <p:cNvSpPr txBox="1"/>
+          <p:nvPr/>
+        </p:nvSpPr>
+        <p:spPr>
+          <a:xfrm>
+            <a:off x="5212080" y="2816352"/>
+            <a:ext cx="1097280" cy="347472"/>
+          </a:xfrm>
+          <a:prstGeom prst="rect">
+            <a:avLst/>
+          </a:prstGeom>
+          <a:noFill/>
+        </p:spPr>
+        <p:txBody>
+          <a:bodyPr wrap="square">
+            <a:spAutoFit/>
+          </a:bodyPr>
+          <a:lstStyle/>
+          <a:p>
+            <a:pPr algn="ctr">
+              <a:defRPr sz="1200" b="0">
+                <a:solidFill>
+                  <a:srgbClr val="333333"/>
+                </a:solidFill>
+                <a:latin typeface="Calibri"/>
+              </a:defRPr>
+            </a:pPr>
+            <a:r>
+              <a:t>1</a:t>
+            </a:r>
+          </a:p>
+        </p:txBody>
+      </p:sp>
+      <p:sp>
+        <p:nvSpPr>
+          <p:cNvPr id="35" name="Rectangle 34"/>
+          <p:cNvSpPr/>
+          <p:nvPr/>
+        </p:nvSpPr>
+        <p:spPr>
+          <a:xfrm>
+            <a:off x="6400800" y="2798064"/>
+            <a:ext cx="1280160" cy="384048"/>
+          </a:xfrm>
+          <a:prstGeom prst="rect">
+            <a:avLst/>
+          </a:prstGeom>
+          <a:solidFill>
+            <a:srgbClr val="F2F2F2"/>
+          </a:solidFill>
+          <a:ln>
+            <a:noFill/>
+          </a:ln>
+        </p:spPr>
+        <p:style>
+          <a:lnRef idx="1">
+            <a:schemeClr val="accent1"/>
+          </a:lnRef>
+          <a:fillRef idx="3">
+            <a:schemeClr val="accent1"/>
+          </a:fillRef>
+          <a:effectRef idx="2">
+            <a:schemeClr val="accent1"/>
+          </a:effectRef>
+          <a:fontRef idx="minor">
+            <a:schemeClr val="lt1"/>
+          </a:fontRef>
+        </p:style>
+        <p:txBody>
+          <a:bodyPr rtlCol="0" anchor="ctr"/>
+          <a:lstStyle/>
+          <a:p>
+            <a:pPr algn="ctr"/>
+            <a:endParaRPr/>
+          </a:p>
+        </p:txBody>
+      </p:sp>
+      <p:sp>
+        <p:nvSpPr>
+          <p:cNvPr id="36" name="TextBox 35"/>
+          <p:cNvSpPr txBox="1"/>
+          <p:nvPr/>
+        </p:nvSpPr>
+        <p:spPr>
+          <a:xfrm>
+            <a:off x="6492240" y="2816352"/>
+            <a:ext cx="1097280" cy="347472"/>
+          </a:xfrm>
+          <a:prstGeom prst="rect">
+            <a:avLst/>
+          </a:prstGeom>
+          <a:noFill/>
+        </p:spPr>
+        <p:txBody>
+          <a:bodyPr wrap="square">
+            <a:spAutoFit/>
+          </a:bodyPr>
+          <a:lstStyle/>
+          <a:p>
+            <a:pPr algn="ctr">
+              <a:defRPr sz="1200" b="0">
+                <a:solidFill>
+                  <a:srgbClr val="333333"/>
+                </a:solidFill>
+                <a:latin typeface="Calibri"/>
+              </a:defRPr>
+            </a:pPr>
+            <a:r>
+              <a:t>1</a:t>
+            </a:r>
+          </a:p>
+        </p:txBody>
+      </p:sp>
+      <p:sp>
+        <p:nvSpPr>
+          <p:cNvPr id="37" name="Rectangle 36"/>
+          <p:cNvSpPr/>
+          <p:nvPr/>
+        </p:nvSpPr>
+        <p:spPr>
+          <a:xfrm>
+            <a:off x="548640" y="3182112"/>
+            <a:ext cx="3474720" cy="384048"/>
+          </a:xfrm>
+          <a:prstGeom prst="rect">
+            <a:avLst/>
+          </a:prstGeom>
+          <a:solidFill>
+            <a:srgbClr val="FFFFFF"/>
+          </a:solidFill>
+          <a:ln>
+            <a:noFill/>
+          </a:ln>
+        </p:spPr>
+        <p:style>
+          <a:lnRef idx="1">
+            <a:schemeClr val="accent1"/>
+          </a:lnRef>
+          <a:fillRef idx="3">
+            <a:schemeClr val="accent1"/>
+          </a:fillRef>
+          <a:effectRef idx="2">
+            <a:schemeClr val="accent1"/>
+          </a:effectRef>
+          <a:fontRef idx="minor">
+            <a:schemeClr val="lt1"/>
+          </a:fontRef>
+        </p:style>
+        <p:txBody>
+          <a:bodyPr rtlCol="0" anchor="ctr"/>
+          <a:lstStyle/>
+          <a:p>
+            <a:pPr algn="ctr"/>
+            <a:endParaRPr/>
+          </a:p>
+        </p:txBody>
+      </p:sp>
+      <p:sp>
+        <p:nvSpPr>
+          <p:cNvPr id="38" name="TextBox 37"/>
+          <p:cNvSpPr txBox="1"/>
+          <p:nvPr/>
+        </p:nvSpPr>
+        <p:spPr>
+          <a:xfrm>
+            <a:off x="640080" y="3200400"/>
+            <a:ext cx="3291840" cy="347472"/>
+          </a:xfrm>
+          <a:prstGeom prst="rect">
+            <a:avLst/>
+          </a:prstGeom>
+          <a:noFill/>
+        </p:spPr>
+        <p:txBody>
+          <a:bodyPr wrap="square">
+            <a:spAutoFit/>
+          </a:bodyPr>
+          <a:lstStyle/>
+          <a:p>
+            <a:pPr algn="l">
+              <a:defRPr sz="1200" b="0">
+                <a:solidFill>
+                  <a:srgbClr val="333333"/>
+                </a:solidFill>
+                <a:latin typeface="Calibri"/>
+              </a:defRPr>
+            </a:pPr>
+            <a:r>
+              <a:t>Engagement &amp; Participation (6)</a:t>
+            </a:r>
+          </a:p>
+        </p:txBody>
+      </p:sp>
+      <p:sp>
+        <p:nvSpPr>
+          <p:cNvPr id="39" name="Rectangle 38"/>
+          <p:cNvSpPr/>
+          <p:nvPr/>
+        </p:nvSpPr>
+        <p:spPr>
+          <a:xfrm>
+            <a:off x="4023360" y="3182112"/>
+            <a:ext cx="1097280" cy="384048"/>
+          </a:xfrm>
+          <a:prstGeom prst="rect">
+            <a:avLst/>
+          </a:prstGeom>
+          <a:solidFill>
+            <a:srgbClr val="E8F5E9"/>
+          </a:solidFill>
+          <a:ln>
+            <a:noFill/>
+          </a:ln>
+        </p:spPr>
+        <p:style>
+          <a:lnRef idx="1">
+            <a:schemeClr val="accent1"/>
+          </a:lnRef>
+          <a:fillRef idx="3">
+            <a:schemeClr val="accent1"/>
+          </a:fillRef>
+          <a:effectRef idx="2">
+            <a:schemeClr val="accent1"/>
+          </a:effectRef>
+          <a:fontRef idx="minor">
+            <a:schemeClr val="lt1"/>
+          </a:fontRef>
+        </p:style>
+        <p:txBody>
+          <a:bodyPr rtlCol="0" anchor="ctr"/>
+          <a:lstStyle/>
+          <a:p>
+            <a:pPr algn="ctr"/>
+            <a:endParaRPr/>
+          </a:p>
+        </p:txBody>
+      </p:sp>
+      <p:sp>
+        <p:nvSpPr>
+          <p:cNvPr id="40" name="TextBox 39"/>
+          <p:cNvSpPr txBox="1"/>
+          <p:nvPr/>
+        </p:nvSpPr>
+        <p:spPr>
+          <a:xfrm>
+            <a:off x="4114800" y="3200400"/>
+            <a:ext cx="914400" cy="347472"/>
+          </a:xfrm>
+          <a:prstGeom prst="rect">
+            <a:avLst/>
+          </a:prstGeom>
+          <a:noFill/>
+        </p:spPr>
+        <p:txBody>
+          <a:bodyPr wrap="square">
+            <a:spAutoFit/>
+          </a:bodyPr>
+          <a:lstStyle/>
+          <a:p>
+            <a:pPr algn="ctr">
+              <a:defRPr sz="1300" b="1">
+                <a:solidFill>
+                  <a:srgbClr val="1B7A43"/>
+                </a:solidFill>
+                <a:latin typeface="Calibri"/>
+              </a:defRPr>
+            </a:pPr>
+            <a:r>
+              <a:t>6</a:t>
+            </a:r>
+          </a:p>
+        </p:txBody>
+      </p:sp>
+      <p:sp>
+        <p:nvSpPr>
+          <p:cNvPr id="41" name="Rectangle 40"/>
+          <p:cNvSpPr/>
+          <p:nvPr/>
+        </p:nvSpPr>
+        <p:spPr>
+          <a:xfrm>
+            <a:off x="5120640" y="3182112"/>
+            <a:ext cx="1280160" cy="384048"/>
+          </a:xfrm>
+          <a:prstGeom prst="rect">
+            <a:avLst/>
+          </a:prstGeom>
+          <a:solidFill>
+            <a:srgbClr val="FFFFFF"/>
+          </a:solidFill>
+          <a:ln>
+            <a:noFill/>
+          </a:ln>
+        </p:spPr>
+        <p:style>
+          <a:lnRef idx="1">
+            <a:schemeClr val="accent1"/>
+          </a:lnRef>
+          <a:fillRef idx="3">
+            <a:schemeClr val="accent1"/>
+          </a:fillRef>
+          <a:effectRef idx="2">
+            <a:schemeClr val="accent1"/>
+          </a:effectRef>
+          <a:fontRef idx="minor">
+            <a:schemeClr val="lt1"/>
+          </a:fontRef>
+        </p:style>
+        <p:txBody>
+          <a:bodyPr rtlCol="0" anchor="ctr"/>
+          <a:lstStyle/>
+          <a:p>
+            <a:pPr algn="ctr"/>
+            <a:endParaRPr/>
+          </a:p>
+        </p:txBody>
+      </p:sp>
+      <p:sp>
+        <p:nvSpPr>
+          <p:cNvPr id="42" name="TextBox 41"/>
+          <p:cNvSpPr txBox="1"/>
+          <p:nvPr/>
+        </p:nvSpPr>
+        <p:spPr>
+          <a:xfrm>
+            <a:off x="5212080" y="3200400"/>
+            <a:ext cx="1097280" cy="347472"/>
+          </a:xfrm>
+          <a:prstGeom prst="rect">
+            <a:avLst/>
+          </a:prstGeom>
+          <a:noFill/>
+        </p:spPr>
+        <p:txBody>
+          <a:bodyPr wrap="square">
+            <a:spAutoFit/>
+          </a:bodyPr>
+          <a:lstStyle/>
+          <a:p>
+            <a:pPr algn="ctr">
+              <a:defRPr sz="1200" b="0">
+                <a:solidFill>
+                  <a:srgbClr val="333333"/>
+                </a:solidFill>
+                <a:latin typeface="Calibri"/>
+              </a:defRPr>
+            </a:pPr>
+            <a:r>
+              <a:t>5</a:t>
+            </a:r>
+          </a:p>
+        </p:txBody>
+      </p:sp>
+      <p:sp>
+        <p:nvSpPr>
+          <p:cNvPr id="43" name="Rectangle 42"/>
+          <p:cNvSpPr/>
+          <p:nvPr/>
+        </p:nvSpPr>
+        <p:spPr>
+          <a:xfrm>
+            <a:off x="6400800" y="3182112"/>
+            <a:ext cx="1280160" cy="384048"/>
+          </a:xfrm>
+          <a:prstGeom prst="rect">
+            <a:avLst/>
+          </a:prstGeom>
+          <a:solidFill>
+            <a:srgbClr val="FFFFFF"/>
+          </a:solidFill>
+          <a:ln>
+            <a:noFill/>
+          </a:ln>
+        </p:spPr>
+        <p:style>
+          <a:lnRef idx="1">
+            <a:schemeClr val="accent1"/>
+          </a:lnRef>
+          <a:fillRef idx="3">
+            <a:schemeClr val="accent1"/>
+          </a:fillRef>
+          <a:effectRef idx="2">
+            <a:schemeClr val="accent1"/>
+          </a:effectRef>
+          <a:fontRef idx="minor">
+            <a:schemeClr val="lt1"/>
+          </a:fontRef>
+        </p:style>
+        <p:txBody>
+          <a:bodyPr rtlCol="0" anchor="ctr"/>
+          <a:lstStyle/>
+          <a:p>
+            <a:pPr algn="ctr"/>
+            <a:endParaRPr/>
+          </a:p>
+        </p:txBody>
+      </p:sp>
+      <p:sp>
+        <p:nvSpPr>
+          <p:cNvPr id="44" name="TextBox 43"/>
+          <p:cNvSpPr txBox="1"/>
+          <p:nvPr/>
+        </p:nvSpPr>
+        <p:spPr>
+          <a:xfrm>
+            <a:off x="6492240" y="3200400"/>
+            <a:ext cx="1097280" cy="347472"/>
+          </a:xfrm>
+          <a:prstGeom prst="rect">
+            <a:avLst/>
+          </a:prstGeom>
+          <a:noFill/>
+        </p:spPr>
+        <p:txBody>
+          <a:bodyPr wrap="square">
+            <a:spAutoFit/>
+          </a:bodyPr>
+          <a:lstStyle/>
+          <a:p>
+            <a:pPr algn="ctr">
+              <a:defRPr sz="1200" b="0">
+                <a:solidFill>
+                  <a:srgbClr val="333333"/>
+                </a:solidFill>
+                <a:latin typeface="Calibri"/>
+              </a:defRPr>
+            </a:pPr>
+            <a:r>
+              <a:t>2</a:t>
+            </a:r>
+          </a:p>
+        </p:txBody>
+      </p:sp>
+      <p:sp>
+        <p:nvSpPr>
+          <p:cNvPr id="45" name="Rectangle 44"/>
+          <p:cNvSpPr/>
+          <p:nvPr/>
+        </p:nvSpPr>
+        <p:spPr>
+          <a:xfrm>
+            <a:off x="548640" y="3566160"/>
+            <a:ext cx="3474720" cy="384048"/>
+          </a:xfrm>
+          <a:prstGeom prst="rect">
+            <a:avLst/>
+          </a:prstGeom>
+          <a:solidFill>
+            <a:srgbClr val="F2F2F2"/>
+          </a:solidFill>
+          <a:ln>
+            <a:noFill/>
+          </a:ln>
+        </p:spPr>
+        <p:style>
+          <a:lnRef idx="1">
+            <a:schemeClr val="accent1"/>
+          </a:lnRef>
+          <a:fillRef idx="3">
+            <a:schemeClr val="accent1"/>
+          </a:fillRef>
+          <a:effectRef idx="2">
+            <a:schemeClr val="accent1"/>
+          </a:effectRef>
+          <a:fontRef idx="minor">
+            <a:schemeClr val="lt1"/>
+          </a:fontRef>
+        </p:style>
+        <p:txBody>
+          <a:bodyPr rtlCol="0" anchor="ctr"/>
+          <a:lstStyle/>
+          <a:p>
+            <a:pPr algn="ctr"/>
+            <a:endParaRPr/>
+          </a:p>
+        </p:txBody>
+      </p:sp>
+      <p:sp>
+        <p:nvSpPr>
+          <p:cNvPr id="46" name="TextBox 45"/>
+          <p:cNvSpPr txBox="1"/>
+          <p:nvPr/>
+        </p:nvSpPr>
+        <p:spPr>
+          <a:xfrm>
+            <a:off x="640080" y="3584448"/>
+            <a:ext cx="3291840" cy="347472"/>
+          </a:xfrm>
+          <a:prstGeom prst="rect">
+            <a:avLst/>
+          </a:prstGeom>
+          <a:noFill/>
+        </p:spPr>
+        <p:txBody>
+          <a:bodyPr wrap="square">
+            <a:spAutoFit/>
+          </a:bodyPr>
+          <a:lstStyle/>
+          <a:p>
+            <a:pPr algn="l">
+              <a:defRPr sz="1200" b="0">
+                <a:solidFill>
+                  <a:srgbClr val="333333"/>
+                </a:solidFill>
+                <a:latin typeface="Calibri"/>
+              </a:defRPr>
+            </a:pPr>
+            <a:r>
+              <a:t>Rewards &amp; Redemption (5)</a:t>
+            </a:r>
+          </a:p>
+        </p:txBody>
+      </p:sp>
+      <p:sp>
+        <p:nvSpPr>
+          <p:cNvPr id="47" name="Rectangle 46"/>
+          <p:cNvSpPr/>
+          <p:nvPr/>
+        </p:nvSpPr>
+        <p:spPr>
+          <a:xfrm>
+            <a:off x="4023360" y="3566160"/>
+            <a:ext cx="1097280" cy="384048"/>
+          </a:xfrm>
+          <a:prstGeom prst="rect">
+            <a:avLst/>
+          </a:prstGeom>
+          <a:solidFill>
+            <a:srgbClr val="E8F5E9"/>
+          </a:solidFill>
+          <a:ln>
+            <a:noFill/>
+          </a:ln>
+        </p:spPr>
+        <p:style>
+          <a:lnRef idx="1">
+            <a:schemeClr val="accent1"/>
+          </a:lnRef>
+          <a:fillRef idx="3">
+            <a:schemeClr val="accent1"/>
+          </a:fillRef>
+          <a:effectRef idx="2">
+            <a:schemeClr val="accent1"/>
+          </a:effectRef>
+          <a:fontRef idx="minor">
+            <a:schemeClr val="lt1"/>
+          </a:fontRef>
+        </p:style>
+        <p:txBody>
+          <a:bodyPr rtlCol="0" anchor="ctr"/>
+          <a:lstStyle/>
+          <a:p>
+            <a:pPr algn="ctr"/>
+            <a:endParaRPr/>
+          </a:p>
+        </p:txBody>
+      </p:sp>
+      <p:sp>
+        <p:nvSpPr>
+          <p:cNvPr id="48" name="TextBox 47"/>
+          <p:cNvSpPr txBox="1"/>
+          <p:nvPr/>
+        </p:nvSpPr>
+        <p:spPr>
+          <a:xfrm>
+            <a:off x="4114800" y="3584448"/>
+            <a:ext cx="914400" cy="347472"/>
+          </a:xfrm>
+          <a:prstGeom prst="rect">
+            <a:avLst/>
+          </a:prstGeom>
+          <a:noFill/>
+        </p:spPr>
+        <p:txBody>
+          <a:bodyPr wrap="square">
+            <a:spAutoFit/>
+          </a:bodyPr>
+          <a:lstStyle/>
+          <a:p>
+            <a:pPr algn="ctr">
+              <a:defRPr sz="1300" b="1">
+                <a:solidFill>
+                  <a:srgbClr val="1B7A43"/>
+                </a:solidFill>
+                <a:latin typeface="Calibri"/>
+              </a:defRPr>
+            </a:pPr>
+            <a:r>
+              <a:t>5</a:t>
+            </a:r>
+          </a:p>
+        </p:txBody>
+      </p:sp>
+      <p:sp>
+        <p:nvSpPr>
+          <p:cNvPr id="49" name="Rectangle 48"/>
+          <p:cNvSpPr/>
+          <p:nvPr/>
+        </p:nvSpPr>
+        <p:spPr>
+          <a:xfrm>
+            <a:off x="5120640" y="3566160"/>
+            <a:ext cx="1280160" cy="384048"/>
+          </a:xfrm>
+          <a:prstGeom prst="rect">
+            <a:avLst/>
+          </a:prstGeom>
+          <a:solidFill>
+            <a:srgbClr val="F2F2F2"/>
+          </a:solidFill>
+          <a:ln>
+            <a:noFill/>
+          </a:ln>
+        </p:spPr>
+        <p:style>
+          <a:lnRef idx="1">
+            <a:schemeClr val="accent1"/>
+          </a:lnRef>
+          <a:fillRef idx="3">
+            <a:schemeClr val="accent1"/>
+          </a:fillRef>
+          <a:effectRef idx="2">
+            <a:schemeClr val="accent1"/>
+          </a:effectRef>
+          <a:fontRef idx="minor">
+            <a:schemeClr val="lt1"/>
+          </a:fontRef>
+        </p:style>
+        <p:txBody>
+          <a:bodyPr rtlCol="0" anchor="ctr"/>
+          <a:lstStyle/>
+          <a:p>
+            <a:pPr algn="ctr"/>
+            <a:endParaRPr/>
+          </a:p>
+        </p:txBody>
+      </p:sp>
+      <p:sp>
+        <p:nvSpPr>
+          <p:cNvPr id="50" name="TextBox 49"/>
+          <p:cNvSpPr txBox="1"/>
+          <p:nvPr/>
+        </p:nvSpPr>
+        <p:spPr>
+          <a:xfrm>
+            <a:off x="5212080" y="3584448"/>
+            <a:ext cx="1097280" cy="347472"/>
+          </a:xfrm>
+          <a:prstGeom prst="rect">
+            <a:avLst/>
+          </a:prstGeom>
+          <a:noFill/>
+        </p:spPr>
+        <p:txBody>
+          <a:bodyPr wrap="square">
+            <a:spAutoFit/>
+          </a:bodyPr>
+          <a:lstStyle/>
+          <a:p>
+            <a:pPr algn="ctr">
+              <a:defRPr sz="1200" b="0">
+                <a:solidFill>
+                  <a:srgbClr val="333333"/>
+                </a:solidFill>
+                <a:latin typeface="Calibri"/>
+              </a:defRPr>
+            </a:pPr>
+            <a:r>
+              <a:t>4</a:t>
+            </a:r>
+          </a:p>
+        </p:txBody>
+      </p:sp>
+      <p:sp>
+        <p:nvSpPr>
+          <p:cNvPr id="51" name="Rectangle 50"/>
+          <p:cNvSpPr/>
+          <p:nvPr/>
+        </p:nvSpPr>
+        <p:spPr>
+          <a:xfrm>
+            <a:off x="6400800" y="3566160"/>
+            <a:ext cx="1280160" cy="384048"/>
+          </a:xfrm>
+          <a:prstGeom prst="rect">
+            <a:avLst/>
+          </a:prstGeom>
+          <a:solidFill>
+            <a:srgbClr val="F2F2F2"/>
+          </a:solidFill>
+          <a:ln>
+            <a:noFill/>
+          </a:ln>
+        </p:spPr>
+        <p:style>
+          <a:lnRef idx="1">
+            <a:schemeClr val="accent1"/>
+          </a:lnRef>
+          <a:fillRef idx="3">
+            <a:schemeClr val="accent1"/>
+          </a:fillRef>
+          <a:effectRef idx="2">
+            <a:schemeClr val="accent1"/>
+          </a:effectRef>
+          <a:fontRef idx="minor">
+            <a:schemeClr val="lt1"/>
+          </a:fontRef>
+        </p:style>
+        <p:txBody>
+          <a:bodyPr rtlCol="0" anchor="ctr"/>
+          <a:lstStyle/>
+          <a:p>
+            <a:pPr algn="ctr"/>
+            <a:endParaRPr/>
+          </a:p>
+        </p:txBody>
+      </p:sp>
+      <p:sp>
+        <p:nvSpPr>
+          <p:cNvPr id="52" name="TextBox 51"/>
+          <p:cNvSpPr txBox="1"/>
+          <p:nvPr/>
+        </p:nvSpPr>
+        <p:spPr>
+          <a:xfrm>
+            <a:off x="6492240" y="3584448"/>
+            <a:ext cx="1097280" cy="347472"/>
+          </a:xfrm>
+          <a:prstGeom prst="rect">
+            <a:avLst/>
+          </a:prstGeom>
+          <a:noFill/>
+        </p:spPr>
+        <p:txBody>
+          <a:bodyPr wrap="square">
+            <a:spAutoFit/>
+          </a:bodyPr>
+          <a:lstStyle/>
+          <a:p>
+            <a:pPr algn="ctr">
+              <a:defRPr sz="1200" b="0">
+                <a:solidFill>
+                  <a:srgbClr val="333333"/>
+                </a:solidFill>
+                <a:latin typeface="Calibri"/>
+              </a:defRPr>
+            </a:pPr>
+            <a:r>
+              <a:t>4</a:t>
+            </a:r>
+          </a:p>
+        </p:txBody>
+      </p:sp>
+      <p:sp>
+        <p:nvSpPr>
+          <p:cNvPr id="53" name="Rectangle 52"/>
+          <p:cNvSpPr/>
+          <p:nvPr/>
+        </p:nvSpPr>
+        <p:spPr>
+          <a:xfrm>
+            <a:off x="548640" y="3950208"/>
+            <a:ext cx="3474720" cy="384048"/>
+          </a:xfrm>
+          <a:prstGeom prst="rect">
+            <a:avLst/>
+          </a:prstGeom>
+          <a:solidFill>
+            <a:srgbClr val="FFFFFF"/>
+          </a:solidFill>
+          <a:ln>
+            <a:noFill/>
+          </a:ln>
+        </p:spPr>
+        <p:style>
+          <a:lnRef idx="1">
+            <a:schemeClr val="accent1"/>
+          </a:lnRef>
+          <a:fillRef idx="3">
+            <a:schemeClr val="accent1"/>
+          </a:fillRef>
+          <a:effectRef idx="2">
+            <a:schemeClr val="accent1"/>
+          </a:effectRef>
+          <a:fontRef idx="minor">
+            <a:schemeClr val="lt1"/>
+          </a:fontRef>
+        </p:style>
+        <p:txBody>
+          <a:bodyPr rtlCol="0" anchor="ctr"/>
+          <a:lstStyle/>
+          <a:p>
+            <a:pPr algn="ctr"/>
+            <a:endParaRPr/>
+          </a:p>
+        </p:txBody>
+      </p:sp>
+      <p:sp>
+        <p:nvSpPr>
+          <p:cNvPr id="54" name="TextBox 53"/>
+          <p:cNvSpPr txBox="1"/>
+          <p:nvPr/>
+        </p:nvSpPr>
+        <p:spPr>
+          <a:xfrm>
+            <a:off x="640080" y="3968496"/>
+            <a:ext cx="3291840" cy="347472"/>
+          </a:xfrm>
+          <a:prstGeom prst="rect">
+            <a:avLst/>
+          </a:prstGeom>
+          <a:noFill/>
+        </p:spPr>
+        <p:txBody>
+          <a:bodyPr wrap="square">
+            <a:spAutoFit/>
+          </a:bodyPr>
+          <a:lstStyle/>
+          <a:p>
+            <a:pPr algn="l">
+              <a:defRPr sz="1200" b="0">
+                <a:solidFill>
+                  <a:srgbClr val="333333"/>
+                </a:solidFill>
+                <a:latin typeface="Calibri"/>
+              </a:defRPr>
+            </a:pPr>
+            <a:r>
+              <a:t>Analytics, AI &amp; Reporting (4)</a:t>
+            </a:r>
+          </a:p>
+        </p:txBody>
+      </p:sp>
+      <p:sp>
+        <p:nvSpPr>
+          <p:cNvPr id="55" name="Rectangle 54"/>
+          <p:cNvSpPr/>
+          <p:nvPr/>
+        </p:nvSpPr>
+        <p:spPr>
+          <a:xfrm>
+            <a:off x="4023360" y="3950208"/>
+            <a:ext cx="1097280" cy="384048"/>
+          </a:xfrm>
+          <a:prstGeom prst="rect">
+            <a:avLst/>
+          </a:prstGeom>
+          <a:solidFill>
+            <a:srgbClr val="E8F5E9"/>
+          </a:solidFill>
+          <a:ln>
+            <a:noFill/>
+          </a:ln>
+        </p:spPr>
+        <p:style>
+          <a:lnRef idx="1">
+            <a:schemeClr val="accent1"/>
+          </a:lnRef>
+          <a:fillRef idx="3">
+            <a:schemeClr val="accent1"/>
+          </a:fillRef>
+          <a:effectRef idx="2">
+            <a:schemeClr val="accent1"/>
+          </a:effectRef>
+          <a:fontRef idx="minor">
+            <a:schemeClr val="lt1"/>
+          </a:fontRef>
+        </p:style>
+        <p:txBody>
+          <a:bodyPr rtlCol="0" anchor="ctr"/>
+          <a:lstStyle/>
+          <a:p>
+            <a:pPr algn="ctr"/>
+            <a:endParaRPr/>
+          </a:p>
+        </p:txBody>
+      </p:sp>
+      <p:sp>
+        <p:nvSpPr>
+          <p:cNvPr id="56" name="TextBox 55"/>
+          <p:cNvSpPr txBox="1"/>
+          <p:nvPr/>
+        </p:nvSpPr>
+        <p:spPr>
+          <a:xfrm>
+            <a:off x="4114800" y="3968496"/>
+            <a:ext cx="914400" cy="347472"/>
+          </a:xfrm>
+          <a:prstGeom prst="rect">
+            <a:avLst/>
+          </a:prstGeom>
+          <a:noFill/>
+        </p:spPr>
+        <p:txBody>
+          <a:bodyPr wrap="square">
+            <a:spAutoFit/>
+          </a:bodyPr>
+          <a:lstStyle/>
+          <a:p>
+            <a:pPr algn="ctr">
+              <a:defRPr sz="1300" b="1">
+                <a:solidFill>
+                  <a:srgbClr val="1B7A43"/>
+                </a:solidFill>
+                <a:latin typeface="Calibri"/>
+              </a:defRPr>
+            </a:pPr>
+            <a:r>
+              <a:t>4</a:t>
+            </a:r>
+          </a:p>
+        </p:txBody>
+      </p:sp>
+      <p:sp>
+        <p:nvSpPr>
+          <p:cNvPr id="57" name="Rectangle 56"/>
+          <p:cNvSpPr/>
+          <p:nvPr/>
+        </p:nvSpPr>
+        <p:spPr>
+          <a:xfrm>
+            <a:off x="5120640" y="3950208"/>
+            <a:ext cx="1280160" cy="384048"/>
+          </a:xfrm>
+          <a:prstGeom prst="rect">
+            <a:avLst/>
+          </a:prstGeom>
+          <a:solidFill>
+            <a:srgbClr val="FFFFFF"/>
+          </a:solidFill>
+          <a:ln>
+            <a:noFill/>
+          </a:ln>
+        </p:spPr>
+        <p:style>
+          <a:lnRef idx="1">
+            <a:schemeClr val="accent1"/>
+          </a:lnRef>
+          <a:fillRef idx="3">
+            <a:schemeClr val="accent1"/>
+          </a:fillRef>
+          <a:effectRef idx="2">
+            <a:schemeClr val="accent1"/>
+          </a:effectRef>
+          <a:fontRef idx="minor">
+            <a:schemeClr val="lt1"/>
+          </a:fontRef>
+        </p:style>
+        <p:txBody>
+          <a:bodyPr rtlCol="0" anchor="ctr"/>
+          <a:lstStyle/>
+          <a:p>
+            <a:pPr algn="ctr"/>
+            <a:endParaRPr/>
+          </a:p>
+        </p:txBody>
+      </p:sp>
+      <p:sp>
+        <p:nvSpPr>
+          <p:cNvPr id="58" name="TextBox 57"/>
+          <p:cNvSpPr txBox="1"/>
+          <p:nvPr/>
+        </p:nvSpPr>
+        <p:spPr>
+          <a:xfrm>
+            <a:off x="5212080" y="3968496"/>
+            <a:ext cx="1097280" cy="347472"/>
+          </a:xfrm>
+          <a:prstGeom prst="rect">
+            <a:avLst/>
+          </a:prstGeom>
+          <a:noFill/>
+        </p:spPr>
+        <p:txBody>
+          <a:bodyPr wrap="square">
+            <a:spAutoFit/>
+          </a:bodyPr>
+          <a:lstStyle/>
+          <a:p>
+            <a:pPr algn="ctr">
+              <a:defRPr sz="1200" b="0">
+                <a:solidFill>
+                  <a:srgbClr val="333333"/>
+                </a:solidFill>
+                <a:latin typeface="Calibri"/>
+              </a:defRPr>
+            </a:pPr>
+            <a:r>
+              <a:t>2</a:t>
+            </a:r>
+          </a:p>
+        </p:txBody>
+      </p:sp>
+      <p:sp>
+        <p:nvSpPr>
+          <p:cNvPr id="59" name="Rectangle 58"/>
+          <p:cNvSpPr/>
+          <p:nvPr/>
+        </p:nvSpPr>
+        <p:spPr>
+          <a:xfrm>
+            <a:off x="6400800" y="3950208"/>
+            <a:ext cx="1280160" cy="384048"/>
+          </a:xfrm>
+          <a:prstGeom prst="rect">
+            <a:avLst/>
+          </a:prstGeom>
+          <a:solidFill>
+            <a:srgbClr val="FFFFFF"/>
+          </a:solidFill>
+          <a:ln>
+            <a:noFill/>
+          </a:ln>
+        </p:spPr>
+        <p:style>
+          <a:lnRef idx="1">
+            <a:schemeClr val="accent1"/>
+          </a:lnRef>
+          <a:fillRef idx="3">
+            <a:schemeClr val="accent1"/>
+          </a:fillRef>
+          <a:effectRef idx="2">
+            <a:schemeClr val="accent1"/>
+          </a:effectRef>
+          <a:fontRef idx="minor">
+            <a:schemeClr val="lt1"/>
+          </a:fontRef>
+        </p:style>
+        <p:txBody>
+          <a:bodyPr rtlCol="0" anchor="ctr"/>
+          <a:lstStyle/>
+          <a:p>
+            <a:pPr algn="ctr"/>
+            <a:endParaRPr/>
+          </a:p>
+        </p:txBody>
+      </p:sp>
+      <p:sp>
+        <p:nvSpPr>
+          <p:cNvPr id="60" name="TextBox 59"/>
+          <p:cNvSpPr txBox="1"/>
+          <p:nvPr/>
+        </p:nvSpPr>
+        <p:spPr>
+          <a:xfrm>
+            <a:off x="6492240" y="3968496"/>
+            <a:ext cx="1097280" cy="347472"/>
+          </a:xfrm>
+          <a:prstGeom prst="rect">
+            <a:avLst/>
+          </a:prstGeom>
+          <a:noFill/>
+        </p:spPr>
+        <p:txBody>
+          <a:bodyPr wrap="square">
+            <a:spAutoFit/>
+          </a:bodyPr>
+          <a:lstStyle/>
+          <a:p>
+            <a:pPr algn="ctr">
+              <a:defRPr sz="1200" b="0">
+                <a:solidFill>
+                  <a:srgbClr val="333333"/>
+                </a:solidFill>
+                <a:latin typeface="Calibri"/>
+              </a:defRPr>
+            </a:pPr>
+            <a:r>
+              <a:t>2</a:t>
+            </a:r>
+          </a:p>
+        </p:txBody>
+      </p:sp>
+      <p:sp>
+        <p:nvSpPr>
+          <p:cNvPr id="61" name="Rectangle 60"/>
+          <p:cNvSpPr/>
+          <p:nvPr/>
+        </p:nvSpPr>
+        <p:spPr>
+          <a:xfrm>
+            <a:off x="548640" y="4334256"/>
+            <a:ext cx="3474720" cy="384048"/>
+          </a:xfrm>
+          <a:prstGeom prst="rect">
+            <a:avLst/>
+          </a:prstGeom>
+          <a:solidFill>
+            <a:srgbClr val="F2F2F2"/>
+          </a:solidFill>
+          <a:ln>
+            <a:noFill/>
+          </a:ln>
+        </p:spPr>
+        <p:style>
+          <a:lnRef idx="1">
+            <a:schemeClr val="accent1"/>
+          </a:lnRef>
+          <a:fillRef idx="3">
+            <a:schemeClr val="accent1"/>
+          </a:fillRef>
+          <a:effectRef idx="2">
+            <a:schemeClr val="accent1"/>
+          </a:effectRef>
+          <a:fontRef idx="minor">
+            <a:schemeClr val="lt1"/>
+          </a:fontRef>
+        </p:style>
+        <p:txBody>
+          <a:bodyPr rtlCol="0" anchor="ctr"/>
+          <a:lstStyle/>
+          <a:p>
+            <a:pPr algn="ctr"/>
+            <a:endParaRPr/>
+          </a:p>
+        </p:txBody>
+      </p:sp>
+      <p:sp>
+        <p:nvSpPr>
+          <p:cNvPr id="62" name="TextBox 61"/>
+          <p:cNvSpPr txBox="1"/>
+          <p:nvPr/>
+        </p:nvSpPr>
+        <p:spPr>
+          <a:xfrm>
+            <a:off x="640080" y="4352544"/>
+            <a:ext cx="3291840" cy="347472"/>
+          </a:xfrm>
+          <a:prstGeom prst="rect">
+            <a:avLst/>
+          </a:prstGeom>
+          <a:noFill/>
+        </p:spPr>
+        <p:txBody>
+          <a:bodyPr wrap="square">
+            <a:spAutoFit/>
+          </a:bodyPr>
+          <a:lstStyle/>
+          <a:p>
+            <a:pPr algn="l">
+              <a:defRPr sz="1200" b="0">
+                <a:solidFill>
+                  <a:srgbClr val="333333"/>
+                </a:solidFill>
+                <a:latin typeface="Calibri"/>
+              </a:defRPr>
+            </a:pPr>
+            <a:r>
+              <a:t>Technical &amp; Infrastructure (8)</a:t>
+            </a:r>
+          </a:p>
+        </p:txBody>
+      </p:sp>
+      <p:sp>
+        <p:nvSpPr>
+          <p:cNvPr id="63" name="Rectangle 62"/>
+          <p:cNvSpPr/>
+          <p:nvPr/>
+        </p:nvSpPr>
+        <p:spPr>
+          <a:xfrm>
+            <a:off x="4023360" y="4334256"/>
+            <a:ext cx="1097280" cy="384048"/>
+          </a:xfrm>
+          <a:prstGeom prst="rect">
+            <a:avLst/>
+          </a:prstGeom>
+          <a:solidFill>
+            <a:srgbClr val="E8F5E9"/>
+          </a:solidFill>
+          <a:ln>
+            <a:noFill/>
+          </a:ln>
+        </p:spPr>
+        <p:style>
+          <a:lnRef idx="1">
+            <a:schemeClr val="accent1"/>
+          </a:lnRef>
+          <a:fillRef idx="3">
+            <a:schemeClr val="accent1"/>
+          </a:fillRef>
+          <a:effectRef idx="2">
+            <a:schemeClr val="accent1"/>
+          </a:effectRef>
+          <a:fontRef idx="minor">
+            <a:schemeClr val="lt1"/>
+          </a:fontRef>
+        </p:style>
+        <p:txBody>
+          <a:bodyPr rtlCol="0" anchor="ctr"/>
+          <a:lstStyle/>
+          <a:p>
+            <a:pPr algn="ctr"/>
+            <a:endParaRPr/>
+          </a:p>
+        </p:txBody>
+      </p:sp>
+      <p:sp>
+        <p:nvSpPr>
+          <p:cNvPr id="64" name="TextBox 63"/>
+          <p:cNvSpPr txBox="1"/>
+          <p:nvPr/>
+        </p:nvSpPr>
+        <p:spPr>
+          <a:xfrm>
+            <a:off x="4114800" y="4352544"/>
+            <a:ext cx="914400" cy="347472"/>
+          </a:xfrm>
+          <a:prstGeom prst="rect">
+            <a:avLst/>
+          </a:prstGeom>
+          <a:noFill/>
+        </p:spPr>
+        <p:txBody>
+          <a:bodyPr wrap="square">
+            <a:spAutoFit/>
+          </a:bodyPr>
+          <a:lstStyle/>
+          <a:p>
+            <a:pPr algn="ctr">
+              <a:defRPr sz="1300" b="1">
+                <a:solidFill>
+                  <a:srgbClr val="1B7A43"/>
+                </a:solidFill>
+                <a:latin typeface="Calibri"/>
+              </a:defRPr>
+            </a:pPr>
+            <a:r>
+              <a:t>8</a:t>
+            </a:r>
+          </a:p>
+        </p:txBody>
+      </p:sp>
+      <p:sp>
+        <p:nvSpPr>
+          <p:cNvPr id="65" name="Rectangle 64"/>
+          <p:cNvSpPr/>
+          <p:nvPr/>
+        </p:nvSpPr>
+        <p:spPr>
+          <a:xfrm>
+            <a:off x="5120640" y="4334256"/>
+            <a:ext cx="1280160" cy="384048"/>
+          </a:xfrm>
+          <a:prstGeom prst="rect">
+            <a:avLst/>
+          </a:prstGeom>
+          <a:solidFill>
+            <a:srgbClr val="F2F2F2"/>
+          </a:solidFill>
+          <a:ln>
+            <a:noFill/>
+          </a:ln>
+        </p:spPr>
+        <p:style>
+          <a:lnRef idx="1">
+            <a:schemeClr val="accent1"/>
+          </a:lnRef>
+          <a:fillRef idx="3">
+            <a:schemeClr val="accent1"/>
+          </a:fillRef>
+          <a:effectRef idx="2">
+            <a:schemeClr val="accent1"/>
+          </a:effectRef>
+          <a:fontRef idx="minor">
+            <a:schemeClr val="lt1"/>
+          </a:fontRef>
+        </p:style>
+        <p:txBody>
+          <a:bodyPr rtlCol="0" anchor="ctr"/>
+          <a:lstStyle/>
+          <a:p>
+            <a:pPr algn="ctr"/>
+            <a:endParaRPr/>
+          </a:p>
+        </p:txBody>
+      </p:sp>
+      <p:sp>
+        <p:nvSpPr>
+          <p:cNvPr id="66" name="TextBox 65"/>
+          <p:cNvSpPr txBox="1"/>
+          <p:nvPr/>
+        </p:nvSpPr>
+        <p:spPr>
+          <a:xfrm>
+            <a:off x="5212080" y="4352544"/>
+            <a:ext cx="1097280" cy="347472"/>
+          </a:xfrm>
+          <a:prstGeom prst="rect">
+            <a:avLst/>
+          </a:prstGeom>
+          <a:noFill/>
+        </p:spPr>
+        <p:txBody>
+          <a:bodyPr wrap="square">
+            <a:spAutoFit/>
+          </a:bodyPr>
+          <a:lstStyle/>
+          <a:p>
+            <a:pPr algn="ctr">
+              <a:defRPr sz="1200" b="0">
+                <a:solidFill>
+                  <a:srgbClr val="333333"/>
+                </a:solidFill>
+                <a:latin typeface="Calibri"/>
+              </a:defRPr>
+            </a:pPr>
+            <a:r>
+              <a:t>2</a:t>
+            </a:r>
+          </a:p>
+        </p:txBody>
+      </p:sp>
+      <p:sp>
+        <p:nvSpPr>
+          <p:cNvPr id="67" name="Rectangle 66"/>
+          <p:cNvSpPr/>
+          <p:nvPr/>
+        </p:nvSpPr>
+        <p:spPr>
+          <a:xfrm>
+            <a:off x="6400800" y="4334256"/>
+            <a:ext cx="1280160" cy="384048"/>
+          </a:xfrm>
+          <a:prstGeom prst="rect">
+            <a:avLst/>
+          </a:prstGeom>
+          <a:solidFill>
+            <a:srgbClr val="F2F2F2"/>
+          </a:solidFill>
+          <a:ln>
+            <a:noFill/>
+          </a:ln>
+        </p:spPr>
+        <p:style>
+          <a:lnRef idx="1">
+            <a:schemeClr val="accent1"/>
+          </a:lnRef>
+          <a:fillRef idx="3">
+            <a:schemeClr val="accent1"/>
+          </a:fillRef>
+          <a:effectRef idx="2">
+            <a:schemeClr val="accent1"/>
+          </a:effectRef>
+          <a:fontRef idx="minor">
+            <a:schemeClr val="lt1"/>
+          </a:fontRef>
+        </p:style>
+        <p:txBody>
+          <a:bodyPr rtlCol="0" anchor="ctr"/>
+          <a:lstStyle/>
+          <a:p>
+            <a:pPr algn="ctr"/>
+            <a:endParaRPr/>
+          </a:p>
+        </p:txBody>
+      </p:sp>
+      <p:sp>
+        <p:nvSpPr>
+          <p:cNvPr id="68" name="TextBox 67"/>
+          <p:cNvSpPr txBox="1"/>
+          <p:nvPr/>
+        </p:nvSpPr>
+        <p:spPr>
+          <a:xfrm>
+            <a:off x="6492240" y="4352544"/>
+            <a:ext cx="1097280" cy="347472"/>
+          </a:xfrm>
+          <a:prstGeom prst="rect">
+            <a:avLst/>
+          </a:prstGeom>
+          <a:noFill/>
+        </p:spPr>
+        <p:txBody>
+          <a:bodyPr wrap="square">
+            <a:spAutoFit/>
+          </a:bodyPr>
+          <a:lstStyle/>
+          <a:p>
+            <a:pPr algn="ctr">
+              <a:defRPr sz="1200" b="0">
+                <a:solidFill>
+                  <a:srgbClr val="333333"/>
+                </a:solidFill>
+                <a:latin typeface="Calibri"/>
+              </a:defRPr>
+            </a:pPr>
+            <a:r>
+              <a:t>2</a:t>
+            </a:r>
+          </a:p>
+        </p:txBody>
+      </p:sp>
+      <p:sp>
+        <p:nvSpPr>
+          <p:cNvPr id="69" name="Rectangle 68"/>
+          <p:cNvSpPr/>
+          <p:nvPr/>
+        </p:nvSpPr>
+        <p:spPr>
+          <a:xfrm>
+            <a:off x="548640" y="4718304"/>
+            <a:ext cx="3474720" cy="384048"/>
+          </a:xfrm>
+          <a:prstGeom prst="rect">
+            <a:avLst/>
+          </a:prstGeom>
+          <a:solidFill>
+            <a:srgbClr val="1B2A4A"/>
+          </a:solidFill>
+          <a:ln>
+            <a:noFill/>
+          </a:ln>
+        </p:spPr>
+        <p:style>
+          <a:lnRef idx="1">
+            <a:schemeClr val="accent1"/>
+          </a:lnRef>
+          <a:fillRef idx="3">
+            <a:schemeClr val="accent1"/>
+          </a:fillRef>
+          <a:effectRef idx="2">
+            <a:schemeClr val="accent1"/>
+          </a:effectRef>
+          <a:fontRef idx="minor">
+            <a:schemeClr val="lt1"/>
+          </a:fontRef>
+        </p:style>
+        <p:txBody>
+          <a:bodyPr rtlCol="0" anchor="ctr"/>
+          <a:lstStyle/>
+          <a:p>
+            <a:pPr algn="ctr"/>
+            <a:endParaRPr/>
+          </a:p>
+        </p:txBody>
+      </p:sp>
+      <p:sp>
+        <p:nvSpPr>
+          <p:cNvPr id="70" name="TextBox 69"/>
+          <p:cNvSpPr txBox="1"/>
+          <p:nvPr/>
+        </p:nvSpPr>
+        <p:spPr>
+          <a:xfrm>
+            <a:off x="640080" y="4736592"/>
+            <a:ext cx="3291840" cy="347472"/>
+          </a:xfrm>
+          <a:prstGeom prst="rect">
+            <a:avLst/>
+          </a:prstGeom>
+          <a:noFill/>
+        </p:spPr>
+        <p:txBody>
+          <a:bodyPr wrap="square">
+            <a:spAutoFit/>
+          </a:bodyPr>
+          <a:lstStyle/>
+          <a:p>
+            <a:pPr algn="l">
+              <a:defRPr sz="1200" b="1">
+                <a:solidFill>
+                  <a:srgbClr val="FFFFFF"/>
+                </a:solidFill>
+                <a:latin typeface="Calibri"/>
+              </a:defRPr>
+            </a:pPr>
+            <a:r>
+              <a:t>TOTAL</a:t>
+            </a:r>
+          </a:p>
+        </p:txBody>
+      </p:sp>
+      <p:sp>
+        <p:nvSpPr>
+          <p:cNvPr id="71" name="Rectangle 70"/>
+          <p:cNvSpPr/>
+          <p:nvPr/>
+        </p:nvSpPr>
+        <p:spPr>
+          <a:xfrm>
+            <a:off x="4023360" y="4718304"/>
+            <a:ext cx="1097280" cy="384048"/>
+          </a:xfrm>
+          <a:prstGeom prst="rect">
+            <a:avLst/>
+          </a:prstGeom>
+          <a:solidFill>
+            <a:srgbClr val="1B7A43"/>
+          </a:solidFill>
+          <a:ln>
+            <a:noFill/>
+          </a:ln>
+        </p:spPr>
+        <p:style>
+          <a:lnRef idx="1">
+            <a:schemeClr val="accent1"/>
+          </a:lnRef>
+          <a:fillRef idx="3">
+            <a:schemeClr val="accent1"/>
+          </a:fillRef>
+          <a:effectRef idx="2">
+            <a:schemeClr val="accent1"/>
+          </a:effectRef>
+          <a:fontRef idx="minor">
+            <a:schemeClr val="lt1"/>
+          </a:fontRef>
+        </p:style>
+        <p:txBody>
+          <a:bodyPr rtlCol="0" anchor="ctr"/>
+          <a:lstStyle/>
+          <a:p>
+            <a:pPr algn="ctr"/>
+            <a:endParaRPr/>
+          </a:p>
+        </p:txBody>
+      </p:sp>
+      <p:sp>
+        <p:nvSpPr>
+          <p:cNvPr id="72" name="TextBox 71"/>
+          <p:cNvSpPr txBox="1"/>
+          <p:nvPr/>
+        </p:nvSpPr>
+        <p:spPr>
+          <a:xfrm>
+            <a:off x="4114800" y="4736592"/>
+            <a:ext cx="914400" cy="347472"/>
+          </a:xfrm>
+          <a:prstGeom prst="rect">
+            <a:avLst/>
+          </a:prstGeom>
+          <a:noFill/>
+        </p:spPr>
+        <p:txBody>
+          <a:bodyPr wrap="square">
+            <a:spAutoFit/>
+          </a:bodyPr>
+          <a:lstStyle/>
+          <a:p>
+            <a:pPr algn="ctr">
+              <a:defRPr sz="1300" b="1">
+                <a:solidFill>
+                  <a:srgbClr val="FFFFFF"/>
+                </a:solidFill>
+                <a:latin typeface="Calibri"/>
+              </a:defRPr>
+            </a:pPr>
+            <a:r>
+              <a:t>36 / 37</a:t>
+            </a:r>
+          </a:p>
+        </p:txBody>
+      </p:sp>
+      <p:sp>
+        <p:nvSpPr>
+          <p:cNvPr id="73" name="Rectangle 72"/>
+          <p:cNvSpPr/>
+          <p:nvPr/>
+        </p:nvSpPr>
+        <p:spPr>
+          <a:xfrm>
+            <a:off x="5120640" y="4718304"/>
+            <a:ext cx="1280160" cy="384048"/>
+          </a:xfrm>
+          <a:prstGeom prst="rect">
+            <a:avLst/>
+          </a:prstGeom>
+          <a:solidFill>
+            <a:srgbClr val="2E86C1"/>
+          </a:solidFill>
+          <a:ln>
+            <a:noFill/>
+          </a:ln>
+        </p:spPr>
+        <p:style>
+          <a:lnRef idx="1">
+            <a:schemeClr val="accent1"/>
+          </a:lnRef>
+          <a:fillRef idx="3">
+            <a:schemeClr val="accent1"/>
+          </a:fillRef>
+          <a:effectRef idx="2">
+            <a:schemeClr val="accent1"/>
+          </a:effectRef>
+          <a:fontRef idx="minor">
+            <a:schemeClr val="lt1"/>
+          </a:fontRef>
+        </p:style>
+        <p:txBody>
+          <a:bodyPr rtlCol="0" anchor="ctr"/>
+          <a:lstStyle/>
+          <a:p>
+            <a:pPr algn="ctr"/>
+            <a:endParaRPr/>
+          </a:p>
+        </p:txBody>
+      </p:sp>
+      <p:sp>
+        <p:nvSpPr>
+          <p:cNvPr id="74" name="TextBox 73"/>
+          <p:cNvSpPr txBox="1"/>
+          <p:nvPr/>
+        </p:nvSpPr>
+        <p:spPr>
+          <a:xfrm>
+            <a:off x="5212080" y="4736592"/>
+            <a:ext cx="1097280" cy="347472"/>
+          </a:xfrm>
+          <a:prstGeom prst="rect">
+            <a:avLst/>
+          </a:prstGeom>
+          <a:noFill/>
+        </p:spPr>
+        <p:txBody>
+          <a:bodyPr wrap="square">
+            <a:spAutoFit/>
+          </a:bodyPr>
+          <a:lstStyle/>
+          <a:p>
+            <a:pPr algn="ctr">
+              <a:defRPr sz="1200" b="1">
+                <a:solidFill>
+                  <a:srgbClr val="FFFFFF"/>
+                </a:solidFill>
+                <a:latin typeface="Calibri"/>
+              </a:defRPr>
+            </a:pPr>
+            <a:r>
+              <a:t>21 / 37</a:t>
+            </a:r>
+          </a:p>
+        </p:txBody>
+      </p:sp>
+      <p:sp>
+        <p:nvSpPr>
+          <p:cNvPr id="75" name="Rectangle 74"/>
+          <p:cNvSpPr/>
+          <p:nvPr/>
+        </p:nvSpPr>
+        <p:spPr>
+          <a:xfrm>
+            <a:off x="6400800" y="4718304"/>
+            <a:ext cx="1280160" cy="384048"/>
+          </a:xfrm>
+          <a:prstGeom prst="rect">
+            <a:avLst/>
+          </a:prstGeom>
+          <a:solidFill>
+            <a:srgbClr val="2E86C1"/>
+          </a:solidFill>
+          <a:ln>
+            <a:noFill/>
+          </a:ln>
+        </p:spPr>
+        <p:style>
+          <a:lnRef idx="1">
+            <a:schemeClr val="accent1"/>
+          </a:lnRef>
+          <a:fillRef idx="3">
+            <a:schemeClr val="accent1"/>
+          </a:fillRef>
+          <a:effectRef idx="2">
+            <a:schemeClr val="accent1"/>
+          </a:effectRef>
+          <a:fontRef idx="minor">
+            <a:schemeClr val="lt1"/>
+          </a:fontRef>
+        </p:style>
+        <p:txBody>
+          <a:bodyPr rtlCol="0" anchor="ctr"/>
+          <a:lstStyle/>
+          <a:p>
+            <a:pPr algn="ctr"/>
+            <a:endParaRPr/>
+          </a:p>
+        </p:txBody>
+      </p:sp>
+      <p:sp>
+        <p:nvSpPr>
+          <p:cNvPr id="76" name="TextBox 75"/>
+          <p:cNvSpPr txBox="1"/>
+          <p:nvPr/>
+        </p:nvSpPr>
+        <p:spPr>
+          <a:xfrm>
+            <a:off x="6492240" y="4736592"/>
+            <a:ext cx="1097280" cy="347472"/>
+          </a:xfrm>
+          <a:prstGeom prst="rect">
+            <a:avLst/>
+          </a:prstGeom>
+          <a:noFill/>
+        </p:spPr>
+        <p:txBody>
+          <a:bodyPr wrap="square">
+            <a:spAutoFit/>
+          </a:bodyPr>
+          <a:lstStyle/>
+          <a:p>
+            <a:pPr algn="ctr">
+              <a:defRPr sz="1200" b="1">
+                <a:solidFill>
+                  <a:srgbClr val="FFFFFF"/>
+                </a:solidFill>
+                <a:latin typeface="Calibri"/>
+              </a:defRPr>
+            </a:pPr>
+            <a:r>
+              <a:t>18 / 37</a:t>
+            </a:r>
+          </a:p>
+        </p:txBody>
+      </p:sp>
+      <p:sp>
+        <p:nvSpPr>
+          <p:cNvPr id="77" name="Rectangle 76"/>
+          <p:cNvSpPr/>
+          <p:nvPr/>
+        </p:nvSpPr>
+        <p:spPr>
+          <a:xfrm>
+            <a:off x="7863840" y="1645920"/>
+            <a:ext cx="4023360" cy="4114800"/>
+          </a:xfrm>
+          <a:prstGeom prst="rect">
+            <a:avLst/>
+          </a:prstGeom>
+          <a:solidFill>
+            <a:srgbClr val="D6EAF8"/>
+          </a:solidFill>
+          <a:ln>
+            <a:noFill/>
+          </a:ln>
+        </p:spPr>
+        <p:style>
+          <a:lnRef idx="1">
+            <a:schemeClr val="accent1"/>
+          </a:lnRef>
+          <a:fillRef idx="3">
+            <a:schemeClr val="accent1"/>
+          </a:fillRef>
+          <a:effectRef idx="2">
+            <a:schemeClr val="accent1"/>
+          </a:effectRef>
+          <a:fontRef idx="minor">
+            <a:schemeClr val="lt1"/>
+          </a:fontRef>
+        </p:style>
+        <p:txBody>
+          <a:bodyPr rtlCol="0" anchor="ctr"/>
+          <a:lstStyle/>
+          <a:p>
+            <a:pPr algn="ctr"/>
+            <a:endParaRPr/>
+          </a:p>
+        </p:txBody>
+      </p:sp>
+      <p:sp>
+        <p:nvSpPr>
+          <p:cNvPr id="78" name="TextBox 77"/>
+          <p:cNvSpPr txBox="1"/>
+          <p:nvPr/>
+        </p:nvSpPr>
+        <p:spPr>
+          <a:xfrm>
+            <a:off x="8046720" y="1737360"/>
+            <a:ext cx="3657600" cy="411480"/>
+          </a:xfrm>
+          <a:prstGeom prst="rect">
+            <a:avLst/>
+          </a:prstGeom>
+          <a:noFill/>
+        </p:spPr>
+        <p:txBody>
+          <a:bodyPr wrap="square">
+            <a:spAutoFit/>
+          </a:bodyPr>
+          <a:lstStyle/>
+          <a:p>
+            <a:pPr algn="l">
+              <a:defRPr sz="1800" b="1">
+                <a:solidFill>
+                  <a:srgbClr val="1B2A4A"/>
+                </a:solidFill>
+                <a:latin typeface="Calibri"/>
+              </a:defRPr>
+            </a:pPr>
+            <a:r>
+              <a:t>IoTeye-Exclusive Advantages</a:t>
+            </a:r>
+          </a:p>
+        </p:txBody>
+      </p:sp>
+      <p:sp>
+        <p:nvSpPr>
+          <p:cNvPr id="79" name="TextBox 78"/>
+          <p:cNvSpPr txBox="1"/>
+          <p:nvPr/>
+        </p:nvSpPr>
+        <p:spPr>
+          <a:xfrm>
+            <a:off x="8046720" y="2194560"/>
+            <a:ext cx="3657600" cy="3383280"/>
+          </a:xfrm>
+          <a:prstGeom prst="rect">
+            <a:avLst/>
+          </a:prstGeom>
+          <a:noFill/>
+        </p:spPr>
+        <p:txBody>
+          <a:bodyPr wrap="square">
+            <a:spAutoFit/>
+          </a:bodyPr>
+          <a:lstStyle/>
+          <a:p>
+            <a:pPr algn="l">
+              <a:spcAft>
+                <a:spcPts val="700"/>
+              </a:spcAft>
+              <a:defRPr sz="1200" b="0">
+                <a:solidFill>
+                  <a:srgbClr val="333333"/>
+                </a:solidFill>
+                <a:latin typeface="Calibri"/>
+              </a:defRPr>
+            </a:pPr>
+            <a:r>
+              <a:t>• BrainClaw AI — 94+ tools already in production at Arc Mercer</a:t>
+            </a:r>
+          </a:p>
+          <a:p>
+            <a:pPr>
+              <a:spcAft>
+                <a:spcPts val="700"/>
+              </a:spcAft>
+              <a:defRPr sz="1200">
+                <a:solidFill>
+                  <a:srgbClr val="333333"/>
+                </a:solidFill>
+                <a:latin typeface="Calibri"/>
+              </a:defRPr>
+            </a:pPr>
+            <a:r>
+              <a:t>• Badge ID + PIN login for frontline staff without email</a:t>
+            </a:r>
+          </a:p>
+          <a:p>
+            <a:pPr>
+              <a:spcAft>
+                <a:spcPts val="700"/>
+              </a:spcAft>
+              <a:defRPr sz="1200">
+                <a:solidFill>
+                  <a:srgbClr val="333333"/>
+                </a:solidFill>
+                <a:latin typeface="Calibri"/>
+              </a:defRPr>
+            </a:pPr>
+            <a:r>
+              <a:t>• WCAG AAA accessibility (7:1 contrast, screen reader tested)</a:t>
+            </a:r>
+          </a:p>
+          <a:p>
+            <a:pPr>
+              <a:spcAft>
+                <a:spcPts val="700"/>
+              </a:spcAft>
+              <a:defRPr sz="1200">
+                <a:solidFill>
+                  <a:srgbClr val="333333"/>
+                </a:solidFill>
+                <a:latin typeface="Calibri"/>
+              </a:defRPr>
+            </a:pPr>
+            <a:r>
+              <a:t>• AWS HIPAA-eligible infrastructure, 99.9% uptime SLA</a:t>
+            </a:r>
+          </a:p>
+          <a:p>
+            <a:pPr>
+              <a:spcAft>
+                <a:spcPts val="700"/>
+              </a:spcAft>
+              <a:defRPr sz="1200">
+                <a:solidFill>
+                  <a:srgbClr val="333333"/>
+                </a:solidFill>
+                <a:latin typeface="Calibri"/>
+              </a:defRPr>
+            </a:pPr>
+            <a:r>
+              <a:t>• Severity-based SLAs (Critical: 2hr response)</a:t>
+            </a:r>
+          </a:p>
+          <a:p>
+            <a:pPr>
+              <a:spcAft>
+                <a:spcPts val="700"/>
+              </a:spcAft>
+              <a:defRPr sz="1200">
+                <a:solidFill>
+                  <a:srgbClr val="333333"/>
+                </a:solidFill>
+                <a:latin typeface="Calibri"/>
+              </a:defRPr>
+            </a:pPr>
+            <a:r>
+              <a:t>• Source code ownership option (Option A)</a:t>
+            </a:r>
+          </a:p>
+          <a:p>
+            <a:pPr>
+              <a:spcAft>
+                <a:spcPts val="700"/>
+              </a:spcAft>
+              <a:defRPr sz="1200">
+                <a:solidFill>
+                  <a:srgbClr val="333333"/>
+                </a:solidFill>
+                <a:latin typeface="Calibri"/>
+              </a:defRPr>
+            </a:pPr>
+            <a:r>
+              <a:t>• Multi-IDP SSO migration path (Google → Microsoft)</a:t>
+            </a:r>
+          </a:p>
+          <a:p>
+            <a:pPr>
+              <a:spcAft>
+                <a:spcPts val="700"/>
+              </a:spcAft>
+              <a:defRPr sz="1200">
+                <a:solidFill>
+                  <a:srgbClr val="333333"/>
+                </a:solidFill>
+                <a:latin typeface="Calibri"/>
+              </a:defRPr>
+            </a:pPr>
+            <a:r>
+              <a:t>• Anomaly detection &amp; immutable audit trails</a:t>
+            </a:r>
+          </a:p>
+        </p:txBody>
+      </p:sp>
+      <p:sp>
+        <p:nvSpPr>
+          <p:cNvPr id="80" name="Rectangle 79"/>
+          <p:cNvSpPr/>
+          <p:nvPr/>
+        </p:nvSpPr>
+        <p:spPr>
+          <a:xfrm>
+            <a:off x="0" y="5943600"/>
+            <a:ext cx="12191695" cy="640080"/>
+          </a:xfrm>
+          <a:prstGeom prst="rect">
+            <a:avLst/>
+          </a:prstGeom>
+          <a:solidFill>
+            <a:srgbClr val="27AE60"/>
+          </a:solidFill>
+          <a:ln>
+            <a:noFill/>
+          </a:ln>
+        </p:spPr>
+        <p:style>
+          <a:lnRef idx="1">
+            <a:schemeClr val="accent1"/>
+          </a:lnRef>
+          <a:fillRef idx="3">
+            <a:schemeClr val="accent1"/>
+          </a:fillRef>
+          <a:effectRef idx="2">
+            <a:schemeClr val="accent1"/>
+          </a:effectRef>
+          <a:fontRef idx="minor">
+            <a:schemeClr val="lt1"/>
+          </a:fontRef>
+        </p:style>
+        <p:txBody>
+          <a:bodyPr rtlCol="0" anchor="ctr"/>
+          <a:lstStyle/>
+          <a:p>
+            <a:pPr algn="ctr"/>
+            <a:endParaRPr/>
+          </a:p>
+        </p:txBody>
+      </p:sp>
+      <p:sp>
+        <p:nvSpPr>
+          <p:cNvPr id="81" name="TextBox 80"/>
+          <p:cNvSpPr txBox="1"/>
+          <p:nvPr/>
+        </p:nvSpPr>
+        <p:spPr>
+          <a:xfrm>
+            <a:off x="457200" y="5989320"/>
+            <a:ext cx="10972800" cy="548640"/>
+          </a:xfrm>
+          <a:prstGeom prst="rect">
+            <a:avLst/>
+          </a:prstGeom>
+          <a:noFill/>
+        </p:spPr>
+        <p:txBody>
+          <a:bodyPr wrap="square">
+            <a:spAutoFit/>
+          </a:bodyPr>
+          <a:lstStyle/>
+          <a:p>
+            <a:pPr algn="ctr">
+              <a:defRPr sz="1600" b="1">
+                <a:solidFill>
+                  <a:srgbClr val="FFFFFF"/>
+                </a:solidFill>
+                <a:latin typeface="Calibri"/>
+              </a:defRPr>
+            </a:pPr>
+            <a:r>
+              <a:t>★  IoTeye covers 36 of 37 features — 10 added after competitive analysis, all within the original $110K budget</a:t>
+            </a:r>
+          </a:p>
+        </p:txBody>
+      </p:sp>
+    </p:spTree>
+  </p:cSld>
+  <p:clrMapOvr>
+    <a:masterClrMapping/>
+  </p:clrMapOvr>
+</p:sld>
+</file>
+
+<file path=ppt/slides/slide18.xml><?xml version="1.0" encoding="utf-8"?>
+<p:sld xmlns:a="http://schemas.openxmlformats.org/drawingml/2006/main" xmlns:r="http://schemas.openxmlformats.org/officeDocument/2006/relationships" xmlns:p="http://schemas.openxmlformats.org/presentationml/2006/main">
   <p:cSld>
     <p:bg>
       <p:bgPr>
@@ -10035,7 +13422,14 @@
         <p:cNvGrpSpPr/>
         <p:nvPr/>
       </p:nvGrpSpPr>
-      <p:grpSpPr/>
+      <p:grpSpPr>
+        <a:xfrm>
+          <a:off x="0" y="0"/>
+          <a:ext cx="0" cy="0"/>
+          <a:chOff x="0" y="0"/>
+          <a:chExt cx="0" cy="0"/>
+        </a:xfrm>
+      </p:grpSpPr>
       <p:sp>
         <p:nvSpPr>
           <p:cNvPr id="2" name="TextBox 1"/>
@@ -10470,6 +13864,7 @@
           <a:lstStyle/>
           <a:p>
             <a:pPr algn="ctr"/>
+            <a:endParaRPr/>
           </a:p>
         </p:txBody>
       </p:sp>
@@ -10602,7 +13997,7 @@
 </file>
 
 <file path=ppt/slides/slide2.xml><?xml version="1.0" encoding="utf-8"?>
-<p:sld xmlns:a="http://schemas.openxmlformats.org/drawingml/2006/main" xmlns:p="http://schemas.openxmlformats.org/presentationml/2006/main" xmlns:r="http://schemas.openxmlformats.org/officeDocument/2006/relationships">
+<p:sld xmlns:a="http://schemas.openxmlformats.org/drawingml/2006/main" xmlns:r="http://schemas.openxmlformats.org/officeDocument/2006/relationships" xmlns:p="http://schemas.openxmlformats.org/presentationml/2006/main">
   <p:cSld>
     <p:bg>
       <p:bgPr>
@@ -10618,7 +14013,14 @@
         <p:cNvGrpSpPr/>
         <p:nvPr/>
       </p:nvGrpSpPr>
-      <p:grpSpPr/>
+      <p:grpSpPr>
+        <a:xfrm>
+          <a:off x="0" y="0"/>
+          <a:ext cx="0" cy="0"/>
+          <a:chOff x="0" y="0"/>
+          <a:chExt cx="0" cy="0"/>
+        </a:xfrm>
+      </p:grpSpPr>
       <p:sp>
         <p:nvSpPr>
           <p:cNvPr id="2" name="Rectangle 1"/>
@@ -10659,6 +14061,7 @@
           <a:lstStyle/>
           <a:p>
             <a:pPr algn="ctr"/>
+            <a:endParaRPr/>
           </a:p>
         </p:txBody>
       </p:sp>
@@ -10732,7 +14135,7 @@
               </a:defRPr>
             </a:pPr>
             <a:r>
-              <a:t>1.  About IoTeye Inc. &amp; Platform Ecosystem</a:t>
+              <a:t>1.  About IoTeye &amp; Platform Ecosystem</a:t>
             </a:r>
           </a:p>
           <a:p>
@@ -10780,7 +14183,7 @@
               </a:defRPr>
             </a:pPr>
             <a:r>
-              <a:t>4.  Our Solution — Platform Overview</a:t>
+              <a:t>4.  Platform Overview &amp; Architecture</a:t>
             </a:r>
           </a:p>
           <a:p>
@@ -10796,7 +14199,7 @@
               </a:defRPr>
             </a:pPr>
             <a:r>
-              <a:t>5.  Nominations, Voting &amp; QA Engine</a:t>
+              <a:t>5.  Key Features (Nominations → Engagement → Marketplace)</a:t>
             </a:r>
           </a:p>
           <a:p>
@@ -10812,7 +14215,7 @@
               </a:defRPr>
             </a:pPr>
             <a:r>
-              <a:t>6.  Points, Engagement &amp; Community Modules</a:t>
+              <a:t>6.  Integration, Authentication &amp; Accessibility</a:t>
             </a:r>
           </a:p>
           <a:p>
@@ -10828,7 +14231,7 @@
               </a:defRPr>
             </a:pPr>
             <a:r>
-              <a:t>7.  Rewards Marketplace — Digital, Café &amp; In-Person Store</a:t>
+              <a:t>7.  Dashboards — Employee &amp; Leadership</a:t>
             </a:r>
           </a:p>
           <a:p>
@@ -10844,7 +14247,7 @@
               </a:defRPr>
             </a:pPr>
             <a:r>
-              <a:t>8.  Paycom Integration &amp; Authentication (SSO + Badge ID)</a:t>
+              <a:t>8.  Implementation Timeline &amp; Pricing</a:t>
             </a:r>
           </a:p>
           <a:p>
@@ -10860,7 +14263,7 @@
               </a:defRPr>
             </a:pPr>
             <a:r>
-              <a:t>9.  Accessibility, Dark Mode &amp; Mobile-First Design</a:t>
+              <a:t>9.  Feature Comparison — How We Stack Up</a:t>
             </a:r>
           </a:p>
           <a:p>
@@ -10876,55 +14279,7 @@
               </a:defRPr>
             </a:pPr>
             <a:r>
-              <a:t>10. Dashboards — Employee &amp; Leadership</a:t>
-            </a:r>
-          </a:p>
-          <a:p>
-            <a:pPr>
-              <a:spcAft>
-                <a:spcPts val="1000"/>
-              </a:spcAft>
-              <a:defRPr sz="2200">
-                <a:solidFill>
-                  <a:srgbClr val="333333"/>
-                </a:solidFill>
-                <a:latin typeface="Calibri"/>
-              </a:defRPr>
-            </a:pPr>
-            <a:r>
-              <a:t>11. Phased Implementation Timeline</a:t>
-            </a:r>
-          </a:p>
-          <a:p>
-            <a:pPr>
-              <a:spcAft>
-                <a:spcPts val="1000"/>
-              </a:spcAft>
-              <a:defRPr sz="2200">
-                <a:solidFill>
-                  <a:srgbClr val="333333"/>
-                </a:solidFill>
-                <a:latin typeface="Calibri"/>
-              </a:defRPr>
-            </a:pPr>
-            <a:r>
-              <a:t>12. Pricing Options</a:t>
-            </a:r>
-          </a:p>
-          <a:p>
-            <a:pPr>
-              <a:spcAft>
-                <a:spcPts val="1000"/>
-              </a:spcAft>
-              <a:defRPr sz="2200">
-                <a:solidFill>
-                  <a:srgbClr val="333333"/>
-                </a:solidFill>
-                <a:latin typeface="Calibri"/>
-              </a:defRPr>
-            </a:pPr>
-            <a:r>
-              <a:t>13. Why IoTeye — Next Steps</a:t>
+              <a:t>10. Why IoTeye — Next Steps</a:t>
             </a:r>
           </a:p>
         </p:txBody>
@@ -10938,7 +14293,7 @@
 </file>
 
 <file path=ppt/slides/slide3.xml><?xml version="1.0" encoding="utf-8"?>
-<p:sld xmlns:a="http://schemas.openxmlformats.org/drawingml/2006/main" xmlns:p="http://schemas.openxmlformats.org/presentationml/2006/main" xmlns:r="http://schemas.openxmlformats.org/officeDocument/2006/relationships">
+<p:sld xmlns:a="http://schemas.openxmlformats.org/drawingml/2006/main" xmlns:r="http://schemas.openxmlformats.org/officeDocument/2006/relationships" xmlns:p="http://schemas.openxmlformats.org/presentationml/2006/main">
   <p:cSld>
     <p:bg>
       <p:bgPr>
@@ -10954,7 +14309,14 @@
         <p:cNvGrpSpPr/>
         <p:nvPr/>
       </p:nvGrpSpPr>
-      <p:grpSpPr/>
+      <p:grpSpPr>
+        <a:xfrm>
+          <a:off x="0" y="0"/>
+          <a:ext cx="0" cy="0"/>
+          <a:chOff x="0" y="0"/>
+          <a:chExt cx="0" cy="0"/>
+        </a:xfrm>
+      </p:grpSpPr>
       <p:sp>
         <p:nvSpPr>
           <p:cNvPr id="2" name="Rectangle 1"/>
@@ -10995,6 +14357,7 @@
           <a:lstStyle/>
           <a:p>
             <a:pPr algn="ctr"/>
+            <a:endParaRPr/>
           </a:p>
         </p:txBody>
       </p:sp>
@@ -11305,7 +14668,7 @@
 </file>
 
 <file path=ppt/slides/slide4.xml><?xml version="1.0" encoding="utf-8"?>
-<p:sld xmlns:a="http://schemas.openxmlformats.org/drawingml/2006/main" xmlns:p="http://schemas.openxmlformats.org/presentationml/2006/main" xmlns:r="http://schemas.openxmlformats.org/officeDocument/2006/relationships">
+<p:sld xmlns:a="http://schemas.openxmlformats.org/drawingml/2006/main" xmlns:r="http://schemas.openxmlformats.org/officeDocument/2006/relationships" xmlns:p="http://schemas.openxmlformats.org/presentationml/2006/main">
   <p:cSld>
     <p:bg>
       <p:bgPr>
@@ -11321,7 +14684,14 @@
         <p:cNvGrpSpPr/>
         <p:nvPr/>
       </p:nvGrpSpPr>
-      <p:grpSpPr/>
+      <p:grpSpPr>
+        <a:xfrm>
+          <a:off x="0" y="0"/>
+          <a:ext cx="0" cy="0"/>
+          <a:chOff x="0" y="0"/>
+          <a:chExt cx="0" cy="0"/>
+        </a:xfrm>
+      </p:grpSpPr>
       <p:sp>
         <p:nvSpPr>
           <p:cNvPr id="2" name="TextBox 1"/>
@@ -11398,6 +14768,7 @@
           <a:lstStyle/>
           <a:p>
             <a:pPr algn="ctr"/>
+            <a:endParaRPr/>
           </a:p>
         </p:txBody>
       </p:sp>
@@ -11612,6 +14983,7 @@
           <a:lstStyle/>
           <a:p>
             <a:pPr algn="ctr"/>
+            <a:endParaRPr/>
           </a:p>
         </p:txBody>
       </p:sp>
@@ -11948,7 +15320,7 @@
 </file>
 
 <file path=ppt/slides/slide5.xml><?xml version="1.0" encoding="utf-8"?>
-<p:sld xmlns:a="http://schemas.openxmlformats.org/drawingml/2006/main" xmlns:p="http://schemas.openxmlformats.org/presentationml/2006/main" xmlns:r="http://schemas.openxmlformats.org/officeDocument/2006/relationships">
+<p:sld xmlns:a="http://schemas.openxmlformats.org/drawingml/2006/main" xmlns:r="http://schemas.openxmlformats.org/officeDocument/2006/relationships" xmlns:p="http://schemas.openxmlformats.org/presentationml/2006/main">
   <p:cSld>
     <p:bg>
       <p:bgPr>
@@ -11964,7 +15336,14 @@
         <p:cNvGrpSpPr/>
         <p:nvPr/>
       </p:nvGrpSpPr>
-      <p:grpSpPr/>
+      <p:grpSpPr>
+        <a:xfrm>
+          <a:off x="0" y="0"/>
+          <a:ext cx="0" cy="0"/>
+          <a:chOff x="0" y="0"/>
+          <a:chExt cx="0" cy="0"/>
+        </a:xfrm>
+      </p:grpSpPr>
       <p:sp>
         <p:nvSpPr>
           <p:cNvPr id="2" name="Rectangle 1"/>
@@ -12005,6 +15384,7 @@
           <a:lstStyle/>
           <a:p>
             <a:pPr algn="ctr"/>
+            <a:endParaRPr/>
           </a:p>
         </p:txBody>
       </p:sp>
@@ -12279,6 +15659,7 @@
           <a:lstStyle/>
           <a:p>
             <a:pPr algn="ctr"/>
+            <a:endParaRPr/>
           </a:p>
         </p:txBody>
       </p:sp>
@@ -12370,6 +15751,7 @@
           <a:lstStyle/>
           <a:p>
             <a:pPr algn="ctr"/>
+            <a:endParaRPr/>
           </a:p>
         </p:txBody>
       </p:sp>
@@ -12588,6 +15970,7 @@
           <a:lstStyle/>
           <a:p>
             <a:pPr algn="ctr"/>
+            <a:endParaRPr/>
           </a:p>
         </p:txBody>
       </p:sp>
@@ -12636,7 +16019,7 @@
 </file>
 
 <file path=ppt/slides/slide6.xml><?xml version="1.0" encoding="utf-8"?>
-<p:sld xmlns:a="http://schemas.openxmlformats.org/drawingml/2006/main" xmlns:p="http://schemas.openxmlformats.org/presentationml/2006/main" xmlns:r="http://schemas.openxmlformats.org/officeDocument/2006/relationships">
+<p:sld xmlns:a="http://schemas.openxmlformats.org/drawingml/2006/main" xmlns:r="http://schemas.openxmlformats.org/officeDocument/2006/relationships" xmlns:p="http://schemas.openxmlformats.org/presentationml/2006/main">
   <p:cSld>
     <p:bg>
       <p:bgPr>
@@ -12652,7 +16035,14 @@
         <p:cNvGrpSpPr/>
         <p:nvPr/>
       </p:nvGrpSpPr>
-      <p:grpSpPr/>
+      <p:grpSpPr>
+        <a:xfrm>
+          <a:off x="0" y="0"/>
+          <a:ext cx="0" cy="0"/>
+          <a:chOff x="0" y="0"/>
+          <a:chExt cx="0" cy="0"/>
+        </a:xfrm>
+      </p:grpSpPr>
       <p:sp>
         <p:nvSpPr>
           <p:cNvPr id="2" name="Rectangle 1"/>
@@ -12693,6 +16083,7 @@
           <a:lstStyle/>
           <a:p>
             <a:pPr algn="ctr"/>
+            <a:endParaRPr/>
           </a:p>
         </p:txBody>
       </p:sp>
@@ -13083,7 +16474,7 @@
 </file>
 
 <file path=ppt/slides/slide7.xml><?xml version="1.0" encoding="utf-8"?>
-<p:sld xmlns:a="http://schemas.openxmlformats.org/drawingml/2006/main" xmlns:p="http://schemas.openxmlformats.org/presentationml/2006/main" xmlns:r="http://schemas.openxmlformats.org/officeDocument/2006/relationships">
+<p:sld xmlns:a="http://schemas.openxmlformats.org/drawingml/2006/main" xmlns:r="http://schemas.openxmlformats.org/officeDocument/2006/relationships" xmlns:p="http://schemas.openxmlformats.org/presentationml/2006/main">
   <p:cSld>
     <p:bg>
       <p:bgPr>
@@ -13099,7 +16490,14 @@
         <p:cNvGrpSpPr/>
         <p:nvPr/>
       </p:nvGrpSpPr>
-      <p:grpSpPr/>
+      <p:grpSpPr>
+        <a:xfrm>
+          <a:off x="0" y="0"/>
+          <a:ext cx="0" cy="0"/>
+          <a:chOff x="0" y="0"/>
+          <a:chExt cx="0" cy="0"/>
+        </a:xfrm>
+      </p:grpSpPr>
       <p:sp>
         <p:nvSpPr>
           <p:cNvPr id="2" name="Rectangle 1"/>
@@ -13140,6 +16538,7 @@
           <a:lstStyle/>
           <a:p>
             <a:pPr algn="ctr"/>
+            <a:endParaRPr/>
           </a:p>
         </p:txBody>
       </p:sp>
@@ -13255,6 +16654,7 @@
           <a:lstStyle/>
           <a:p>
             <a:pPr algn="ctr"/>
+            <a:endParaRPr/>
           </a:p>
         </p:txBody>
       </p:sp>
@@ -13370,6 +16770,7 @@
           <a:lstStyle/>
           <a:p>
             <a:pPr algn="ctr"/>
+            <a:endParaRPr/>
           </a:p>
         </p:txBody>
       </p:sp>
@@ -13485,6 +16886,7 @@
           <a:lstStyle/>
           <a:p>
             <a:pPr algn="ctr"/>
+            <a:endParaRPr/>
           </a:p>
         </p:txBody>
       </p:sp>
@@ -13600,6 +17002,7 @@
           <a:lstStyle/>
           <a:p>
             <a:pPr algn="ctr"/>
+            <a:endParaRPr/>
           </a:p>
         </p:txBody>
       </p:sp>
@@ -13720,7 +17123,7 @@
 </file>
 
 <file path=ppt/slides/slide8.xml><?xml version="1.0" encoding="utf-8"?>
-<p:sld xmlns:a="http://schemas.openxmlformats.org/drawingml/2006/main" xmlns:p="http://schemas.openxmlformats.org/presentationml/2006/main" xmlns:r="http://schemas.openxmlformats.org/officeDocument/2006/relationships">
+<p:sld xmlns:a="http://schemas.openxmlformats.org/drawingml/2006/main" xmlns:r="http://schemas.openxmlformats.org/officeDocument/2006/relationships" xmlns:p="http://schemas.openxmlformats.org/presentationml/2006/main">
   <p:cSld>
     <p:bg>
       <p:bgPr>
@@ -13736,7 +17139,14 @@
         <p:cNvGrpSpPr/>
         <p:nvPr/>
       </p:nvGrpSpPr>
-      <p:grpSpPr/>
+      <p:grpSpPr>
+        <a:xfrm>
+          <a:off x="0" y="0"/>
+          <a:ext cx="0" cy="0"/>
+          <a:chOff x="0" y="0"/>
+          <a:chExt cx="0" cy="0"/>
+        </a:xfrm>
+      </p:grpSpPr>
       <p:sp>
         <p:nvSpPr>
           <p:cNvPr id="2" name="Rectangle 1"/>
@@ -13777,6 +17187,7 @@
           <a:lstStyle/>
           <a:p>
             <a:pPr algn="ctr"/>
+            <a:endParaRPr/>
           </a:p>
         </p:txBody>
       </p:sp>
@@ -14186,7 +17597,7 @@
 </file>
 
 <file path=ppt/slides/slide9.xml><?xml version="1.0" encoding="utf-8"?>
-<p:sld xmlns:a="http://schemas.openxmlformats.org/drawingml/2006/main" xmlns:p="http://schemas.openxmlformats.org/presentationml/2006/main" xmlns:r="http://schemas.openxmlformats.org/officeDocument/2006/relationships">
+<p:sld xmlns:a="http://schemas.openxmlformats.org/drawingml/2006/main" xmlns:r="http://schemas.openxmlformats.org/officeDocument/2006/relationships" xmlns:p="http://schemas.openxmlformats.org/presentationml/2006/main">
   <p:cSld>
     <p:bg>
       <p:bgPr>
@@ -14202,7 +17613,14 @@
         <p:cNvGrpSpPr/>
         <p:nvPr/>
       </p:nvGrpSpPr>
-      <p:grpSpPr/>
+      <p:grpSpPr>
+        <a:xfrm>
+          <a:off x="0" y="0"/>
+          <a:ext cx="0" cy="0"/>
+          <a:chOff x="0" y="0"/>
+          <a:chExt cx="0" cy="0"/>
+        </a:xfrm>
+      </p:grpSpPr>
       <p:sp>
         <p:nvSpPr>
           <p:cNvPr id="2" name="Rectangle 1"/>
@@ -14243,6 +17661,7 @@
           <a:lstStyle/>
           <a:p>
             <a:pPr algn="ctr"/>
+            <a:endParaRPr/>
           </a:p>
         </p:txBody>
       </p:sp>
@@ -14358,6 +17777,7 @@
           <a:lstStyle/>
           <a:p>
             <a:pPr algn="ctr"/>
+            <a:endParaRPr/>
           </a:p>
         </p:txBody>
       </p:sp>
@@ -14473,6 +17893,7 @@
           <a:lstStyle/>
           <a:p>
             <a:pPr algn="ctr"/>
+            <a:endParaRPr/>
           </a:p>
         </p:txBody>
       </p:sp>
@@ -14588,6 +18009,7 @@
           <a:lstStyle/>
           <a:p>
             <a:pPr algn="ctr"/>
+            <a:endParaRPr/>
           </a:p>
         </p:txBody>
       </p:sp>
@@ -14703,6 +18125,7 @@
           <a:lstStyle/>
           <a:p>
             <a:pPr algn="ctr"/>
+            <a:endParaRPr/>
           </a:p>
         </p:txBody>
       </p:sp>
@@ -14818,6 +18241,7 @@
           <a:lstStyle/>
           <a:p>
             <a:pPr algn="ctr"/>
+            <a:endParaRPr/>
           </a:p>
         </p:txBody>
       </p:sp>
@@ -14933,6 +18357,7 @@
           <a:lstStyle/>
           <a:p>
             <a:pPr algn="ctr"/>
+            <a:endParaRPr/>
           </a:p>
         </p:txBody>
       </p:sp>
@@ -15048,6 +18473,7 @@
           <a:lstStyle/>
           <a:p>
             <a:pPr algn="ctr"/>
+            <a:endParaRPr/>
           </a:p>
         </p:txBody>
       </p:sp>
@@ -15163,6 +18589,7 @@
           <a:lstStyle/>
           <a:p>
             <a:pPr algn="ctr"/>
+            <a:endParaRPr/>
           </a:p>
         </p:txBody>
       </p:sp>
@@ -15278,6 +18705,7 @@
           <a:lstStyle/>
           <a:p>
             <a:pPr algn="ctr"/>
+            <a:endParaRPr/>
           </a:p>
         </p:txBody>
       </p:sp>
@@ -15393,6 +18821,7 @@
           <a:lstStyle/>
           <a:p>
             <a:pPr algn="ctr"/>
+            <a:endParaRPr/>
           </a:p>
         </p:txBody>
       </p:sp>

--- a/RFP/IoTeye - Arc Mercer Pitch.pptx
+++ b/RFP/IoTeye - Arc Mercer Pitch.pptx
@@ -5,26 +5,26 @@
     <p:sldMasterId id="2147483648" r:id="rId1"/>
   </p:sldMasterIdLst>
   <p:sldIdLst>
-    <p:sldId id="256" r:id="rId2"/>
-    <p:sldId id="257" r:id="rId3"/>
-    <p:sldId id="258" r:id="rId4"/>
-    <p:sldId id="259" r:id="rId5"/>
-    <p:sldId id="260" r:id="rId6"/>
-    <p:sldId id="261" r:id="rId7"/>
-    <p:sldId id="262" r:id="rId8"/>
-    <p:sldId id="263" r:id="rId9"/>
-    <p:sldId id="264" r:id="rId10"/>
-    <p:sldId id="265" r:id="rId11"/>
-    <p:sldId id="266" r:id="rId12"/>
-    <p:sldId id="267" r:id="rId13"/>
-    <p:sldId id="268" r:id="rId14"/>
-    <p:sldId id="269" r:id="rId15"/>
-    <p:sldId id="270" r:id="rId16"/>
-    <p:sldId id="271" r:id="rId17"/>
-    <p:sldId id="272" r:id="rId18"/>
-    <p:sldId id="273" r:id="rId19"/>
+    <p:sldId id="256" r:id="rId7"/>
+    <p:sldId id="257" r:id="rId8"/>
+    <p:sldId id="258" r:id="rId9"/>
+    <p:sldId id="259" r:id="rId10"/>
+    <p:sldId id="260" r:id="rId11"/>
+    <p:sldId id="261" r:id="rId12"/>
+    <p:sldId id="262" r:id="rId13"/>
+    <p:sldId id="263" r:id="rId14"/>
+    <p:sldId id="264" r:id="rId15"/>
+    <p:sldId id="265" r:id="rId16"/>
+    <p:sldId id="266" r:id="rId17"/>
+    <p:sldId id="267" r:id="rId18"/>
+    <p:sldId id="268" r:id="rId19"/>
+    <p:sldId id="269" r:id="rId20"/>
+    <p:sldId id="270" r:id="rId21"/>
+    <p:sldId id="271" r:id="rId22"/>
+    <p:sldId id="272" r:id="rId23"/>
+    <p:sldId id="273" r:id="rId24"/>
   </p:sldIdLst>
-  <p:sldSz cx="12192000" cy="6858000"/>
+  <p:sldSz cx="12191695" cy="6858000" type="screen4x3"/>
   <p:notesSz cx="6858000" cy="9144000"/>
   <p:defaultTextStyle>
     <a:defPPr>
@@ -121,22 +121,6 @@
       </a:defRPr>
     </a:lvl9pPr>
   </p:defaultTextStyle>
-  <p:extLst>
-    <p:ext uri="{EFAFB233-063F-42B5-8137-9DF3F51BA10A}">
-      <p15:sldGuideLst xmlns:p15="http://schemas.microsoft.com/office/powerpoint/2012/main">
-        <p15:guide id="1" orient="horz" pos="2160">
-          <p15:clr>
-            <a:srgbClr val="A4A3A4"/>
-          </p15:clr>
-        </p15:guide>
-        <p15:guide id="2" pos="2880">
-          <p15:clr>
-            <a:srgbClr val="A4A3A4"/>
-          </p15:clr>
-        </p15:guide>
-      </p15:sldGuideLst>
-    </p:ext>
-  </p:extLst>
 </p:presentation>
 </file>
 
@@ -178,9 +162,10 @@
           <a:lstStyle/>
           <a:p>
             <a:r>
-              <a:rPr lang="en-US"/>
+              <a:rPr lang="en-US" smtClean="0"/>
               <a:t>Click to edit Master title style</a:t>
             </a:r>
+            <a:endParaRPr lang="en-US"/>
           </a:p>
         </p:txBody>
       </p:sp>
@@ -296,9 +281,10 @@
           </a:lstStyle>
           <a:p>
             <a:r>
-              <a:rPr lang="en-US"/>
+              <a:rPr lang="en-US" smtClean="0"/>
               <a:t>Click to edit Master subtitle style</a:t>
             </a:r>
+            <a:endParaRPr lang="en-US"/>
           </a:p>
         </p:txBody>
       </p:sp>
@@ -319,7 +305,7 @@
           <a:p>
             <a:fld id="{5BCAD085-E8A6-8845-BD4E-CB4CCA059FC4}" type="datetimeFigureOut">
               <a:rPr lang="en-US" smtClean="0"/>
-              <a:t>4/14/26</a:t>
+              <a:t>1/27/13</a:t>
             </a:fld>
             <a:endParaRPr lang="en-US"/>
           </a:p>
@@ -413,9 +399,10 @@
           <a:lstStyle/>
           <a:p>
             <a:r>
-              <a:rPr lang="en-US"/>
+              <a:rPr lang="en-US" smtClean="0"/>
               <a:t>Click to edit Master title style</a:t>
             </a:r>
+            <a:endParaRPr lang="en-US"/>
           </a:p>
         </p:txBody>
       </p:sp>
@@ -436,37 +423,38 @@
           <a:p>
             <a:pPr lvl="0"/>
             <a:r>
-              <a:rPr lang="en-US"/>
+              <a:rPr lang="en-US" smtClean="0"/>
               <a:t>Click to edit Master text styles</a:t>
             </a:r>
           </a:p>
           <a:p>
             <a:pPr lvl="1"/>
             <a:r>
-              <a:rPr lang="en-US"/>
+              <a:rPr lang="en-US" smtClean="0"/>
               <a:t>Second level</a:t>
             </a:r>
           </a:p>
           <a:p>
             <a:pPr lvl="2"/>
             <a:r>
-              <a:rPr lang="en-US"/>
+              <a:rPr lang="en-US" smtClean="0"/>
               <a:t>Third level</a:t>
             </a:r>
           </a:p>
           <a:p>
             <a:pPr lvl="3"/>
             <a:r>
-              <a:rPr lang="en-US"/>
+              <a:rPr lang="en-US" smtClean="0"/>
               <a:t>Fourth level</a:t>
             </a:r>
           </a:p>
           <a:p>
             <a:pPr lvl="4"/>
             <a:r>
-              <a:rPr lang="en-US"/>
+              <a:rPr lang="en-US" smtClean="0"/>
               <a:t>Fifth level</a:t>
             </a:r>
+            <a:endParaRPr lang="en-US"/>
           </a:p>
         </p:txBody>
       </p:sp>
@@ -487,7 +475,7 @@
           <a:p>
             <a:fld id="{5BCAD085-E8A6-8845-BD4E-CB4CCA059FC4}" type="datetimeFigureOut">
               <a:rPr lang="en-US" smtClean="0"/>
-              <a:t>4/14/26</a:t>
+              <a:t>1/27/13</a:t>
             </a:fld>
             <a:endParaRPr lang="en-US"/>
           </a:p>
@@ -586,9 +574,10 @@
           <a:lstStyle/>
           <a:p>
             <a:r>
-              <a:rPr lang="en-US"/>
+              <a:rPr lang="en-US" smtClean="0"/>
               <a:t>Click to edit Master title style</a:t>
             </a:r>
+            <a:endParaRPr lang="en-US"/>
           </a:p>
         </p:txBody>
       </p:sp>
@@ -614,37 +603,38 @@
           <a:p>
             <a:pPr lvl="0"/>
             <a:r>
-              <a:rPr lang="en-US"/>
+              <a:rPr lang="en-US" smtClean="0"/>
               <a:t>Click to edit Master text styles</a:t>
             </a:r>
           </a:p>
           <a:p>
             <a:pPr lvl="1"/>
             <a:r>
-              <a:rPr lang="en-US"/>
+              <a:rPr lang="en-US" smtClean="0"/>
               <a:t>Second level</a:t>
             </a:r>
           </a:p>
           <a:p>
             <a:pPr lvl="2"/>
             <a:r>
-              <a:rPr lang="en-US"/>
+              <a:rPr lang="en-US" smtClean="0"/>
               <a:t>Third level</a:t>
             </a:r>
           </a:p>
           <a:p>
             <a:pPr lvl="3"/>
             <a:r>
-              <a:rPr lang="en-US"/>
+              <a:rPr lang="en-US" smtClean="0"/>
               <a:t>Fourth level</a:t>
             </a:r>
           </a:p>
           <a:p>
             <a:pPr lvl="4"/>
             <a:r>
-              <a:rPr lang="en-US"/>
+              <a:rPr lang="en-US" smtClean="0"/>
               <a:t>Fifth level</a:t>
             </a:r>
+            <a:endParaRPr lang="en-US"/>
           </a:p>
         </p:txBody>
       </p:sp>
@@ -665,7 +655,7 @@
           <a:p>
             <a:fld id="{5BCAD085-E8A6-8845-BD4E-CB4CCA059FC4}" type="datetimeFigureOut">
               <a:rPr lang="en-US" smtClean="0"/>
-              <a:t>4/14/26</a:t>
+              <a:t>1/27/13</a:t>
             </a:fld>
             <a:endParaRPr lang="en-US"/>
           </a:p>
@@ -759,9 +749,10 @@
           <a:lstStyle/>
           <a:p>
             <a:r>
-              <a:rPr lang="en-US"/>
+              <a:rPr lang="en-US" smtClean="0"/>
               <a:t>Click to edit Master title style</a:t>
             </a:r>
+            <a:endParaRPr lang="en-US"/>
           </a:p>
         </p:txBody>
       </p:sp>
@@ -782,37 +773,38 @@
           <a:p>
             <a:pPr lvl="0"/>
             <a:r>
-              <a:rPr lang="en-US"/>
+              <a:rPr lang="en-US" smtClean="0"/>
               <a:t>Click to edit Master text styles</a:t>
             </a:r>
           </a:p>
           <a:p>
             <a:pPr lvl="1"/>
             <a:r>
-              <a:rPr lang="en-US"/>
+              <a:rPr lang="en-US" smtClean="0"/>
               <a:t>Second level</a:t>
             </a:r>
           </a:p>
           <a:p>
             <a:pPr lvl="2"/>
             <a:r>
-              <a:rPr lang="en-US"/>
+              <a:rPr lang="en-US" smtClean="0"/>
               <a:t>Third level</a:t>
             </a:r>
           </a:p>
           <a:p>
             <a:pPr lvl="3"/>
             <a:r>
-              <a:rPr lang="en-US"/>
+              <a:rPr lang="en-US" smtClean="0"/>
               <a:t>Fourth level</a:t>
             </a:r>
           </a:p>
           <a:p>
             <a:pPr lvl="4"/>
             <a:r>
-              <a:rPr lang="en-US"/>
+              <a:rPr lang="en-US" smtClean="0"/>
               <a:t>Fifth level</a:t>
             </a:r>
+            <a:endParaRPr lang="en-US"/>
           </a:p>
         </p:txBody>
       </p:sp>
@@ -833,7 +825,7 @@
           <a:p>
             <a:fld id="{5BCAD085-E8A6-8845-BD4E-CB4CCA059FC4}" type="datetimeFigureOut">
               <a:rPr lang="en-US" smtClean="0"/>
-              <a:t>4/14/26</a:t>
+              <a:t>1/27/13</a:t>
             </a:fld>
             <a:endParaRPr lang="en-US"/>
           </a:p>
@@ -936,9 +928,10 @@
           </a:lstStyle>
           <a:p>
             <a:r>
-              <a:rPr lang="en-US"/>
+              <a:rPr lang="en-US" smtClean="0"/>
               <a:t>Click to edit Master title style</a:t>
             </a:r>
+            <a:endParaRPr lang="en-US"/>
           </a:p>
         </p:txBody>
       </p:sp>
@@ -1055,7 +1048,7 @@
           <a:p>
             <a:pPr lvl="0"/>
             <a:r>
-              <a:rPr lang="en-US"/>
+              <a:rPr lang="en-US" smtClean="0"/>
               <a:t>Click to edit Master text styles</a:t>
             </a:r>
           </a:p>
@@ -1078,7 +1071,7 @@
           <a:p>
             <a:fld id="{5BCAD085-E8A6-8845-BD4E-CB4CCA059FC4}" type="datetimeFigureOut">
               <a:rPr lang="en-US" smtClean="0"/>
-              <a:t>4/14/26</a:t>
+              <a:t>1/27/13</a:t>
             </a:fld>
             <a:endParaRPr lang="en-US"/>
           </a:p>
@@ -1172,9 +1165,10 @@
           <a:lstStyle/>
           <a:p>
             <a:r>
-              <a:rPr lang="en-US"/>
+              <a:rPr lang="en-US" smtClean="0"/>
               <a:t>Click to edit Master title style</a:t>
             </a:r>
+            <a:endParaRPr lang="en-US"/>
           </a:p>
         </p:txBody>
       </p:sp>
@@ -1228,37 +1222,38 @@
           <a:p>
             <a:pPr lvl="0"/>
             <a:r>
-              <a:rPr lang="en-US"/>
+              <a:rPr lang="en-US" smtClean="0"/>
               <a:t>Click to edit Master text styles</a:t>
             </a:r>
           </a:p>
           <a:p>
             <a:pPr lvl="1"/>
             <a:r>
-              <a:rPr lang="en-US"/>
+              <a:rPr lang="en-US" smtClean="0"/>
               <a:t>Second level</a:t>
             </a:r>
           </a:p>
           <a:p>
             <a:pPr lvl="2"/>
             <a:r>
-              <a:rPr lang="en-US"/>
+              <a:rPr lang="en-US" smtClean="0"/>
               <a:t>Third level</a:t>
             </a:r>
           </a:p>
           <a:p>
             <a:pPr lvl="3"/>
             <a:r>
-              <a:rPr lang="en-US"/>
+              <a:rPr lang="en-US" smtClean="0"/>
               <a:t>Fourth level</a:t>
             </a:r>
           </a:p>
           <a:p>
             <a:pPr lvl="4"/>
             <a:r>
-              <a:rPr lang="en-US"/>
+              <a:rPr lang="en-US" smtClean="0"/>
               <a:t>Fifth level</a:t>
             </a:r>
+            <a:endParaRPr lang="en-US"/>
           </a:p>
         </p:txBody>
       </p:sp>
@@ -1312,37 +1307,38 @@
           <a:p>
             <a:pPr lvl="0"/>
             <a:r>
-              <a:rPr lang="en-US"/>
+              <a:rPr lang="en-US" smtClean="0"/>
               <a:t>Click to edit Master text styles</a:t>
             </a:r>
           </a:p>
           <a:p>
             <a:pPr lvl="1"/>
             <a:r>
-              <a:rPr lang="en-US"/>
+              <a:rPr lang="en-US" smtClean="0"/>
               <a:t>Second level</a:t>
             </a:r>
           </a:p>
           <a:p>
             <a:pPr lvl="2"/>
             <a:r>
-              <a:rPr lang="en-US"/>
+              <a:rPr lang="en-US" smtClean="0"/>
               <a:t>Third level</a:t>
             </a:r>
           </a:p>
           <a:p>
             <a:pPr lvl="3"/>
             <a:r>
-              <a:rPr lang="en-US"/>
+              <a:rPr lang="en-US" smtClean="0"/>
               <a:t>Fourth level</a:t>
             </a:r>
           </a:p>
           <a:p>
             <a:pPr lvl="4"/>
             <a:r>
-              <a:rPr lang="en-US"/>
+              <a:rPr lang="en-US" smtClean="0"/>
               <a:t>Fifth level</a:t>
             </a:r>
+            <a:endParaRPr lang="en-US"/>
           </a:p>
         </p:txBody>
       </p:sp>
@@ -1363,7 +1359,7 @@
           <a:p>
             <a:fld id="{5BCAD085-E8A6-8845-BD4E-CB4CCA059FC4}" type="datetimeFigureOut">
               <a:rPr lang="en-US" smtClean="0"/>
-              <a:t>4/14/26</a:t>
+              <a:t>1/27/13</a:t>
             </a:fld>
             <a:endParaRPr lang="en-US"/>
           </a:p>
@@ -1461,9 +1457,10 @@
           </a:lstStyle>
           <a:p>
             <a:r>
-              <a:rPr lang="en-US"/>
+              <a:rPr lang="en-US" smtClean="0"/>
               <a:t>Click to edit Master title style</a:t>
             </a:r>
+            <a:endParaRPr lang="en-US"/>
           </a:p>
         </p:txBody>
       </p:sp>
@@ -1526,7 +1523,7 @@
           <a:p>
             <a:pPr lvl="0"/>
             <a:r>
-              <a:rPr lang="en-US"/>
+              <a:rPr lang="en-US" smtClean="0"/>
               <a:t>Click to edit Master text styles</a:t>
             </a:r>
           </a:p>
@@ -1582,37 +1579,38 @@
           <a:p>
             <a:pPr lvl="0"/>
             <a:r>
-              <a:rPr lang="en-US"/>
+              <a:rPr lang="en-US" smtClean="0"/>
               <a:t>Click to edit Master text styles</a:t>
             </a:r>
           </a:p>
           <a:p>
             <a:pPr lvl="1"/>
             <a:r>
-              <a:rPr lang="en-US"/>
+              <a:rPr lang="en-US" smtClean="0"/>
               <a:t>Second level</a:t>
             </a:r>
           </a:p>
           <a:p>
             <a:pPr lvl="2"/>
             <a:r>
-              <a:rPr lang="en-US"/>
+              <a:rPr lang="en-US" smtClean="0"/>
               <a:t>Third level</a:t>
             </a:r>
           </a:p>
           <a:p>
             <a:pPr lvl="3"/>
             <a:r>
-              <a:rPr lang="en-US"/>
+              <a:rPr lang="en-US" smtClean="0"/>
               <a:t>Fourth level</a:t>
             </a:r>
           </a:p>
           <a:p>
             <a:pPr lvl="4"/>
             <a:r>
-              <a:rPr lang="en-US"/>
+              <a:rPr lang="en-US" smtClean="0"/>
               <a:t>Fifth level</a:t>
             </a:r>
+            <a:endParaRPr lang="en-US"/>
           </a:p>
         </p:txBody>
       </p:sp>
@@ -1675,7 +1673,7 @@
           <a:p>
             <a:pPr lvl="0"/>
             <a:r>
-              <a:rPr lang="en-US"/>
+              <a:rPr lang="en-US" smtClean="0"/>
               <a:t>Click to edit Master text styles</a:t>
             </a:r>
           </a:p>
@@ -1731,37 +1729,38 @@
           <a:p>
             <a:pPr lvl="0"/>
             <a:r>
-              <a:rPr lang="en-US"/>
+              <a:rPr lang="en-US" smtClean="0"/>
               <a:t>Click to edit Master text styles</a:t>
             </a:r>
           </a:p>
           <a:p>
             <a:pPr lvl="1"/>
             <a:r>
-              <a:rPr lang="en-US"/>
+              <a:rPr lang="en-US" smtClean="0"/>
               <a:t>Second level</a:t>
             </a:r>
           </a:p>
           <a:p>
             <a:pPr lvl="2"/>
             <a:r>
-              <a:rPr lang="en-US"/>
+              <a:rPr lang="en-US" smtClean="0"/>
               <a:t>Third level</a:t>
             </a:r>
           </a:p>
           <a:p>
             <a:pPr lvl="3"/>
             <a:r>
-              <a:rPr lang="en-US"/>
+              <a:rPr lang="en-US" smtClean="0"/>
               <a:t>Fourth level</a:t>
             </a:r>
           </a:p>
           <a:p>
             <a:pPr lvl="4"/>
             <a:r>
-              <a:rPr lang="en-US"/>
+              <a:rPr lang="en-US" smtClean="0"/>
               <a:t>Fifth level</a:t>
             </a:r>
+            <a:endParaRPr lang="en-US"/>
           </a:p>
         </p:txBody>
       </p:sp>
@@ -1782,7 +1781,7 @@
           <a:p>
             <a:fld id="{5BCAD085-E8A6-8845-BD4E-CB4CCA059FC4}" type="datetimeFigureOut">
               <a:rPr lang="en-US" smtClean="0"/>
-              <a:t>4/14/26</a:t>
+              <a:t>1/27/13</a:t>
             </a:fld>
             <a:endParaRPr lang="en-US"/>
           </a:p>
@@ -1876,9 +1875,10 @@
           <a:lstStyle/>
           <a:p>
             <a:r>
-              <a:rPr lang="en-US"/>
+              <a:rPr lang="en-US" smtClean="0"/>
               <a:t>Click to edit Master title style</a:t>
             </a:r>
+            <a:endParaRPr lang="en-US"/>
           </a:p>
         </p:txBody>
       </p:sp>
@@ -1899,7 +1899,7 @@
           <a:p>
             <a:fld id="{5BCAD085-E8A6-8845-BD4E-CB4CCA059FC4}" type="datetimeFigureOut">
               <a:rPr lang="en-US" smtClean="0"/>
-              <a:t>4/14/26</a:t>
+              <a:t>1/27/13</a:t>
             </a:fld>
             <a:endParaRPr lang="en-US"/>
           </a:p>
@@ -1994,7 +1994,7 @@
           <a:p>
             <a:fld id="{5BCAD085-E8A6-8845-BD4E-CB4CCA059FC4}" type="datetimeFigureOut">
               <a:rPr lang="en-US" smtClean="0"/>
-              <a:t>4/14/26</a:t>
+              <a:t>1/27/13</a:t>
             </a:fld>
             <a:endParaRPr lang="en-US"/>
           </a:p>
@@ -2097,9 +2097,10 @@
           </a:lstStyle>
           <a:p>
             <a:r>
-              <a:rPr lang="en-US"/>
+              <a:rPr lang="en-US" smtClean="0"/>
               <a:t>Click to edit Master title style</a:t>
             </a:r>
+            <a:endParaRPr lang="en-US"/>
           </a:p>
         </p:txBody>
       </p:sp>
@@ -2153,37 +2154,38 @@
           <a:p>
             <a:pPr lvl="0"/>
             <a:r>
-              <a:rPr lang="en-US"/>
+              <a:rPr lang="en-US" smtClean="0"/>
               <a:t>Click to edit Master text styles</a:t>
             </a:r>
           </a:p>
           <a:p>
             <a:pPr lvl="1"/>
             <a:r>
-              <a:rPr lang="en-US"/>
+              <a:rPr lang="en-US" smtClean="0"/>
               <a:t>Second level</a:t>
             </a:r>
           </a:p>
           <a:p>
             <a:pPr lvl="2"/>
             <a:r>
-              <a:rPr lang="en-US"/>
+              <a:rPr lang="en-US" smtClean="0"/>
               <a:t>Third level</a:t>
             </a:r>
           </a:p>
           <a:p>
             <a:pPr lvl="3"/>
             <a:r>
-              <a:rPr lang="en-US"/>
+              <a:rPr lang="en-US" smtClean="0"/>
               <a:t>Fourth level</a:t>
             </a:r>
           </a:p>
           <a:p>
             <a:pPr lvl="4"/>
             <a:r>
-              <a:rPr lang="en-US"/>
+              <a:rPr lang="en-US" smtClean="0"/>
               <a:t>Fifth level</a:t>
             </a:r>
+            <a:endParaRPr lang="en-US"/>
           </a:p>
         </p:txBody>
       </p:sp>
@@ -2246,7 +2248,7 @@
           <a:p>
             <a:pPr lvl="0"/>
             <a:r>
-              <a:rPr lang="en-US"/>
+              <a:rPr lang="en-US" smtClean="0"/>
               <a:t>Click to edit Master text styles</a:t>
             </a:r>
           </a:p>
@@ -2269,7 +2271,7 @@
           <a:p>
             <a:fld id="{5BCAD085-E8A6-8845-BD4E-CB4CCA059FC4}" type="datetimeFigureOut">
               <a:rPr lang="en-US" smtClean="0"/>
-              <a:t>4/14/26</a:t>
+              <a:t>1/27/13</a:t>
             </a:fld>
             <a:endParaRPr lang="en-US"/>
           </a:p>
@@ -2372,9 +2374,10 @@
           </a:lstStyle>
           <a:p>
             <a:r>
-              <a:rPr lang="en-US"/>
+              <a:rPr lang="en-US" smtClean="0"/>
               <a:t>Click to edit Master title style</a:t>
             </a:r>
+            <a:endParaRPr lang="en-US"/>
           </a:p>
         </p:txBody>
       </p:sp>
@@ -2498,7 +2501,7 @@
           <a:p>
             <a:pPr lvl="0"/>
             <a:r>
-              <a:rPr lang="en-US"/>
+              <a:rPr lang="en-US" smtClean="0"/>
               <a:t>Click to edit Master text styles</a:t>
             </a:r>
           </a:p>
@@ -2521,7 +2524,7 @@
           <a:p>
             <a:fld id="{5BCAD085-E8A6-8845-BD4E-CB4CCA059FC4}" type="datetimeFigureOut">
               <a:rPr lang="en-US" smtClean="0"/>
-              <a:t>4/14/26</a:t>
+              <a:t>1/27/13</a:t>
             </a:fld>
             <a:endParaRPr lang="en-US"/>
           </a:p>
@@ -2630,9 +2633,10 @@
           <a:lstStyle/>
           <a:p>
             <a:r>
-              <a:rPr lang="en-US"/>
+              <a:rPr lang="en-US" smtClean="0"/>
               <a:t>Click to edit Master title style</a:t>
             </a:r>
+            <a:endParaRPr lang="en-US"/>
           </a:p>
         </p:txBody>
       </p:sp>
@@ -2663,37 +2667,38 @@
           <a:p>
             <a:pPr lvl="0"/>
             <a:r>
-              <a:rPr lang="en-US"/>
+              <a:rPr lang="en-US" smtClean="0"/>
               <a:t>Click to edit Master text styles</a:t>
             </a:r>
           </a:p>
           <a:p>
             <a:pPr lvl="1"/>
             <a:r>
-              <a:rPr lang="en-US"/>
+              <a:rPr lang="en-US" smtClean="0"/>
               <a:t>Second level</a:t>
             </a:r>
           </a:p>
           <a:p>
             <a:pPr lvl="2"/>
             <a:r>
-              <a:rPr lang="en-US"/>
+              <a:rPr lang="en-US" smtClean="0"/>
               <a:t>Third level</a:t>
             </a:r>
           </a:p>
           <a:p>
             <a:pPr lvl="3"/>
             <a:r>
-              <a:rPr lang="en-US"/>
+              <a:rPr lang="en-US" smtClean="0"/>
               <a:t>Fourth level</a:t>
             </a:r>
           </a:p>
           <a:p>
             <a:pPr lvl="4"/>
             <a:r>
-              <a:rPr lang="en-US"/>
+              <a:rPr lang="en-US" smtClean="0"/>
               <a:t>Fifth level</a:t>
             </a:r>
+            <a:endParaRPr lang="en-US"/>
           </a:p>
         </p:txBody>
       </p:sp>
@@ -2732,7 +2737,7 @@
           <a:p>
             <a:fld id="{5BCAD085-E8A6-8845-BD4E-CB4CCA059FC4}" type="datetimeFigureOut">
               <a:rPr lang="en-US" smtClean="0"/>
-              <a:t>4/14/26</a:t>
+              <a:t>1/27/13</a:t>
             </a:fld>
             <a:endParaRPr lang="en-US"/>
           </a:p>
@@ -3091,7 +3096,7 @@
 </file>
 
 <file path=ppt/slides/slide1.xml><?xml version="1.0" encoding="utf-8"?>
-<p:sld xmlns:a="http://schemas.openxmlformats.org/drawingml/2006/main" xmlns:r="http://schemas.openxmlformats.org/officeDocument/2006/relationships" xmlns:p="http://schemas.openxmlformats.org/presentationml/2006/main">
+<p:sld xmlns:a="http://schemas.openxmlformats.org/drawingml/2006/main" xmlns:p="http://schemas.openxmlformats.org/presentationml/2006/main" xmlns:r="http://schemas.openxmlformats.org/officeDocument/2006/relationships">
   <p:cSld>
     <p:bg>
       <p:bgPr>
@@ -3107,14 +3112,7 @@
         <p:cNvGrpSpPr/>
         <p:nvPr/>
       </p:nvGrpSpPr>
-      <p:grpSpPr>
-        <a:xfrm>
-          <a:off x="0" y="0"/>
-          <a:ext cx="0" cy="0"/>
-          <a:chOff x="0" y="0"/>
-          <a:chExt cx="0" cy="0"/>
-        </a:xfrm>
-      </p:grpSpPr>
+      <p:grpSpPr/>
       <p:sp>
         <p:nvSpPr>
           <p:cNvPr id="2" name="Rectangle 1"/>
@@ -3155,7 +3153,6 @@
           <a:lstStyle/>
           <a:p>
             <a:pPr algn="ctr"/>
-            <a:endParaRPr/>
           </a:p>
         </p:txBody>
       </p:sp>
@@ -3316,7 +3313,7 @@
 </file>
 
 <file path=ppt/slides/slide10.xml><?xml version="1.0" encoding="utf-8"?>
-<p:sld xmlns:a="http://schemas.openxmlformats.org/drawingml/2006/main" xmlns:r="http://schemas.openxmlformats.org/officeDocument/2006/relationships" xmlns:p="http://schemas.openxmlformats.org/presentationml/2006/main">
+<p:sld xmlns:a="http://schemas.openxmlformats.org/drawingml/2006/main" xmlns:p="http://schemas.openxmlformats.org/presentationml/2006/main" xmlns:r="http://schemas.openxmlformats.org/officeDocument/2006/relationships">
   <p:cSld>
     <p:bg>
       <p:bgPr>
@@ -3332,14 +3329,7 @@
         <p:cNvGrpSpPr/>
         <p:nvPr/>
       </p:nvGrpSpPr>
-      <p:grpSpPr>
-        <a:xfrm>
-          <a:off x="0" y="0"/>
-          <a:ext cx="0" cy="0"/>
-          <a:chOff x="0" y="0"/>
-          <a:chExt cx="0" cy="0"/>
-        </a:xfrm>
-      </p:grpSpPr>
+      <p:grpSpPr/>
       <p:sp>
         <p:nvSpPr>
           <p:cNvPr id="2" name="Rectangle 1"/>
@@ -3380,7 +3370,6 @@
           <a:lstStyle/>
           <a:p>
             <a:pPr algn="ctr"/>
-            <a:endParaRPr/>
           </a:p>
         </p:txBody>
       </p:sp>
@@ -3806,7 +3795,7 @@
 </file>
 
 <file path=ppt/slides/slide11.xml><?xml version="1.0" encoding="utf-8"?>
-<p:sld xmlns:a="http://schemas.openxmlformats.org/drawingml/2006/main" xmlns:r="http://schemas.openxmlformats.org/officeDocument/2006/relationships" xmlns:p="http://schemas.openxmlformats.org/presentationml/2006/main">
+<p:sld xmlns:a="http://schemas.openxmlformats.org/drawingml/2006/main" xmlns:p="http://schemas.openxmlformats.org/presentationml/2006/main" xmlns:r="http://schemas.openxmlformats.org/officeDocument/2006/relationships">
   <p:cSld>
     <p:bg>
       <p:bgPr>
@@ -3822,14 +3811,7 @@
         <p:cNvGrpSpPr/>
         <p:nvPr/>
       </p:nvGrpSpPr>
-      <p:grpSpPr>
-        <a:xfrm>
-          <a:off x="0" y="0"/>
-          <a:ext cx="0" cy="0"/>
-          <a:chOff x="0" y="0"/>
-          <a:chExt cx="0" cy="0"/>
-        </a:xfrm>
-      </p:grpSpPr>
+      <p:grpSpPr/>
       <p:sp>
         <p:nvSpPr>
           <p:cNvPr id="2" name="Rectangle 1"/>
@@ -3870,7 +3852,6 @@
           <a:lstStyle/>
           <a:p>
             <a:pPr algn="ctr"/>
-            <a:endParaRPr/>
           </a:p>
         </p:txBody>
       </p:sp>
@@ -4105,7 +4086,6 @@
           <a:lstStyle/>
           <a:p>
             <a:pPr algn="ctr"/>
-            <a:endParaRPr/>
           </a:p>
         </p:txBody>
       </p:sp>
@@ -4237,7 +4217,6 @@
           <a:lstStyle/>
           <a:p>
             <a:pPr algn="ctr"/>
-            <a:endParaRPr/>
           </a:p>
         </p:txBody>
       </p:sp>
@@ -4388,7 +4367,6 @@
           <a:lstStyle/>
           <a:p>
             <a:pPr algn="ctr"/>
-            <a:endParaRPr/>
           </a:p>
         </p:txBody>
       </p:sp>
@@ -4523,7 +4501,6 @@
           <a:lstStyle/>
           <a:p>
             <a:pPr algn="ctr"/>
-            <a:endParaRPr/>
           </a:p>
         </p:txBody>
       </p:sp>
@@ -4639,7 +4616,6 @@
           <a:lstStyle/>
           <a:p>
             <a:pPr algn="ctr"/>
-            <a:endParaRPr/>
           </a:p>
         </p:txBody>
       </p:sp>
@@ -4692,7 +4668,7 @@
 </file>
 
 <file path=ppt/slides/slide12.xml><?xml version="1.0" encoding="utf-8"?>
-<p:sld xmlns:a="http://schemas.openxmlformats.org/drawingml/2006/main" xmlns:r="http://schemas.openxmlformats.org/officeDocument/2006/relationships" xmlns:p="http://schemas.openxmlformats.org/presentationml/2006/main">
+<p:sld xmlns:a="http://schemas.openxmlformats.org/drawingml/2006/main" xmlns:p="http://schemas.openxmlformats.org/presentationml/2006/main" xmlns:r="http://schemas.openxmlformats.org/officeDocument/2006/relationships">
   <p:cSld>
     <p:bg>
       <p:bgPr>
@@ -4708,14 +4684,7 @@
         <p:cNvGrpSpPr/>
         <p:nvPr/>
       </p:nvGrpSpPr>
-      <p:grpSpPr>
-        <a:xfrm>
-          <a:off x="0" y="0"/>
-          <a:ext cx="0" cy="0"/>
-          <a:chOff x="0" y="0"/>
-          <a:chExt cx="0" cy="0"/>
-        </a:xfrm>
-      </p:grpSpPr>
+      <p:grpSpPr/>
       <p:sp>
         <p:nvSpPr>
           <p:cNvPr id="2" name="Rectangle 1"/>
@@ -4756,7 +4725,6 @@
           <a:lstStyle/>
           <a:p>
             <a:pPr algn="ctr"/>
-            <a:endParaRPr/>
           </a:p>
         </p:txBody>
       </p:sp>
@@ -5151,7 +5119,7 @@
 </file>
 
 <file path=ppt/slides/slide13.xml><?xml version="1.0" encoding="utf-8"?>
-<p:sld xmlns:a="http://schemas.openxmlformats.org/drawingml/2006/main" xmlns:r="http://schemas.openxmlformats.org/officeDocument/2006/relationships" xmlns:p="http://schemas.openxmlformats.org/presentationml/2006/main">
+<p:sld xmlns:a="http://schemas.openxmlformats.org/drawingml/2006/main" xmlns:p="http://schemas.openxmlformats.org/presentationml/2006/main" xmlns:r="http://schemas.openxmlformats.org/officeDocument/2006/relationships">
   <p:cSld>
     <p:bg>
       <p:bgPr>
@@ -5167,14 +5135,7 @@
         <p:cNvGrpSpPr/>
         <p:nvPr/>
       </p:nvGrpSpPr>
-      <p:grpSpPr>
-        <a:xfrm>
-          <a:off x="0" y="0"/>
-          <a:ext cx="0" cy="0"/>
-          <a:chOff x="0" y="0"/>
-          <a:chExt cx="0" cy="0"/>
-        </a:xfrm>
-      </p:grpSpPr>
+      <p:grpSpPr/>
       <p:sp>
         <p:nvSpPr>
           <p:cNvPr id="2" name="Rectangle 1"/>
@@ -5215,7 +5176,6 @@
           <a:lstStyle/>
           <a:p>
             <a:pPr algn="ctr"/>
-            <a:endParaRPr/>
           </a:p>
         </p:txBody>
       </p:sp>
@@ -5487,7 +5447,6 @@
           <a:lstStyle/>
           <a:p>
             <a:pPr algn="ctr"/>
-            <a:endParaRPr/>
           </a:p>
         </p:txBody>
       </p:sp>
@@ -5536,7 +5495,7 @@
 </file>
 
 <file path=ppt/slides/slide14.xml><?xml version="1.0" encoding="utf-8"?>
-<p:sld xmlns:a="http://schemas.openxmlformats.org/drawingml/2006/main" xmlns:r="http://schemas.openxmlformats.org/officeDocument/2006/relationships" xmlns:p="http://schemas.openxmlformats.org/presentationml/2006/main">
+<p:sld xmlns:a="http://schemas.openxmlformats.org/drawingml/2006/main" xmlns:p="http://schemas.openxmlformats.org/presentationml/2006/main" xmlns:r="http://schemas.openxmlformats.org/officeDocument/2006/relationships">
   <p:cSld>
     <p:bg>
       <p:bgPr>
@@ -5552,14 +5511,7 @@
         <p:cNvGrpSpPr/>
         <p:nvPr/>
       </p:nvGrpSpPr>
-      <p:grpSpPr>
-        <a:xfrm>
-          <a:off x="0" y="0"/>
-          <a:ext cx="0" cy="0"/>
-          <a:chOff x="0" y="0"/>
-          <a:chExt cx="0" cy="0"/>
-        </a:xfrm>
-      </p:grpSpPr>
+      <p:grpSpPr/>
       <p:sp>
         <p:nvSpPr>
           <p:cNvPr id="2" name="Rectangle 1"/>
@@ -5600,7 +5552,6 @@
           <a:lstStyle/>
           <a:p>
             <a:pPr algn="ctr"/>
-            <a:endParaRPr/>
           </a:p>
         </p:txBody>
       </p:sp>
@@ -5680,7 +5631,6 @@
           <a:lstStyle/>
           <a:p>
             <a:pPr algn="ctr"/>
-            <a:endParaRPr/>
           </a:p>
         </p:txBody>
       </p:sp>
@@ -5760,7 +5710,6 @@
           <a:lstStyle/>
           <a:p>
             <a:pPr algn="ctr"/>
-            <a:endParaRPr/>
           </a:p>
         </p:txBody>
       </p:sp>
@@ -5840,7 +5789,6 @@
           <a:lstStyle/>
           <a:p>
             <a:pPr algn="ctr"/>
-            <a:endParaRPr/>
           </a:p>
         </p:txBody>
       </p:sp>
@@ -6290,7 +6238,7 @@
 </file>
 
 <file path=ppt/slides/slide15.xml><?xml version="1.0" encoding="utf-8"?>
-<p:sld xmlns:a="http://schemas.openxmlformats.org/drawingml/2006/main" xmlns:r="http://schemas.openxmlformats.org/officeDocument/2006/relationships" xmlns:p="http://schemas.openxmlformats.org/presentationml/2006/main">
+<p:sld xmlns:a="http://schemas.openxmlformats.org/drawingml/2006/main" xmlns:p="http://schemas.openxmlformats.org/presentationml/2006/main" xmlns:r="http://schemas.openxmlformats.org/officeDocument/2006/relationships">
   <p:cSld>
     <p:bg>
       <p:bgPr>
@@ -6306,14 +6254,7 @@
         <p:cNvGrpSpPr/>
         <p:nvPr/>
       </p:nvGrpSpPr>
-      <p:grpSpPr>
-        <a:xfrm>
-          <a:off x="0" y="0"/>
-          <a:ext cx="0" cy="0"/>
-          <a:chOff x="0" y="0"/>
-          <a:chExt cx="0" cy="0"/>
-        </a:xfrm>
-      </p:grpSpPr>
+      <p:grpSpPr/>
       <p:sp>
         <p:nvSpPr>
           <p:cNvPr id="2" name="Rectangle 1"/>
@@ -6354,7 +6295,6 @@
           <a:lstStyle/>
           <a:p>
             <a:pPr algn="ctr"/>
-            <a:endParaRPr/>
           </a:p>
         </p:txBody>
       </p:sp>
@@ -6470,7 +6410,6 @@
           <a:lstStyle/>
           <a:p>
             <a:pPr algn="ctr"/>
-            <a:endParaRPr/>
           </a:p>
         </p:txBody>
       </p:sp>
@@ -6550,7 +6489,6 @@
           <a:lstStyle/>
           <a:p>
             <a:pPr algn="ctr"/>
-            <a:endParaRPr/>
           </a:p>
         </p:txBody>
       </p:sp>
@@ -6630,7 +6568,6 @@
           <a:lstStyle/>
           <a:p>
             <a:pPr algn="ctr"/>
-            <a:endParaRPr/>
           </a:p>
         </p:txBody>
       </p:sp>
@@ -6710,7 +6647,6 @@
           <a:lstStyle/>
           <a:p>
             <a:pPr algn="ctr"/>
-            <a:endParaRPr/>
           </a:p>
         </p:txBody>
       </p:sp>
@@ -6722,7 +6658,7 @@
         </p:nvSpPr>
         <p:spPr>
           <a:xfrm>
-            <a:off x="1463040" y="2121408"/>
+            <a:off x="1463040" y="2167128"/>
             <a:ext cx="3474720" cy="365760"/>
           </a:xfrm>
           <a:prstGeom prst="rect">
@@ -6745,7 +6681,6 @@
               </a:defRPr>
             </a:pPr>
             <a:r>
-              <a:rPr dirty="0"/>
               <a:t>Phase 1: Nominations, Voting, Paycom, Badge ID Auth, SSO</a:t>
             </a:r>
           </a:p>
@@ -6791,7 +6726,6 @@
           <a:lstStyle/>
           <a:p>
             <a:pPr algn="ctr"/>
-            <a:endParaRPr/>
           </a:p>
         </p:txBody>
       </p:sp>
@@ -6871,7 +6805,6 @@
           <a:lstStyle/>
           <a:p>
             <a:pPr algn="ctr"/>
-            <a:endParaRPr/>
           </a:p>
         </p:txBody>
       </p:sp>
@@ -6951,7 +6884,6 @@
           <a:lstStyle/>
           <a:p>
             <a:pPr algn="ctr"/>
-            <a:endParaRPr/>
           </a:p>
         </p:txBody>
       </p:sp>
@@ -6963,7 +6895,7 @@
         </p:nvSpPr>
         <p:spPr>
           <a:xfrm>
-            <a:off x="1463040" y="2542032"/>
+            <a:off x="1463040" y="2578608"/>
             <a:ext cx="3474720" cy="365760"/>
           </a:xfrm>
           <a:prstGeom prst="rect">
@@ -6986,7 +6918,6 @@
               </a:defRPr>
             </a:pPr>
             <a:r>
-              <a:rPr dirty="0"/>
               <a:t>Phase 2: Dashboards, Engagement Modules, Dark Mode, Notifications</a:t>
             </a:r>
           </a:p>
@@ -7032,7 +6963,6 @@
           <a:lstStyle/>
           <a:p>
             <a:pPr algn="ctr"/>
-            <a:endParaRPr/>
           </a:p>
         </p:txBody>
       </p:sp>
@@ -7112,7 +7042,6 @@
           <a:lstStyle/>
           <a:p>
             <a:pPr algn="ctr"/>
-            <a:endParaRPr/>
           </a:p>
         </p:txBody>
       </p:sp>
@@ -7192,7 +7121,6 @@
           <a:lstStyle/>
           <a:p>
             <a:pPr algn="ctr"/>
-            <a:endParaRPr/>
           </a:p>
         </p:txBody>
       </p:sp>
@@ -7204,7 +7132,7 @@
         </p:nvSpPr>
         <p:spPr>
           <a:xfrm>
-            <a:off x="1463040" y="2944720"/>
+            <a:off x="1463040" y="2990088"/>
             <a:ext cx="3474720" cy="365760"/>
           </a:xfrm>
           <a:prstGeom prst="rect">
@@ -7227,7 +7155,6 @@
               </a:defRPr>
             </a:pPr>
             <a:r>
-              <a:rPr dirty="0"/>
               <a:t>Phase 3: Marketplace, Café Redemption, QR Store, Gift Cards</a:t>
             </a:r>
           </a:p>
@@ -7273,7 +7200,6 @@
           <a:lstStyle/>
           <a:p>
             <a:pPr algn="ctr"/>
-            <a:endParaRPr/>
           </a:p>
         </p:txBody>
       </p:sp>
@@ -7353,7 +7279,6 @@
           <a:lstStyle/>
           <a:p>
             <a:pPr algn="ctr"/>
-            <a:endParaRPr/>
           </a:p>
         </p:txBody>
       </p:sp>
@@ -7433,7 +7358,6 @@
           <a:lstStyle/>
           <a:p>
             <a:pPr algn="ctr"/>
-            <a:endParaRPr/>
           </a:p>
         </p:txBody>
       </p:sp>
@@ -7513,7 +7437,6 @@
           <a:lstStyle/>
           <a:p>
             <a:pPr algn="ctr"/>
-            <a:endParaRPr/>
           </a:p>
         </p:txBody>
       </p:sp>
@@ -7593,7 +7516,6 @@
           <a:lstStyle/>
           <a:p>
             <a:pPr algn="ctr"/>
-            <a:endParaRPr/>
           </a:p>
         </p:txBody>
       </p:sp>
@@ -7848,7 +7770,6 @@
           <a:lstStyle/>
           <a:p>
             <a:pPr algn="ctr"/>
-            <a:endParaRPr/>
           </a:p>
         </p:txBody>
       </p:sp>
@@ -7964,7 +7885,6 @@
           <a:lstStyle/>
           <a:p>
             <a:pPr algn="ctr"/>
-            <a:endParaRPr/>
           </a:p>
         </p:txBody>
       </p:sp>
@@ -8013,7 +7933,7 @@
 </file>
 
 <file path=ppt/slides/slide16.xml><?xml version="1.0" encoding="utf-8"?>
-<p:sld xmlns:a="http://schemas.openxmlformats.org/drawingml/2006/main" xmlns:r="http://schemas.openxmlformats.org/officeDocument/2006/relationships" xmlns:p="http://schemas.openxmlformats.org/presentationml/2006/main">
+<p:sld xmlns:a="http://schemas.openxmlformats.org/drawingml/2006/main" xmlns:p="http://schemas.openxmlformats.org/presentationml/2006/main" xmlns:r="http://schemas.openxmlformats.org/officeDocument/2006/relationships">
   <p:cSld>
     <p:bg>
       <p:bgPr>
@@ -8029,14 +7949,7 @@
         <p:cNvGrpSpPr/>
         <p:nvPr/>
       </p:nvGrpSpPr>
-      <p:grpSpPr>
-        <a:xfrm>
-          <a:off x="0" y="0"/>
-          <a:ext cx="0" cy="0"/>
-          <a:chOff x="0" y="0"/>
-          <a:chExt cx="0" cy="0"/>
-        </a:xfrm>
-      </p:grpSpPr>
+      <p:grpSpPr/>
       <p:sp>
         <p:nvSpPr>
           <p:cNvPr id="2" name="Rectangle 1"/>
@@ -8077,7 +7990,6 @@
           <a:lstStyle/>
           <a:p>
             <a:pPr algn="ctr"/>
-            <a:endParaRPr/>
           </a:p>
         </p:txBody>
       </p:sp>
@@ -8193,7 +8105,6 @@
           <a:lstStyle/>
           <a:p>
             <a:pPr algn="ctr"/>
-            <a:endParaRPr/>
           </a:p>
         </p:txBody>
       </p:sp>
@@ -8360,7 +8271,6 @@
           <a:lstStyle/>
           <a:p>
             <a:pPr algn="ctr"/>
-            <a:endParaRPr/>
           </a:p>
         </p:txBody>
       </p:sp>
@@ -8543,7 +8453,6 @@
           <a:lstStyle/>
           <a:p>
             <a:pPr algn="ctr"/>
-            <a:endParaRPr/>
           </a:p>
         </p:txBody>
       </p:sp>
@@ -8659,7 +8568,6 @@
           <a:lstStyle/>
           <a:p>
             <a:pPr algn="ctr"/>
-            <a:endParaRPr/>
           </a:p>
         </p:txBody>
       </p:sp>
@@ -8693,7 +8601,6 @@
                 <a:latin typeface="Calibri"/>
               </a:defRPr>
             </a:pPr>
-            <a:endParaRPr/>
           </a:p>
         </p:txBody>
       </p:sp>
@@ -8737,7 +8644,6 @@
           <a:lstStyle/>
           <a:p>
             <a:pPr algn="ctr"/>
-            <a:endParaRPr/>
           </a:p>
         </p:txBody>
       </p:sp>
@@ -8817,7 +8723,6 @@
           <a:lstStyle/>
           <a:p>
             <a:pPr algn="ctr"/>
-            <a:endParaRPr/>
           </a:p>
         </p:txBody>
       </p:sp>
@@ -8897,7 +8802,6 @@
           <a:lstStyle/>
           <a:p>
             <a:pPr algn="ctr"/>
-            <a:endParaRPr/>
           </a:p>
         </p:txBody>
       </p:sp>
@@ -8977,7 +8881,6 @@
           <a:lstStyle/>
           <a:p>
             <a:pPr algn="ctr"/>
-            <a:endParaRPr/>
           </a:p>
         </p:txBody>
       </p:sp>
@@ -9057,7 +8960,6 @@
           <a:lstStyle/>
           <a:p>
             <a:pPr algn="ctr"/>
-            <a:endParaRPr/>
           </a:p>
         </p:txBody>
       </p:sp>
@@ -9137,7 +9039,6 @@
           <a:lstStyle/>
           <a:p>
             <a:pPr algn="ctr"/>
-            <a:endParaRPr/>
           </a:p>
         </p:txBody>
       </p:sp>
@@ -9217,7 +9118,6 @@
           <a:lstStyle/>
           <a:p>
             <a:pPr algn="ctr"/>
-            <a:endParaRPr/>
           </a:p>
         </p:txBody>
       </p:sp>
@@ -9297,7 +9197,6 @@
           <a:lstStyle/>
           <a:p>
             <a:pPr algn="ctr"/>
-            <a:endParaRPr/>
           </a:p>
         </p:txBody>
       </p:sp>
@@ -9377,7 +9276,6 @@
           <a:lstStyle/>
           <a:p>
             <a:pPr algn="ctr"/>
-            <a:endParaRPr/>
           </a:p>
         </p:txBody>
       </p:sp>
@@ -9457,7 +9355,6 @@
           <a:lstStyle/>
           <a:p>
             <a:pPr algn="ctr"/>
-            <a:endParaRPr/>
           </a:p>
         </p:txBody>
       </p:sp>
@@ -9537,7 +9434,6 @@
           <a:lstStyle/>
           <a:p>
             <a:pPr algn="ctr"/>
-            <a:endParaRPr/>
           </a:p>
         </p:txBody>
       </p:sp>
@@ -9617,7 +9513,6 @@
           <a:lstStyle/>
           <a:p>
             <a:pPr algn="ctr"/>
-            <a:endParaRPr/>
           </a:p>
         </p:txBody>
       </p:sp>
@@ -9697,7 +9592,6 @@
           <a:lstStyle/>
           <a:p>
             <a:pPr algn="ctr"/>
-            <a:endParaRPr/>
           </a:p>
         </p:txBody>
       </p:sp>
@@ -9777,7 +9671,6 @@
           <a:lstStyle/>
           <a:p>
             <a:pPr algn="ctr"/>
-            <a:endParaRPr/>
           </a:p>
         </p:txBody>
       </p:sp>
@@ -9857,7 +9750,6 @@
           <a:lstStyle/>
           <a:p>
             <a:pPr algn="ctr"/>
-            <a:endParaRPr/>
           </a:p>
         </p:txBody>
       </p:sp>
@@ -9937,7 +9829,6 @@
           <a:lstStyle/>
           <a:p>
             <a:pPr algn="ctr"/>
-            <a:endParaRPr/>
           </a:p>
         </p:txBody>
       </p:sp>
@@ -10017,7 +9908,6 @@
           <a:lstStyle/>
           <a:p>
             <a:pPr algn="ctr"/>
-            <a:endParaRPr/>
           </a:p>
         </p:txBody>
       </p:sp>
@@ -10066,7 +9956,7 @@
 </file>
 
 <file path=ppt/slides/slide17.xml><?xml version="1.0" encoding="utf-8"?>
-<p:sld xmlns:a="http://schemas.openxmlformats.org/drawingml/2006/main" xmlns:r="http://schemas.openxmlformats.org/officeDocument/2006/relationships" xmlns:p="http://schemas.openxmlformats.org/presentationml/2006/main">
+<p:sld xmlns:a="http://schemas.openxmlformats.org/drawingml/2006/main" xmlns:p="http://schemas.openxmlformats.org/presentationml/2006/main" xmlns:r="http://schemas.openxmlformats.org/officeDocument/2006/relationships">
   <p:cSld>
     <p:bg>
       <p:bgPr>
@@ -10082,14 +9972,7 @@
         <p:cNvGrpSpPr/>
         <p:nvPr/>
       </p:nvGrpSpPr>
-      <p:grpSpPr>
-        <a:xfrm>
-          <a:off x="0" y="0"/>
-          <a:ext cx="0" cy="0"/>
-          <a:chOff x="0" y="0"/>
-          <a:chExt cx="0" cy="0"/>
-        </a:xfrm>
-      </p:grpSpPr>
+      <p:grpSpPr/>
       <p:sp>
         <p:nvSpPr>
           <p:cNvPr id="2" name="Rectangle 1"/>
@@ -10130,7 +10013,6 @@
           <a:lstStyle/>
           <a:p>
             <a:pPr algn="ctr"/>
-            <a:endParaRPr/>
           </a:p>
         </p:txBody>
       </p:sp>
@@ -10246,7 +10128,6 @@
           <a:lstStyle/>
           <a:p>
             <a:pPr algn="ctr"/>
-            <a:endParaRPr/>
           </a:p>
         </p:txBody>
       </p:sp>
@@ -10326,7 +10207,6 @@
           <a:lstStyle/>
           <a:p>
             <a:pPr algn="ctr"/>
-            <a:endParaRPr/>
           </a:p>
         </p:txBody>
       </p:sp>
@@ -10406,7 +10286,6 @@
           <a:lstStyle/>
           <a:p>
             <a:pPr algn="ctr"/>
-            <a:endParaRPr/>
           </a:p>
         </p:txBody>
       </p:sp>
@@ -10486,7 +10365,6 @@
           <a:lstStyle/>
           <a:p>
             <a:pPr algn="ctr"/>
-            <a:endParaRPr/>
           </a:p>
         </p:txBody>
       </p:sp>
@@ -10566,7 +10444,6 @@
           <a:lstStyle/>
           <a:p>
             <a:pPr algn="ctr"/>
-            <a:endParaRPr/>
           </a:p>
         </p:txBody>
       </p:sp>
@@ -10646,7 +10523,6 @@
           <a:lstStyle/>
           <a:p>
             <a:pPr algn="ctr"/>
-            <a:endParaRPr/>
           </a:p>
         </p:txBody>
       </p:sp>
@@ -10726,7 +10602,6 @@
           <a:lstStyle/>
           <a:p>
             <a:pPr algn="ctr"/>
-            <a:endParaRPr/>
           </a:p>
         </p:txBody>
       </p:sp>
@@ -10806,7 +10681,6 @@
           <a:lstStyle/>
           <a:p>
             <a:pPr algn="ctr"/>
-            <a:endParaRPr/>
           </a:p>
         </p:txBody>
       </p:sp>
@@ -10886,7 +10760,6 @@
           <a:lstStyle/>
           <a:p>
             <a:pPr algn="ctr"/>
-            <a:endParaRPr/>
           </a:p>
         </p:txBody>
       </p:sp>
@@ -10966,7 +10839,6 @@
           <a:lstStyle/>
           <a:p>
             <a:pPr algn="ctr"/>
-            <a:endParaRPr/>
           </a:p>
         </p:txBody>
       </p:sp>
@@ -11046,7 +10918,6 @@
           <a:lstStyle/>
           <a:p>
             <a:pPr algn="ctr"/>
-            <a:endParaRPr/>
           </a:p>
         </p:txBody>
       </p:sp>
@@ -11126,7 +10997,6 @@
           <a:lstStyle/>
           <a:p>
             <a:pPr algn="ctr"/>
-            <a:endParaRPr/>
           </a:p>
         </p:txBody>
       </p:sp>
@@ -11206,7 +11076,6 @@
           <a:lstStyle/>
           <a:p>
             <a:pPr algn="ctr"/>
-            <a:endParaRPr/>
           </a:p>
         </p:txBody>
       </p:sp>
@@ -11286,7 +11155,6 @@
           <a:lstStyle/>
           <a:p>
             <a:pPr algn="ctr"/>
-            <a:endParaRPr/>
           </a:p>
         </p:txBody>
       </p:sp>
@@ -11366,7 +11234,6 @@
           <a:lstStyle/>
           <a:p>
             <a:pPr algn="ctr"/>
-            <a:endParaRPr/>
           </a:p>
         </p:txBody>
       </p:sp>
@@ -11446,7 +11313,6 @@
           <a:lstStyle/>
           <a:p>
             <a:pPr algn="ctr"/>
-            <a:endParaRPr/>
           </a:p>
         </p:txBody>
       </p:sp>
@@ -11526,7 +11392,6 @@
           <a:lstStyle/>
           <a:p>
             <a:pPr algn="ctr"/>
-            <a:endParaRPr/>
           </a:p>
         </p:txBody>
       </p:sp>
@@ -11606,7 +11471,6 @@
           <a:lstStyle/>
           <a:p>
             <a:pPr algn="ctr"/>
-            <a:endParaRPr/>
           </a:p>
         </p:txBody>
       </p:sp>
@@ -11686,7 +11550,6 @@
           <a:lstStyle/>
           <a:p>
             <a:pPr algn="ctr"/>
-            <a:endParaRPr/>
           </a:p>
         </p:txBody>
       </p:sp>
@@ -11766,7 +11629,6 @@
           <a:lstStyle/>
           <a:p>
             <a:pPr algn="ctr"/>
-            <a:endParaRPr/>
           </a:p>
         </p:txBody>
       </p:sp>
@@ -11846,7 +11708,6 @@
           <a:lstStyle/>
           <a:p>
             <a:pPr algn="ctr"/>
-            <a:endParaRPr/>
           </a:p>
         </p:txBody>
       </p:sp>
@@ -11926,7 +11787,6 @@
           <a:lstStyle/>
           <a:p>
             <a:pPr algn="ctr"/>
-            <a:endParaRPr/>
           </a:p>
         </p:txBody>
       </p:sp>
@@ -12006,7 +11866,6 @@
           <a:lstStyle/>
           <a:p>
             <a:pPr algn="ctr"/>
-            <a:endParaRPr/>
           </a:p>
         </p:txBody>
       </p:sp>
@@ -12086,7 +11945,6 @@
           <a:lstStyle/>
           <a:p>
             <a:pPr algn="ctr"/>
-            <a:endParaRPr/>
           </a:p>
         </p:txBody>
       </p:sp>
@@ -12166,7 +12024,6 @@
           <a:lstStyle/>
           <a:p>
             <a:pPr algn="ctr"/>
-            <a:endParaRPr/>
           </a:p>
         </p:txBody>
       </p:sp>
@@ -12246,7 +12103,6 @@
           <a:lstStyle/>
           <a:p>
             <a:pPr algn="ctr"/>
-            <a:endParaRPr/>
           </a:p>
         </p:txBody>
       </p:sp>
@@ -12326,7 +12182,6 @@
           <a:lstStyle/>
           <a:p>
             <a:pPr algn="ctr"/>
-            <a:endParaRPr/>
           </a:p>
         </p:txBody>
       </p:sp>
@@ -12406,7 +12261,6 @@
           <a:lstStyle/>
           <a:p>
             <a:pPr algn="ctr"/>
-            <a:endParaRPr/>
           </a:p>
         </p:txBody>
       </p:sp>
@@ -12486,7 +12340,6 @@
           <a:lstStyle/>
           <a:p>
             <a:pPr algn="ctr"/>
-            <a:endParaRPr/>
           </a:p>
         </p:txBody>
       </p:sp>
@@ -12566,7 +12419,6 @@
           <a:lstStyle/>
           <a:p>
             <a:pPr algn="ctr"/>
-            <a:endParaRPr/>
           </a:p>
         </p:txBody>
       </p:sp>
@@ -12646,7 +12498,6 @@
           <a:lstStyle/>
           <a:p>
             <a:pPr algn="ctr"/>
-            <a:endParaRPr/>
           </a:p>
         </p:txBody>
       </p:sp>
@@ -12726,7 +12577,6 @@
           <a:lstStyle/>
           <a:p>
             <a:pPr algn="ctr"/>
-            <a:endParaRPr/>
           </a:p>
         </p:txBody>
       </p:sp>
@@ -12806,7 +12656,6 @@
           <a:lstStyle/>
           <a:p>
             <a:pPr algn="ctr"/>
-            <a:endParaRPr/>
           </a:p>
         </p:txBody>
       </p:sp>
@@ -12886,7 +12735,6 @@
           <a:lstStyle/>
           <a:p>
             <a:pPr algn="ctr"/>
-            <a:endParaRPr/>
           </a:p>
         </p:txBody>
       </p:sp>
@@ -12966,7 +12814,6 @@
           <a:lstStyle/>
           <a:p>
             <a:pPr algn="ctr"/>
-            <a:endParaRPr/>
           </a:p>
         </p:txBody>
       </p:sp>
@@ -13046,7 +12893,6 @@
           <a:lstStyle/>
           <a:p>
             <a:pPr algn="ctr"/>
-            <a:endParaRPr/>
           </a:p>
         </p:txBody>
       </p:sp>
@@ -13126,7 +12972,6 @@
           <a:lstStyle/>
           <a:p>
             <a:pPr algn="ctr"/>
-            <a:endParaRPr/>
           </a:p>
         </p:txBody>
       </p:sp>
@@ -13357,7 +13202,6 @@
           <a:lstStyle/>
           <a:p>
             <a:pPr algn="ctr"/>
-            <a:endParaRPr/>
           </a:p>
         </p:txBody>
       </p:sp>
@@ -13406,598 +13250,7 @@
 </file>
 
 <file path=ppt/slides/slide18.xml><?xml version="1.0" encoding="utf-8"?>
-<p:sld xmlns:a="http://schemas.openxmlformats.org/drawingml/2006/main" xmlns:r="http://schemas.openxmlformats.org/officeDocument/2006/relationships" xmlns:p="http://schemas.openxmlformats.org/presentationml/2006/main">
-  <p:cSld>
-    <p:bg>
-      <p:bgPr>
-        <a:solidFill>
-          <a:srgbClr val="1B2A4A"/>
-        </a:solidFill>
-        <a:effectLst/>
-      </p:bgPr>
-    </p:bg>
-    <p:spTree>
-      <p:nvGrpSpPr>
-        <p:cNvPr id="1" name=""/>
-        <p:cNvGrpSpPr/>
-        <p:nvPr/>
-      </p:nvGrpSpPr>
-      <p:grpSpPr>
-        <a:xfrm>
-          <a:off x="0" y="0"/>
-          <a:ext cx="0" cy="0"/>
-          <a:chOff x="0" y="0"/>
-          <a:chExt cx="0" cy="0"/>
-        </a:xfrm>
-      </p:grpSpPr>
-      <p:sp>
-        <p:nvSpPr>
-          <p:cNvPr id="2" name="TextBox 1"/>
-          <p:cNvSpPr txBox="1"/>
-          <p:nvPr/>
-        </p:nvSpPr>
-        <p:spPr>
-          <a:xfrm>
-            <a:off x="731520" y="457200"/>
-            <a:ext cx="10058400" cy="640080"/>
-          </a:xfrm>
-          <a:prstGeom prst="rect">
-            <a:avLst/>
-          </a:prstGeom>
-          <a:noFill/>
-        </p:spPr>
-        <p:txBody>
-          <a:bodyPr wrap="square">
-            <a:spAutoFit/>
-          </a:bodyPr>
-          <a:lstStyle/>
-          <a:p>
-            <a:pPr algn="l">
-              <a:defRPr sz="3600" b="1">
-                <a:solidFill>
-                  <a:srgbClr val="FFFFFF"/>
-                </a:solidFill>
-                <a:latin typeface="Calibri"/>
-              </a:defRPr>
-            </a:pPr>
-            <a:r>
-              <a:t>Why IoTeye — Next Steps</a:t>
-            </a:r>
-          </a:p>
-        </p:txBody>
-      </p:sp>
-      <p:sp>
-        <p:nvSpPr>
-          <p:cNvPr id="3" name="TextBox 2"/>
-          <p:cNvSpPr txBox="1"/>
-          <p:nvPr/>
-        </p:nvSpPr>
-        <p:spPr>
-          <a:xfrm>
-            <a:off x="731520" y="1371600"/>
-            <a:ext cx="5029200" cy="457200"/>
-          </a:xfrm>
-          <a:prstGeom prst="rect">
-            <a:avLst/>
-          </a:prstGeom>
-          <a:noFill/>
-        </p:spPr>
-        <p:txBody>
-          <a:bodyPr wrap="square">
-            <a:spAutoFit/>
-          </a:bodyPr>
-          <a:lstStyle/>
-          <a:p>
-            <a:pPr algn="l">
-              <a:defRPr sz="2400" b="1">
-                <a:solidFill>
-                  <a:srgbClr val="2E86C1"/>
-                </a:solidFill>
-                <a:latin typeface="Calibri"/>
-              </a:defRPr>
-            </a:pPr>
-            <a:r>
-              <a:t>Why We're the Right Partner</a:t>
-            </a:r>
-          </a:p>
-        </p:txBody>
-      </p:sp>
-      <p:sp>
-        <p:nvSpPr>
-          <p:cNvPr id="4" name="TextBox 3"/>
-          <p:cNvSpPr txBox="1"/>
-          <p:nvPr/>
-        </p:nvSpPr>
-        <p:spPr>
-          <a:xfrm>
-            <a:off x="731520" y="1920240"/>
-            <a:ext cx="5029200" cy="4114800"/>
-          </a:xfrm>
-          <a:prstGeom prst="rect">
-            <a:avLst/>
-          </a:prstGeom>
-          <a:noFill/>
-        </p:spPr>
-        <p:txBody>
-          <a:bodyPr wrap="square">
-            <a:spAutoFit/>
-          </a:bodyPr>
-          <a:lstStyle/>
-          <a:p>
-            <a:pPr algn="l">
-              <a:spcAft>
-                <a:spcPts val="700"/>
-              </a:spcAft>
-              <a:defRPr sz="1400" b="0">
-                <a:solidFill>
-                  <a:srgbClr val="FFFFFF"/>
-                </a:solidFill>
-                <a:latin typeface="Calibri"/>
-              </a:defRPr>
-            </a:pPr>
-            <a:r>
-              <a:t>• 5+ years in special care software — we know your workforce</a:t>
-            </a:r>
-          </a:p>
-          <a:p>
-            <a:pPr>
-              <a:spcAft>
-                <a:spcPts val="700"/>
-              </a:spcAft>
-              <a:defRPr sz="1400">
-                <a:solidFill>
-                  <a:srgbClr val="FFFFFF"/>
-                </a:solidFill>
-                <a:latin typeface="Calibri"/>
-              </a:defRPr>
-            </a:pPr>
-            <a:r>
-              <a:t>• Arc Mercer is an existing SpringBoard &amp; Guardian customer</a:t>
-            </a:r>
-          </a:p>
-          <a:p>
-            <a:pPr>
-              <a:spcAft>
-                <a:spcPts val="700"/>
-              </a:spcAft>
-              <a:defRPr sz="1400">
-                <a:solidFill>
-                  <a:srgbClr val="FFFFFF"/>
-                </a:solidFill>
-                <a:latin typeface="Calibri"/>
-              </a:defRPr>
-            </a:pPr>
-            <a:r>
-              <a:t>• BrainClaw AI agents already running at Arc Mercer (37+57 tools)</a:t>
-            </a:r>
-          </a:p>
-          <a:p>
-            <a:pPr>
-              <a:spcAft>
-                <a:spcPts val="700"/>
-              </a:spcAft>
-              <a:defRPr sz="1400">
-                <a:solidFill>
-                  <a:srgbClr val="FFFFFF"/>
-                </a:solidFill>
-                <a:latin typeface="Calibri"/>
-              </a:defRPr>
-            </a:pPr>
-            <a:r>
-              <a:t>• Badge ID + PIN login for frontline staff without email</a:t>
-            </a:r>
-          </a:p>
-          <a:p>
-            <a:pPr>
-              <a:spcAft>
-                <a:spcPts val="700"/>
-              </a:spcAft>
-              <a:defRPr sz="1400">
-                <a:solidFill>
-                  <a:srgbClr val="FFFFFF"/>
-                </a:solidFill>
-                <a:latin typeface="Calibri"/>
-              </a:defRPr>
-            </a:pPr>
-            <a:r>
-              <a:t>• Ranked-choice committee voting — matching your current process</a:t>
-            </a:r>
-          </a:p>
-          <a:p>
-            <a:pPr>
-              <a:spcAft>
-                <a:spcPts val="700"/>
-              </a:spcAft>
-              <a:defRPr sz="1400">
-                <a:solidFill>
-                  <a:srgbClr val="FFFFFF"/>
-                </a:solidFill>
-                <a:latin typeface="Calibri"/>
-              </a:defRPr>
-            </a:pPr>
-            <a:r>
-              <a:t>• Full engagement suite: TAC RSVP, culture groups, volunteering</a:t>
-            </a:r>
-          </a:p>
-          <a:p>
-            <a:pPr>
-              <a:spcAft>
-                <a:spcPts val="700"/>
-              </a:spcAft>
-              <a:defRPr sz="1400">
-                <a:solidFill>
-                  <a:srgbClr val="FFFFFF"/>
-                </a:solidFill>
-                <a:latin typeface="Calibri"/>
-              </a:defRPr>
-            </a:pPr>
-            <a:r>
-              <a:t>• Café cashier screen + in-person store QR redemption</a:t>
-            </a:r>
-          </a:p>
-          <a:p>
-            <a:pPr>
-              <a:spcAft>
-                <a:spcPts val="700"/>
-              </a:spcAft>
-              <a:defRPr sz="1400">
-                <a:solidFill>
-                  <a:srgbClr val="FFFFFF"/>
-                </a:solidFill>
-                <a:latin typeface="Calibri"/>
-              </a:defRPr>
-            </a:pPr>
-            <a:r>
-              <a:t>• Dark mode for night-shift staff at group homes</a:t>
-            </a:r>
-          </a:p>
-          <a:p>
-            <a:pPr>
-              <a:spcAft>
-                <a:spcPts val="700"/>
-              </a:spcAft>
-              <a:defRPr sz="1400">
-                <a:solidFill>
-                  <a:srgbClr val="FFFFFF"/>
-                </a:solidFill>
-                <a:latin typeface="Calibri"/>
-              </a:defRPr>
-            </a:pPr>
-            <a:r>
-              <a:t>• WCAG AAA accessibility — 7:1 contrast, screen reader tested</a:t>
-            </a:r>
-          </a:p>
-          <a:p>
-            <a:pPr>
-              <a:spcAft>
-                <a:spcPts val="700"/>
-              </a:spcAft>
-              <a:defRPr sz="1400">
-                <a:solidFill>
-                  <a:srgbClr val="FFFFFF"/>
-                </a:solidFill>
-                <a:latin typeface="Calibri"/>
-              </a:defRPr>
-            </a:pPr>
-            <a:r>
-              <a:t>• All add-ons FREE — pay only AI LLM usage (pass-through)</a:t>
-            </a:r>
-          </a:p>
-        </p:txBody>
-      </p:sp>
-      <p:sp>
-        <p:nvSpPr>
-          <p:cNvPr id="5" name="TextBox 4"/>
-          <p:cNvSpPr txBox="1"/>
-          <p:nvPr/>
-        </p:nvSpPr>
-        <p:spPr>
-          <a:xfrm>
-            <a:off x="6400800" y="1371600"/>
-            <a:ext cx="5029200" cy="457200"/>
-          </a:xfrm>
-          <a:prstGeom prst="rect">
-            <a:avLst/>
-          </a:prstGeom>
-          <a:noFill/>
-        </p:spPr>
-        <p:txBody>
-          <a:bodyPr wrap="square">
-            <a:spAutoFit/>
-          </a:bodyPr>
-          <a:lstStyle/>
-          <a:p>
-            <a:pPr algn="l">
-              <a:defRPr sz="2400" b="1">
-                <a:solidFill>
-                  <a:srgbClr val="2E86C1"/>
-                </a:solidFill>
-                <a:latin typeface="Calibri"/>
-              </a:defRPr>
-            </a:pPr>
-            <a:r>
-              <a:t>Next Steps</a:t>
-            </a:r>
-          </a:p>
-        </p:txBody>
-      </p:sp>
-      <p:sp>
-        <p:nvSpPr>
-          <p:cNvPr id="6" name="TextBox 5"/>
-          <p:cNvSpPr txBox="1"/>
-          <p:nvPr/>
-        </p:nvSpPr>
-        <p:spPr>
-          <a:xfrm>
-            <a:off x="6400800" y="1920240"/>
-            <a:ext cx="5029200" cy="2743200"/>
-          </a:xfrm>
-          <a:prstGeom prst="rect">
-            <a:avLst/>
-          </a:prstGeom>
-          <a:noFill/>
-        </p:spPr>
-        <p:txBody>
-          <a:bodyPr wrap="square">
-            <a:spAutoFit/>
-          </a:bodyPr>
-          <a:lstStyle/>
-          <a:p>
-            <a:pPr algn="l">
-              <a:spcAft>
-                <a:spcPts val="1200"/>
-              </a:spcAft>
-              <a:defRPr sz="1600" b="0">
-                <a:solidFill>
-                  <a:srgbClr val="FFFFFF"/>
-                </a:solidFill>
-                <a:latin typeface="Calibri"/>
-              </a:defRPr>
-            </a:pPr>
-            <a:r>
-              <a:t>• Select pricing option (A or B)</a:t>
-            </a:r>
-          </a:p>
-          <a:p>
-            <a:pPr>
-              <a:spcAft>
-                <a:spcPts val="1200"/>
-              </a:spcAft>
-              <a:defRPr sz="1600">
-                <a:solidFill>
-                  <a:srgbClr val="FFFFFF"/>
-                </a:solidFill>
-                <a:latin typeface="Calibri"/>
-              </a:defRPr>
-            </a:pPr>
-            <a:r>
-              <a:t>• Schedule kickoff &amp; discovery workshop</a:t>
-            </a:r>
-          </a:p>
-          <a:p>
-            <a:pPr>
-              <a:spcAft>
-                <a:spcPts val="1200"/>
-              </a:spcAft>
-              <a:defRPr sz="1600">
-                <a:solidFill>
-                  <a:srgbClr val="FFFFFF"/>
-                </a:solidFill>
-                <a:latin typeface="Calibri"/>
-              </a:defRPr>
-            </a:pPr>
-            <a:r>
-              <a:t>• Initiate Paycom SFTP access setup</a:t>
-            </a:r>
-          </a:p>
-          <a:p>
-            <a:pPr>
-              <a:spcAft>
-                <a:spcPts val="1200"/>
-              </a:spcAft>
-              <a:defRPr sz="1600">
-                <a:solidFill>
-                  <a:srgbClr val="FFFFFF"/>
-                </a:solidFill>
-                <a:latin typeface="Calibri"/>
-              </a:defRPr>
-            </a:pPr>
-            <a:r>
-              <a:t>• Configure Google Workspace SSO + Badge ID mapping</a:t>
-            </a:r>
-          </a:p>
-          <a:p>
-            <a:pPr>
-              <a:spcAft>
-                <a:spcPts val="1200"/>
-              </a:spcAft>
-              <a:defRPr sz="1600">
-                <a:solidFill>
-                  <a:srgbClr val="FFFFFF"/>
-                </a:solidFill>
-                <a:latin typeface="Calibri"/>
-              </a:defRPr>
-            </a:pPr>
-            <a:r>
-              <a:t>• Phase One live in 12 weeks</a:t>
-            </a:r>
-          </a:p>
-        </p:txBody>
-      </p:sp>
-      <p:sp>
-        <p:nvSpPr>
-          <p:cNvPr id="7" name="Rectangle 6"/>
-          <p:cNvSpPr/>
-          <p:nvPr/>
-        </p:nvSpPr>
-        <p:spPr>
-          <a:xfrm>
-            <a:off x="6400800" y="4389120"/>
-            <a:ext cx="4572000" cy="1828800"/>
-          </a:xfrm>
-          <a:prstGeom prst="rect">
-            <a:avLst/>
-          </a:prstGeom>
-          <a:solidFill>
-            <a:srgbClr val="2E86C1"/>
-          </a:solidFill>
-          <a:ln>
-            <a:noFill/>
-          </a:ln>
-        </p:spPr>
-        <p:style>
-          <a:lnRef idx="1">
-            <a:schemeClr val="accent1"/>
-          </a:lnRef>
-          <a:fillRef idx="3">
-            <a:schemeClr val="accent1"/>
-          </a:fillRef>
-          <a:effectRef idx="2">
-            <a:schemeClr val="accent1"/>
-          </a:effectRef>
-          <a:fontRef idx="minor">
-            <a:schemeClr val="lt1"/>
-          </a:fontRef>
-        </p:style>
-        <p:txBody>
-          <a:bodyPr rtlCol="0" anchor="ctr"/>
-          <a:lstStyle/>
-          <a:p>
-            <a:pPr algn="ctr"/>
-            <a:endParaRPr/>
-          </a:p>
-        </p:txBody>
-      </p:sp>
-      <p:sp>
-        <p:nvSpPr>
-          <p:cNvPr id="8" name="TextBox 7"/>
-          <p:cNvSpPr txBox="1"/>
-          <p:nvPr/>
-        </p:nvSpPr>
-        <p:spPr>
-          <a:xfrm>
-            <a:off x="6675120" y="4480560"/>
-            <a:ext cx="4114800" cy="457200"/>
-          </a:xfrm>
-          <a:prstGeom prst="rect">
-            <a:avLst/>
-          </a:prstGeom>
-          <a:noFill/>
-        </p:spPr>
-        <p:txBody>
-          <a:bodyPr wrap="square">
-            <a:spAutoFit/>
-          </a:bodyPr>
-          <a:lstStyle/>
-          <a:p>
-            <a:pPr algn="l">
-              <a:defRPr sz="2200" b="1">
-                <a:solidFill>
-                  <a:srgbClr val="FFFFFF"/>
-                </a:solidFill>
-                <a:latin typeface="Calibri"/>
-              </a:defRPr>
-            </a:pPr>
-            <a:r>
-              <a:t>Contact Us</a:t>
-            </a:r>
-          </a:p>
-        </p:txBody>
-      </p:sp>
-      <p:sp>
-        <p:nvSpPr>
-          <p:cNvPr id="9" name="TextBox 8"/>
-          <p:cNvSpPr txBox="1"/>
-          <p:nvPr/>
-        </p:nvSpPr>
-        <p:spPr>
-          <a:xfrm>
-            <a:off x="6675120" y="4937760"/>
-            <a:ext cx="4114800" cy="1097280"/>
-          </a:xfrm>
-          <a:prstGeom prst="rect">
-            <a:avLst/>
-          </a:prstGeom>
-          <a:noFill/>
-        </p:spPr>
-        <p:txBody>
-          <a:bodyPr wrap="square">
-            <a:spAutoFit/>
-          </a:bodyPr>
-          <a:lstStyle/>
-          <a:p>
-            <a:pPr algn="l">
-              <a:defRPr sz="1600" b="0">
-                <a:solidFill>
-                  <a:srgbClr val="FFFFFF"/>
-                </a:solidFill>
-                <a:latin typeface="Calibri"/>
-              </a:defRPr>
-            </a:pPr>
-            <a:r>
-              <a:t>IoTeye Inc.</a:t>
-            </a:r>
-            <a:br/>
-            <a:r>
-              <a:t>Basking Ridge, New Jersey</a:t>
-            </a:r>
-            <a:br/>
-            <a:r>
-              <a:t>mingjye.sheng@ioteyeinc.com</a:t>
-            </a:r>
-            <a:br/>
-            <a:r>
-              <a:t>www.ioteyeinc.com</a:t>
-            </a:r>
-          </a:p>
-        </p:txBody>
-      </p:sp>
-      <p:sp>
-        <p:nvSpPr>
-          <p:cNvPr id="10" name="TextBox 9"/>
-          <p:cNvSpPr txBox="1"/>
-          <p:nvPr/>
-        </p:nvSpPr>
-        <p:spPr>
-          <a:xfrm>
-            <a:off x="731520" y="5669280"/>
-            <a:ext cx="4572000" cy="731520"/>
-          </a:xfrm>
-          <a:prstGeom prst="rect">
-            <a:avLst/>
-          </a:prstGeom>
-          <a:noFill/>
-        </p:spPr>
-        <p:txBody>
-          <a:bodyPr wrap="square">
-            <a:spAutoFit/>
-          </a:bodyPr>
-          <a:lstStyle/>
-          <a:p>
-            <a:pPr algn="l">
-              <a:defRPr sz="4000" b="1">
-                <a:solidFill>
-                  <a:srgbClr val="FFFFFF"/>
-                </a:solidFill>
-                <a:latin typeface="Calibri"/>
-              </a:defRPr>
-            </a:pPr>
-            <a:r>
-              <a:t>Thank You</a:t>
-            </a:r>
-          </a:p>
-        </p:txBody>
-      </p:sp>
-    </p:spTree>
-  </p:cSld>
-  <p:clrMapOvr>
-    <a:masterClrMapping/>
-  </p:clrMapOvr>
-</p:sld>
-</file>
-
-<file path=ppt/slides/slide2.xml><?xml version="1.0" encoding="utf-8"?>
-<p:sld xmlns:a="http://schemas.openxmlformats.org/drawingml/2006/main" xmlns:r="http://schemas.openxmlformats.org/officeDocument/2006/relationships" xmlns:p="http://schemas.openxmlformats.org/presentationml/2006/main">
+<p:sld xmlns:a="http://schemas.openxmlformats.org/drawingml/2006/main" xmlns:p="http://schemas.openxmlformats.org/presentationml/2006/main" xmlns:r="http://schemas.openxmlformats.org/officeDocument/2006/relationships">
   <p:cSld>
     <p:bg>
       <p:bgPr>
@@ -14013,14 +13266,7 @@
         <p:cNvGrpSpPr/>
         <p:nvPr/>
       </p:nvGrpSpPr>
-      <p:grpSpPr>
-        <a:xfrm>
-          <a:off x="0" y="0"/>
-          <a:ext cx="0" cy="0"/>
-          <a:chOff x="0" y="0"/>
-          <a:chExt cx="0" cy="0"/>
-        </a:xfrm>
-      </p:grpSpPr>
+      <p:grpSpPr/>
       <p:sp>
         <p:nvSpPr>
           <p:cNvPr id="2" name="Rectangle 1"/>
@@ -14061,7 +13307,6 @@
           <a:lstStyle/>
           <a:p>
             <a:pPr algn="ctr"/>
-            <a:endParaRPr/>
           </a:p>
         </p:txBody>
       </p:sp>
@@ -14096,7 +13341,7 @@
               </a:defRPr>
             </a:pPr>
             <a:r>
-              <a:t>Agenda</a:t>
+              <a:t>Why IoTeye — Next Steps</a:t>
             </a:r>
           </a:p>
         </p:txBody>
@@ -14109,8 +13354,44 @@
         </p:nvSpPr>
         <p:spPr>
           <a:xfrm>
-            <a:off x="1371600" y="1463040"/>
-            <a:ext cx="9144000" cy="4572000"/>
+            <a:off x="731520" y="1188720"/>
+            <a:ext cx="5029200" cy="457200"/>
+          </a:xfrm>
+          <a:prstGeom prst="rect">
+            <a:avLst/>
+          </a:prstGeom>
+          <a:noFill/>
+        </p:spPr>
+        <p:txBody>
+          <a:bodyPr wrap="square">
+            <a:spAutoFit/>
+          </a:bodyPr>
+          <a:lstStyle/>
+          <a:p>
+            <a:pPr algn="l">
+              <a:defRPr sz="2400" b="1">
+                <a:solidFill>
+                  <a:srgbClr val="2E86C1"/>
+                </a:solidFill>
+                <a:latin typeface="Calibri"/>
+              </a:defRPr>
+            </a:pPr>
+            <a:r>
+              <a:t>Why We're the Right Partner</a:t>
+            </a:r>
+          </a:p>
+        </p:txBody>
+      </p:sp>
+      <p:sp>
+        <p:nvSpPr>
+          <p:cNvPr id="5" name="TextBox 4"/>
+          <p:cNvSpPr txBox="1"/>
+          <p:nvPr/>
+        </p:nvSpPr>
+        <p:spPr>
+          <a:xfrm>
+            <a:off x="731520" y="1737360"/>
+            <a:ext cx="5029200" cy="4114800"/>
           </a:xfrm>
           <a:prstGeom prst="rect">
             <a:avLst/>
@@ -14125,161 +13406,463 @@
           <a:p>
             <a:pPr algn="l">
               <a:spcAft>
-                <a:spcPts val="1000"/>
+                <a:spcPts val="700"/>
               </a:spcAft>
-              <a:defRPr sz="2200" b="0">
-                <a:solidFill>
-                  <a:srgbClr val="333333"/>
-                </a:solidFill>
-                <a:latin typeface="Calibri"/>
-              </a:defRPr>
-            </a:pPr>
-            <a:r>
-              <a:t>1.  About IoTeye &amp; Platform Ecosystem</a:t>
+              <a:defRPr sz="1400" b="0">
+                <a:solidFill>
+                  <a:srgbClr val="333333"/>
+                </a:solidFill>
+                <a:latin typeface="Calibri"/>
+              </a:defRPr>
+            </a:pPr>
+            <a:r>
+              <a:t>• 5+ years in special care software — we know your workforce</a:t>
             </a:r>
           </a:p>
           <a:p>
             <a:pPr>
               <a:spcAft>
-                <a:spcPts val="1000"/>
+                <a:spcPts val="700"/>
               </a:spcAft>
-              <a:defRPr sz="2200">
-                <a:solidFill>
-                  <a:srgbClr val="333333"/>
-                </a:solidFill>
-                <a:latin typeface="Calibri"/>
-              </a:defRPr>
-            </a:pPr>
-            <a:r>
-              <a:t>2.  BrainClaw AI Agents — Already at Arc Mercer</a:t>
+              <a:defRPr sz="1400">
+                <a:solidFill>
+                  <a:srgbClr val="333333"/>
+                </a:solidFill>
+                <a:latin typeface="Calibri"/>
+              </a:defRPr>
+            </a:pPr>
+            <a:r>
+              <a:t>• Arc Mercer is an existing SpringBoard &amp; Guardian customer</a:t>
             </a:r>
           </a:p>
           <a:p>
             <a:pPr>
               <a:spcAft>
-                <a:spcPts val="1000"/>
+                <a:spcPts val="700"/>
               </a:spcAft>
-              <a:defRPr sz="2200">
-                <a:solidFill>
-                  <a:srgbClr val="333333"/>
-                </a:solidFill>
-                <a:latin typeface="Calibri"/>
-              </a:defRPr>
-            </a:pPr>
-            <a:r>
-              <a:t>3.  Understanding Your Challenge</a:t>
+              <a:defRPr sz="1400">
+                <a:solidFill>
+                  <a:srgbClr val="333333"/>
+                </a:solidFill>
+                <a:latin typeface="Calibri"/>
+              </a:defRPr>
+            </a:pPr>
+            <a:r>
+              <a:t>• BrainClaw AI agents already running at Arc Mercer (37+57 tools)</a:t>
             </a:r>
           </a:p>
           <a:p>
             <a:pPr>
               <a:spcAft>
-                <a:spcPts val="1000"/>
+                <a:spcPts val="700"/>
               </a:spcAft>
-              <a:defRPr sz="2200">
-                <a:solidFill>
-                  <a:srgbClr val="333333"/>
-                </a:solidFill>
-                <a:latin typeface="Calibri"/>
-              </a:defRPr>
-            </a:pPr>
-            <a:r>
-              <a:t>4.  Platform Overview &amp; Architecture</a:t>
+              <a:defRPr sz="1400">
+                <a:solidFill>
+                  <a:srgbClr val="333333"/>
+                </a:solidFill>
+                <a:latin typeface="Calibri"/>
+              </a:defRPr>
+            </a:pPr>
+            <a:r>
+              <a:t>• Badge ID + PIN login for frontline staff without email</a:t>
             </a:r>
           </a:p>
           <a:p>
             <a:pPr>
               <a:spcAft>
-                <a:spcPts val="1000"/>
+                <a:spcPts val="700"/>
               </a:spcAft>
-              <a:defRPr sz="2200">
-                <a:solidFill>
-                  <a:srgbClr val="333333"/>
-                </a:solidFill>
-                <a:latin typeface="Calibri"/>
-              </a:defRPr>
-            </a:pPr>
-            <a:r>
-              <a:t>5.  Key Features (Nominations → Engagement → Marketplace)</a:t>
+              <a:defRPr sz="1400">
+                <a:solidFill>
+                  <a:srgbClr val="333333"/>
+                </a:solidFill>
+                <a:latin typeface="Calibri"/>
+              </a:defRPr>
+            </a:pPr>
+            <a:r>
+              <a:t>• Ranked-choice committee voting — matching your current process</a:t>
             </a:r>
           </a:p>
           <a:p>
             <a:pPr>
               <a:spcAft>
-                <a:spcPts val="1000"/>
+                <a:spcPts val="700"/>
               </a:spcAft>
-              <a:defRPr sz="2200">
-                <a:solidFill>
-                  <a:srgbClr val="333333"/>
-                </a:solidFill>
-                <a:latin typeface="Calibri"/>
-              </a:defRPr>
-            </a:pPr>
-            <a:r>
-              <a:t>6.  Integration, Authentication &amp; Accessibility</a:t>
+              <a:defRPr sz="1400">
+                <a:solidFill>
+                  <a:srgbClr val="333333"/>
+                </a:solidFill>
+                <a:latin typeface="Calibri"/>
+              </a:defRPr>
+            </a:pPr>
+            <a:r>
+              <a:t>• Full engagement suite: TAC RSVP, culture groups, volunteering</a:t>
             </a:r>
           </a:p>
           <a:p>
             <a:pPr>
               <a:spcAft>
-                <a:spcPts val="1000"/>
+                <a:spcPts val="700"/>
               </a:spcAft>
-              <a:defRPr sz="2200">
-                <a:solidFill>
-                  <a:srgbClr val="333333"/>
-                </a:solidFill>
-                <a:latin typeface="Calibri"/>
-              </a:defRPr>
-            </a:pPr>
-            <a:r>
-              <a:t>7.  Dashboards — Employee &amp; Leadership</a:t>
+              <a:defRPr sz="1400">
+                <a:solidFill>
+                  <a:srgbClr val="333333"/>
+                </a:solidFill>
+                <a:latin typeface="Calibri"/>
+              </a:defRPr>
+            </a:pPr>
+            <a:r>
+              <a:t>• Café cashier screen + in-person store QR redemption</a:t>
             </a:r>
           </a:p>
           <a:p>
             <a:pPr>
               <a:spcAft>
-                <a:spcPts val="1000"/>
+                <a:spcPts val="700"/>
               </a:spcAft>
-              <a:defRPr sz="2200">
-                <a:solidFill>
-                  <a:srgbClr val="333333"/>
-                </a:solidFill>
-                <a:latin typeface="Calibri"/>
-              </a:defRPr>
-            </a:pPr>
-            <a:r>
-              <a:t>8.  Implementation Timeline &amp; Pricing</a:t>
+              <a:defRPr sz="1400">
+                <a:solidFill>
+                  <a:srgbClr val="333333"/>
+                </a:solidFill>
+                <a:latin typeface="Calibri"/>
+              </a:defRPr>
+            </a:pPr>
+            <a:r>
+              <a:t>• Dark mode for night-shift staff at group homes</a:t>
             </a:r>
           </a:p>
           <a:p>
             <a:pPr>
               <a:spcAft>
-                <a:spcPts val="1000"/>
+                <a:spcPts val="700"/>
               </a:spcAft>
-              <a:defRPr sz="2200">
-                <a:solidFill>
-                  <a:srgbClr val="333333"/>
-                </a:solidFill>
-                <a:latin typeface="Calibri"/>
-              </a:defRPr>
-            </a:pPr>
-            <a:r>
-              <a:t>9.  Feature Comparison — How We Stack Up</a:t>
+              <a:defRPr sz="1400">
+                <a:solidFill>
+                  <a:srgbClr val="333333"/>
+                </a:solidFill>
+                <a:latin typeface="Calibri"/>
+              </a:defRPr>
+            </a:pPr>
+            <a:r>
+              <a:t>• WCAG AAA accessibility — 7:1 contrast, screen reader tested</a:t>
             </a:r>
           </a:p>
           <a:p>
             <a:pPr>
               <a:spcAft>
-                <a:spcPts val="1000"/>
+                <a:spcPts val="700"/>
               </a:spcAft>
-              <a:defRPr sz="2200">
-                <a:solidFill>
-                  <a:srgbClr val="333333"/>
-                </a:solidFill>
-                <a:latin typeface="Calibri"/>
-              </a:defRPr>
-            </a:pPr>
-            <a:r>
-              <a:t>10. Why IoTeye — Next Steps</a:t>
+              <a:defRPr sz="1400">
+                <a:solidFill>
+                  <a:srgbClr val="333333"/>
+                </a:solidFill>
+                <a:latin typeface="Calibri"/>
+              </a:defRPr>
+            </a:pPr>
+            <a:r>
+              <a:t>• All add-ons FREE — pay only AI LLM usage (pass-through)</a:t>
+            </a:r>
+          </a:p>
+        </p:txBody>
+      </p:sp>
+      <p:sp>
+        <p:nvSpPr>
+          <p:cNvPr id="6" name="TextBox 5"/>
+          <p:cNvSpPr txBox="1"/>
+          <p:nvPr/>
+        </p:nvSpPr>
+        <p:spPr>
+          <a:xfrm>
+            <a:off x="6400800" y="1188720"/>
+            <a:ext cx="5029200" cy="457200"/>
+          </a:xfrm>
+          <a:prstGeom prst="rect">
+            <a:avLst/>
+          </a:prstGeom>
+          <a:noFill/>
+        </p:spPr>
+        <p:txBody>
+          <a:bodyPr wrap="square">
+            <a:spAutoFit/>
+          </a:bodyPr>
+          <a:lstStyle/>
+          <a:p>
+            <a:pPr algn="l">
+              <a:defRPr sz="2400" b="1">
+                <a:solidFill>
+                  <a:srgbClr val="2E86C1"/>
+                </a:solidFill>
+                <a:latin typeface="Calibri"/>
+              </a:defRPr>
+            </a:pPr>
+            <a:r>
+              <a:t>Next Steps</a:t>
+            </a:r>
+          </a:p>
+        </p:txBody>
+      </p:sp>
+      <p:sp>
+        <p:nvSpPr>
+          <p:cNvPr id="7" name="TextBox 6"/>
+          <p:cNvSpPr txBox="1"/>
+          <p:nvPr/>
+        </p:nvSpPr>
+        <p:spPr>
+          <a:xfrm>
+            <a:off x="6400800" y="1737360"/>
+            <a:ext cx="5029200" cy="2743200"/>
+          </a:xfrm>
+          <a:prstGeom prst="rect">
+            <a:avLst/>
+          </a:prstGeom>
+          <a:noFill/>
+        </p:spPr>
+        <p:txBody>
+          <a:bodyPr wrap="square">
+            <a:spAutoFit/>
+          </a:bodyPr>
+          <a:lstStyle/>
+          <a:p>
+            <a:pPr algn="l">
+              <a:spcAft>
+                <a:spcPts val="1200"/>
+              </a:spcAft>
+              <a:defRPr sz="1600" b="0">
+                <a:solidFill>
+                  <a:srgbClr val="333333"/>
+                </a:solidFill>
+                <a:latin typeface="Calibri"/>
+              </a:defRPr>
+            </a:pPr>
+            <a:r>
+              <a:t>• Select pricing option (A or B)</a:t>
+            </a:r>
+          </a:p>
+          <a:p>
+            <a:pPr>
+              <a:spcAft>
+                <a:spcPts val="1200"/>
+              </a:spcAft>
+              <a:defRPr sz="1600">
+                <a:solidFill>
+                  <a:srgbClr val="333333"/>
+                </a:solidFill>
+                <a:latin typeface="Calibri"/>
+              </a:defRPr>
+            </a:pPr>
+            <a:r>
+              <a:t>• Schedule kickoff &amp; discovery workshop</a:t>
+            </a:r>
+          </a:p>
+          <a:p>
+            <a:pPr>
+              <a:spcAft>
+                <a:spcPts val="1200"/>
+              </a:spcAft>
+              <a:defRPr sz="1600">
+                <a:solidFill>
+                  <a:srgbClr val="333333"/>
+                </a:solidFill>
+                <a:latin typeface="Calibri"/>
+              </a:defRPr>
+            </a:pPr>
+            <a:r>
+              <a:t>• Initiate Paycom SFTP access setup</a:t>
+            </a:r>
+          </a:p>
+          <a:p>
+            <a:pPr>
+              <a:spcAft>
+                <a:spcPts val="1200"/>
+              </a:spcAft>
+              <a:defRPr sz="1600">
+                <a:solidFill>
+                  <a:srgbClr val="333333"/>
+                </a:solidFill>
+                <a:latin typeface="Calibri"/>
+              </a:defRPr>
+            </a:pPr>
+            <a:r>
+              <a:t>• Configure Google Workspace SSO + Badge ID mapping</a:t>
+            </a:r>
+          </a:p>
+          <a:p>
+            <a:pPr>
+              <a:spcAft>
+                <a:spcPts val="1200"/>
+              </a:spcAft>
+              <a:defRPr sz="1600">
+                <a:solidFill>
+                  <a:srgbClr val="333333"/>
+                </a:solidFill>
+                <a:latin typeface="Calibri"/>
+              </a:defRPr>
+            </a:pPr>
+            <a:r>
+              <a:t>• Phase One live in 12 weeks</a:t>
+            </a:r>
+          </a:p>
+        </p:txBody>
+      </p:sp>
+      <p:sp>
+        <p:nvSpPr>
+          <p:cNvPr id="8" name="Rectangle 7"/>
+          <p:cNvSpPr/>
+          <p:nvPr/>
+        </p:nvSpPr>
+        <p:spPr>
+          <a:xfrm>
+            <a:off x="6400800" y="4389120"/>
+            <a:ext cx="4572000" cy="1828800"/>
+          </a:xfrm>
+          <a:prstGeom prst="rect">
+            <a:avLst/>
+          </a:prstGeom>
+          <a:solidFill>
+            <a:srgbClr val="D6EAF8"/>
+          </a:solidFill>
+          <a:ln>
+            <a:noFill/>
+          </a:ln>
+        </p:spPr>
+        <p:style>
+          <a:lnRef idx="1">
+            <a:schemeClr val="accent1"/>
+          </a:lnRef>
+          <a:fillRef idx="3">
+            <a:schemeClr val="accent1"/>
+          </a:fillRef>
+          <a:effectRef idx="2">
+            <a:schemeClr val="accent1"/>
+          </a:effectRef>
+          <a:fontRef idx="minor">
+            <a:schemeClr val="lt1"/>
+          </a:fontRef>
+        </p:style>
+        <p:txBody>
+          <a:bodyPr rtlCol="0" anchor="ctr"/>
+          <a:lstStyle/>
+          <a:p>
+            <a:pPr algn="ctr"/>
+          </a:p>
+        </p:txBody>
+      </p:sp>
+      <p:sp>
+        <p:nvSpPr>
+          <p:cNvPr id="9" name="TextBox 8"/>
+          <p:cNvSpPr txBox="1"/>
+          <p:nvPr/>
+        </p:nvSpPr>
+        <p:spPr>
+          <a:xfrm>
+            <a:off x="6675120" y="4480560"/>
+            <a:ext cx="4114800" cy="457200"/>
+          </a:xfrm>
+          <a:prstGeom prst="rect">
+            <a:avLst/>
+          </a:prstGeom>
+          <a:noFill/>
+        </p:spPr>
+        <p:txBody>
+          <a:bodyPr wrap="square">
+            <a:spAutoFit/>
+          </a:bodyPr>
+          <a:lstStyle/>
+          <a:p>
+            <a:pPr algn="l">
+              <a:defRPr sz="2200" b="1">
+                <a:solidFill>
+                  <a:srgbClr val="1B2A4A"/>
+                </a:solidFill>
+                <a:latin typeface="Calibri"/>
+              </a:defRPr>
+            </a:pPr>
+            <a:r>
+              <a:t>Contact Us</a:t>
+            </a:r>
+          </a:p>
+        </p:txBody>
+      </p:sp>
+      <p:sp>
+        <p:nvSpPr>
+          <p:cNvPr id="10" name="TextBox 9"/>
+          <p:cNvSpPr txBox="1"/>
+          <p:nvPr/>
+        </p:nvSpPr>
+        <p:spPr>
+          <a:xfrm>
+            <a:off x="6675120" y="4937760"/>
+            <a:ext cx="4114800" cy="1097280"/>
+          </a:xfrm>
+          <a:prstGeom prst="rect">
+            <a:avLst/>
+          </a:prstGeom>
+          <a:noFill/>
+        </p:spPr>
+        <p:txBody>
+          <a:bodyPr wrap="square">
+            <a:spAutoFit/>
+          </a:bodyPr>
+          <a:lstStyle/>
+          <a:p>
+            <a:pPr algn="l">
+              <a:defRPr sz="1600" b="0">
+                <a:solidFill>
+                  <a:srgbClr val="333333"/>
+                </a:solidFill>
+                <a:latin typeface="Calibri"/>
+              </a:defRPr>
+            </a:pPr>
+            <a:r>
+              <a:t>IoTeye Inc.</a:t>
+            </a:r>
+            <a:br/>
+            <a:r>
+              <a:t>Basking Ridge, New Jersey</a:t>
+            </a:r>
+            <a:br/>
+            <a:r>
+              <a:t>mingjye.sheng@ioteyeinc.com</a:t>
+            </a:r>
+            <a:br/>
+            <a:r>
+              <a:t>www.ioteyeinc.com</a:t>
+            </a:r>
+          </a:p>
+        </p:txBody>
+      </p:sp>
+      <p:sp>
+        <p:nvSpPr>
+          <p:cNvPr id="11" name="TextBox 10"/>
+          <p:cNvSpPr txBox="1"/>
+          <p:nvPr/>
+        </p:nvSpPr>
+        <p:spPr>
+          <a:xfrm>
+            <a:off x="731520" y="5669280"/>
+            <a:ext cx="4572000" cy="731520"/>
+          </a:xfrm>
+          <a:prstGeom prst="rect">
+            <a:avLst/>
+          </a:prstGeom>
+          <a:noFill/>
+        </p:spPr>
+        <p:txBody>
+          <a:bodyPr wrap="square">
+            <a:spAutoFit/>
+          </a:bodyPr>
+          <a:lstStyle/>
+          <a:p>
+            <a:pPr algn="l">
+              <a:defRPr sz="4000" b="1">
+                <a:solidFill>
+                  <a:srgbClr val="2E86C1"/>
+                </a:solidFill>
+                <a:latin typeface="Calibri"/>
+              </a:defRPr>
+            </a:pPr>
+            <a:r>
+              <a:t>Thank You</a:t>
             </a:r>
           </a:p>
         </p:txBody>
@@ -14292,8 +13875,8 @@
 </p:sld>
 </file>
 
-<file path=ppt/slides/slide3.xml><?xml version="1.0" encoding="utf-8"?>
-<p:sld xmlns:a="http://schemas.openxmlformats.org/drawingml/2006/main" xmlns:r="http://schemas.openxmlformats.org/officeDocument/2006/relationships" xmlns:p="http://schemas.openxmlformats.org/presentationml/2006/main">
+<file path=ppt/slides/slide2.xml><?xml version="1.0" encoding="utf-8"?>
+<p:sld xmlns:a="http://schemas.openxmlformats.org/drawingml/2006/main" xmlns:p="http://schemas.openxmlformats.org/presentationml/2006/main" xmlns:r="http://schemas.openxmlformats.org/officeDocument/2006/relationships">
   <p:cSld>
     <p:bg>
       <p:bgPr>
@@ -14309,14 +13892,7 @@
         <p:cNvGrpSpPr/>
         <p:nvPr/>
       </p:nvGrpSpPr>
-      <p:grpSpPr>
-        <a:xfrm>
-          <a:off x="0" y="0"/>
-          <a:ext cx="0" cy="0"/>
-          <a:chOff x="0" y="0"/>
-          <a:chExt cx="0" cy="0"/>
-        </a:xfrm>
-      </p:grpSpPr>
+      <p:grpSpPr/>
       <p:sp>
         <p:nvSpPr>
           <p:cNvPr id="2" name="Rectangle 1"/>
@@ -14357,7 +13933,6 @@
           <a:lstStyle/>
           <a:p>
             <a:pPr algn="ctr"/>
-            <a:endParaRPr/>
           </a:p>
         </p:txBody>
       </p:sp>
@@ -14392,7 +13967,7 @@
               </a:defRPr>
             </a:pPr>
             <a:r>
-              <a:t>About IoTeye Inc.</a:t>
+              <a:t>Agenda</a:t>
             </a:r>
           </a:p>
         </p:txBody>
@@ -14405,44 +13980,8 @@
         </p:nvSpPr>
         <p:spPr>
           <a:xfrm>
-            <a:off x="731520" y="1280160"/>
-            <a:ext cx="5029200" cy="457200"/>
-          </a:xfrm>
-          <a:prstGeom prst="rect">
-            <a:avLst/>
-          </a:prstGeom>
-          <a:noFill/>
-        </p:spPr>
-        <p:txBody>
-          <a:bodyPr wrap="square">
-            <a:spAutoFit/>
-          </a:bodyPr>
-          <a:lstStyle/>
-          <a:p>
-            <a:pPr algn="l">
-              <a:defRPr sz="2400" b="1">
-                <a:solidFill>
-                  <a:srgbClr val="2E86C1"/>
-                </a:solidFill>
-                <a:latin typeface="Calibri"/>
-              </a:defRPr>
-            </a:pPr>
-            <a:r>
-              <a:t>Who We Are</a:t>
-            </a:r>
-          </a:p>
-        </p:txBody>
-      </p:sp>
-      <p:sp>
-        <p:nvSpPr>
-          <p:cNvPr id="5" name="TextBox 4"/>
-          <p:cNvSpPr txBox="1"/>
-          <p:nvPr/>
-        </p:nvSpPr>
-        <p:spPr>
-          <a:xfrm>
-            <a:off x="731520" y="1828800"/>
-            <a:ext cx="5029200" cy="4114800"/>
+            <a:off x="1371600" y="1463040"/>
+            <a:ext cx="9144000" cy="4572000"/>
           </a:xfrm>
           <a:prstGeom prst="rect">
             <a:avLst/>
@@ -14459,15 +13998,15 @@
               <a:spcAft>
                 <a:spcPts val="1000"/>
               </a:spcAft>
-              <a:defRPr sz="1600" b="0">
-                <a:solidFill>
-                  <a:srgbClr val="333333"/>
-                </a:solidFill>
-                <a:latin typeface="Calibri"/>
-              </a:defRPr>
-            </a:pPr>
-            <a:r>
-              <a:t>• Remote software company — Basking Ridge, NJ</a:t>
+              <a:defRPr sz="2200" b="0">
+                <a:solidFill>
+                  <a:srgbClr val="333333"/>
+                </a:solidFill>
+                <a:latin typeface="Calibri"/>
+              </a:defRPr>
+            </a:pPr>
+            <a:r>
+              <a:t>1.  About IoTeye &amp; Platform Ecosystem</a:t>
             </a:r>
           </a:p>
           <a:p>
@@ -14475,15 +14014,15 @@
               <a:spcAft>
                 <a:spcPts val="1000"/>
               </a:spcAft>
-              <a:defRPr sz="1600">
-                <a:solidFill>
-                  <a:srgbClr val="333333"/>
-                </a:solidFill>
-                <a:latin typeface="Calibri"/>
-              </a:defRPr>
-            </a:pPr>
-            <a:r>
-              <a:t>• 5+ years building special care software</a:t>
+              <a:defRPr sz="2200">
+                <a:solidFill>
+                  <a:srgbClr val="333333"/>
+                </a:solidFill>
+                <a:latin typeface="Calibri"/>
+              </a:defRPr>
+            </a:pPr>
+            <a:r>
+              <a:t>2.  BrainClaw AI Agents — Already at Arc Mercer</a:t>
             </a:r>
           </a:p>
           <a:p>
@@ -14491,15 +14030,15 @@
               <a:spcAft>
                 <a:spcPts val="1000"/>
               </a:spcAft>
-              <a:defRPr sz="1600">
-                <a:solidFill>
-                  <a:srgbClr val="333333"/>
-                </a:solidFill>
-                <a:latin typeface="Calibri"/>
-              </a:defRPr>
-            </a:pPr>
-            <a:r>
-              <a:t>• 1,000+ consumers across our platforms</a:t>
+              <a:defRPr sz="2200">
+                <a:solidFill>
+                  <a:srgbClr val="333333"/>
+                </a:solidFill>
+                <a:latin typeface="Calibri"/>
+              </a:defRPr>
+            </a:pPr>
+            <a:r>
+              <a:t>3.  Understanding Your Challenge</a:t>
             </a:r>
           </a:p>
           <a:p>
@@ -14507,15 +14046,15 @@
               <a:spcAft>
                 <a:spcPts val="1000"/>
               </a:spcAft>
-              <a:defRPr sz="1600">
-                <a:solidFill>
-                  <a:srgbClr val="333333"/>
-                </a:solidFill>
-                <a:latin typeface="Calibri"/>
-              </a:defRPr>
-            </a:pPr>
-            <a:r>
-              <a:t>• Core domain: Special Care sector</a:t>
+              <a:defRPr sz="2200">
+                <a:solidFill>
+                  <a:srgbClr val="333333"/>
+                </a:solidFill>
+                <a:latin typeface="Calibri"/>
+              </a:defRPr>
+            </a:pPr>
+            <a:r>
+              <a:t>4.  Platform Overview &amp; Architecture</a:t>
             </a:r>
           </a:p>
           <a:p>
@@ -14523,90 +14062,15 @@
               <a:spcAft>
                 <a:spcPts val="1000"/>
               </a:spcAft>
-              <a:defRPr sz="1600">
-                <a:solidFill>
-                  <a:srgbClr val="333333"/>
-                </a:solidFill>
-                <a:latin typeface="Calibri"/>
-              </a:defRPr>
-            </a:pPr>
-            <a:r>
-              <a:t>• Full-stack SaaS expertise: design → deploy → support</a:t>
-            </a:r>
-          </a:p>
-        </p:txBody>
-      </p:sp>
-      <p:sp>
-        <p:nvSpPr>
-          <p:cNvPr id="6" name="TextBox 5"/>
-          <p:cNvSpPr txBox="1"/>
-          <p:nvPr/>
-        </p:nvSpPr>
-        <p:spPr>
-          <a:xfrm>
-            <a:off x="6400800" y="1280160"/>
-            <a:ext cx="5029200" cy="457200"/>
-          </a:xfrm>
-          <a:prstGeom prst="rect">
-            <a:avLst/>
-          </a:prstGeom>
-          <a:noFill/>
-        </p:spPr>
-        <p:txBody>
-          <a:bodyPr wrap="square">
-            <a:spAutoFit/>
-          </a:bodyPr>
-          <a:lstStyle/>
-          <a:p>
-            <a:pPr algn="l">
-              <a:defRPr sz="2400" b="1">
-                <a:solidFill>
-                  <a:srgbClr val="2E86C1"/>
-                </a:solidFill>
-                <a:latin typeface="Calibri"/>
-              </a:defRPr>
-            </a:pPr>
-            <a:r>
-              <a:t>Our Products</a:t>
-            </a:r>
-          </a:p>
-        </p:txBody>
-      </p:sp>
-      <p:sp>
-        <p:nvSpPr>
-          <p:cNvPr id="7" name="TextBox 6"/>
-          <p:cNvSpPr txBox="1"/>
-          <p:nvPr/>
-        </p:nvSpPr>
-        <p:spPr>
-          <a:xfrm>
-            <a:off x="6400800" y="1828800"/>
-            <a:ext cx="5303520" cy="4389120"/>
-          </a:xfrm>
-          <a:prstGeom prst="rect">
-            <a:avLst/>
-          </a:prstGeom>
-          <a:noFill/>
-        </p:spPr>
-        <p:txBody>
-          <a:bodyPr wrap="square">
-            <a:spAutoFit/>
-          </a:bodyPr>
-          <a:lstStyle/>
-          <a:p>
-            <a:pPr algn="l">
-              <a:spcAft>
-                <a:spcPts val="1000"/>
-              </a:spcAft>
-              <a:defRPr sz="1400" b="0">
-                <a:solidFill>
-                  <a:srgbClr val="333333"/>
-                </a:solidFill>
-                <a:latin typeface="Calibri"/>
-              </a:defRPr>
-            </a:pPr>
-            <a:r>
-              <a:t>• SpringBoard: Multi-agency route management &amp; operations (route opt., fleet, Twilio SMS, multi-tenant)</a:t>
+              <a:defRPr sz="2200">
+                <a:solidFill>
+                  <a:srgbClr val="333333"/>
+                </a:solidFill>
+                <a:latin typeface="Calibri"/>
+              </a:defRPr>
+            </a:pPr>
+            <a:r>
+              <a:t>5.  Key Features (Nominations → Engagement → Marketplace)</a:t>
             </a:r>
           </a:p>
           <a:p>
@@ -14614,15 +14078,15 @@
               <a:spcAft>
                 <a:spcPts val="1000"/>
               </a:spcAft>
-              <a:defRPr sz="1400">
-                <a:solidFill>
-                  <a:srgbClr val="333333"/>
-                </a:solidFill>
-                <a:latin typeface="Calibri"/>
-              </a:defRPr>
-            </a:pPr>
-            <a:r>
-              <a:t>• BrainBook: AI platform — Next.js/React/TypeScript, Supabase, AI agents, voice I/O, desktop &amp; web</a:t>
+              <a:defRPr sz="2200">
+                <a:solidFill>
+                  <a:srgbClr val="333333"/>
+                </a:solidFill>
+                <a:latin typeface="Calibri"/>
+              </a:defRPr>
+            </a:pPr>
+            <a:r>
+              <a:t>6.  Integration, Authentication &amp; Accessibility</a:t>
             </a:r>
           </a:p>
           <a:p>
@@ -14630,15 +14094,15 @@
               <a:spcAft>
                 <a:spcPts val="1000"/>
               </a:spcAft>
-              <a:defRPr sz="1400">
-                <a:solidFill>
-                  <a:srgbClr val="333333"/>
-                </a:solidFill>
-                <a:latin typeface="Calibri"/>
-              </a:defRPr>
-            </a:pPr>
-            <a:r>
-              <a:t>• Guardian: Notification system — SMS, push notifications, reply tracking, iOS &amp; Android</a:t>
+              <a:defRPr sz="2200">
+                <a:solidFill>
+                  <a:srgbClr val="333333"/>
+                </a:solidFill>
+                <a:latin typeface="Calibri"/>
+              </a:defRPr>
+            </a:pPr>
+            <a:r>
+              <a:t>7.  Dashboards — Employee &amp; Leadership</a:t>
             </a:r>
           </a:p>
           <a:p>
@@ -14646,15 +14110,47 @@
               <a:spcAft>
                 <a:spcPts val="1000"/>
               </a:spcAft>
-              <a:defRPr sz="1400">
-                <a:solidFill>
-                  <a:srgbClr val="333333"/>
-                </a:solidFill>
-                <a:latin typeface="Calibri"/>
-              </a:defRPr>
-            </a:pPr>
-            <a:r>
-              <a:t>• BrainClaw: AI agent gateway (GPT-4.1) — 37-tool SpringBoard agent &amp; 57-tool Samsara agent live at Arc Mercer</a:t>
+              <a:defRPr sz="2200">
+                <a:solidFill>
+                  <a:srgbClr val="333333"/>
+                </a:solidFill>
+                <a:latin typeface="Calibri"/>
+              </a:defRPr>
+            </a:pPr>
+            <a:r>
+              <a:t>8.  Implementation Timeline &amp; Pricing</a:t>
+            </a:r>
+          </a:p>
+          <a:p>
+            <a:pPr>
+              <a:spcAft>
+                <a:spcPts val="1000"/>
+              </a:spcAft>
+              <a:defRPr sz="2200">
+                <a:solidFill>
+                  <a:srgbClr val="333333"/>
+                </a:solidFill>
+                <a:latin typeface="Calibri"/>
+              </a:defRPr>
+            </a:pPr>
+            <a:r>
+              <a:t>9.  Feature Comparison — How We Stack Up</a:t>
+            </a:r>
+          </a:p>
+          <a:p>
+            <a:pPr>
+              <a:spcAft>
+                <a:spcPts val="1000"/>
+              </a:spcAft>
+              <a:defRPr sz="2200">
+                <a:solidFill>
+                  <a:srgbClr val="333333"/>
+                </a:solidFill>
+                <a:latin typeface="Calibri"/>
+              </a:defRPr>
+            </a:pPr>
+            <a:r>
+              <a:t>10. Why IoTeye — Next Steps</a:t>
             </a:r>
           </a:p>
         </p:txBody>
@@ -14667,660 +14163,8 @@
 </p:sld>
 </file>
 
-<file path=ppt/slides/slide4.xml><?xml version="1.0" encoding="utf-8"?>
-<p:sld xmlns:a="http://schemas.openxmlformats.org/drawingml/2006/main" xmlns:r="http://schemas.openxmlformats.org/officeDocument/2006/relationships" xmlns:p="http://schemas.openxmlformats.org/presentationml/2006/main">
-  <p:cSld>
-    <p:bg>
-      <p:bgPr>
-        <a:solidFill>
-          <a:srgbClr val="1B2A4A"/>
-        </a:solidFill>
-        <a:effectLst/>
-      </p:bgPr>
-    </p:bg>
-    <p:spTree>
-      <p:nvGrpSpPr>
-        <p:cNvPr id="1" name=""/>
-        <p:cNvGrpSpPr/>
-        <p:nvPr/>
-      </p:nvGrpSpPr>
-      <p:grpSpPr>
-        <a:xfrm>
-          <a:off x="0" y="0"/>
-          <a:ext cx="0" cy="0"/>
-          <a:chOff x="0" y="0"/>
-          <a:chExt cx="0" cy="0"/>
-        </a:xfrm>
-      </p:grpSpPr>
-      <p:sp>
-        <p:nvSpPr>
-          <p:cNvPr id="2" name="TextBox 1"/>
-          <p:cNvSpPr txBox="1"/>
-          <p:nvPr/>
-        </p:nvSpPr>
-        <p:spPr>
-          <a:xfrm>
-            <a:off x="731520" y="274320"/>
-            <a:ext cx="10058400" cy="594360"/>
-          </a:xfrm>
-          <a:prstGeom prst="rect">
-            <a:avLst/>
-          </a:prstGeom>
-          <a:noFill/>
-        </p:spPr>
-        <p:txBody>
-          <a:bodyPr wrap="square">
-            <a:spAutoFit/>
-          </a:bodyPr>
-          <a:lstStyle/>
-          <a:p>
-            <a:pPr algn="l">
-              <a:defRPr sz="3000" b="1">
-                <a:solidFill>
-                  <a:srgbClr val="FFFFFF"/>
-                </a:solidFill>
-                <a:latin typeface="Calibri"/>
-              </a:defRPr>
-            </a:pPr>
-            <a:r>
-              <a:t>Total Agency Services for Special Care</a:t>
-            </a:r>
-          </a:p>
-        </p:txBody>
-      </p:sp>
-      <p:sp>
-        <p:nvSpPr>
-          <p:cNvPr id="3" name="Rectangle 2"/>
-          <p:cNvSpPr/>
-          <p:nvPr/>
-        </p:nvSpPr>
-        <p:spPr>
-          <a:xfrm>
-            <a:off x="365760" y="1005840"/>
-            <a:ext cx="5394960" cy="5303520"/>
-          </a:xfrm>
-          <a:prstGeom prst="rect">
-            <a:avLst/>
-          </a:prstGeom>
-          <a:solidFill>
-            <a:srgbClr val="121D35"/>
-          </a:solidFill>
-          <a:ln>
-            <a:noFill/>
-          </a:ln>
-        </p:spPr>
-        <p:style>
-          <a:lnRef idx="1">
-            <a:schemeClr val="accent1"/>
-          </a:lnRef>
-          <a:fillRef idx="3">
-            <a:schemeClr val="accent1"/>
-          </a:fillRef>
-          <a:effectRef idx="2">
-            <a:schemeClr val="accent1"/>
-          </a:effectRef>
-          <a:fontRef idx="minor">
-            <a:schemeClr val="lt1"/>
-          </a:fontRef>
-        </p:style>
-        <p:txBody>
-          <a:bodyPr rtlCol="0" anchor="ctr"/>
-          <a:lstStyle/>
-          <a:p>
-            <a:pPr algn="ctr"/>
-            <a:endParaRPr/>
-          </a:p>
-        </p:txBody>
-      </p:sp>
-      <p:sp>
-        <p:nvSpPr>
-          <p:cNvPr id="4" name="TextBox 3"/>
-          <p:cNvSpPr txBox="1"/>
-          <p:nvPr/>
-        </p:nvSpPr>
-        <p:spPr>
-          <a:xfrm>
-            <a:off x="594360" y="1097280"/>
-            <a:ext cx="4846320" cy="411480"/>
-          </a:xfrm>
-          <a:prstGeom prst="rect">
-            <a:avLst/>
-          </a:prstGeom>
-          <a:noFill/>
-        </p:spPr>
-        <p:txBody>
-          <a:bodyPr wrap="square">
-            <a:spAutoFit/>
-          </a:bodyPr>
-          <a:lstStyle/>
-          <a:p>
-            <a:pPr algn="l">
-              <a:defRPr sz="1800" b="1">
-                <a:solidFill>
-                  <a:srgbClr val="2E86C1"/>
-                </a:solidFill>
-                <a:latin typeface="Calibri"/>
-              </a:defRPr>
-            </a:pPr>
-            <a:r>
-              <a:t>Special Care Cloud (AWS)</a:t>
-            </a:r>
-          </a:p>
-        </p:txBody>
-      </p:sp>
-      <p:sp>
-        <p:nvSpPr>
-          <p:cNvPr id="5" name="TextBox 4"/>
-          <p:cNvSpPr txBox="1"/>
-          <p:nvPr/>
-        </p:nvSpPr>
-        <p:spPr>
-          <a:xfrm>
-            <a:off x="594360" y="1600200"/>
-            <a:ext cx="4846320" cy="4389120"/>
-          </a:xfrm>
-          <a:prstGeom prst="rect">
-            <a:avLst/>
-          </a:prstGeom>
-          <a:noFill/>
-        </p:spPr>
-        <p:txBody>
-          <a:bodyPr wrap="square">
-            <a:spAutoFit/>
-          </a:bodyPr>
-          <a:lstStyle/>
-          <a:p>
-            <a:pPr algn="l">
-              <a:spcAft>
-                <a:spcPts val="800"/>
-              </a:spcAft>
-              <a:defRPr sz="1300" b="0">
-                <a:solidFill>
-                  <a:srgbClr val="FFFFFF"/>
-                </a:solidFill>
-                <a:latin typeface="Calibri"/>
-              </a:defRPr>
-            </a:pPr>
-            <a:r>
-              <a:t>• Market: 6,000+ special care agencies in the USA</a:t>
-            </a:r>
-          </a:p>
-          <a:p>
-            <a:pPr>
-              <a:spcAft>
-                <a:spcPts val="800"/>
-              </a:spcAft>
-              <a:defRPr sz="1300">
-                <a:solidFill>
-                  <a:srgbClr val="FFFFFF"/>
-                </a:solidFill>
-                <a:latin typeface="Calibri"/>
-              </a:defRPr>
-            </a:pPr>
-            <a:r>
-              <a:t>• Agentic AI Platform — Cloud, Desktop, Mobile, IoT</a:t>
-            </a:r>
-          </a:p>
-          <a:p>
-            <a:pPr>
-              <a:spcAft>
-                <a:spcPts val="800"/>
-              </a:spcAft>
-              <a:defRPr sz="1300">
-                <a:solidFill>
-                  <a:srgbClr val="FFFFFF"/>
-                </a:solidFill>
-                <a:latin typeface="Calibri"/>
-              </a:defRPr>
-            </a:pPr>
-            <a:r>
-              <a:t>• Personal AI assistants for agency workflows</a:t>
-            </a:r>
-          </a:p>
-          <a:p>
-            <a:pPr>
-              <a:spcAft>
-                <a:spcPts val="800"/>
-              </a:spcAft>
-              <a:defRPr sz="1300">
-                <a:solidFill>
-                  <a:srgbClr val="FFFFFF"/>
-                </a:solidFill>
-                <a:latin typeface="Calibri"/>
-              </a:defRPr>
-            </a:pPr>
-            <a:r>
-              <a:t>• Apps for Parent/Guardian, Consumer/Patient, Staff/Driver</a:t>
-            </a:r>
-          </a:p>
-          <a:p>
-            <a:pPr>
-              <a:spcAft>
-                <a:spcPts val="800"/>
-              </a:spcAft>
-              <a:defRPr sz="1300">
-                <a:solidFill>
-                  <a:srgbClr val="FFFFFF"/>
-                </a:solidFill>
-                <a:latin typeface="Calibri"/>
-              </a:defRPr>
-            </a:pPr>
-            <a:r>
-              <a:t>• IoT: OBD, DashCam, Minew Proximity, Home Assistant Green</a:t>
-            </a:r>
-          </a:p>
-          <a:p>
-            <a:pPr>
-              <a:spcAft>
-                <a:spcPts val="800"/>
-              </a:spcAft>
-              <a:defRPr sz="1300">
-                <a:solidFill>
-                  <a:srgbClr val="FFFFFF"/>
-                </a:solidFill>
-                <a:latin typeface="Calibri"/>
-              </a:defRPr>
-            </a:pPr>
-            <a:r>
-              <a:t>• Samsara App Partner — fleet telematics</a:t>
-            </a:r>
-          </a:p>
-          <a:p>
-            <a:pPr>
-              <a:spcAft>
-                <a:spcPts val="800"/>
-              </a:spcAft>
-              <a:defRPr sz="1300">
-                <a:solidFill>
-                  <a:srgbClr val="FFFFFF"/>
-                </a:solidFill>
-                <a:latin typeface="Calibri"/>
-              </a:defRPr>
-            </a:pPr>
-            <a:r>
-              <a:t>• HIPAA-compliant AI inference servers</a:t>
-            </a:r>
-          </a:p>
-        </p:txBody>
-      </p:sp>
-      <p:sp>
-        <p:nvSpPr>
-          <p:cNvPr id="6" name="Rectangle 5"/>
-          <p:cNvSpPr/>
-          <p:nvPr/>
-        </p:nvSpPr>
-        <p:spPr>
-          <a:xfrm>
-            <a:off x="6400800" y="1005840"/>
-            <a:ext cx="5394960" cy="5303520"/>
-          </a:xfrm>
-          <a:prstGeom prst="rect">
-            <a:avLst/>
-          </a:prstGeom>
-          <a:solidFill>
-            <a:srgbClr val="121D35"/>
-          </a:solidFill>
-          <a:ln>
-            <a:noFill/>
-          </a:ln>
-        </p:spPr>
-        <p:style>
-          <a:lnRef idx="1">
-            <a:schemeClr val="accent1"/>
-          </a:lnRef>
-          <a:fillRef idx="3">
-            <a:schemeClr val="accent1"/>
-          </a:fillRef>
-          <a:effectRef idx="2">
-            <a:schemeClr val="accent1"/>
-          </a:effectRef>
-          <a:fontRef idx="minor">
-            <a:schemeClr val="lt1"/>
-          </a:fontRef>
-        </p:style>
-        <p:txBody>
-          <a:bodyPr rtlCol="0" anchor="ctr"/>
-          <a:lstStyle/>
-          <a:p>
-            <a:pPr algn="ctr"/>
-            <a:endParaRPr/>
-          </a:p>
-        </p:txBody>
-      </p:sp>
-      <p:sp>
-        <p:nvSpPr>
-          <p:cNvPr id="7" name="TextBox 6"/>
-          <p:cNvSpPr txBox="1"/>
-          <p:nvPr/>
-        </p:nvSpPr>
-        <p:spPr>
-          <a:xfrm>
-            <a:off x="6629400" y="1097280"/>
-            <a:ext cx="4937760" cy="411480"/>
-          </a:xfrm>
-          <a:prstGeom prst="rect">
-            <a:avLst/>
-          </a:prstGeom>
-          <a:noFill/>
-        </p:spPr>
-        <p:txBody>
-          <a:bodyPr wrap="square">
-            <a:spAutoFit/>
-          </a:bodyPr>
-          <a:lstStyle/>
-          <a:p>
-            <a:pPr algn="l">
-              <a:defRPr sz="1800" b="1">
-                <a:solidFill>
-                  <a:srgbClr val="2E86C1"/>
-                </a:solidFill>
-                <a:latin typeface="Calibri"/>
-              </a:defRPr>
-            </a:pPr>
-            <a:r>
-              <a:t>Platform Products</a:t>
-            </a:r>
-          </a:p>
-        </p:txBody>
-      </p:sp>
-      <p:sp>
-        <p:nvSpPr>
-          <p:cNvPr id="8" name="TextBox 7"/>
-          <p:cNvSpPr txBox="1"/>
-          <p:nvPr/>
-        </p:nvSpPr>
-        <p:spPr>
-          <a:xfrm>
-            <a:off x="6629400" y="1691640"/>
-            <a:ext cx="4937760" cy="274320"/>
-          </a:xfrm>
-          <a:prstGeom prst="rect">
-            <a:avLst/>
-          </a:prstGeom>
-          <a:noFill/>
-        </p:spPr>
-        <p:txBody>
-          <a:bodyPr wrap="square">
-            <a:spAutoFit/>
-          </a:bodyPr>
-          <a:lstStyle/>
-          <a:p>
-            <a:pPr algn="l">
-              <a:defRPr sz="1500" b="1">
-                <a:solidFill>
-                  <a:srgbClr val="2E86C1"/>
-                </a:solidFill>
-                <a:latin typeface="Calibri"/>
-              </a:defRPr>
-            </a:pPr>
-            <a:r>
-              <a:t>SpringBoard</a:t>
-            </a:r>
-          </a:p>
-        </p:txBody>
-      </p:sp>
-      <p:sp>
-        <p:nvSpPr>
-          <p:cNvPr id="9" name="TextBox 8"/>
-          <p:cNvSpPr txBox="1"/>
-          <p:nvPr/>
-        </p:nvSpPr>
-        <p:spPr>
-          <a:xfrm>
-            <a:off x="6629400" y="1965960"/>
-            <a:ext cx="4937760" cy="320040"/>
-          </a:xfrm>
-          <a:prstGeom prst="rect">
-            <a:avLst/>
-          </a:prstGeom>
-          <a:noFill/>
-        </p:spPr>
-        <p:txBody>
-          <a:bodyPr wrap="square">
-            <a:spAutoFit/>
-          </a:bodyPr>
-          <a:lstStyle/>
-          <a:p>
-            <a:pPr algn="l">
-              <a:defRPr sz="1300" b="0">
-                <a:solidFill>
-                  <a:srgbClr val="FFFFFF"/>
-                </a:solidFill>
-                <a:latin typeface="Calibri"/>
-              </a:defRPr>
-            </a:pPr>
-            <a:r>
-              <a:t>Route/Fleet — paratransit ops, multi-tenant</a:t>
-            </a:r>
-          </a:p>
-        </p:txBody>
-      </p:sp>
-      <p:sp>
-        <p:nvSpPr>
-          <p:cNvPr id="10" name="TextBox 9"/>
-          <p:cNvSpPr txBox="1"/>
-          <p:nvPr/>
-        </p:nvSpPr>
-        <p:spPr>
-          <a:xfrm>
-            <a:off x="6629400" y="2468880"/>
-            <a:ext cx="4937760" cy="274320"/>
-          </a:xfrm>
-          <a:prstGeom prst="rect">
-            <a:avLst/>
-          </a:prstGeom>
-          <a:noFill/>
-        </p:spPr>
-        <p:txBody>
-          <a:bodyPr wrap="square">
-            <a:spAutoFit/>
-          </a:bodyPr>
-          <a:lstStyle/>
-          <a:p>
-            <a:pPr algn="l">
-              <a:defRPr sz="1500" b="1">
-                <a:solidFill>
-                  <a:srgbClr val="2E86C1"/>
-                </a:solidFill>
-                <a:latin typeface="Calibri"/>
-              </a:defRPr>
-            </a:pPr>
-            <a:r>
-              <a:t>Guardian</a:t>
-            </a:r>
-          </a:p>
-        </p:txBody>
-      </p:sp>
-      <p:sp>
-        <p:nvSpPr>
-          <p:cNvPr id="11" name="TextBox 10"/>
-          <p:cNvSpPr txBox="1"/>
-          <p:nvPr/>
-        </p:nvSpPr>
-        <p:spPr>
-          <a:xfrm>
-            <a:off x="6629400" y="2743200"/>
-            <a:ext cx="4937760" cy="320040"/>
-          </a:xfrm>
-          <a:prstGeom prst="rect">
-            <a:avLst/>
-          </a:prstGeom>
-          <a:noFill/>
-        </p:spPr>
-        <p:txBody>
-          <a:bodyPr wrap="square">
-            <a:spAutoFit/>
-          </a:bodyPr>
-          <a:lstStyle/>
-          <a:p>
-            <a:pPr algn="l">
-              <a:defRPr sz="1300" b="0">
-                <a:solidFill>
-                  <a:srgbClr val="FFFFFF"/>
-                </a:solidFill>
-                <a:latin typeface="Calibri"/>
-              </a:defRPr>
-            </a:pPr>
-            <a:r>
-              <a:t>Notifications — SMS, push, reply tracking</a:t>
-            </a:r>
-          </a:p>
-        </p:txBody>
-      </p:sp>
-      <p:sp>
-        <p:nvSpPr>
-          <p:cNvPr id="12" name="TextBox 11"/>
-          <p:cNvSpPr txBox="1"/>
-          <p:nvPr/>
-        </p:nvSpPr>
-        <p:spPr>
-          <a:xfrm>
-            <a:off x="6629400" y="3246120"/>
-            <a:ext cx="4937760" cy="274320"/>
-          </a:xfrm>
-          <a:prstGeom prst="rect">
-            <a:avLst/>
-          </a:prstGeom>
-          <a:noFill/>
-        </p:spPr>
-        <p:txBody>
-          <a:bodyPr wrap="square">
-            <a:spAutoFit/>
-          </a:bodyPr>
-          <a:lstStyle/>
-          <a:p>
-            <a:pPr algn="l">
-              <a:defRPr sz="1500" b="1">
-                <a:solidFill>
-                  <a:srgbClr val="2E86C1"/>
-                </a:solidFill>
-                <a:latin typeface="Calibri"/>
-              </a:defRPr>
-            </a:pPr>
-            <a:r>
-              <a:t>BrainBook</a:t>
-            </a:r>
-          </a:p>
-        </p:txBody>
-      </p:sp>
-      <p:sp>
-        <p:nvSpPr>
-          <p:cNvPr id="13" name="TextBox 12"/>
-          <p:cNvSpPr txBox="1"/>
-          <p:nvPr/>
-        </p:nvSpPr>
-        <p:spPr>
-          <a:xfrm>
-            <a:off x="6629400" y="3520440"/>
-            <a:ext cx="4937760" cy="320040"/>
-          </a:xfrm>
-          <a:prstGeom prst="rect">
-            <a:avLst/>
-          </a:prstGeom>
-          <a:noFill/>
-        </p:spPr>
-        <p:txBody>
-          <a:bodyPr wrap="square">
-            <a:spAutoFit/>
-          </a:bodyPr>
-          <a:lstStyle/>
-          <a:p>
-            <a:pPr algn="l">
-              <a:defRPr sz="1300" b="0">
-                <a:solidFill>
-                  <a:srgbClr val="FFFFFF"/>
-                </a:solidFill>
-                <a:latin typeface="Calibri"/>
-              </a:defRPr>
-            </a:pPr>
-            <a:r>
-              <a:t>AI Platform — desktop, web, mobile, voice I/O</a:t>
-            </a:r>
-          </a:p>
-        </p:txBody>
-      </p:sp>
-      <p:sp>
-        <p:nvSpPr>
-          <p:cNvPr id="14" name="TextBox 13"/>
-          <p:cNvSpPr txBox="1"/>
-          <p:nvPr/>
-        </p:nvSpPr>
-        <p:spPr>
-          <a:xfrm>
-            <a:off x="6629400" y="4023360"/>
-            <a:ext cx="4937760" cy="274320"/>
-          </a:xfrm>
-          <a:prstGeom prst="rect">
-            <a:avLst/>
-          </a:prstGeom>
-          <a:noFill/>
-        </p:spPr>
-        <p:txBody>
-          <a:bodyPr wrap="square">
-            <a:spAutoFit/>
-          </a:bodyPr>
-          <a:lstStyle/>
-          <a:p>
-            <a:pPr algn="l">
-              <a:defRPr sz="1500" b="1">
-                <a:solidFill>
-                  <a:srgbClr val="2E86C1"/>
-                </a:solidFill>
-                <a:latin typeface="Calibri"/>
-              </a:defRPr>
-            </a:pPr>
-            <a:r>
-              <a:t>BrainClaw</a:t>
-            </a:r>
-          </a:p>
-        </p:txBody>
-      </p:sp>
-      <p:sp>
-        <p:nvSpPr>
-          <p:cNvPr id="15" name="TextBox 14"/>
-          <p:cNvSpPr txBox="1"/>
-          <p:nvPr/>
-        </p:nvSpPr>
-        <p:spPr>
-          <a:xfrm>
-            <a:off x="6629400" y="4297680"/>
-            <a:ext cx="4937760" cy="320040"/>
-          </a:xfrm>
-          <a:prstGeom prst="rect">
-            <a:avLst/>
-          </a:prstGeom>
-          <a:noFill/>
-        </p:spPr>
-        <p:txBody>
-          <a:bodyPr wrap="square">
-            <a:spAutoFit/>
-          </a:bodyPr>
-          <a:lstStyle/>
-          <a:p>
-            <a:pPr algn="l">
-              <a:defRPr sz="1300" b="0">
-                <a:solidFill>
-                  <a:srgbClr val="FFFFFF"/>
-                </a:solidFill>
-                <a:latin typeface="Calibri"/>
-              </a:defRPr>
-            </a:pPr>
-            <a:r>
-              <a:t>AI Agents — 94+ tools, GPT-4.1, Arc Mercer live</a:t>
-            </a:r>
-          </a:p>
-        </p:txBody>
-      </p:sp>
-    </p:spTree>
-  </p:cSld>
-  <p:clrMapOvr>
-    <a:masterClrMapping/>
-  </p:clrMapOvr>
-</p:sld>
-</file>
-
-<file path=ppt/slides/slide5.xml><?xml version="1.0" encoding="utf-8"?>
-<p:sld xmlns:a="http://schemas.openxmlformats.org/drawingml/2006/main" xmlns:r="http://schemas.openxmlformats.org/officeDocument/2006/relationships" xmlns:p="http://schemas.openxmlformats.org/presentationml/2006/main">
+<file path=ppt/slides/slide3.xml><?xml version="1.0" encoding="utf-8"?>
+<p:sld xmlns:a="http://schemas.openxmlformats.org/drawingml/2006/main" xmlns:p="http://schemas.openxmlformats.org/presentationml/2006/main" xmlns:r="http://schemas.openxmlformats.org/officeDocument/2006/relationships">
   <p:cSld>
     <p:bg>
       <p:bgPr>
@@ -15336,14 +14180,7 @@
         <p:cNvGrpSpPr/>
         <p:nvPr/>
       </p:nvGrpSpPr>
-      <p:grpSpPr>
-        <a:xfrm>
-          <a:off x="0" y="0"/>
-          <a:ext cx="0" cy="0"/>
-          <a:chOff x="0" y="0"/>
-          <a:chExt cx="0" cy="0"/>
-        </a:xfrm>
-      </p:grpSpPr>
+      <p:grpSpPr/>
       <p:sp>
         <p:nvSpPr>
           <p:cNvPr id="2" name="Rectangle 1"/>
@@ -15384,7 +14221,6 @@
           <a:lstStyle/>
           <a:p>
             <a:pPr algn="ctr"/>
-            <a:endParaRPr/>
           </a:p>
         </p:txBody>
       </p:sp>
@@ -15419,7 +14255,7 @@
               </a:defRPr>
             </a:pPr>
             <a:r>
-              <a:t>BrainClaw AI Agents — Already at Arc Mercer</a:t>
+              <a:t>About IoTeye Inc.</a:t>
             </a:r>
           </a:p>
         </p:txBody>
@@ -15432,8 +14268,8 @@
         </p:nvSpPr>
         <p:spPr>
           <a:xfrm>
-            <a:off x="457200" y="1143000"/>
-            <a:ext cx="5486400" cy="411480"/>
+            <a:off x="731520" y="1280160"/>
+            <a:ext cx="5029200" cy="457200"/>
           </a:xfrm>
           <a:prstGeom prst="rect">
             <a:avLst/>
@@ -15447,7 +14283,7 @@
           <a:lstStyle/>
           <a:p>
             <a:pPr algn="l">
-              <a:defRPr sz="2000" b="1">
+              <a:defRPr sz="2400" b="1">
                 <a:solidFill>
                   <a:srgbClr val="2E86C1"/>
                 </a:solidFill>
@@ -15455,7 +14291,7 @@
               </a:defRPr>
             </a:pPr>
             <a:r>
-              <a:t>In Production at Arc Mercer Today</a:t>
+              <a:t>Who We Are</a:t>
             </a:r>
           </a:p>
         </p:txBody>
@@ -15468,44 +14304,8 @@
         </p:nvSpPr>
         <p:spPr>
           <a:xfrm>
-            <a:off x="457200" y="1645920"/>
-            <a:ext cx="5486400" cy="320040"/>
-          </a:xfrm>
-          <a:prstGeom prst="rect">
-            <a:avLst/>
-          </a:prstGeom>
-          <a:noFill/>
-        </p:spPr>
-        <p:txBody>
-          <a:bodyPr wrap="square">
-            <a:spAutoFit/>
-          </a:bodyPr>
-          <a:lstStyle/>
-          <a:p>
-            <a:pPr algn="l">
-              <a:defRPr sz="1400" b="0">
-                <a:solidFill>
-                  <a:srgbClr val="666666"/>
-                </a:solidFill>
-                <a:latin typeface="Calibri"/>
-              </a:defRPr>
-            </a:pPr>
-            <a:r>
-              <a:t>Powered by BrainClaw + GPT-4.1 (GitHub Copilot)</a:t>
-            </a:r>
-          </a:p>
-        </p:txBody>
-      </p:sp>
-      <p:sp>
-        <p:nvSpPr>
-          <p:cNvPr id="6" name="TextBox 5"/>
-          <p:cNvSpPr txBox="1"/>
-          <p:nvPr/>
-        </p:nvSpPr>
-        <p:spPr>
-          <a:xfrm>
-            <a:off x="457200" y="2057400"/>
-            <a:ext cx="5486400" cy="1920240"/>
+            <a:off x="731520" y="1828800"/>
+            <a:ext cx="5029200" cy="4114800"/>
           </a:xfrm>
           <a:prstGeom prst="rect">
             <a:avLst/>
@@ -15520,65 +14320,117 @@
           <a:p>
             <a:pPr algn="l">
               <a:spcAft>
-                <a:spcPts val="500"/>
+                <a:spcPts val="1000"/>
               </a:spcAft>
-              <a:defRPr sz="1400" b="0">
-                <a:solidFill>
-                  <a:srgbClr val="333333"/>
-                </a:solidFill>
-                <a:latin typeface="Calibri"/>
-              </a:defRPr>
-            </a:pPr>
-            <a:r>
-              <a:t>• SpringBoard Agent — 37 tools</a:t>
+              <a:defRPr sz="1600" b="0">
+                <a:solidFill>
+                  <a:srgbClr val="333333"/>
+                </a:solidFill>
+                <a:latin typeface="Calibri"/>
+              </a:defRPr>
+            </a:pPr>
+            <a:r>
+              <a:t>• Remote software company — Basking Ridge, NJ</a:t>
             </a:r>
           </a:p>
           <a:p>
             <a:pPr>
               <a:spcAft>
-                <a:spcPts val="500"/>
+                <a:spcPts val="1000"/>
               </a:spcAft>
-              <a:defRPr sz="1400">
-                <a:solidFill>
-                  <a:srgbClr val="333333"/>
-                </a:solidFill>
-                <a:latin typeface="Calibri"/>
-              </a:defRPr>
-            </a:pPr>
-            <a:r>
-              <a:t>•   Routes, fleet, consumers, optimization, SMS, GPS, SOS</a:t>
+              <a:defRPr sz="1600">
+                <a:solidFill>
+                  <a:srgbClr val="333333"/>
+                </a:solidFill>
+                <a:latin typeface="Calibri"/>
+              </a:defRPr>
+            </a:pPr>
+            <a:r>
+              <a:t>• 5+ years building special care software</a:t>
             </a:r>
           </a:p>
           <a:p>
             <a:pPr>
               <a:spcAft>
-                <a:spcPts val="500"/>
+                <a:spcPts val="1000"/>
               </a:spcAft>
-              <a:defRPr sz="1400">
-                <a:solidFill>
-                  <a:srgbClr val="333333"/>
-                </a:solidFill>
-                <a:latin typeface="Calibri"/>
-              </a:defRPr>
-            </a:pPr>
-            <a:r>
-              <a:t>• Samsara Agent — 57 tools</a:t>
+              <a:defRPr sz="1600">
+                <a:solidFill>
+                  <a:srgbClr val="333333"/>
+                </a:solidFill>
+                <a:latin typeface="Calibri"/>
+              </a:defRPr>
+            </a:pPr>
+            <a:r>
+              <a:t>• 1,000+ consumers across our platforms</a:t>
             </a:r>
           </a:p>
           <a:p>
             <a:pPr>
               <a:spcAft>
-                <a:spcPts val="500"/>
+                <a:spcPts val="1000"/>
               </a:spcAft>
-              <a:defRPr sz="1400">
-                <a:solidFill>
-                  <a:srgbClr val="333333"/>
-                </a:solidFill>
-                <a:latin typeface="Calibri"/>
-              </a:defRPr>
-            </a:pPr>
-            <a:r>
-              <a:t>•   Vehicles, drivers, HOS, safety events, DVIRs, GPS</a:t>
+              <a:defRPr sz="1600">
+                <a:solidFill>
+                  <a:srgbClr val="333333"/>
+                </a:solidFill>
+                <a:latin typeface="Calibri"/>
+              </a:defRPr>
+            </a:pPr>
+            <a:r>
+              <a:t>• Core domain: Special Care sector</a:t>
+            </a:r>
+          </a:p>
+          <a:p>
+            <a:pPr>
+              <a:spcAft>
+                <a:spcPts val="1000"/>
+              </a:spcAft>
+              <a:defRPr sz="1600">
+                <a:solidFill>
+                  <a:srgbClr val="333333"/>
+                </a:solidFill>
+                <a:latin typeface="Calibri"/>
+              </a:defRPr>
+            </a:pPr>
+            <a:r>
+              <a:t>• Full-stack SaaS expertise: design → deploy → support</a:t>
+            </a:r>
+          </a:p>
+        </p:txBody>
+      </p:sp>
+      <p:sp>
+        <p:nvSpPr>
+          <p:cNvPr id="6" name="TextBox 5"/>
+          <p:cNvSpPr txBox="1"/>
+          <p:nvPr/>
+        </p:nvSpPr>
+        <p:spPr>
+          <a:xfrm>
+            <a:off x="6400800" y="1280160"/>
+            <a:ext cx="5029200" cy="457200"/>
+          </a:xfrm>
+          <a:prstGeom prst="rect">
+            <a:avLst/>
+          </a:prstGeom>
+          <a:noFill/>
+        </p:spPr>
+        <p:txBody>
+          <a:bodyPr wrap="square">
+            <a:spAutoFit/>
+          </a:bodyPr>
+          <a:lstStyle/>
+          <a:p>
+            <a:pPr algn="l">
+              <a:defRPr sz="2400" b="1">
+                <a:solidFill>
+                  <a:srgbClr val="2E86C1"/>
+                </a:solidFill>
+                <a:latin typeface="Calibri"/>
+              </a:defRPr>
+            </a:pPr>
+            <a:r>
+              <a:t>Our Products</a:t>
             </a:r>
           </a:p>
         </p:txBody>
@@ -15591,252 +14443,8 @@
         </p:nvSpPr>
         <p:spPr>
           <a:xfrm>
-            <a:off x="457200" y="4069080"/>
-            <a:ext cx="5486400" cy="365760"/>
-          </a:xfrm>
-          <a:prstGeom prst="rect">
-            <a:avLst/>
-          </a:prstGeom>
-          <a:noFill/>
-        </p:spPr>
-        <p:txBody>
-          <a:bodyPr wrap="square">
-            <a:spAutoFit/>
-          </a:bodyPr>
-          <a:lstStyle/>
-          <a:p>
-            <a:pPr algn="l">
-              <a:defRPr sz="1400" b="1">
-                <a:solidFill>
-                  <a:srgbClr val="333333"/>
-                </a:solidFill>
-                <a:latin typeface="Calibri"/>
-              </a:defRPr>
-            </a:pPr>
-            <a:r>
-              <a:t>Arc Mercer staff use natural language today:</a:t>
-            </a:r>
-          </a:p>
-        </p:txBody>
-      </p:sp>
-      <p:sp>
-        <p:nvSpPr>
-          <p:cNvPr id="8" name="Rectangle 7"/>
-          <p:cNvSpPr/>
-          <p:nvPr/>
-        </p:nvSpPr>
-        <p:spPr>
-          <a:xfrm>
-            <a:off x="457200" y="4480560"/>
-            <a:ext cx="5486400" cy="1828800"/>
-          </a:xfrm>
-          <a:prstGeom prst="rect">
-            <a:avLst/>
-          </a:prstGeom>
-          <a:solidFill>
-            <a:srgbClr val="F2F2F2"/>
-          </a:solidFill>
-          <a:ln>
-            <a:noFill/>
-          </a:ln>
-        </p:spPr>
-        <p:style>
-          <a:lnRef idx="1">
-            <a:schemeClr val="accent1"/>
-          </a:lnRef>
-          <a:fillRef idx="3">
-            <a:schemeClr val="accent1"/>
-          </a:fillRef>
-          <a:effectRef idx="2">
-            <a:schemeClr val="accent1"/>
-          </a:effectRef>
-          <a:fontRef idx="minor">
-            <a:schemeClr val="lt1"/>
-          </a:fontRef>
-        </p:style>
-        <p:txBody>
-          <a:bodyPr rtlCol="0" anchor="ctr"/>
-          <a:lstStyle/>
-          <a:p>
-            <a:pPr algn="ctr"/>
-            <a:endParaRPr/>
-          </a:p>
-        </p:txBody>
-      </p:sp>
-      <p:sp>
-        <p:nvSpPr>
-          <p:cNvPr id="9" name="TextBox 8"/>
-          <p:cNvSpPr txBox="1"/>
-          <p:nvPr/>
-        </p:nvSpPr>
-        <p:spPr>
-          <a:xfrm>
-            <a:off x="594360" y="4526280"/>
-            <a:ext cx="5212080" cy="1645920"/>
-          </a:xfrm>
-          <a:prstGeom prst="rect">
-            <a:avLst/>
-          </a:prstGeom>
-          <a:noFill/>
-        </p:spPr>
-        <p:txBody>
-          <a:bodyPr wrap="square">
-            <a:spAutoFit/>
-          </a:bodyPr>
-          <a:lstStyle/>
-          <a:p>
-            <a:pPr algn="l">
-              <a:defRPr sz="1300" b="0">
-                <a:solidFill>
-                  <a:srgbClr val="333333"/>
-                </a:solidFill>
-                <a:latin typeface="Consolas"/>
-              </a:defRPr>
-            </a:pPr>
-            <a:r>
-              <a:t>"Optimize routes for Weekday AM"</a:t>
-            </a:r>
-            <a:br/>
-            <a:r>
-              <a:t>"Where is vehicle 147 right now?"</a:t>
-            </a:r>
-            <a:br/>
-            <a:r>
-              <a:t>"SMS all Residential drivers — 10 min delay"</a:t>
-            </a:r>
-            <a:br/>
-            <a:r>
-              <a:t>"Generate daily manifest for Arc Mercer"</a:t>
-            </a:r>
-          </a:p>
-        </p:txBody>
-      </p:sp>
-      <p:sp>
-        <p:nvSpPr>
-          <p:cNvPr id="10" name="Rectangle 9"/>
-          <p:cNvSpPr/>
-          <p:nvPr/>
-        </p:nvSpPr>
-        <p:spPr>
-          <a:xfrm>
-            <a:off x="6309360" y="1097280"/>
-            <a:ext cx="5577840" cy="5303520"/>
-          </a:xfrm>
-          <a:prstGeom prst="rect">
-            <a:avLst/>
-          </a:prstGeom>
-          <a:solidFill>
-            <a:srgbClr val="D6EAF8"/>
-          </a:solidFill>
-          <a:ln>
-            <a:noFill/>
-          </a:ln>
-        </p:spPr>
-        <p:style>
-          <a:lnRef idx="1">
-            <a:schemeClr val="accent1"/>
-          </a:lnRef>
-          <a:fillRef idx="3">
-            <a:schemeClr val="accent1"/>
-          </a:fillRef>
-          <a:effectRef idx="2">
-            <a:schemeClr val="accent1"/>
-          </a:effectRef>
-          <a:fontRef idx="minor">
-            <a:schemeClr val="lt1"/>
-          </a:fontRef>
-        </p:style>
-        <p:txBody>
-          <a:bodyPr rtlCol="0" anchor="ctr"/>
-          <a:lstStyle/>
-          <a:p>
-            <a:pPr algn="ctr"/>
-            <a:endParaRPr/>
-          </a:p>
-        </p:txBody>
-      </p:sp>
-      <p:sp>
-        <p:nvSpPr>
-          <p:cNvPr id="11" name="TextBox 10"/>
-          <p:cNvSpPr txBox="1"/>
-          <p:nvPr/>
-        </p:nvSpPr>
-        <p:spPr>
-          <a:xfrm>
-            <a:off x="6492240" y="1188720"/>
-            <a:ext cx="5212080" cy="411480"/>
-          </a:xfrm>
-          <a:prstGeom prst="rect">
-            <a:avLst/>
-          </a:prstGeom>
-          <a:noFill/>
-        </p:spPr>
-        <p:txBody>
-          <a:bodyPr wrap="square">
-            <a:spAutoFit/>
-          </a:bodyPr>
-          <a:lstStyle/>
-          <a:p>
-            <a:pPr algn="l">
-              <a:defRPr sz="2000" b="1">
-                <a:solidFill>
-                  <a:srgbClr val="1B2A4A"/>
-                </a:solidFill>
-                <a:latin typeface="Calibri"/>
-              </a:defRPr>
-            </a:pPr>
-            <a:r>
-              <a:t>Extending to Recognition Platform</a:t>
-            </a:r>
-          </a:p>
-        </p:txBody>
-      </p:sp>
-      <p:sp>
-        <p:nvSpPr>
-          <p:cNvPr id="12" name="TextBox 11"/>
-          <p:cNvSpPr txBox="1"/>
-          <p:nvPr/>
-        </p:nvSpPr>
-        <p:spPr>
-          <a:xfrm>
-            <a:off x="6492240" y="1691640"/>
-            <a:ext cx="5212080" cy="365760"/>
-          </a:xfrm>
-          <a:prstGeom prst="rect">
-            <a:avLst/>
-          </a:prstGeom>
-          <a:noFill/>
-        </p:spPr>
-        <p:txBody>
-          <a:bodyPr wrap="square">
-            <a:spAutoFit/>
-          </a:bodyPr>
-          <a:lstStyle/>
-          <a:p>
-            <a:pPr algn="l">
-              <a:defRPr sz="1500" b="1">
-                <a:solidFill>
-                  <a:srgbClr val="333333"/>
-                </a:solidFill>
-                <a:latin typeface="Calibri"/>
-              </a:defRPr>
-            </a:pPr>
-            <a:r>
-              <a:t>Natural language for HR &amp; leadership:</a:t>
-            </a:r>
-          </a:p>
-        </p:txBody>
-      </p:sp>
-      <p:sp>
-        <p:nvSpPr>
-          <p:cNvPr id="13" name="TextBox 12"/>
-          <p:cNvSpPr txBox="1"/>
-          <p:nvPr/>
-        </p:nvSpPr>
-        <p:spPr>
-          <a:xfrm>
-            <a:off x="6492240" y="2148840"/>
-            <a:ext cx="5212080" cy="2926080"/>
+            <a:off x="6400800" y="1828800"/>
+            <a:ext cx="5303520" cy="4389120"/>
           </a:xfrm>
           <a:prstGeom prst="rect">
             <a:avLst/>
@@ -15861,7 +14469,7 @@
               </a:defRPr>
             </a:pPr>
             <a:r>
-              <a:t>• "Which program had most nominations last month?"</a:t>
+              <a:t>• SpringBoard: Multi-agency route management &amp; operations (route opt., fleet, Twilio SMS, multi-tenant)</a:t>
             </a:r>
           </a:p>
           <a:p>
@@ -15877,7 +14485,7 @@
               </a:defRPr>
             </a:pPr>
             <a:r>
-              <a:t>• "Who hasn't been recognized in 60+ days?"</a:t>
+              <a:t>• BrainBook: AI platform — Next.js/React/TypeScript, Supabase, AI agents, voice I/O, desktop &amp; web</a:t>
             </a:r>
           </a:p>
           <a:p>
@@ -15893,7 +14501,7 @@
               </a:defRPr>
             </a:pPr>
             <a:r>
-              <a:t>• "Flag unusual point bestowals this week"</a:t>
+              <a:t>• Guardian: Notification system — SMS, push notifications, reply tracking, iOS &amp; Android</a:t>
             </a:r>
           </a:p>
           <a:p>
@@ -15909,103 +14517,7 @@
               </a:defRPr>
             </a:pPr>
             <a:r>
-              <a:t>• "Generate Q1 engagement report as CSV"</a:t>
-            </a:r>
-          </a:p>
-          <a:p>
-            <a:pPr>
-              <a:spcAft>
-                <a:spcPts val="1000"/>
-              </a:spcAft>
-              <a:defRPr sz="1400">
-                <a:solidFill>
-                  <a:srgbClr val="333333"/>
-                </a:solidFill>
-                <a:latin typeface="Calibri"/>
-              </a:defRPr>
-            </a:pPr>
-            <a:r>
-              <a:t>• "What's our engagement score this month?"</a:t>
-            </a:r>
-          </a:p>
-        </p:txBody>
-      </p:sp>
-      <p:sp>
-        <p:nvSpPr>
-          <p:cNvPr id="14" name="Rectangle 13"/>
-          <p:cNvSpPr/>
-          <p:nvPr/>
-        </p:nvSpPr>
-        <p:spPr>
-          <a:xfrm>
-            <a:off x="6400800" y="5303520"/>
-            <a:ext cx="5303520" cy="731520"/>
-          </a:xfrm>
-          <a:prstGeom prst="rect">
-            <a:avLst/>
-          </a:prstGeom>
-          <a:solidFill>
-            <a:srgbClr val="2E86C1"/>
-          </a:solidFill>
-          <a:ln>
-            <a:noFill/>
-          </a:ln>
-        </p:spPr>
-        <p:style>
-          <a:lnRef idx="1">
-            <a:schemeClr val="accent1"/>
-          </a:lnRef>
-          <a:fillRef idx="3">
-            <a:schemeClr val="accent1"/>
-          </a:fillRef>
-          <a:effectRef idx="2">
-            <a:schemeClr val="accent1"/>
-          </a:effectRef>
-          <a:fontRef idx="minor">
-            <a:schemeClr val="lt1"/>
-          </a:fontRef>
-        </p:style>
-        <p:txBody>
-          <a:bodyPr rtlCol="0" anchor="ctr"/>
-          <a:lstStyle/>
-          <a:p>
-            <a:pPr algn="ctr"/>
-            <a:endParaRPr/>
-          </a:p>
-        </p:txBody>
-      </p:sp>
-      <p:sp>
-        <p:nvSpPr>
-          <p:cNvPr id="15" name="TextBox 14"/>
-          <p:cNvSpPr txBox="1"/>
-          <p:nvPr/>
-        </p:nvSpPr>
-        <p:spPr>
-          <a:xfrm>
-            <a:off x="6583680" y="5349240"/>
-            <a:ext cx="4937760" cy="594360"/>
-          </a:xfrm>
-          <a:prstGeom prst="rect">
-            <a:avLst/>
-          </a:prstGeom>
-          <a:noFill/>
-        </p:spPr>
-        <p:txBody>
-          <a:bodyPr wrap="square">
-            <a:spAutoFit/>
-          </a:bodyPr>
-          <a:lstStyle/>
-          <a:p>
-            <a:pPr algn="l">
-              <a:defRPr sz="1400" b="1">
-                <a:solidFill>
-                  <a:srgbClr val="FFFFFF"/>
-                </a:solidFill>
-                <a:latin typeface="Calibri"/>
-              </a:defRPr>
-            </a:pPr>
-            <a:r>
-              <a:t>★ Optional add-on — same BrainBook UI Arc Mercer already uses</a:t>
+              <a:t>• BrainClaw: AI agent gateway (GPT-4.1) — 37-tool SpringBoard agent &amp; 57-tool Samsara agent live at Arc Mercer</a:t>
             </a:r>
           </a:p>
         </p:txBody>
@@ -16018,8 +14530,8 @@
 </p:sld>
 </file>
 
-<file path=ppt/slides/slide6.xml><?xml version="1.0" encoding="utf-8"?>
-<p:sld xmlns:a="http://schemas.openxmlformats.org/drawingml/2006/main" xmlns:r="http://schemas.openxmlformats.org/officeDocument/2006/relationships" xmlns:p="http://schemas.openxmlformats.org/presentationml/2006/main">
+<file path=ppt/slides/slide4.xml><?xml version="1.0" encoding="utf-8"?>
+<p:sld xmlns:a="http://schemas.openxmlformats.org/drawingml/2006/main" xmlns:p="http://schemas.openxmlformats.org/presentationml/2006/main" xmlns:r="http://schemas.openxmlformats.org/officeDocument/2006/relationships">
   <p:cSld>
     <p:bg>
       <p:bgPr>
@@ -16035,14 +14547,7 @@
         <p:cNvGrpSpPr/>
         <p:nvPr/>
       </p:nvGrpSpPr>
-      <p:grpSpPr>
-        <a:xfrm>
-          <a:off x="0" y="0"/>
-          <a:ext cx="0" cy="0"/>
-          <a:chOff x="0" y="0"/>
-          <a:chExt cx="0" cy="0"/>
-        </a:xfrm>
-      </p:grpSpPr>
+      <p:grpSpPr/>
       <p:sp>
         <p:nvSpPr>
           <p:cNvPr id="2" name="Rectangle 1"/>
@@ -16083,7 +14588,6 @@
           <a:lstStyle/>
           <a:p>
             <a:pPr algn="ctr"/>
-            <a:endParaRPr/>
           </a:p>
         </p:txBody>
       </p:sp>
@@ -16118,21 +14622,64 @@
               </a:defRPr>
             </a:pPr>
             <a:r>
-              <a:t>Understanding Your Challenge</a:t>
-            </a:r>
-          </a:p>
-        </p:txBody>
-      </p:sp>
-      <p:sp>
-        <p:nvSpPr>
-          <p:cNvPr id="4" name="TextBox 3"/>
-          <p:cNvSpPr txBox="1"/>
-          <p:nvPr/>
-        </p:nvSpPr>
-        <p:spPr>
-          <a:xfrm>
-            <a:off x="731520" y="1280160"/>
-            <a:ext cx="10058400" cy="457200"/>
+              <a:t>Total Agency Services for Special Care</a:t>
+            </a:r>
+          </a:p>
+        </p:txBody>
+      </p:sp>
+      <p:sp>
+        <p:nvSpPr>
+          <p:cNvPr id="4" name="Rectangle 3"/>
+          <p:cNvSpPr/>
+          <p:nvPr/>
+        </p:nvSpPr>
+        <p:spPr>
+          <a:xfrm>
+            <a:off x="365760" y="1188720"/>
+            <a:ext cx="5394960" cy="5029200"/>
+          </a:xfrm>
+          <a:prstGeom prst="rect">
+            <a:avLst/>
+          </a:prstGeom>
+          <a:solidFill>
+            <a:srgbClr val="F2F2F2"/>
+          </a:solidFill>
+          <a:ln>
+            <a:noFill/>
+          </a:ln>
+        </p:spPr>
+        <p:style>
+          <a:lnRef idx="1">
+            <a:schemeClr val="accent1"/>
+          </a:lnRef>
+          <a:fillRef idx="3">
+            <a:schemeClr val="accent1"/>
+          </a:fillRef>
+          <a:effectRef idx="2">
+            <a:schemeClr val="accent1"/>
+          </a:effectRef>
+          <a:fontRef idx="minor">
+            <a:schemeClr val="lt1"/>
+          </a:fontRef>
+        </p:style>
+        <p:txBody>
+          <a:bodyPr rtlCol="0" anchor="ctr"/>
+          <a:lstStyle/>
+          <a:p>
+            <a:pPr algn="ctr"/>
+          </a:p>
+        </p:txBody>
+      </p:sp>
+      <p:sp>
+        <p:nvSpPr>
+          <p:cNvPr id="5" name="TextBox 4"/>
+          <p:cNvSpPr txBox="1"/>
+          <p:nvPr/>
+        </p:nvSpPr>
+        <p:spPr>
+          <a:xfrm>
+            <a:off x="594360" y="1280160"/>
+            <a:ext cx="4846320" cy="411480"/>
           </a:xfrm>
           <a:prstGeom prst="rect">
             <a:avLst/>
@@ -16146,7 +14693,7 @@
           <a:lstStyle/>
           <a:p>
             <a:pPr algn="l">
-              <a:defRPr sz="2400" b="1">
+              <a:defRPr sz="1800" b="1">
                 <a:solidFill>
                   <a:srgbClr val="2E86C1"/>
                 </a:solidFill>
@@ -16154,21 +14701,21 @@
               </a:defRPr>
             </a:pPr>
             <a:r>
-              <a:t>The Arc Mercer's Current State</a:t>
-            </a:r>
-          </a:p>
-        </p:txBody>
-      </p:sp>
-      <p:sp>
-        <p:nvSpPr>
-          <p:cNvPr id="5" name="TextBox 4"/>
-          <p:cNvSpPr txBox="1"/>
-          <p:nvPr/>
-        </p:nvSpPr>
-        <p:spPr>
-          <a:xfrm>
-            <a:off x="731520" y="1920240"/>
-            <a:ext cx="5029200" cy="3657600"/>
+              <a:t>Special Care Cloud (AWS)</a:t>
+            </a:r>
+          </a:p>
+        </p:txBody>
+      </p:sp>
+      <p:sp>
+        <p:nvSpPr>
+          <p:cNvPr id="6" name="TextBox 5"/>
+          <p:cNvSpPr txBox="1"/>
+          <p:nvPr/>
+        </p:nvSpPr>
+        <p:spPr>
+          <a:xfrm>
+            <a:off x="594360" y="1783080"/>
+            <a:ext cx="4846320" cy="4389120"/>
           </a:xfrm>
           <a:prstGeom prst="rect">
             <a:avLst/>
@@ -16183,127 +14730,170 @@
           <a:p>
             <a:pPr algn="l">
               <a:spcAft>
-                <a:spcPts val="1000"/>
+                <a:spcPts val="800"/>
               </a:spcAft>
-              <a:defRPr sz="1600" b="0">
-                <a:solidFill>
-                  <a:srgbClr val="333333"/>
-                </a:solidFill>
-                <a:latin typeface="Calibri"/>
-              </a:defRPr>
-            </a:pPr>
-            <a:r>
-              <a:t>• Manual recognition processes — inconsistent, hard to track</a:t>
+              <a:defRPr sz="1300" b="0">
+                <a:solidFill>
+                  <a:srgbClr val="333333"/>
+                </a:solidFill>
+                <a:latin typeface="Calibri"/>
+              </a:defRPr>
+            </a:pPr>
+            <a:r>
+              <a:t>• Market: 6,000+ special care agencies in the USA</a:t>
             </a:r>
           </a:p>
           <a:p>
             <a:pPr>
               <a:spcAft>
-                <a:spcPts val="1000"/>
+                <a:spcPts val="800"/>
               </a:spcAft>
-              <a:defRPr sz="1600">
-                <a:solidFill>
-                  <a:srgbClr val="333333"/>
-                </a:solidFill>
-                <a:latin typeface="Calibri"/>
-              </a:defRPr>
-            </a:pPr>
-            <a:r>
-              <a:t>• Multiple programs (Residential, Day Programs) operating in silos</a:t>
+              <a:defRPr sz="1300">
+                <a:solidFill>
+                  <a:srgbClr val="333333"/>
+                </a:solidFill>
+                <a:latin typeface="Calibri"/>
+              </a:defRPr>
+            </a:pPr>
+            <a:r>
+              <a:t>• Agentic AI Platform — Cloud, Desktop, Mobile, IoT</a:t>
             </a:r>
           </a:p>
           <a:p>
             <a:pPr>
               <a:spcAft>
-                <a:spcPts val="1000"/>
+                <a:spcPts val="800"/>
               </a:spcAft>
-              <a:defRPr sz="1600">
-                <a:solidFill>
-                  <a:srgbClr val="333333"/>
-                </a:solidFill>
-                <a:latin typeface="Calibri"/>
-              </a:defRPr>
-            </a:pPr>
-            <a:r>
-              <a:t>• Frontline staff with varying technical literacy</a:t>
+              <a:defRPr sz="1300">
+                <a:solidFill>
+                  <a:srgbClr val="333333"/>
+                </a:solidFill>
+                <a:latin typeface="Calibri"/>
+              </a:defRPr>
+            </a:pPr>
+            <a:r>
+              <a:t>• Personal AI assistants for agency workflows</a:t>
             </a:r>
           </a:p>
           <a:p>
             <a:pPr>
               <a:spcAft>
-                <a:spcPts val="1000"/>
+                <a:spcPts val="800"/>
               </a:spcAft>
-              <a:defRPr sz="1600">
-                <a:solidFill>
-                  <a:srgbClr val="333333"/>
-                </a:solidFill>
-                <a:latin typeface="Calibri"/>
-              </a:defRPr>
-            </a:pPr>
-            <a:r>
-              <a:t>• Many frontline DSPs lack company email addresses</a:t>
+              <a:defRPr sz="1300">
+                <a:solidFill>
+                  <a:srgbClr val="333333"/>
+                </a:solidFill>
+                <a:latin typeface="Calibri"/>
+              </a:defRPr>
+            </a:pPr>
+            <a:r>
+              <a:t>• Apps for Parent/Guardian, Consumer/Patient, Staff/Driver</a:t>
             </a:r>
           </a:p>
           <a:p>
             <a:pPr>
               <a:spcAft>
-                <a:spcPts val="1000"/>
+                <a:spcPts val="800"/>
               </a:spcAft>
-              <a:defRPr sz="1600">
-                <a:solidFill>
-                  <a:srgbClr val="333333"/>
-                </a:solidFill>
-                <a:latin typeface="Calibri"/>
-              </a:defRPr>
-            </a:pPr>
-            <a:r>
-              <a:t>• Selection committee uses ranked-choice voting — no digital tool</a:t>
+              <a:defRPr sz="1300">
+                <a:solidFill>
+                  <a:srgbClr val="333333"/>
+                </a:solidFill>
+                <a:latin typeface="Calibri"/>
+              </a:defRPr>
+            </a:pPr>
+            <a:r>
+              <a:t>• IoT: OBD, DashCam, Minew Proximity, Home Assistant Green</a:t>
             </a:r>
           </a:p>
           <a:p>
             <a:pPr>
               <a:spcAft>
-                <a:spcPts val="1000"/>
+                <a:spcPts val="800"/>
               </a:spcAft>
-              <a:defRPr sz="1600">
-                <a:solidFill>
-                  <a:srgbClr val="333333"/>
-                </a:solidFill>
-                <a:latin typeface="Calibri"/>
-              </a:defRPr>
-            </a:pPr>
-            <a:r>
-              <a:t>• No centralized system for nominations or point tracking</a:t>
+              <a:defRPr sz="1300">
+                <a:solidFill>
+                  <a:srgbClr val="333333"/>
+                </a:solidFill>
+                <a:latin typeface="Calibri"/>
+              </a:defRPr>
+            </a:pPr>
+            <a:r>
+              <a:t>• Samsara App Partner — fleet telematics</a:t>
             </a:r>
           </a:p>
           <a:p>
             <a:pPr>
               <a:spcAft>
-                <a:spcPts val="1000"/>
+                <a:spcPts val="800"/>
               </a:spcAft>
-              <a:defRPr sz="1600">
-                <a:solidFill>
-                  <a:srgbClr val="333333"/>
-                </a:solidFill>
-                <a:latin typeface="Calibri"/>
-              </a:defRPr>
-            </a:pPr>
-            <a:r>
-              <a:t>• No connection to Paycom HRIS for employee data</a:t>
-            </a:r>
-          </a:p>
-        </p:txBody>
-      </p:sp>
-      <p:sp>
-        <p:nvSpPr>
-          <p:cNvPr id="6" name="TextBox 5"/>
-          <p:cNvSpPr txBox="1"/>
-          <p:nvPr/>
-        </p:nvSpPr>
-        <p:spPr>
-          <a:xfrm>
-            <a:off x="6400800" y="1280160"/>
-            <a:ext cx="5029200" cy="457200"/>
+              <a:defRPr sz="1300">
+                <a:solidFill>
+                  <a:srgbClr val="333333"/>
+                </a:solidFill>
+                <a:latin typeface="Calibri"/>
+              </a:defRPr>
+            </a:pPr>
+            <a:r>
+              <a:t>• HIPAA-compliant AI inference servers</a:t>
+            </a:r>
+          </a:p>
+        </p:txBody>
+      </p:sp>
+      <p:sp>
+        <p:nvSpPr>
+          <p:cNvPr id="7" name="Rectangle 6"/>
+          <p:cNvSpPr/>
+          <p:nvPr/>
+        </p:nvSpPr>
+        <p:spPr>
+          <a:xfrm>
+            <a:off x="6400800" y="1188720"/>
+            <a:ext cx="5394960" cy="5029200"/>
+          </a:xfrm>
+          <a:prstGeom prst="rect">
+            <a:avLst/>
+          </a:prstGeom>
+          <a:solidFill>
+            <a:srgbClr val="F2F2F2"/>
+          </a:solidFill>
+          <a:ln>
+            <a:noFill/>
+          </a:ln>
+        </p:spPr>
+        <p:style>
+          <a:lnRef idx="1">
+            <a:schemeClr val="accent1"/>
+          </a:lnRef>
+          <a:fillRef idx="3">
+            <a:schemeClr val="accent1"/>
+          </a:fillRef>
+          <a:effectRef idx="2">
+            <a:schemeClr val="accent1"/>
+          </a:effectRef>
+          <a:fontRef idx="minor">
+            <a:schemeClr val="lt1"/>
+          </a:fontRef>
+        </p:style>
+        <p:txBody>
+          <a:bodyPr rtlCol="0" anchor="ctr"/>
+          <a:lstStyle/>
+          <a:p>
+            <a:pPr algn="ctr"/>
+          </a:p>
+        </p:txBody>
+      </p:sp>
+      <p:sp>
+        <p:nvSpPr>
+          <p:cNvPr id="8" name="TextBox 7"/>
+          <p:cNvSpPr txBox="1"/>
+          <p:nvPr/>
+        </p:nvSpPr>
+        <p:spPr>
+          <a:xfrm>
+            <a:off x="6629400" y="1280160"/>
+            <a:ext cx="4937760" cy="411480"/>
           </a:xfrm>
           <a:prstGeom prst="rect">
             <a:avLst/>
@@ -16317,7 +14907,7 @@
           <a:lstStyle/>
           <a:p>
             <a:pPr algn="l">
-              <a:defRPr sz="2400" b="1">
+              <a:defRPr sz="1800" b="1">
                 <a:solidFill>
                   <a:srgbClr val="2E86C1"/>
                 </a:solidFill>
@@ -16325,21 +14915,21 @@
               </a:defRPr>
             </a:pPr>
             <a:r>
-              <a:t>What You Need</a:t>
-            </a:r>
-          </a:p>
-        </p:txBody>
-      </p:sp>
-      <p:sp>
-        <p:nvSpPr>
-          <p:cNvPr id="7" name="TextBox 6"/>
-          <p:cNvSpPr txBox="1"/>
-          <p:nvPr/>
-        </p:nvSpPr>
-        <p:spPr>
-          <a:xfrm>
-            <a:off x="6400800" y="1920240"/>
-            <a:ext cx="5029200" cy="3657600"/>
+              <a:t>Platform Products</a:t>
+            </a:r>
+          </a:p>
+        </p:txBody>
+      </p:sp>
+      <p:sp>
+        <p:nvSpPr>
+          <p:cNvPr id="9" name="TextBox 8"/>
+          <p:cNvSpPr txBox="1"/>
+          <p:nvPr/>
+        </p:nvSpPr>
+        <p:spPr>
+          <a:xfrm>
+            <a:off x="6629400" y="1874519"/>
+            <a:ext cx="4937760" cy="274320"/>
           </a:xfrm>
           <a:prstGeom prst="rect">
             <a:avLst/>
@@ -16353,114 +14943,267 @@
           <a:lstStyle/>
           <a:p>
             <a:pPr algn="l">
-              <a:spcAft>
-                <a:spcPts val="1000"/>
-              </a:spcAft>
-              <a:defRPr sz="1600" b="0">
-                <a:solidFill>
-                  <a:srgbClr val="333333"/>
-                </a:solidFill>
-                <a:latin typeface="Calibri"/>
-              </a:defRPr>
-            </a:pPr>
-            <a:r>
-              <a:t>• Centralized, web-based recognition platform</a:t>
-            </a:r>
-          </a:p>
-          <a:p>
-            <a:pPr>
-              <a:spcAft>
-                <a:spcPts val="1000"/>
-              </a:spcAft>
-              <a:defRPr sz="1600">
-                <a:solidFill>
-                  <a:srgbClr val="333333"/>
-                </a:solidFill>
-                <a:latin typeface="Calibri"/>
-              </a:defRPr>
-            </a:pPr>
-            <a:r>
-              <a:t>• Program-based competition engine with committee voting</a:t>
-            </a:r>
-          </a:p>
-          <a:p>
-            <a:pPr>
-              <a:spcAft>
-                <a:spcPts val="1000"/>
-              </a:spcAft>
-              <a:defRPr sz="1600">
-                <a:solidFill>
-                  <a:srgbClr val="333333"/>
-                </a:solidFill>
-                <a:latin typeface="Calibri"/>
-              </a:defRPr>
-            </a:pPr>
-            <a:r>
-              <a:t>• Multi-stream point system with audit trails</a:t>
-            </a:r>
-          </a:p>
-          <a:p>
-            <a:pPr>
-              <a:spcAft>
-                <a:spcPts val="1000"/>
-              </a:spcAft>
-              <a:defRPr sz="1600">
-                <a:solidFill>
-                  <a:srgbClr val="333333"/>
-                </a:solidFill>
-                <a:latin typeface="Calibri"/>
-              </a:defRPr>
-            </a:pPr>
-            <a:r>
-              <a:t>• Rewards marketplace — digital, café, and in-person store</a:t>
-            </a:r>
-          </a:p>
-          <a:p>
-            <a:pPr>
-              <a:spcAft>
-                <a:spcPts val="1000"/>
-              </a:spcAft>
-              <a:defRPr sz="1600">
-                <a:solidFill>
-                  <a:srgbClr val="333333"/>
-                </a:solidFill>
-                <a:latin typeface="Calibri"/>
-              </a:defRPr>
-            </a:pPr>
-            <a:r>
-              <a:t>• Paycom integration &amp; flexible auth (SSO + Badge ID + PIN)</a:t>
-            </a:r>
-          </a:p>
-          <a:p>
-            <a:pPr>
-              <a:spcAft>
-                <a:spcPts val="1000"/>
-              </a:spcAft>
-              <a:defRPr sz="1600">
-                <a:solidFill>
-                  <a:srgbClr val="333333"/>
-                </a:solidFill>
-                <a:latin typeface="Calibri"/>
-              </a:defRPr>
-            </a:pPr>
-            <a:r>
-              <a:t>• Community engagement: TAC, culture groups, volunteering</a:t>
-            </a:r>
-          </a:p>
-          <a:p>
-            <a:pPr>
-              <a:spcAft>
-                <a:spcPts val="1000"/>
-              </a:spcAft>
-              <a:defRPr sz="1600">
-                <a:solidFill>
-                  <a:srgbClr val="333333"/>
-                </a:solidFill>
-                <a:latin typeface="Calibri"/>
-              </a:defRPr>
-            </a:pPr>
-            <a:r>
-              <a:t>• Mobile-first, accessible to all staff (incl. dark mode)</a:t>
+              <a:defRPr sz="1500" b="1">
+                <a:solidFill>
+                  <a:srgbClr val="2E86C1"/>
+                </a:solidFill>
+                <a:latin typeface="Calibri"/>
+              </a:defRPr>
+            </a:pPr>
+            <a:r>
+              <a:t>SpringBoard</a:t>
+            </a:r>
+          </a:p>
+        </p:txBody>
+      </p:sp>
+      <p:sp>
+        <p:nvSpPr>
+          <p:cNvPr id="10" name="TextBox 9"/>
+          <p:cNvSpPr txBox="1"/>
+          <p:nvPr/>
+        </p:nvSpPr>
+        <p:spPr>
+          <a:xfrm>
+            <a:off x="6629400" y="2148839"/>
+            <a:ext cx="4937760" cy="320040"/>
+          </a:xfrm>
+          <a:prstGeom prst="rect">
+            <a:avLst/>
+          </a:prstGeom>
+          <a:noFill/>
+        </p:spPr>
+        <p:txBody>
+          <a:bodyPr wrap="square">
+            <a:spAutoFit/>
+          </a:bodyPr>
+          <a:lstStyle/>
+          <a:p>
+            <a:pPr algn="l">
+              <a:defRPr sz="1300" b="0">
+                <a:solidFill>
+                  <a:srgbClr val="333333"/>
+                </a:solidFill>
+                <a:latin typeface="Calibri"/>
+              </a:defRPr>
+            </a:pPr>
+            <a:r>
+              <a:t>Route/Fleet — paratransit ops, multi-tenant</a:t>
+            </a:r>
+          </a:p>
+        </p:txBody>
+      </p:sp>
+      <p:sp>
+        <p:nvSpPr>
+          <p:cNvPr id="11" name="TextBox 10"/>
+          <p:cNvSpPr txBox="1"/>
+          <p:nvPr/>
+        </p:nvSpPr>
+        <p:spPr>
+          <a:xfrm>
+            <a:off x="6629400" y="2651759"/>
+            <a:ext cx="4937760" cy="274320"/>
+          </a:xfrm>
+          <a:prstGeom prst="rect">
+            <a:avLst/>
+          </a:prstGeom>
+          <a:noFill/>
+        </p:spPr>
+        <p:txBody>
+          <a:bodyPr wrap="square">
+            <a:spAutoFit/>
+          </a:bodyPr>
+          <a:lstStyle/>
+          <a:p>
+            <a:pPr algn="l">
+              <a:defRPr sz="1500" b="1">
+                <a:solidFill>
+                  <a:srgbClr val="2E86C1"/>
+                </a:solidFill>
+                <a:latin typeface="Calibri"/>
+              </a:defRPr>
+            </a:pPr>
+            <a:r>
+              <a:t>Guardian</a:t>
+            </a:r>
+          </a:p>
+        </p:txBody>
+      </p:sp>
+      <p:sp>
+        <p:nvSpPr>
+          <p:cNvPr id="12" name="TextBox 11"/>
+          <p:cNvSpPr txBox="1"/>
+          <p:nvPr/>
+        </p:nvSpPr>
+        <p:spPr>
+          <a:xfrm>
+            <a:off x="6629400" y="2926079"/>
+            <a:ext cx="4937760" cy="320040"/>
+          </a:xfrm>
+          <a:prstGeom prst="rect">
+            <a:avLst/>
+          </a:prstGeom>
+          <a:noFill/>
+        </p:spPr>
+        <p:txBody>
+          <a:bodyPr wrap="square">
+            <a:spAutoFit/>
+          </a:bodyPr>
+          <a:lstStyle/>
+          <a:p>
+            <a:pPr algn="l">
+              <a:defRPr sz="1300" b="0">
+                <a:solidFill>
+                  <a:srgbClr val="333333"/>
+                </a:solidFill>
+                <a:latin typeface="Calibri"/>
+              </a:defRPr>
+            </a:pPr>
+            <a:r>
+              <a:t>Notifications — SMS, push, reply tracking</a:t>
+            </a:r>
+          </a:p>
+        </p:txBody>
+      </p:sp>
+      <p:sp>
+        <p:nvSpPr>
+          <p:cNvPr id="13" name="TextBox 12"/>
+          <p:cNvSpPr txBox="1"/>
+          <p:nvPr/>
+        </p:nvSpPr>
+        <p:spPr>
+          <a:xfrm>
+            <a:off x="6629400" y="3428999"/>
+            <a:ext cx="4937760" cy="274320"/>
+          </a:xfrm>
+          <a:prstGeom prst="rect">
+            <a:avLst/>
+          </a:prstGeom>
+          <a:noFill/>
+        </p:spPr>
+        <p:txBody>
+          <a:bodyPr wrap="square">
+            <a:spAutoFit/>
+          </a:bodyPr>
+          <a:lstStyle/>
+          <a:p>
+            <a:pPr algn="l">
+              <a:defRPr sz="1500" b="1">
+                <a:solidFill>
+                  <a:srgbClr val="2E86C1"/>
+                </a:solidFill>
+                <a:latin typeface="Calibri"/>
+              </a:defRPr>
+            </a:pPr>
+            <a:r>
+              <a:t>BrainBook</a:t>
+            </a:r>
+          </a:p>
+        </p:txBody>
+      </p:sp>
+      <p:sp>
+        <p:nvSpPr>
+          <p:cNvPr id="14" name="TextBox 13"/>
+          <p:cNvSpPr txBox="1"/>
+          <p:nvPr/>
+        </p:nvSpPr>
+        <p:spPr>
+          <a:xfrm>
+            <a:off x="6629400" y="3703319"/>
+            <a:ext cx="4937760" cy="320040"/>
+          </a:xfrm>
+          <a:prstGeom prst="rect">
+            <a:avLst/>
+          </a:prstGeom>
+          <a:noFill/>
+        </p:spPr>
+        <p:txBody>
+          <a:bodyPr wrap="square">
+            <a:spAutoFit/>
+          </a:bodyPr>
+          <a:lstStyle/>
+          <a:p>
+            <a:pPr algn="l">
+              <a:defRPr sz="1300" b="0">
+                <a:solidFill>
+                  <a:srgbClr val="333333"/>
+                </a:solidFill>
+                <a:latin typeface="Calibri"/>
+              </a:defRPr>
+            </a:pPr>
+            <a:r>
+              <a:t>AI Platform — desktop, web, mobile, voice I/O</a:t>
+            </a:r>
+          </a:p>
+        </p:txBody>
+      </p:sp>
+      <p:sp>
+        <p:nvSpPr>
+          <p:cNvPr id="15" name="TextBox 14"/>
+          <p:cNvSpPr txBox="1"/>
+          <p:nvPr/>
+        </p:nvSpPr>
+        <p:spPr>
+          <a:xfrm>
+            <a:off x="6629400" y="4206239"/>
+            <a:ext cx="4937760" cy="274320"/>
+          </a:xfrm>
+          <a:prstGeom prst="rect">
+            <a:avLst/>
+          </a:prstGeom>
+          <a:noFill/>
+        </p:spPr>
+        <p:txBody>
+          <a:bodyPr wrap="square">
+            <a:spAutoFit/>
+          </a:bodyPr>
+          <a:lstStyle/>
+          <a:p>
+            <a:pPr algn="l">
+              <a:defRPr sz="1500" b="1">
+                <a:solidFill>
+                  <a:srgbClr val="2E86C1"/>
+                </a:solidFill>
+                <a:latin typeface="Calibri"/>
+              </a:defRPr>
+            </a:pPr>
+            <a:r>
+              <a:t>BrainClaw</a:t>
+            </a:r>
+          </a:p>
+        </p:txBody>
+      </p:sp>
+      <p:sp>
+        <p:nvSpPr>
+          <p:cNvPr id="16" name="TextBox 15"/>
+          <p:cNvSpPr txBox="1"/>
+          <p:nvPr/>
+        </p:nvSpPr>
+        <p:spPr>
+          <a:xfrm>
+            <a:off x="6629400" y="4480559"/>
+            <a:ext cx="4937760" cy="320040"/>
+          </a:xfrm>
+          <a:prstGeom prst="rect">
+            <a:avLst/>
+          </a:prstGeom>
+          <a:noFill/>
+        </p:spPr>
+        <p:txBody>
+          <a:bodyPr wrap="square">
+            <a:spAutoFit/>
+          </a:bodyPr>
+          <a:lstStyle/>
+          <a:p>
+            <a:pPr algn="l">
+              <a:defRPr sz="1300" b="0">
+                <a:solidFill>
+                  <a:srgbClr val="333333"/>
+                </a:solidFill>
+                <a:latin typeface="Calibri"/>
+              </a:defRPr>
+            </a:pPr>
+            <a:r>
+              <a:t>AI Agents — 94+ tools, GPT-4.1, Arc Mercer live</a:t>
             </a:r>
           </a:p>
         </p:txBody>
@@ -16473,8 +15216,8 @@
 </p:sld>
 </file>
 
-<file path=ppt/slides/slide7.xml><?xml version="1.0" encoding="utf-8"?>
-<p:sld xmlns:a="http://schemas.openxmlformats.org/drawingml/2006/main" xmlns:r="http://schemas.openxmlformats.org/officeDocument/2006/relationships" xmlns:p="http://schemas.openxmlformats.org/presentationml/2006/main">
+<file path=ppt/slides/slide5.xml><?xml version="1.0" encoding="utf-8"?>
+<p:sld xmlns:a="http://schemas.openxmlformats.org/drawingml/2006/main" xmlns:p="http://schemas.openxmlformats.org/presentationml/2006/main" xmlns:r="http://schemas.openxmlformats.org/officeDocument/2006/relationships">
   <p:cSld>
     <p:bg>
       <p:bgPr>
@@ -16490,14 +15233,7 @@
         <p:cNvGrpSpPr/>
         <p:nvPr/>
       </p:nvGrpSpPr>
-      <p:grpSpPr>
-        <a:xfrm>
-          <a:off x="0" y="0"/>
-          <a:ext cx="0" cy="0"/>
-          <a:chOff x="0" y="0"/>
-          <a:chExt cx="0" cy="0"/>
-        </a:xfrm>
-      </p:grpSpPr>
+      <p:grpSpPr/>
       <p:sp>
         <p:nvSpPr>
           <p:cNvPr id="2" name="Rectangle 1"/>
@@ -16538,7 +15274,6 @@
           <a:lstStyle/>
           <a:p>
             <a:pPr algn="ctr"/>
-            <a:endParaRPr/>
           </a:p>
         </p:txBody>
       </p:sp>
@@ -16573,7 +15308,7 @@
               </a:defRPr>
             </a:pPr>
             <a:r>
-              <a:t>Our Solution — Platform Overview</a:t>
+              <a:t>BrainClaw AI Agents — Already at Arc Mercer</a:t>
             </a:r>
           </a:p>
         </p:txBody>
@@ -16586,8 +15321,8 @@
         </p:nvSpPr>
         <p:spPr>
           <a:xfrm>
-            <a:off x="731520" y="1188720"/>
-            <a:ext cx="10058400" cy="457200"/>
+            <a:off x="457200" y="1143000"/>
+            <a:ext cx="5486400" cy="411480"/>
           </a:xfrm>
           <a:prstGeom prst="rect">
             <a:avLst/>
@@ -16601,7 +15336,7 @@
           <a:lstStyle/>
           <a:p>
             <a:pPr algn="l">
-              <a:defRPr sz="2200" b="1">
+              <a:defRPr sz="2000" b="1">
                 <a:solidFill>
                   <a:srgbClr val="2E86C1"/>
                 </a:solidFill>
@@ -16609,21 +15344,489 @@
               </a:defRPr>
             </a:pPr>
             <a:r>
-              <a:t>Custom-Built SaaS — Tailored for The Arc Mercer</a:t>
-            </a:r>
-          </a:p>
-        </p:txBody>
-      </p:sp>
-      <p:sp>
-        <p:nvSpPr>
-          <p:cNvPr id="5" name="Rectangle 4"/>
+              <a:t>In Production at Arc Mercer Today</a:t>
+            </a:r>
+          </a:p>
+        </p:txBody>
+      </p:sp>
+      <p:sp>
+        <p:nvSpPr>
+          <p:cNvPr id="5" name="TextBox 4"/>
+          <p:cNvSpPr txBox="1"/>
+          <p:nvPr/>
+        </p:nvSpPr>
+        <p:spPr>
+          <a:xfrm>
+            <a:off x="457200" y="1645920"/>
+            <a:ext cx="5486400" cy="320040"/>
+          </a:xfrm>
+          <a:prstGeom prst="rect">
+            <a:avLst/>
+          </a:prstGeom>
+          <a:noFill/>
+        </p:spPr>
+        <p:txBody>
+          <a:bodyPr wrap="square">
+            <a:spAutoFit/>
+          </a:bodyPr>
+          <a:lstStyle/>
+          <a:p>
+            <a:pPr algn="l">
+              <a:defRPr sz="1400" b="0">
+                <a:solidFill>
+                  <a:srgbClr val="666666"/>
+                </a:solidFill>
+                <a:latin typeface="Calibri"/>
+              </a:defRPr>
+            </a:pPr>
+            <a:r>
+              <a:t>Powered by BrainClaw + GPT-4.1 (GitHub Copilot)</a:t>
+            </a:r>
+          </a:p>
+        </p:txBody>
+      </p:sp>
+      <p:sp>
+        <p:nvSpPr>
+          <p:cNvPr id="6" name="TextBox 5"/>
+          <p:cNvSpPr txBox="1"/>
+          <p:nvPr/>
+        </p:nvSpPr>
+        <p:spPr>
+          <a:xfrm>
+            <a:off x="457200" y="2057400"/>
+            <a:ext cx="5486400" cy="1920240"/>
+          </a:xfrm>
+          <a:prstGeom prst="rect">
+            <a:avLst/>
+          </a:prstGeom>
+          <a:noFill/>
+        </p:spPr>
+        <p:txBody>
+          <a:bodyPr wrap="square">
+            <a:spAutoFit/>
+          </a:bodyPr>
+          <a:lstStyle/>
+          <a:p>
+            <a:pPr algn="l">
+              <a:spcAft>
+                <a:spcPts val="500"/>
+              </a:spcAft>
+              <a:defRPr sz="1400" b="0">
+                <a:solidFill>
+                  <a:srgbClr val="333333"/>
+                </a:solidFill>
+                <a:latin typeface="Calibri"/>
+              </a:defRPr>
+            </a:pPr>
+            <a:r>
+              <a:t>• SpringBoard Agent — 37 tools</a:t>
+            </a:r>
+          </a:p>
+          <a:p>
+            <a:pPr>
+              <a:spcAft>
+                <a:spcPts val="500"/>
+              </a:spcAft>
+              <a:defRPr sz="1400">
+                <a:solidFill>
+                  <a:srgbClr val="333333"/>
+                </a:solidFill>
+                <a:latin typeface="Calibri"/>
+              </a:defRPr>
+            </a:pPr>
+            <a:r>
+              <a:t>•   Routes, fleet, consumers, optimization, SMS, GPS, SOS</a:t>
+            </a:r>
+          </a:p>
+          <a:p>
+            <a:pPr>
+              <a:spcAft>
+                <a:spcPts val="500"/>
+              </a:spcAft>
+              <a:defRPr sz="1400">
+                <a:solidFill>
+                  <a:srgbClr val="333333"/>
+                </a:solidFill>
+                <a:latin typeface="Calibri"/>
+              </a:defRPr>
+            </a:pPr>
+            <a:r>
+              <a:t>• Samsara Agent — 57 tools</a:t>
+            </a:r>
+          </a:p>
+          <a:p>
+            <a:pPr>
+              <a:spcAft>
+                <a:spcPts val="500"/>
+              </a:spcAft>
+              <a:defRPr sz="1400">
+                <a:solidFill>
+                  <a:srgbClr val="333333"/>
+                </a:solidFill>
+                <a:latin typeface="Calibri"/>
+              </a:defRPr>
+            </a:pPr>
+            <a:r>
+              <a:t>•   Vehicles, drivers, HOS, safety events, DVIRs, GPS</a:t>
+            </a:r>
+          </a:p>
+        </p:txBody>
+      </p:sp>
+      <p:sp>
+        <p:nvSpPr>
+          <p:cNvPr id="7" name="TextBox 6"/>
+          <p:cNvSpPr txBox="1"/>
+          <p:nvPr/>
+        </p:nvSpPr>
+        <p:spPr>
+          <a:xfrm>
+            <a:off x="457200" y="4069080"/>
+            <a:ext cx="5486400" cy="365760"/>
+          </a:xfrm>
+          <a:prstGeom prst="rect">
+            <a:avLst/>
+          </a:prstGeom>
+          <a:noFill/>
+        </p:spPr>
+        <p:txBody>
+          <a:bodyPr wrap="square">
+            <a:spAutoFit/>
+          </a:bodyPr>
+          <a:lstStyle/>
+          <a:p>
+            <a:pPr algn="l">
+              <a:defRPr sz="1400" b="1">
+                <a:solidFill>
+                  <a:srgbClr val="333333"/>
+                </a:solidFill>
+                <a:latin typeface="Calibri"/>
+              </a:defRPr>
+            </a:pPr>
+            <a:r>
+              <a:t>Arc Mercer staff use natural language today:</a:t>
+            </a:r>
+          </a:p>
+        </p:txBody>
+      </p:sp>
+      <p:sp>
+        <p:nvSpPr>
+          <p:cNvPr id="8" name="Rectangle 7"/>
           <p:cNvSpPr/>
           <p:nvPr/>
         </p:nvSpPr>
         <p:spPr>
           <a:xfrm>
-            <a:off x="1371600" y="1828800"/>
-            <a:ext cx="9144000" cy="914400"/>
+            <a:off x="457200" y="4480560"/>
+            <a:ext cx="5486400" cy="1828800"/>
+          </a:xfrm>
+          <a:prstGeom prst="rect">
+            <a:avLst/>
+          </a:prstGeom>
+          <a:solidFill>
+            <a:srgbClr val="F2F2F2"/>
+          </a:solidFill>
+          <a:ln>
+            <a:noFill/>
+          </a:ln>
+        </p:spPr>
+        <p:style>
+          <a:lnRef idx="1">
+            <a:schemeClr val="accent1"/>
+          </a:lnRef>
+          <a:fillRef idx="3">
+            <a:schemeClr val="accent1"/>
+          </a:fillRef>
+          <a:effectRef idx="2">
+            <a:schemeClr val="accent1"/>
+          </a:effectRef>
+          <a:fontRef idx="minor">
+            <a:schemeClr val="lt1"/>
+          </a:fontRef>
+        </p:style>
+        <p:txBody>
+          <a:bodyPr rtlCol="0" anchor="ctr"/>
+          <a:lstStyle/>
+          <a:p>
+            <a:pPr algn="ctr"/>
+          </a:p>
+        </p:txBody>
+      </p:sp>
+      <p:sp>
+        <p:nvSpPr>
+          <p:cNvPr id="9" name="TextBox 8"/>
+          <p:cNvSpPr txBox="1"/>
+          <p:nvPr/>
+        </p:nvSpPr>
+        <p:spPr>
+          <a:xfrm>
+            <a:off x="594360" y="4526280"/>
+            <a:ext cx="5212080" cy="1645920"/>
+          </a:xfrm>
+          <a:prstGeom prst="rect">
+            <a:avLst/>
+          </a:prstGeom>
+          <a:noFill/>
+        </p:spPr>
+        <p:txBody>
+          <a:bodyPr wrap="square">
+            <a:spAutoFit/>
+          </a:bodyPr>
+          <a:lstStyle/>
+          <a:p>
+            <a:pPr algn="l">
+              <a:defRPr sz="1300" b="0">
+                <a:solidFill>
+                  <a:srgbClr val="333333"/>
+                </a:solidFill>
+                <a:latin typeface="Consolas"/>
+              </a:defRPr>
+            </a:pPr>
+            <a:r>
+              <a:t>"Optimize routes for Weekday AM"</a:t>
+            </a:r>
+            <a:br/>
+            <a:r>
+              <a:t>"Where is vehicle 147 right now?"</a:t>
+            </a:r>
+            <a:br/>
+            <a:r>
+              <a:t>"SMS all Residential drivers — 10 min delay"</a:t>
+            </a:r>
+            <a:br/>
+            <a:r>
+              <a:t>"Generate daily manifest for Arc Mercer"</a:t>
+            </a:r>
+          </a:p>
+        </p:txBody>
+      </p:sp>
+      <p:sp>
+        <p:nvSpPr>
+          <p:cNvPr id="10" name="Rectangle 9"/>
+          <p:cNvSpPr/>
+          <p:nvPr/>
+        </p:nvSpPr>
+        <p:spPr>
+          <a:xfrm>
+            <a:off x="6309360" y="1097280"/>
+            <a:ext cx="5577840" cy="5303520"/>
+          </a:xfrm>
+          <a:prstGeom prst="rect">
+            <a:avLst/>
+          </a:prstGeom>
+          <a:solidFill>
+            <a:srgbClr val="D6EAF8"/>
+          </a:solidFill>
+          <a:ln>
+            <a:noFill/>
+          </a:ln>
+        </p:spPr>
+        <p:style>
+          <a:lnRef idx="1">
+            <a:schemeClr val="accent1"/>
+          </a:lnRef>
+          <a:fillRef idx="3">
+            <a:schemeClr val="accent1"/>
+          </a:fillRef>
+          <a:effectRef idx="2">
+            <a:schemeClr val="accent1"/>
+          </a:effectRef>
+          <a:fontRef idx="minor">
+            <a:schemeClr val="lt1"/>
+          </a:fontRef>
+        </p:style>
+        <p:txBody>
+          <a:bodyPr rtlCol="0" anchor="ctr"/>
+          <a:lstStyle/>
+          <a:p>
+            <a:pPr algn="ctr"/>
+          </a:p>
+        </p:txBody>
+      </p:sp>
+      <p:sp>
+        <p:nvSpPr>
+          <p:cNvPr id="11" name="TextBox 10"/>
+          <p:cNvSpPr txBox="1"/>
+          <p:nvPr/>
+        </p:nvSpPr>
+        <p:spPr>
+          <a:xfrm>
+            <a:off x="6492240" y="1188720"/>
+            <a:ext cx="5212080" cy="411480"/>
+          </a:xfrm>
+          <a:prstGeom prst="rect">
+            <a:avLst/>
+          </a:prstGeom>
+          <a:noFill/>
+        </p:spPr>
+        <p:txBody>
+          <a:bodyPr wrap="square">
+            <a:spAutoFit/>
+          </a:bodyPr>
+          <a:lstStyle/>
+          <a:p>
+            <a:pPr algn="l">
+              <a:defRPr sz="2000" b="1">
+                <a:solidFill>
+                  <a:srgbClr val="1B2A4A"/>
+                </a:solidFill>
+                <a:latin typeface="Calibri"/>
+              </a:defRPr>
+            </a:pPr>
+            <a:r>
+              <a:t>Extending to Recognition Platform</a:t>
+            </a:r>
+          </a:p>
+        </p:txBody>
+      </p:sp>
+      <p:sp>
+        <p:nvSpPr>
+          <p:cNvPr id="12" name="TextBox 11"/>
+          <p:cNvSpPr txBox="1"/>
+          <p:nvPr/>
+        </p:nvSpPr>
+        <p:spPr>
+          <a:xfrm>
+            <a:off x="6492240" y="1691640"/>
+            <a:ext cx="5212080" cy="365760"/>
+          </a:xfrm>
+          <a:prstGeom prst="rect">
+            <a:avLst/>
+          </a:prstGeom>
+          <a:noFill/>
+        </p:spPr>
+        <p:txBody>
+          <a:bodyPr wrap="square">
+            <a:spAutoFit/>
+          </a:bodyPr>
+          <a:lstStyle/>
+          <a:p>
+            <a:pPr algn="l">
+              <a:defRPr sz="1500" b="1">
+                <a:solidFill>
+                  <a:srgbClr val="333333"/>
+                </a:solidFill>
+                <a:latin typeface="Calibri"/>
+              </a:defRPr>
+            </a:pPr>
+            <a:r>
+              <a:t>Natural language for HR &amp; leadership:</a:t>
+            </a:r>
+          </a:p>
+        </p:txBody>
+      </p:sp>
+      <p:sp>
+        <p:nvSpPr>
+          <p:cNvPr id="13" name="TextBox 12"/>
+          <p:cNvSpPr txBox="1"/>
+          <p:nvPr/>
+        </p:nvSpPr>
+        <p:spPr>
+          <a:xfrm>
+            <a:off x="6492240" y="2148840"/>
+            <a:ext cx="5212080" cy="2926080"/>
+          </a:xfrm>
+          <a:prstGeom prst="rect">
+            <a:avLst/>
+          </a:prstGeom>
+          <a:noFill/>
+        </p:spPr>
+        <p:txBody>
+          <a:bodyPr wrap="square">
+            <a:spAutoFit/>
+          </a:bodyPr>
+          <a:lstStyle/>
+          <a:p>
+            <a:pPr algn="l">
+              <a:spcAft>
+                <a:spcPts val="1000"/>
+              </a:spcAft>
+              <a:defRPr sz="1400" b="0">
+                <a:solidFill>
+                  <a:srgbClr val="333333"/>
+                </a:solidFill>
+                <a:latin typeface="Calibri"/>
+              </a:defRPr>
+            </a:pPr>
+            <a:r>
+              <a:t>• "Which program had most nominations last month?"</a:t>
+            </a:r>
+          </a:p>
+          <a:p>
+            <a:pPr>
+              <a:spcAft>
+                <a:spcPts val="1000"/>
+              </a:spcAft>
+              <a:defRPr sz="1400">
+                <a:solidFill>
+                  <a:srgbClr val="333333"/>
+                </a:solidFill>
+                <a:latin typeface="Calibri"/>
+              </a:defRPr>
+            </a:pPr>
+            <a:r>
+              <a:t>• "Who hasn't been recognized in 60+ days?"</a:t>
+            </a:r>
+          </a:p>
+          <a:p>
+            <a:pPr>
+              <a:spcAft>
+                <a:spcPts val="1000"/>
+              </a:spcAft>
+              <a:defRPr sz="1400">
+                <a:solidFill>
+                  <a:srgbClr val="333333"/>
+                </a:solidFill>
+                <a:latin typeface="Calibri"/>
+              </a:defRPr>
+            </a:pPr>
+            <a:r>
+              <a:t>• "Flag unusual point bestowals this week"</a:t>
+            </a:r>
+          </a:p>
+          <a:p>
+            <a:pPr>
+              <a:spcAft>
+                <a:spcPts val="1000"/>
+              </a:spcAft>
+              <a:defRPr sz="1400">
+                <a:solidFill>
+                  <a:srgbClr val="333333"/>
+                </a:solidFill>
+                <a:latin typeface="Calibri"/>
+              </a:defRPr>
+            </a:pPr>
+            <a:r>
+              <a:t>• "Generate Q1 engagement report as CSV"</a:t>
+            </a:r>
+          </a:p>
+          <a:p>
+            <a:pPr>
+              <a:spcAft>
+                <a:spcPts val="1000"/>
+              </a:spcAft>
+              <a:defRPr sz="1400">
+                <a:solidFill>
+                  <a:srgbClr val="333333"/>
+                </a:solidFill>
+                <a:latin typeface="Calibri"/>
+              </a:defRPr>
+            </a:pPr>
+            <a:r>
+              <a:t>• "What's our engagement score this month?"</a:t>
+            </a:r>
+          </a:p>
+        </p:txBody>
+      </p:sp>
+      <p:sp>
+        <p:nvSpPr>
+          <p:cNvPr id="14" name="Rectangle 13"/>
+          <p:cNvSpPr/>
+          <p:nvPr/>
+        </p:nvSpPr>
+        <p:spPr>
+          <a:xfrm>
+            <a:off x="6400800" y="5303520"/>
+            <a:ext cx="5303520" cy="731520"/>
           </a:xfrm>
           <a:prstGeom prst="rect">
             <a:avLst/>
@@ -16654,20 +15857,19 @@
           <a:lstStyle/>
           <a:p>
             <a:pPr algn="ctr"/>
-            <a:endParaRPr/>
-          </a:p>
-        </p:txBody>
-      </p:sp>
-      <p:sp>
-        <p:nvSpPr>
-          <p:cNvPr id="6" name="TextBox 5"/>
-          <p:cNvSpPr txBox="1"/>
-          <p:nvPr/>
-        </p:nvSpPr>
-        <p:spPr>
-          <a:xfrm>
-            <a:off x="1828800" y="1901952"/>
-            <a:ext cx="3657600" cy="411480"/>
+          </a:p>
+        </p:txBody>
+      </p:sp>
+      <p:sp>
+        <p:nvSpPr>
+          <p:cNvPr id="15" name="TextBox 14"/>
+          <p:cNvSpPr txBox="1"/>
+          <p:nvPr/>
+        </p:nvSpPr>
+        <p:spPr>
+          <a:xfrm>
+            <a:off x="6583680" y="5349240"/>
+            <a:ext cx="4937760" cy="594360"/>
           </a:xfrm>
           <a:prstGeom prst="rect">
             <a:avLst/>
@@ -16681,7 +15883,7 @@
           <a:lstStyle/>
           <a:p>
             <a:pPr algn="l">
-              <a:defRPr sz="2000" b="1">
+              <a:defRPr sz="1400" b="1">
                 <a:solidFill>
                   <a:srgbClr val="FFFFFF"/>
                 </a:solidFill>
@@ -16689,427 +15891,7 @@
               </a:defRPr>
             </a:pPr>
             <a:r>
-              <a:t>React + TypeScript PWA</a:t>
-            </a:r>
-          </a:p>
-        </p:txBody>
-      </p:sp>
-      <p:sp>
-        <p:nvSpPr>
-          <p:cNvPr id="7" name="TextBox 6"/>
-          <p:cNvSpPr txBox="1"/>
-          <p:nvPr/>
-        </p:nvSpPr>
-        <p:spPr>
-          <a:xfrm>
-            <a:off x="1828800" y="2267712"/>
-            <a:ext cx="8229600" cy="411480"/>
-          </a:xfrm>
-          <a:prstGeom prst="rect">
-            <a:avLst/>
-          </a:prstGeom>
-          <a:noFill/>
-        </p:spPr>
-        <p:txBody>
-          <a:bodyPr wrap="square">
-            <a:spAutoFit/>
-          </a:bodyPr>
-          <a:lstStyle/>
-          <a:p>
-            <a:pPr algn="l">
-              <a:defRPr sz="1400" b="0">
-                <a:solidFill>
-                  <a:srgbClr val="FFFFFF"/>
-                </a:solidFill>
-                <a:latin typeface="Calibri"/>
-              </a:defRPr>
-            </a:pPr>
-            <a:r>
-              <a:t>Mobile-first responsive design, offline capable</a:t>
-            </a:r>
-          </a:p>
-        </p:txBody>
-      </p:sp>
-      <p:sp>
-        <p:nvSpPr>
-          <p:cNvPr id="8" name="Rectangle 7"/>
-          <p:cNvSpPr/>
-          <p:nvPr/>
-        </p:nvSpPr>
-        <p:spPr>
-          <a:xfrm>
-            <a:off x="1371600" y="2880360"/>
-            <a:ext cx="9144000" cy="914400"/>
-          </a:xfrm>
-          <a:prstGeom prst="rect">
-            <a:avLst/>
-          </a:prstGeom>
-          <a:solidFill>
-            <a:srgbClr val="1A5C8A"/>
-          </a:solidFill>
-          <a:ln>
-            <a:noFill/>
-          </a:ln>
-        </p:spPr>
-        <p:style>
-          <a:lnRef idx="1">
-            <a:schemeClr val="accent1"/>
-          </a:lnRef>
-          <a:fillRef idx="3">
-            <a:schemeClr val="accent1"/>
-          </a:fillRef>
-          <a:effectRef idx="2">
-            <a:schemeClr val="accent1"/>
-          </a:effectRef>
-          <a:fontRef idx="minor">
-            <a:schemeClr val="lt1"/>
-          </a:fontRef>
-        </p:style>
-        <p:txBody>
-          <a:bodyPr rtlCol="0" anchor="ctr"/>
-          <a:lstStyle/>
-          <a:p>
-            <a:pPr algn="ctr"/>
-            <a:endParaRPr/>
-          </a:p>
-        </p:txBody>
-      </p:sp>
-      <p:sp>
-        <p:nvSpPr>
-          <p:cNvPr id="9" name="TextBox 8"/>
-          <p:cNvSpPr txBox="1"/>
-          <p:nvPr/>
-        </p:nvSpPr>
-        <p:spPr>
-          <a:xfrm>
-            <a:off x="1828800" y="2953512"/>
-            <a:ext cx="3657600" cy="411480"/>
-          </a:xfrm>
-          <a:prstGeom prst="rect">
-            <a:avLst/>
-          </a:prstGeom>
-          <a:noFill/>
-        </p:spPr>
-        <p:txBody>
-          <a:bodyPr wrap="square">
-            <a:spAutoFit/>
-          </a:bodyPr>
-          <a:lstStyle/>
-          <a:p>
-            <a:pPr algn="l">
-              <a:defRPr sz="2000" b="1">
-                <a:solidFill>
-                  <a:srgbClr val="FFFFFF"/>
-                </a:solidFill>
-                <a:latin typeface="Calibri"/>
-              </a:defRPr>
-            </a:pPr>
-            <a:r>
-              <a:t>Supabase (PostgreSQL)</a:t>
-            </a:r>
-          </a:p>
-        </p:txBody>
-      </p:sp>
-      <p:sp>
-        <p:nvSpPr>
-          <p:cNvPr id="10" name="TextBox 9"/>
-          <p:cNvSpPr txBox="1"/>
-          <p:nvPr/>
-        </p:nvSpPr>
-        <p:spPr>
-          <a:xfrm>
-            <a:off x="1828800" y="3319272"/>
-            <a:ext cx="8229600" cy="411480"/>
-          </a:xfrm>
-          <a:prstGeom prst="rect">
-            <a:avLst/>
-          </a:prstGeom>
-          <a:noFill/>
-        </p:spPr>
-        <p:txBody>
-          <a:bodyPr wrap="square">
-            <a:spAutoFit/>
-          </a:bodyPr>
-          <a:lstStyle/>
-          <a:p>
-            <a:pPr algn="l">
-              <a:defRPr sz="1400" b="0">
-                <a:solidFill>
-                  <a:srgbClr val="FFFFFF"/>
-                </a:solidFill>
-                <a:latin typeface="Calibri"/>
-              </a:defRPr>
-            </a:pPr>
-            <a:r>
-              <a:t>Auth, real-time subscriptions, Row Level Security</a:t>
-            </a:r>
-          </a:p>
-        </p:txBody>
-      </p:sp>
-      <p:sp>
-        <p:nvSpPr>
-          <p:cNvPr id="11" name="Rectangle 10"/>
-          <p:cNvSpPr/>
-          <p:nvPr/>
-        </p:nvSpPr>
-        <p:spPr>
-          <a:xfrm>
-            <a:off x="1371600" y="3931920"/>
-            <a:ext cx="9144000" cy="914400"/>
-          </a:xfrm>
-          <a:prstGeom prst="rect">
-            <a:avLst/>
-          </a:prstGeom>
-          <a:solidFill>
-            <a:srgbClr val="14735A"/>
-          </a:solidFill>
-          <a:ln>
-            <a:noFill/>
-          </a:ln>
-        </p:spPr>
-        <p:style>
-          <a:lnRef idx="1">
-            <a:schemeClr val="accent1"/>
-          </a:lnRef>
-          <a:fillRef idx="3">
-            <a:schemeClr val="accent1"/>
-          </a:fillRef>
-          <a:effectRef idx="2">
-            <a:schemeClr val="accent1"/>
-          </a:effectRef>
-          <a:fontRef idx="minor">
-            <a:schemeClr val="lt1"/>
-          </a:fontRef>
-        </p:style>
-        <p:txBody>
-          <a:bodyPr rtlCol="0" anchor="ctr"/>
-          <a:lstStyle/>
-          <a:p>
-            <a:pPr algn="ctr"/>
-            <a:endParaRPr/>
-          </a:p>
-        </p:txBody>
-      </p:sp>
-      <p:sp>
-        <p:nvSpPr>
-          <p:cNvPr id="12" name="TextBox 11"/>
-          <p:cNvSpPr txBox="1"/>
-          <p:nvPr/>
-        </p:nvSpPr>
-        <p:spPr>
-          <a:xfrm>
-            <a:off x="1828800" y="4005072"/>
-            <a:ext cx="3657600" cy="411480"/>
-          </a:xfrm>
-          <a:prstGeom prst="rect">
-            <a:avLst/>
-          </a:prstGeom>
-          <a:noFill/>
-        </p:spPr>
-        <p:txBody>
-          <a:bodyPr wrap="square">
-            <a:spAutoFit/>
-          </a:bodyPr>
-          <a:lstStyle/>
-          <a:p>
-            <a:pPr algn="l">
-              <a:defRPr sz="2000" b="1">
-                <a:solidFill>
-                  <a:srgbClr val="FFFFFF"/>
-                </a:solidFill>
-                <a:latin typeface="Calibri"/>
-              </a:defRPr>
-            </a:pPr>
-            <a:r>
-              <a:t>Python (FastAPI)</a:t>
-            </a:r>
-          </a:p>
-        </p:txBody>
-      </p:sp>
-      <p:sp>
-        <p:nvSpPr>
-          <p:cNvPr id="13" name="TextBox 12"/>
-          <p:cNvSpPr txBox="1"/>
-          <p:nvPr/>
-        </p:nvSpPr>
-        <p:spPr>
-          <a:xfrm>
-            <a:off x="1828800" y="4370832"/>
-            <a:ext cx="8229600" cy="411480"/>
-          </a:xfrm>
-          <a:prstGeom prst="rect">
-            <a:avLst/>
-          </a:prstGeom>
-          <a:noFill/>
-        </p:spPr>
-        <p:txBody>
-          <a:bodyPr wrap="square">
-            <a:spAutoFit/>
-          </a:bodyPr>
-          <a:lstStyle/>
-          <a:p>
-            <a:pPr algn="l">
-              <a:defRPr sz="1400" b="0">
-                <a:solidFill>
-                  <a:srgbClr val="FFFFFF"/>
-                </a:solidFill>
-                <a:latin typeface="Calibri"/>
-              </a:defRPr>
-            </a:pPr>
-            <a:r>
-              <a:t>Paycom SFTP sync, gift card APIs, scheduled jobs</a:t>
-            </a:r>
-          </a:p>
-        </p:txBody>
-      </p:sp>
-      <p:sp>
-        <p:nvSpPr>
-          <p:cNvPr id="14" name="Rectangle 13"/>
-          <p:cNvSpPr/>
-          <p:nvPr/>
-        </p:nvSpPr>
-        <p:spPr>
-          <a:xfrm>
-            <a:off x="1371600" y="4983480"/>
-            <a:ext cx="9144000" cy="914400"/>
-          </a:xfrm>
-          <a:prstGeom prst="rect">
-            <a:avLst/>
-          </a:prstGeom>
-          <a:solidFill>
-            <a:srgbClr val="E67E22"/>
-          </a:solidFill>
-          <a:ln>
-            <a:noFill/>
-          </a:ln>
-        </p:spPr>
-        <p:style>
-          <a:lnRef idx="1">
-            <a:schemeClr val="accent1"/>
-          </a:lnRef>
-          <a:fillRef idx="3">
-            <a:schemeClr val="accent1"/>
-          </a:fillRef>
-          <a:effectRef idx="2">
-            <a:schemeClr val="accent1"/>
-          </a:effectRef>
-          <a:fontRef idx="minor">
-            <a:schemeClr val="lt1"/>
-          </a:fontRef>
-        </p:style>
-        <p:txBody>
-          <a:bodyPr rtlCol="0" anchor="ctr"/>
-          <a:lstStyle/>
-          <a:p>
-            <a:pPr algn="ctr"/>
-            <a:endParaRPr/>
-          </a:p>
-        </p:txBody>
-      </p:sp>
-      <p:sp>
-        <p:nvSpPr>
-          <p:cNvPr id="15" name="TextBox 14"/>
-          <p:cNvSpPr txBox="1"/>
-          <p:nvPr/>
-        </p:nvSpPr>
-        <p:spPr>
-          <a:xfrm>
-            <a:off x="1828800" y="5056632"/>
-            <a:ext cx="3657600" cy="411480"/>
-          </a:xfrm>
-          <a:prstGeom prst="rect">
-            <a:avLst/>
-          </a:prstGeom>
-          <a:noFill/>
-        </p:spPr>
-        <p:txBody>
-          <a:bodyPr wrap="square">
-            <a:spAutoFit/>
-          </a:bodyPr>
-          <a:lstStyle/>
-          <a:p>
-            <a:pPr algn="l">
-              <a:defRPr sz="2000" b="1">
-                <a:solidFill>
-                  <a:srgbClr val="FFFFFF"/>
-                </a:solidFill>
-                <a:latin typeface="Calibri"/>
-              </a:defRPr>
-            </a:pPr>
-            <a:r>
-              <a:t>AWS Cloud</a:t>
-            </a:r>
-          </a:p>
-        </p:txBody>
-      </p:sp>
-      <p:sp>
-        <p:nvSpPr>
-          <p:cNvPr id="16" name="TextBox 15"/>
-          <p:cNvSpPr txBox="1"/>
-          <p:nvPr/>
-        </p:nvSpPr>
-        <p:spPr>
-          <a:xfrm>
-            <a:off x="1828800" y="5422392"/>
-            <a:ext cx="8229600" cy="411480"/>
-          </a:xfrm>
-          <a:prstGeom prst="rect">
-            <a:avLst/>
-          </a:prstGeom>
-          <a:noFill/>
-        </p:spPr>
-        <p:txBody>
-          <a:bodyPr wrap="square">
-            <a:spAutoFit/>
-          </a:bodyPr>
-          <a:lstStyle/>
-          <a:p>
-            <a:pPr algn="l">
-              <a:defRPr sz="1400" b="0">
-                <a:solidFill>
-                  <a:srgbClr val="FFFFFF"/>
-                </a:solidFill>
-                <a:latin typeface="Calibri"/>
-              </a:defRPr>
-            </a:pPr>
-            <a:r>
-              <a:t>ECS Fargate, CloudFront, S3, WAF, CloudWatch</a:t>
-            </a:r>
-          </a:p>
-        </p:txBody>
-      </p:sp>
-      <p:sp>
-        <p:nvSpPr>
-          <p:cNvPr id="17" name="TextBox 16"/>
-          <p:cNvSpPr txBox="1"/>
-          <p:nvPr/>
-        </p:nvSpPr>
-        <p:spPr>
-          <a:xfrm>
-            <a:off x="731520" y="5943600"/>
-            <a:ext cx="10058400" cy="457200"/>
-          </a:xfrm>
-          <a:prstGeom prst="rect">
-            <a:avLst/>
-          </a:prstGeom>
-          <a:noFill/>
-        </p:spPr>
-        <p:txBody>
-          <a:bodyPr wrap="square">
-            <a:spAutoFit/>
-          </a:bodyPr>
-          <a:lstStyle/>
-          <a:p>
-            <a:pPr algn="ctr">
-              <a:defRPr sz="1400" b="0">
-                <a:solidFill>
-                  <a:srgbClr val="666666"/>
-                </a:solidFill>
-                <a:latin typeface="Calibri"/>
-              </a:defRPr>
-            </a:pPr>
-            <a:r>
-              <a:t>Security: AES-256 at rest  |  TLS 1.3 in transit  |  WCAG AAA  |  Full audit logging</a:t>
+              <a:t>★ Optional add-on — same BrainBook UI Arc Mercer already uses</a:t>
             </a:r>
           </a:p>
         </p:txBody>
@@ -17122,8 +15904,8 @@
 </p:sld>
 </file>
 
-<file path=ppt/slides/slide8.xml><?xml version="1.0" encoding="utf-8"?>
-<p:sld xmlns:a="http://schemas.openxmlformats.org/drawingml/2006/main" xmlns:r="http://schemas.openxmlformats.org/officeDocument/2006/relationships" xmlns:p="http://schemas.openxmlformats.org/presentationml/2006/main">
+<file path=ppt/slides/slide6.xml><?xml version="1.0" encoding="utf-8"?>
+<p:sld xmlns:a="http://schemas.openxmlformats.org/drawingml/2006/main" xmlns:p="http://schemas.openxmlformats.org/presentationml/2006/main" xmlns:r="http://schemas.openxmlformats.org/officeDocument/2006/relationships">
   <p:cSld>
     <p:bg>
       <p:bgPr>
@@ -17139,14 +15921,7 @@
         <p:cNvGrpSpPr/>
         <p:nvPr/>
       </p:nvGrpSpPr>
-      <p:grpSpPr>
-        <a:xfrm>
-          <a:off x="0" y="0"/>
-          <a:ext cx="0" cy="0"/>
-          <a:chOff x="0" y="0"/>
-          <a:chExt cx="0" cy="0"/>
-        </a:xfrm>
-      </p:grpSpPr>
+      <p:grpSpPr/>
       <p:sp>
         <p:nvSpPr>
           <p:cNvPr id="2" name="Rectangle 1"/>
@@ -17187,7 +15962,6 @@
           <a:lstStyle/>
           <a:p>
             <a:pPr algn="ctr"/>
-            <a:endParaRPr/>
           </a:p>
         </p:txBody>
       </p:sp>
@@ -17222,7 +15996,7 @@
               </a:defRPr>
             </a:pPr>
             <a:r>
-              <a:t>Nominations, Voting &amp; QA Engine</a:t>
+              <a:t>Understanding Your Challenge</a:t>
             </a:r>
           </a:p>
         </p:txBody>
@@ -17235,8 +16009,8 @@
         </p:nvSpPr>
         <p:spPr>
           <a:xfrm>
-            <a:off x="365760" y="1188720"/>
-            <a:ext cx="5029200" cy="411480"/>
+            <a:off x="731520" y="1280160"/>
+            <a:ext cx="10058400" cy="457200"/>
           </a:xfrm>
           <a:prstGeom prst="rect">
             <a:avLst/>
@@ -17250,7 +16024,7 @@
           <a:lstStyle/>
           <a:p>
             <a:pPr algn="l">
-              <a:defRPr sz="2200" b="1">
+              <a:defRPr sz="2400" b="1">
                 <a:solidFill>
                   <a:srgbClr val="2E86C1"/>
                 </a:solidFill>
@@ -17258,7 +16032,7 @@
               </a:defRPr>
             </a:pPr>
             <a:r>
-              <a:t>Nominations</a:t>
+              <a:t>The Arc Mercer's Current State</a:t>
             </a:r>
           </a:p>
         </p:txBody>
@@ -17271,8 +16045,8 @@
         </p:nvSpPr>
         <p:spPr>
           <a:xfrm>
-            <a:off x="365760" y="1691640"/>
-            <a:ext cx="5029200" cy="1463040"/>
+            <a:off x="731520" y="1920240"/>
+            <a:ext cx="5029200" cy="3657600"/>
           </a:xfrm>
           <a:prstGeom prst="rect">
             <a:avLst/>
@@ -17287,49 +16061,113 @@
           <a:p>
             <a:pPr algn="l">
               <a:spcAft>
-                <a:spcPts val="600"/>
+                <a:spcPts val="1000"/>
               </a:spcAft>
-              <a:defRPr sz="1400" b="0">
-                <a:solidFill>
-                  <a:srgbClr val="333333"/>
-                </a:solidFill>
-                <a:latin typeface="Calibri"/>
-              </a:defRPr>
-            </a:pPr>
-            <a:r>
-              <a:t>• 3 award types: Employee of the Month, Rising Star, Team Impact</a:t>
+              <a:defRPr sz="1600" b="0">
+                <a:solidFill>
+                  <a:srgbClr val="333333"/>
+                </a:solidFill>
+                <a:latin typeface="Calibri"/>
+              </a:defRPr>
+            </a:pPr>
+            <a:r>
+              <a:t>• Manual recognition processes — inconsistent, hard to track</a:t>
             </a:r>
           </a:p>
           <a:p>
             <a:pPr>
               <a:spcAft>
-                <a:spcPts val="600"/>
+                <a:spcPts val="1000"/>
               </a:spcAft>
-              <a:defRPr sz="1400">
-                <a:solidFill>
-                  <a:srgbClr val="333333"/>
-                </a:solidFill>
-                <a:latin typeface="Calibri"/>
-              </a:defRPr>
-            </a:pPr>
-            <a:r>
-              <a:t>• Step-by-step guided form with large buttons</a:t>
+              <a:defRPr sz="1600">
+                <a:solidFill>
+                  <a:srgbClr val="333333"/>
+                </a:solidFill>
+                <a:latin typeface="Calibri"/>
+              </a:defRPr>
+            </a:pPr>
+            <a:r>
+              <a:t>• Multiple programs (Residential, Day Programs) operating in silos</a:t>
             </a:r>
           </a:p>
           <a:p>
             <a:pPr>
               <a:spcAft>
-                <a:spcPts val="600"/>
+                <a:spcPts val="1000"/>
               </a:spcAft>
-              <a:defRPr sz="1400">
-                <a:solidFill>
-                  <a:srgbClr val="333333"/>
-                </a:solidFill>
-                <a:latin typeface="Calibri"/>
-              </a:defRPr>
-            </a:pPr>
-            <a:r>
-              <a:t>• 1 nomination per candidate/month, 5 total/month</a:t>
+              <a:defRPr sz="1600">
+                <a:solidFill>
+                  <a:srgbClr val="333333"/>
+                </a:solidFill>
+                <a:latin typeface="Calibri"/>
+              </a:defRPr>
+            </a:pPr>
+            <a:r>
+              <a:t>• Frontline staff with varying technical literacy</a:t>
+            </a:r>
+          </a:p>
+          <a:p>
+            <a:pPr>
+              <a:spcAft>
+                <a:spcPts val="1000"/>
+              </a:spcAft>
+              <a:defRPr sz="1600">
+                <a:solidFill>
+                  <a:srgbClr val="333333"/>
+                </a:solidFill>
+                <a:latin typeface="Calibri"/>
+              </a:defRPr>
+            </a:pPr>
+            <a:r>
+              <a:t>• Many frontline DSPs lack company email addresses</a:t>
+            </a:r>
+          </a:p>
+          <a:p>
+            <a:pPr>
+              <a:spcAft>
+                <a:spcPts val="1000"/>
+              </a:spcAft>
+              <a:defRPr sz="1600">
+                <a:solidFill>
+                  <a:srgbClr val="333333"/>
+                </a:solidFill>
+                <a:latin typeface="Calibri"/>
+              </a:defRPr>
+            </a:pPr>
+            <a:r>
+              <a:t>• Selection committee uses ranked-choice voting — no digital tool</a:t>
+            </a:r>
+          </a:p>
+          <a:p>
+            <a:pPr>
+              <a:spcAft>
+                <a:spcPts val="1000"/>
+              </a:spcAft>
+              <a:defRPr sz="1600">
+                <a:solidFill>
+                  <a:srgbClr val="333333"/>
+                </a:solidFill>
+                <a:latin typeface="Calibri"/>
+              </a:defRPr>
+            </a:pPr>
+            <a:r>
+              <a:t>• No centralized system for nominations or point tracking</a:t>
+            </a:r>
+          </a:p>
+          <a:p>
+            <a:pPr>
+              <a:spcAft>
+                <a:spcPts val="1000"/>
+              </a:spcAft>
+              <a:defRPr sz="1600">
+                <a:solidFill>
+                  <a:srgbClr val="333333"/>
+                </a:solidFill>
+                <a:latin typeface="Calibri"/>
+              </a:defRPr>
+            </a:pPr>
+            <a:r>
+              <a:t>• No connection to Paycom HRIS for employee data</a:t>
             </a:r>
           </a:p>
         </p:txBody>
@@ -17342,8 +16180,8 @@
         </p:nvSpPr>
         <p:spPr>
           <a:xfrm>
-            <a:off x="365760" y="3108960"/>
-            <a:ext cx="5029200" cy="411480"/>
+            <a:off x="6400800" y="1280160"/>
+            <a:ext cx="5029200" cy="457200"/>
           </a:xfrm>
           <a:prstGeom prst="rect">
             <a:avLst/>
@@ -17357,7 +16195,7 @@
           <a:lstStyle/>
           <a:p>
             <a:pPr algn="l">
-              <a:defRPr sz="2200" b="1">
+              <a:defRPr sz="2400" b="1">
                 <a:solidFill>
                   <a:srgbClr val="2E86C1"/>
                 </a:solidFill>
@@ -17365,7 +16203,7 @@
               </a:defRPr>
             </a:pPr>
             <a:r>
-              <a:t>Selection Committee Voting</a:t>
+              <a:t>What You Need</a:t>
             </a:r>
           </a:p>
         </p:txBody>
@@ -17378,8 +16216,8 @@
         </p:nvSpPr>
         <p:spPr>
           <a:xfrm>
-            <a:off x="365760" y="3566160"/>
-            <a:ext cx="5029200" cy="1371600"/>
+            <a:off x="6400800" y="1920240"/>
+            <a:ext cx="5029200" cy="3657600"/>
           </a:xfrm>
           <a:prstGeom prst="rect">
             <a:avLst/>
@@ -17394,200 +16232,117 @@
           <a:p>
             <a:pPr algn="l">
               <a:spcAft>
-                <a:spcPts val="600"/>
+                <a:spcPts val="1000"/>
               </a:spcAft>
-              <a:defRPr sz="1400" b="0">
-                <a:solidFill>
-                  <a:srgbClr val="333333"/>
-                </a:solidFill>
-                <a:latin typeface="Calibri"/>
-              </a:defRPr>
-            </a:pPr>
-            <a:r>
-              <a:t>• Ranked-choice drag-and-drop voting interface</a:t>
+              <a:defRPr sz="1600" b="0">
+                <a:solidFill>
+                  <a:srgbClr val="333333"/>
+                </a:solidFill>
+                <a:latin typeface="Calibri"/>
+              </a:defRPr>
+            </a:pPr>
+            <a:r>
+              <a:t>• Centralized, web-based recognition platform</a:t>
             </a:r>
           </a:p>
           <a:p>
             <a:pPr>
               <a:spcAft>
-                <a:spcPts val="600"/>
+                <a:spcPts val="1000"/>
               </a:spcAft>
-              <a:defRPr sz="1400">
-                <a:solidFill>
-                  <a:srgbClr val="333333"/>
-                </a:solidFill>
-                <a:latin typeface="Calibri"/>
-              </a:defRPr>
-            </a:pPr>
-            <a:r>
-              <a:t>• Private ballots — not visible until window closes</a:t>
+              <a:defRPr sz="1600">
+                <a:solidFill>
+                  <a:srgbClr val="333333"/>
+                </a:solidFill>
+                <a:latin typeface="Calibri"/>
+              </a:defRPr>
+            </a:pPr>
+            <a:r>
+              <a:t>• Program-based competition engine with committee voting</a:t>
             </a:r>
           </a:p>
           <a:p>
             <a:pPr>
               <a:spcAft>
-                <a:spcPts val="600"/>
+                <a:spcPts val="1000"/>
               </a:spcAft>
-              <a:defRPr sz="1400">
-                <a:solidFill>
-                  <a:srgbClr val="333333"/>
-                </a:solidFill>
-                <a:latin typeface="Calibri"/>
-              </a:defRPr>
-            </a:pPr>
-            <a:r>
-              <a:t>• Automated tally (Borda count / weighted rank)</a:t>
+              <a:defRPr sz="1600">
+                <a:solidFill>
+                  <a:srgbClr val="333333"/>
+                </a:solidFill>
+                <a:latin typeface="Calibri"/>
+              </a:defRPr>
+            </a:pPr>
+            <a:r>
+              <a:t>• Multi-stream point system with audit trails</a:t>
             </a:r>
           </a:p>
           <a:p>
             <a:pPr>
               <a:spcAft>
-                <a:spcPts val="600"/>
+                <a:spcPts val="1000"/>
               </a:spcAft>
-              <a:defRPr sz="1400">
-                <a:solidFill>
-                  <a:srgbClr val="333333"/>
-                </a:solidFill>
-                <a:latin typeface="Calibri"/>
-              </a:defRPr>
-            </a:pPr>
-            <a:r>
-              <a:t>• Per-voter audit trail &amp; historical ballot archive</a:t>
-            </a:r>
-          </a:p>
-        </p:txBody>
-      </p:sp>
-      <p:sp>
-        <p:nvSpPr>
-          <p:cNvPr id="8" name="TextBox 7"/>
-          <p:cNvSpPr txBox="1"/>
-          <p:nvPr/>
-        </p:nvSpPr>
-        <p:spPr>
-          <a:xfrm>
-            <a:off x="365760" y="4937760"/>
-            <a:ext cx="5029200" cy="411480"/>
-          </a:xfrm>
-          <a:prstGeom prst="rect">
-            <a:avLst/>
-          </a:prstGeom>
-          <a:noFill/>
-        </p:spPr>
-        <p:txBody>
-          <a:bodyPr wrap="square">
-            <a:spAutoFit/>
-          </a:bodyPr>
-          <a:lstStyle/>
-          <a:p>
-            <a:pPr algn="l">
-              <a:defRPr sz="2200" b="1">
-                <a:solidFill>
-                  <a:srgbClr val="2E86C1"/>
-                </a:solidFill>
-                <a:latin typeface="Calibri"/>
-              </a:defRPr>
-            </a:pPr>
-            <a:r>
-              <a:t>QA Queue &amp; Revise-Resubmit</a:t>
-            </a:r>
-          </a:p>
-        </p:txBody>
-      </p:sp>
-      <p:sp>
-        <p:nvSpPr>
-          <p:cNvPr id="9" name="TextBox 8"/>
-          <p:cNvSpPr txBox="1"/>
-          <p:nvPr/>
-        </p:nvSpPr>
-        <p:spPr>
-          <a:xfrm>
-            <a:off x="365760" y="5394960"/>
-            <a:ext cx="5029200" cy="1280160"/>
-          </a:xfrm>
-          <a:prstGeom prst="rect">
-            <a:avLst/>
-          </a:prstGeom>
-          <a:noFill/>
-        </p:spPr>
-        <p:txBody>
-          <a:bodyPr wrap="square">
-            <a:spAutoFit/>
-          </a:bodyPr>
-          <a:lstStyle/>
-          <a:p>
-            <a:pPr algn="l">
-              <a:spcAft>
-                <a:spcPts val="600"/>
-              </a:spcAft>
-              <a:defRPr sz="1400" b="0">
-                <a:solidFill>
-                  <a:srgbClr val="333333"/>
-                </a:solidFill>
-                <a:latin typeface="Calibri"/>
-              </a:defRPr>
-            </a:pPr>
-            <a:r>
-              <a:t>• Approve / Return for Edits / Decline with batch operations</a:t>
+              <a:defRPr sz="1600">
+                <a:solidFill>
+                  <a:srgbClr val="333333"/>
+                </a:solidFill>
+                <a:latin typeface="Calibri"/>
+              </a:defRPr>
+            </a:pPr>
+            <a:r>
+              <a:t>• Rewards marketplace — digital, café, and in-person store</a:t>
             </a:r>
           </a:p>
           <a:p>
             <a:pPr>
               <a:spcAft>
-                <a:spcPts val="600"/>
+                <a:spcPts val="1000"/>
               </a:spcAft>
-              <a:defRPr sz="1400">
-                <a:solidFill>
-                  <a:srgbClr val="333333"/>
-                </a:solidFill>
-                <a:latin typeface="Calibri"/>
-              </a:defRPr>
-            </a:pPr>
-            <a:r>
-              <a:t>• Formal resubmission loop: status tracking through full cycle</a:t>
+              <a:defRPr sz="1600">
+                <a:solidFill>
+                  <a:srgbClr val="333333"/>
+                </a:solidFill>
+                <a:latin typeface="Calibri"/>
+              </a:defRPr>
+            </a:pPr>
+            <a:r>
+              <a:t>• Paycom integration &amp; flexible auth (SSO + Badge ID + PIN)</a:t>
             </a:r>
           </a:p>
           <a:p>
             <a:pPr>
               <a:spcAft>
-                <a:spcPts val="600"/>
+                <a:spcPts val="1000"/>
               </a:spcAft>
-              <a:defRPr sz="1400">
-                <a:solidFill>
-                  <a:srgbClr val="333333"/>
-                </a:solidFill>
-                <a:latin typeface="Calibri"/>
-              </a:defRPr>
-            </a:pPr>
-            <a:r>
-              <a:t>• Admin comments → nominator notification → edit &amp; resubmit</a:t>
-            </a:r>
-          </a:p>
-        </p:txBody>
-      </p:sp>
-      <p:pic>
-        <p:nvPicPr>
-          <p:cNvPr id="10" name="Picture 9" descr="reward_2.png"/>
-          <p:cNvPicPr>
-            <a:picLocks noChangeAspect="1"/>
-          </p:cNvPicPr>
-          <p:nvPr/>
-        </p:nvPicPr>
-        <p:blipFill>
-          <a:blip r:embed="rId2"/>
-          <a:stretch>
-            <a:fillRect/>
-          </a:stretch>
-        </p:blipFill>
-        <p:spPr>
-          <a:xfrm>
-            <a:off x="5577840" y="1371600"/>
-            <a:ext cx="6217920" cy="3461915"/>
-          </a:xfrm>
-          <a:prstGeom prst="rect">
-            <a:avLst/>
-          </a:prstGeom>
-        </p:spPr>
-      </p:pic>
+              <a:defRPr sz="1600">
+                <a:solidFill>
+                  <a:srgbClr val="333333"/>
+                </a:solidFill>
+                <a:latin typeface="Calibri"/>
+              </a:defRPr>
+            </a:pPr>
+            <a:r>
+              <a:t>• Community engagement: TAC, culture groups, volunteering</a:t>
+            </a:r>
+          </a:p>
+          <a:p>
+            <a:pPr>
+              <a:spcAft>
+                <a:spcPts val="1000"/>
+              </a:spcAft>
+              <a:defRPr sz="1600">
+                <a:solidFill>
+                  <a:srgbClr val="333333"/>
+                </a:solidFill>
+                <a:latin typeface="Calibri"/>
+              </a:defRPr>
+            </a:pPr>
+            <a:r>
+              <a:t>• Mobile-first, accessible to all staff (incl. dark mode)</a:t>
+            </a:r>
+          </a:p>
+        </p:txBody>
+      </p:sp>
     </p:spTree>
   </p:cSld>
   <p:clrMapOvr>
@@ -17596,8 +16351,8 @@
 </p:sld>
 </file>
 
-<file path=ppt/slides/slide9.xml><?xml version="1.0" encoding="utf-8"?>
-<p:sld xmlns:a="http://schemas.openxmlformats.org/drawingml/2006/main" xmlns:r="http://schemas.openxmlformats.org/officeDocument/2006/relationships" xmlns:p="http://schemas.openxmlformats.org/presentationml/2006/main">
+<file path=ppt/slides/slide7.xml><?xml version="1.0" encoding="utf-8"?>
+<p:sld xmlns:a="http://schemas.openxmlformats.org/drawingml/2006/main" xmlns:p="http://schemas.openxmlformats.org/presentationml/2006/main" xmlns:r="http://schemas.openxmlformats.org/officeDocument/2006/relationships">
   <p:cSld>
     <p:bg>
       <p:bgPr>
@@ -17613,14 +16368,7 @@
         <p:cNvGrpSpPr/>
         <p:nvPr/>
       </p:nvGrpSpPr>
-      <p:grpSpPr>
-        <a:xfrm>
-          <a:off x="0" y="0"/>
-          <a:ext cx="0" cy="0"/>
-          <a:chOff x="0" y="0"/>
-          <a:chExt cx="0" cy="0"/>
-        </a:xfrm>
-      </p:grpSpPr>
+      <p:grpSpPr/>
       <p:sp>
         <p:nvSpPr>
           <p:cNvPr id="2" name="Rectangle 1"/>
@@ -17661,7 +16409,6 @@
           <a:lstStyle/>
           <a:p>
             <a:pPr algn="ctr"/>
-            <a:endParaRPr/>
           </a:p>
         </p:txBody>
       </p:sp>
@@ -17696,7 +16443,7 @@
               </a:defRPr>
             </a:pPr>
             <a:r>
-              <a:t>Points, Engagement &amp; Community Modules</a:t>
+              <a:t>Our Solution — Platform Overview</a:t>
             </a:r>
           </a:p>
         </p:txBody>
@@ -17709,8 +16456,8 @@
         </p:nvSpPr>
         <p:spPr>
           <a:xfrm>
-            <a:off x="731520" y="1280160"/>
-            <a:ext cx="5486400" cy="457200"/>
+            <a:off x="731520" y="1188720"/>
+            <a:ext cx="10058400" cy="457200"/>
           </a:xfrm>
           <a:prstGeom prst="rect">
             <a:avLst/>
@@ -17732,7 +16479,7 @@
               </a:defRPr>
             </a:pPr>
             <a:r>
-              <a:t>Multi-Stream Point Accrual</a:t>
+              <a:t>Custom-Built SaaS — Tailored for The Arc Mercer</a:t>
             </a:r>
           </a:p>
         </p:txBody>
@@ -17745,8 +16492,8 @@
         </p:nvSpPr>
         <p:spPr>
           <a:xfrm>
-            <a:off x="731520" y="1828800"/>
-            <a:ext cx="6400800" cy="347472"/>
+            <a:off x="1371600" y="1828800"/>
+            <a:ext cx="9144000" cy="914400"/>
           </a:xfrm>
           <a:prstGeom prst="rect">
             <a:avLst/>
@@ -17777,7 +16524,1109 @@
           <a:lstStyle/>
           <a:p>
             <a:pPr algn="ctr"/>
-            <a:endParaRPr/>
+          </a:p>
+        </p:txBody>
+      </p:sp>
+      <p:sp>
+        <p:nvSpPr>
+          <p:cNvPr id="6" name="TextBox 5"/>
+          <p:cNvSpPr txBox="1"/>
+          <p:nvPr/>
+        </p:nvSpPr>
+        <p:spPr>
+          <a:xfrm>
+            <a:off x="1828800" y="1901952"/>
+            <a:ext cx="3657600" cy="411480"/>
+          </a:xfrm>
+          <a:prstGeom prst="rect">
+            <a:avLst/>
+          </a:prstGeom>
+          <a:noFill/>
+        </p:spPr>
+        <p:txBody>
+          <a:bodyPr wrap="square">
+            <a:spAutoFit/>
+          </a:bodyPr>
+          <a:lstStyle/>
+          <a:p>
+            <a:pPr algn="l">
+              <a:defRPr sz="2000" b="1">
+                <a:solidFill>
+                  <a:srgbClr val="FFFFFF"/>
+                </a:solidFill>
+                <a:latin typeface="Calibri"/>
+              </a:defRPr>
+            </a:pPr>
+            <a:r>
+              <a:t>React + TypeScript PWA</a:t>
+            </a:r>
+          </a:p>
+        </p:txBody>
+      </p:sp>
+      <p:sp>
+        <p:nvSpPr>
+          <p:cNvPr id="7" name="TextBox 6"/>
+          <p:cNvSpPr txBox="1"/>
+          <p:nvPr/>
+        </p:nvSpPr>
+        <p:spPr>
+          <a:xfrm>
+            <a:off x="1828800" y="2267712"/>
+            <a:ext cx="8229600" cy="411480"/>
+          </a:xfrm>
+          <a:prstGeom prst="rect">
+            <a:avLst/>
+          </a:prstGeom>
+          <a:noFill/>
+        </p:spPr>
+        <p:txBody>
+          <a:bodyPr wrap="square">
+            <a:spAutoFit/>
+          </a:bodyPr>
+          <a:lstStyle/>
+          <a:p>
+            <a:pPr algn="l">
+              <a:defRPr sz="1400" b="0">
+                <a:solidFill>
+                  <a:srgbClr val="FFFFFF"/>
+                </a:solidFill>
+                <a:latin typeface="Calibri"/>
+              </a:defRPr>
+            </a:pPr>
+            <a:r>
+              <a:t>Mobile-first responsive design, offline capable</a:t>
+            </a:r>
+          </a:p>
+        </p:txBody>
+      </p:sp>
+      <p:sp>
+        <p:nvSpPr>
+          <p:cNvPr id="8" name="Rectangle 7"/>
+          <p:cNvSpPr/>
+          <p:nvPr/>
+        </p:nvSpPr>
+        <p:spPr>
+          <a:xfrm>
+            <a:off x="1371600" y="2880360"/>
+            <a:ext cx="9144000" cy="914400"/>
+          </a:xfrm>
+          <a:prstGeom prst="rect">
+            <a:avLst/>
+          </a:prstGeom>
+          <a:solidFill>
+            <a:srgbClr val="1A5C8A"/>
+          </a:solidFill>
+          <a:ln>
+            <a:noFill/>
+          </a:ln>
+        </p:spPr>
+        <p:style>
+          <a:lnRef idx="1">
+            <a:schemeClr val="accent1"/>
+          </a:lnRef>
+          <a:fillRef idx="3">
+            <a:schemeClr val="accent1"/>
+          </a:fillRef>
+          <a:effectRef idx="2">
+            <a:schemeClr val="accent1"/>
+          </a:effectRef>
+          <a:fontRef idx="minor">
+            <a:schemeClr val="lt1"/>
+          </a:fontRef>
+        </p:style>
+        <p:txBody>
+          <a:bodyPr rtlCol="0" anchor="ctr"/>
+          <a:lstStyle/>
+          <a:p>
+            <a:pPr algn="ctr"/>
+          </a:p>
+        </p:txBody>
+      </p:sp>
+      <p:sp>
+        <p:nvSpPr>
+          <p:cNvPr id="9" name="TextBox 8"/>
+          <p:cNvSpPr txBox="1"/>
+          <p:nvPr/>
+        </p:nvSpPr>
+        <p:spPr>
+          <a:xfrm>
+            <a:off x="1828800" y="2953512"/>
+            <a:ext cx="3657600" cy="411480"/>
+          </a:xfrm>
+          <a:prstGeom prst="rect">
+            <a:avLst/>
+          </a:prstGeom>
+          <a:noFill/>
+        </p:spPr>
+        <p:txBody>
+          <a:bodyPr wrap="square">
+            <a:spAutoFit/>
+          </a:bodyPr>
+          <a:lstStyle/>
+          <a:p>
+            <a:pPr algn="l">
+              <a:defRPr sz="2000" b="1">
+                <a:solidFill>
+                  <a:srgbClr val="FFFFFF"/>
+                </a:solidFill>
+                <a:latin typeface="Calibri"/>
+              </a:defRPr>
+            </a:pPr>
+            <a:r>
+              <a:t>Supabase (PostgreSQL)</a:t>
+            </a:r>
+          </a:p>
+        </p:txBody>
+      </p:sp>
+      <p:sp>
+        <p:nvSpPr>
+          <p:cNvPr id="10" name="TextBox 9"/>
+          <p:cNvSpPr txBox="1"/>
+          <p:nvPr/>
+        </p:nvSpPr>
+        <p:spPr>
+          <a:xfrm>
+            <a:off x="1828800" y="3319272"/>
+            <a:ext cx="8229600" cy="411480"/>
+          </a:xfrm>
+          <a:prstGeom prst="rect">
+            <a:avLst/>
+          </a:prstGeom>
+          <a:noFill/>
+        </p:spPr>
+        <p:txBody>
+          <a:bodyPr wrap="square">
+            <a:spAutoFit/>
+          </a:bodyPr>
+          <a:lstStyle/>
+          <a:p>
+            <a:pPr algn="l">
+              <a:defRPr sz="1400" b="0">
+                <a:solidFill>
+                  <a:srgbClr val="FFFFFF"/>
+                </a:solidFill>
+                <a:latin typeface="Calibri"/>
+              </a:defRPr>
+            </a:pPr>
+            <a:r>
+              <a:t>Auth, real-time subscriptions, Row Level Security</a:t>
+            </a:r>
+          </a:p>
+        </p:txBody>
+      </p:sp>
+      <p:sp>
+        <p:nvSpPr>
+          <p:cNvPr id="11" name="Rectangle 10"/>
+          <p:cNvSpPr/>
+          <p:nvPr/>
+        </p:nvSpPr>
+        <p:spPr>
+          <a:xfrm>
+            <a:off x="1371600" y="3931920"/>
+            <a:ext cx="9144000" cy="914400"/>
+          </a:xfrm>
+          <a:prstGeom prst="rect">
+            <a:avLst/>
+          </a:prstGeom>
+          <a:solidFill>
+            <a:srgbClr val="14735A"/>
+          </a:solidFill>
+          <a:ln>
+            <a:noFill/>
+          </a:ln>
+        </p:spPr>
+        <p:style>
+          <a:lnRef idx="1">
+            <a:schemeClr val="accent1"/>
+          </a:lnRef>
+          <a:fillRef idx="3">
+            <a:schemeClr val="accent1"/>
+          </a:fillRef>
+          <a:effectRef idx="2">
+            <a:schemeClr val="accent1"/>
+          </a:effectRef>
+          <a:fontRef idx="minor">
+            <a:schemeClr val="lt1"/>
+          </a:fontRef>
+        </p:style>
+        <p:txBody>
+          <a:bodyPr rtlCol="0" anchor="ctr"/>
+          <a:lstStyle/>
+          <a:p>
+            <a:pPr algn="ctr"/>
+          </a:p>
+        </p:txBody>
+      </p:sp>
+      <p:sp>
+        <p:nvSpPr>
+          <p:cNvPr id="12" name="TextBox 11"/>
+          <p:cNvSpPr txBox="1"/>
+          <p:nvPr/>
+        </p:nvSpPr>
+        <p:spPr>
+          <a:xfrm>
+            <a:off x="1828800" y="4005072"/>
+            <a:ext cx="3657600" cy="411480"/>
+          </a:xfrm>
+          <a:prstGeom prst="rect">
+            <a:avLst/>
+          </a:prstGeom>
+          <a:noFill/>
+        </p:spPr>
+        <p:txBody>
+          <a:bodyPr wrap="square">
+            <a:spAutoFit/>
+          </a:bodyPr>
+          <a:lstStyle/>
+          <a:p>
+            <a:pPr algn="l">
+              <a:defRPr sz="2000" b="1">
+                <a:solidFill>
+                  <a:srgbClr val="FFFFFF"/>
+                </a:solidFill>
+                <a:latin typeface="Calibri"/>
+              </a:defRPr>
+            </a:pPr>
+            <a:r>
+              <a:t>Python (FastAPI)</a:t>
+            </a:r>
+          </a:p>
+        </p:txBody>
+      </p:sp>
+      <p:sp>
+        <p:nvSpPr>
+          <p:cNvPr id="13" name="TextBox 12"/>
+          <p:cNvSpPr txBox="1"/>
+          <p:nvPr/>
+        </p:nvSpPr>
+        <p:spPr>
+          <a:xfrm>
+            <a:off x="1828800" y="4370832"/>
+            <a:ext cx="8229600" cy="411480"/>
+          </a:xfrm>
+          <a:prstGeom prst="rect">
+            <a:avLst/>
+          </a:prstGeom>
+          <a:noFill/>
+        </p:spPr>
+        <p:txBody>
+          <a:bodyPr wrap="square">
+            <a:spAutoFit/>
+          </a:bodyPr>
+          <a:lstStyle/>
+          <a:p>
+            <a:pPr algn="l">
+              <a:defRPr sz="1400" b="0">
+                <a:solidFill>
+                  <a:srgbClr val="FFFFFF"/>
+                </a:solidFill>
+                <a:latin typeface="Calibri"/>
+              </a:defRPr>
+            </a:pPr>
+            <a:r>
+              <a:t>Paycom SFTP sync, gift card APIs, scheduled jobs</a:t>
+            </a:r>
+          </a:p>
+        </p:txBody>
+      </p:sp>
+      <p:sp>
+        <p:nvSpPr>
+          <p:cNvPr id="14" name="Rectangle 13"/>
+          <p:cNvSpPr/>
+          <p:nvPr/>
+        </p:nvSpPr>
+        <p:spPr>
+          <a:xfrm>
+            <a:off x="1371600" y="4983480"/>
+            <a:ext cx="9144000" cy="914400"/>
+          </a:xfrm>
+          <a:prstGeom prst="rect">
+            <a:avLst/>
+          </a:prstGeom>
+          <a:solidFill>
+            <a:srgbClr val="E67E22"/>
+          </a:solidFill>
+          <a:ln>
+            <a:noFill/>
+          </a:ln>
+        </p:spPr>
+        <p:style>
+          <a:lnRef idx="1">
+            <a:schemeClr val="accent1"/>
+          </a:lnRef>
+          <a:fillRef idx="3">
+            <a:schemeClr val="accent1"/>
+          </a:fillRef>
+          <a:effectRef idx="2">
+            <a:schemeClr val="accent1"/>
+          </a:effectRef>
+          <a:fontRef idx="minor">
+            <a:schemeClr val="lt1"/>
+          </a:fontRef>
+        </p:style>
+        <p:txBody>
+          <a:bodyPr rtlCol="0" anchor="ctr"/>
+          <a:lstStyle/>
+          <a:p>
+            <a:pPr algn="ctr"/>
+          </a:p>
+        </p:txBody>
+      </p:sp>
+      <p:sp>
+        <p:nvSpPr>
+          <p:cNvPr id="15" name="TextBox 14"/>
+          <p:cNvSpPr txBox="1"/>
+          <p:nvPr/>
+        </p:nvSpPr>
+        <p:spPr>
+          <a:xfrm>
+            <a:off x="1828800" y="5056632"/>
+            <a:ext cx="3657600" cy="411480"/>
+          </a:xfrm>
+          <a:prstGeom prst="rect">
+            <a:avLst/>
+          </a:prstGeom>
+          <a:noFill/>
+        </p:spPr>
+        <p:txBody>
+          <a:bodyPr wrap="square">
+            <a:spAutoFit/>
+          </a:bodyPr>
+          <a:lstStyle/>
+          <a:p>
+            <a:pPr algn="l">
+              <a:defRPr sz="2000" b="1">
+                <a:solidFill>
+                  <a:srgbClr val="FFFFFF"/>
+                </a:solidFill>
+                <a:latin typeface="Calibri"/>
+              </a:defRPr>
+            </a:pPr>
+            <a:r>
+              <a:t>AWS Cloud</a:t>
+            </a:r>
+          </a:p>
+        </p:txBody>
+      </p:sp>
+      <p:sp>
+        <p:nvSpPr>
+          <p:cNvPr id="16" name="TextBox 15"/>
+          <p:cNvSpPr txBox="1"/>
+          <p:nvPr/>
+        </p:nvSpPr>
+        <p:spPr>
+          <a:xfrm>
+            <a:off x="1828800" y="5422392"/>
+            <a:ext cx="8229600" cy="411480"/>
+          </a:xfrm>
+          <a:prstGeom prst="rect">
+            <a:avLst/>
+          </a:prstGeom>
+          <a:noFill/>
+        </p:spPr>
+        <p:txBody>
+          <a:bodyPr wrap="square">
+            <a:spAutoFit/>
+          </a:bodyPr>
+          <a:lstStyle/>
+          <a:p>
+            <a:pPr algn="l">
+              <a:defRPr sz="1400" b="0">
+                <a:solidFill>
+                  <a:srgbClr val="FFFFFF"/>
+                </a:solidFill>
+                <a:latin typeface="Calibri"/>
+              </a:defRPr>
+            </a:pPr>
+            <a:r>
+              <a:t>ECS Fargate, CloudFront, S3, WAF, CloudWatch</a:t>
+            </a:r>
+          </a:p>
+        </p:txBody>
+      </p:sp>
+      <p:sp>
+        <p:nvSpPr>
+          <p:cNvPr id="17" name="TextBox 16"/>
+          <p:cNvSpPr txBox="1"/>
+          <p:nvPr/>
+        </p:nvSpPr>
+        <p:spPr>
+          <a:xfrm>
+            <a:off x="731520" y="5943600"/>
+            <a:ext cx="10058400" cy="457200"/>
+          </a:xfrm>
+          <a:prstGeom prst="rect">
+            <a:avLst/>
+          </a:prstGeom>
+          <a:noFill/>
+        </p:spPr>
+        <p:txBody>
+          <a:bodyPr wrap="square">
+            <a:spAutoFit/>
+          </a:bodyPr>
+          <a:lstStyle/>
+          <a:p>
+            <a:pPr algn="ctr">
+              <a:defRPr sz="1400" b="0">
+                <a:solidFill>
+                  <a:srgbClr val="666666"/>
+                </a:solidFill>
+                <a:latin typeface="Calibri"/>
+              </a:defRPr>
+            </a:pPr>
+            <a:r>
+              <a:t>Security: AES-256 at rest  |  TLS 1.3 in transit  |  WCAG AAA  |  Full audit logging</a:t>
+            </a:r>
+          </a:p>
+        </p:txBody>
+      </p:sp>
+    </p:spTree>
+  </p:cSld>
+  <p:clrMapOvr>
+    <a:masterClrMapping/>
+  </p:clrMapOvr>
+</p:sld>
+</file>
+
+<file path=ppt/slides/slide8.xml><?xml version="1.0" encoding="utf-8"?>
+<p:sld xmlns:a="http://schemas.openxmlformats.org/drawingml/2006/main" xmlns:p="http://schemas.openxmlformats.org/presentationml/2006/main" xmlns:r="http://schemas.openxmlformats.org/officeDocument/2006/relationships">
+  <p:cSld>
+    <p:bg>
+      <p:bgPr>
+        <a:solidFill>
+          <a:srgbClr val="FFFFFF"/>
+        </a:solidFill>
+        <a:effectLst/>
+      </p:bgPr>
+    </p:bg>
+    <p:spTree>
+      <p:nvGrpSpPr>
+        <p:cNvPr id="1" name=""/>
+        <p:cNvGrpSpPr/>
+        <p:nvPr/>
+      </p:nvGrpSpPr>
+      <p:grpSpPr/>
+      <p:sp>
+        <p:nvSpPr>
+          <p:cNvPr id="2" name="Rectangle 1"/>
+          <p:cNvSpPr/>
+          <p:nvPr/>
+        </p:nvSpPr>
+        <p:spPr>
+          <a:xfrm>
+            <a:off x="0" y="0"/>
+            <a:ext cx="12191695" cy="1005840"/>
+          </a:xfrm>
+          <a:prstGeom prst="rect">
+            <a:avLst/>
+          </a:prstGeom>
+          <a:solidFill>
+            <a:srgbClr val="1B2A4A"/>
+          </a:solidFill>
+          <a:ln>
+            <a:noFill/>
+          </a:ln>
+        </p:spPr>
+        <p:style>
+          <a:lnRef idx="1">
+            <a:schemeClr val="accent1"/>
+          </a:lnRef>
+          <a:fillRef idx="3">
+            <a:schemeClr val="accent1"/>
+          </a:fillRef>
+          <a:effectRef idx="2">
+            <a:schemeClr val="accent1"/>
+          </a:effectRef>
+          <a:fontRef idx="minor">
+            <a:schemeClr val="lt1"/>
+          </a:fontRef>
+        </p:style>
+        <p:txBody>
+          <a:bodyPr rtlCol="0" anchor="ctr"/>
+          <a:lstStyle/>
+          <a:p>
+            <a:pPr algn="ctr"/>
+          </a:p>
+        </p:txBody>
+      </p:sp>
+      <p:sp>
+        <p:nvSpPr>
+          <p:cNvPr id="3" name="TextBox 2"/>
+          <p:cNvSpPr txBox="1"/>
+          <p:nvPr/>
+        </p:nvSpPr>
+        <p:spPr>
+          <a:xfrm>
+            <a:off x="731520" y="182880"/>
+            <a:ext cx="10058400" cy="640080"/>
+          </a:xfrm>
+          <a:prstGeom prst="rect">
+            <a:avLst/>
+          </a:prstGeom>
+          <a:noFill/>
+        </p:spPr>
+        <p:txBody>
+          <a:bodyPr wrap="square">
+            <a:spAutoFit/>
+          </a:bodyPr>
+          <a:lstStyle/>
+          <a:p>
+            <a:pPr algn="l">
+              <a:defRPr sz="3200" b="1">
+                <a:solidFill>
+                  <a:srgbClr val="FFFFFF"/>
+                </a:solidFill>
+                <a:latin typeface="Calibri"/>
+              </a:defRPr>
+            </a:pPr>
+            <a:r>
+              <a:t>Nominations, Voting &amp; QA Engine</a:t>
+            </a:r>
+          </a:p>
+        </p:txBody>
+      </p:sp>
+      <p:sp>
+        <p:nvSpPr>
+          <p:cNvPr id="4" name="TextBox 3"/>
+          <p:cNvSpPr txBox="1"/>
+          <p:nvPr/>
+        </p:nvSpPr>
+        <p:spPr>
+          <a:xfrm>
+            <a:off x="365760" y="1188720"/>
+            <a:ext cx="5029200" cy="411480"/>
+          </a:xfrm>
+          <a:prstGeom prst="rect">
+            <a:avLst/>
+          </a:prstGeom>
+          <a:noFill/>
+        </p:spPr>
+        <p:txBody>
+          <a:bodyPr wrap="square">
+            <a:spAutoFit/>
+          </a:bodyPr>
+          <a:lstStyle/>
+          <a:p>
+            <a:pPr algn="l">
+              <a:defRPr sz="2200" b="1">
+                <a:solidFill>
+                  <a:srgbClr val="2E86C1"/>
+                </a:solidFill>
+                <a:latin typeface="Calibri"/>
+              </a:defRPr>
+            </a:pPr>
+            <a:r>
+              <a:t>Nominations</a:t>
+            </a:r>
+          </a:p>
+        </p:txBody>
+      </p:sp>
+      <p:sp>
+        <p:nvSpPr>
+          <p:cNvPr id="5" name="TextBox 4"/>
+          <p:cNvSpPr txBox="1"/>
+          <p:nvPr/>
+        </p:nvSpPr>
+        <p:spPr>
+          <a:xfrm>
+            <a:off x="365760" y="1691640"/>
+            <a:ext cx="5029200" cy="1463040"/>
+          </a:xfrm>
+          <a:prstGeom prst="rect">
+            <a:avLst/>
+          </a:prstGeom>
+          <a:noFill/>
+        </p:spPr>
+        <p:txBody>
+          <a:bodyPr wrap="square">
+            <a:spAutoFit/>
+          </a:bodyPr>
+          <a:lstStyle/>
+          <a:p>
+            <a:pPr algn="l">
+              <a:spcAft>
+                <a:spcPts val="600"/>
+              </a:spcAft>
+              <a:defRPr sz="1400" b="0">
+                <a:solidFill>
+                  <a:srgbClr val="333333"/>
+                </a:solidFill>
+                <a:latin typeface="Calibri"/>
+              </a:defRPr>
+            </a:pPr>
+            <a:r>
+              <a:t>• 3 award types: Employee of the Month, Rising Star, Team Impact</a:t>
+            </a:r>
+          </a:p>
+          <a:p>
+            <a:pPr>
+              <a:spcAft>
+                <a:spcPts val="600"/>
+              </a:spcAft>
+              <a:defRPr sz="1400">
+                <a:solidFill>
+                  <a:srgbClr val="333333"/>
+                </a:solidFill>
+                <a:latin typeface="Calibri"/>
+              </a:defRPr>
+            </a:pPr>
+            <a:r>
+              <a:t>• Step-by-step guided form with large buttons</a:t>
+            </a:r>
+          </a:p>
+          <a:p>
+            <a:pPr>
+              <a:spcAft>
+                <a:spcPts val="600"/>
+              </a:spcAft>
+              <a:defRPr sz="1400">
+                <a:solidFill>
+                  <a:srgbClr val="333333"/>
+                </a:solidFill>
+                <a:latin typeface="Calibri"/>
+              </a:defRPr>
+            </a:pPr>
+            <a:r>
+              <a:t>• 1 nomination per candidate/month, 5 total/month</a:t>
+            </a:r>
+          </a:p>
+        </p:txBody>
+      </p:sp>
+      <p:sp>
+        <p:nvSpPr>
+          <p:cNvPr id="6" name="TextBox 5"/>
+          <p:cNvSpPr txBox="1"/>
+          <p:nvPr/>
+        </p:nvSpPr>
+        <p:spPr>
+          <a:xfrm>
+            <a:off x="365760" y="3108960"/>
+            <a:ext cx="5029200" cy="411480"/>
+          </a:xfrm>
+          <a:prstGeom prst="rect">
+            <a:avLst/>
+          </a:prstGeom>
+          <a:noFill/>
+        </p:spPr>
+        <p:txBody>
+          <a:bodyPr wrap="square">
+            <a:spAutoFit/>
+          </a:bodyPr>
+          <a:lstStyle/>
+          <a:p>
+            <a:pPr algn="l">
+              <a:defRPr sz="2200" b="1">
+                <a:solidFill>
+                  <a:srgbClr val="2E86C1"/>
+                </a:solidFill>
+                <a:latin typeface="Calibri"/>
+              </a:defRPr>
+            </a:pPr>
+            <a:r>
+              <a:t>Selection Committee Voting</a:t>
+            </a:r>
+          </a:p>
+        </p:txBody>
+      </p:sp>
+      <p:sp>
+        <p:nvSpPr>
+          <p:cNvPr id="7" name="TextBox 6"/>
+          <p:cNvSpPr txBox="1"/>
+          <p:nvPr/>
+        </p:nvSpPr>
+        <p:spPr>
+          <a:xfrm>
+            <a:off x="365760" y="3566160"/>
+            <a:ext cx="5029200" cy="1371600"/>
+          </a:xfrm>
+          <a:prstGeom prst="rect">
+            <a:avLst/>
+          </a:prstGeom>
+          <a:noFill/>
+        </p:spPr>
+        <p:txBody>
+          <a:bodyPr wrap="square">
+            <a:spAutoFit/>
+          </a:bodyPr>
+          <a:lstStyle/>
+          <a:p>
+            <a:pPr algn="l">
+              <a:spcAft>
+                <a:spcPts val="600"/>
+              </a:spcAft>
+              <a:defRPr sz="1400" b="0">
+                <a:solidFill>
+                  <a:srgbClr val="333333"/>
+                </a:solidFill>
+                <a:latin typeface="Calibri"/>
+              </a:defRPr>
+            </a:pPr>
+            <a:r>
+              <a:t>• Ranked-choice drag-and-drop voting interface</a:t>
+            </a:r>
+          </a:p>
+          <a:p>
+            <a:pPr>
+              <a:spcAft>
+                <a:spcPts val="600"/>
+              </a:spcAft>
+              <a:defRPr sz="1400">
+                <a:solidFill>
+                  <a:srgbClr val="333333"/>
+                </a:solidFill>
+                <a:latin typeface="Calibri"/>
+              </a:defRPr>
+            </a:pPr>
+            <a:r>
+              <a:t>• Private ballots — not visible until window closes</a:t>
+            </a:r>
+          </a:p>
+          <a:p>
+            <a:pPr>
+              <a:spcAft>
+                <a:spcPts val="600"/>
+              </a:spcAft>
+              <a:defRPr sz="1400">
+                <a:solidFill>
+                  <a:srgbClr val="333333"/>
+                </a:solidFill>
+                <a:latin typeface="Calibri"/>
+              </a:defRPr>
+            </a:pPr>
+            <a:r>
+              <a:t>• Automated tally (Borda count / weighted rank)</a:t>
+            </a:r>
+          </a:p>
+          <a:p>
+            <a:pPr>
+              <a:spcAft>
+                <a:spcPts val="600"/>
+              </a:spcAft>
+              <a:defRPr sz="1400">
+                <a:solidFill>
+                  <a:srgbClr val="333333"/>
+                </a:solidFill>
+                <a:latin typeface="Calibri"/>
+              </a:defRPr>
+            </a:pPr>
+            <a:r>
+              <a:t>• Per-voter audit trail &amp; historical ballot archive</a:t>
+            </a:r>
+          </a:p>
+        </p:txBody>
+      </p:sp>
+      <p:sp>
+        <p:nvSpPr>
+          <p:cNvPr id="8" name="TextBox 7"/>
+          <p:cNvSpPr txBox="1"/>
+          <p:nvPr/>
+        </p:nvSpPr>
+        <p:spPr>
+          <a:xfrm>
+            <a:off x="365760" y="4937760"/>
+            <a:ext cx="5029200" cy="411480"/>
+          </a:xfrm>
+          <a:prstGeom prst="rect">
+            <a:avLst/>
+          </a:prstGeom>
+          <a:noFill/>
+        </p:spPr>
+        <p:txBody>
+          <a:bodyPr wrap="square">
+            <a:spAutoFit/>
+          </a:bodyPr>
+          <a:lstStyle/>
+          <a:p>
+            <a:pPr algn="l">
+              <a:defRPr sz="2200" b="1">
+                <a:solidFill>
+                  <a:srgbClr val="2E86C1"/>
+                </a:solidFill>
+                <a:latin typeface="Calibri"/>
+              </a:defRPr>
+            </a:pPr>
+            <a:r>
+              <a:t>QA Queue &amp; Revise-Resubmit</a:t>
+            </a:r>
+          </a:p>
+        </p:txBody>
+      </p:sp>
+      <p:sp>
+        <p:nvSpPr>
+          <p:cNvPr id="9" name="TextBox 8"/>
+          <p:cNvSpPr txBox="1"/>
+          <p:nvPr/>
+        </p:nvSpPr>
+        <p:spPr>
+          <a:xfrm>
+            <a:off x="365760" y="5394960"/>
+            <a:ext cx="5029200" cy="1280160"/>
+          </a:xfrm>
+          <a:prstGeom prst="rect">
+            <a:avLst/>
+          </a:prstGeom>
+          <a:noFill/>
+        </p:spPr>
+        <p:txBody>
+          <a:bodyPr wrap="square">
+            <a:spAutoFit/>
+          </a:bodyPr>
+          <a:lstStyle/>
+          <a:p>
+            <a:pPr algn="l">
+              <a:spcAft>
+                <a:spcPts val="600"/>
+              </a:spcAft>
+              <a:defRPr sz="1400" b="0">
+                <a:solidFill>
+                  <a:srgbClr val="333333"/>
+                </a:solidFill>
+                <a:latin typeface="Calibri"/>
+              </a:defRPr>
+            </a:pPr>
+            <a:r>
+              <a:t>• Approve / Return for Edits / Decline with batch operations</a:t>
+            </a:r>
+          </a:p>
+          <a:p>
+            <a:pPr>
+              <a:spcAft>
+                <a:spcPts val="600"/>
+              </a:spcAft>
+              <a:defRPr sz="1400">
+                <a:solidFill>
+                  <a:srgbClr val="333333"/>
+                </a:solidFill>
+                <a:latin typeface="Calibri"/>
+              </a:defRPr>
+            </a:pPr>
+            <a:r>
+              <a:t>• Formal resubmission loop: status tracking through full cycle</a:t>
+            </a:r>
+          </a:p>
+          <a:p>
+            <a:pPr>
+              <a:spcAft>
+                <a:spcPts val="600"/>
+              </a:spcAft>
+              <a:defRPr sz="1400">
+                <a:solidFill>
+                  <a:srgbClr val="333333"/>
+                </a:solidFill>
+                <a:latin typeface="Calibri"/>
+              </a:defRPr>
+            </a:pPr>
+            <a:r>
+              <a:t>• Admin comments → nominator notification → edit &amp; resubmit</a:t>
+            </a:r>
+          </a:p>
+        </p:txBody>
+      </p:sp>
+      <p:pic>
+        <p:nvPicPr>
+          <p:cNvPr id="10" name="Picture 9" descr="reward_2.png"/>
+          <p:cNvPicPr>
+            <a:picLocks noChangeAspect="1"/>
+          </p:cNvPicPr>
+          <p:nvPr/>
+        </p:nvPicPr>
+        <p:blipFill>
+          <a:blip r:embed="rId2"/>
+          <a:stretch>
+            <a:fillRect/>
+          </a:stretch>
+        </p:blipFill>
+        <p:spPr>
+          <a:xfrm>
+            <a:off x="5577840" y="1371600"/>
+            <a:ext cx="6217920" cy="3461915"/>
+          </a:xfrm>
+          <a:prstGeom prst="rect">
+            <a:avLst/>
+          </a:prstGeom>
+        </p:spPr>
+      </p:pic>
+    </p:spTree>
+  </p:cSld>
+  <p:clrMapOvr>
+    <a:masterClrMapping/>
+  </p:clrMapOvr>
+</p:sld>
+</file>
+
+<file path=ppt/slides/slide9.xml><?xml version="1.0" encoding="utf-8"?>
+<p:sld xmlns:a="http://schemas.openxmlformats.org/drawingml/2006/main" xmlns:p="http://schemas.openxmlformats.org/presentationml/2006/main" xmlns:r="http://schemas.openxmlformats.org/officeDocument/2006/relationships">
+  <p:cSld>
+    <p:bg>
+      <p:bgPr>
+        <a:solidFill>
+          <a:srgbClr val="FFFFFF"/>
+        </a:solidFill>
+        <a:effectLst/>
+      </p:bgPr>
+    </p:bg>
+    <p:spTree>
+      <p:nvGrpSpPr>
+        <p:cNvPr id="1" name=""/>
+        <p:cNvGrpSpPr/>
+        <p:nvPr/>
+      </p:nvGrpSpPr>
+      <p:grpSpPr/>
+      <p:sp>
+        <p:nvSpPr>
+          <p:cNvPr id="2" name="Rectangle 1"/>
+          <p:cNvSpPr/>
+          <p:nvPr/>
+        </p:nvSpPr>
+        <p:spPr>
+          <a:xfrm>
+            <a:off x="0" y="0"/>
+            <a:ext cx="12191695" cy="1005840"/>
+          </a:xfrm>
+          <a:prstGeom prst="rect">
+            <a:avLst/>
+          </a:prstGeom>
+          <a:solidFill>
+            <a:srgbClr val="1B2A4A"/>
+          </a:solidFill>
+          <a:ln>
+            <a:noFill/>
+          </a:ln>
+        </p:spPr>
+        <p:style>
+          <a:lnRef idx="1">
+            <a:schemeClr val="accent1"/>
+          </a:lnRef>
+          <a:fillRef idx="3">
+            <a:schemeClr val="accent1"/>
+          </a:fillRef>
+          <a:effectRef idx="2">
+            <a:schemeClr val="accent1"/>
+          </a:effectRef>
+          <a:fontRef idx="minor">
+            <a:schemeClr val="lt1"/>
+          </a:fontRef>
+        </p:style>
+        <p:txBody>
+          <a:bodyPr rtlCol="0" anchor="ctr"/>
+          <a:lstStyle/>
+          <a:p>
+            <a:pPr algn="ctr"/>
+          </a:p>
+        </p:txBody>
+      </p:sp>
+      <p:sp>
+        <p:nvSpPr>
+          <p:cNvPr id="3" name="TextBox 2"/>
+          <p:cNvSpPr txBox="1"/>
+          <p:nvPr/>
+        </p:nvSpPr>
+        <p:spPr>
+          <a:xfrm>
+            <a:off x="731520" y="182880"/>
+            <a:ext cx="10058400" cy="640080"/>
+          </a:xfrm>
+          <a:prstGeom prst="rect">
+            <a:avLst/>
+          </a:prstGeom>
+          <a:noFill/>
+        </p:spPr>
+        <p:txBody>
+          <a:bodyPr wrap="square">
+            <a:spAutoFit/>
+          </a:bodyPr>
+          <a:lstStyle/>
+          <a:p>
+            <a:pPr algn="l">
+              <a:defRPr sz="3200" b="1">
+                <a:solidFill>
+                  <a:srgbClr val="FFFFFF"/>
+                </a:solidFill>
+                <a:latin typeface="Calibri"/>
+              </a:defRPr>
+            </a:pPr>
+            <a:r>
+              <a:t>Points, Engagement &amp; Community Modules</a:t>
+            </a:r>
+          </a:p>
+        </p:txBody>
+      </p:sp>
+      <p:sp>
+        <p:nvSpPr>
+          <p:cNvPr id="4" name="TextBox 3"/>
+          <p:cNvSpPr txBox="1"/>
+          <p:nvPr/>
+        </p:nvSpPr>
+        <p:spPr>
+          <a:xfrm>
+            <a:off x="731520" y="1280160"/>
+            <a:ext cx="5486400" cy="457200"/>
+          </a:xfrm>
+          <a:prstGeom prst="rect">
+            <a:avLst/>
+          </a:prstGeom>
+          <a:noFill/>
+        </p:spPr>
+        <p:txBody>
+          <a:bodyPr wrap="square">
+            <a:spAutoFit/>
+          </a:bodyPr>
+          <a:lstStyle/>
+          <a:p>
+            <a:pPr algn="l">
+              <a:defRPr sz="2200" b="1">
+                <a:solidFill>
+                  <a:srgbClr val="2E86C1"/>
+                </a:solidFill>
+                <a:latin typeface="Calibri"/>
+              </a:defRPr>
+            </a:pPr>
+            <a:r>
+              <a:t>Multi-Stream Point Accrual</a:t>
+            </a:r>
+          </a:p>
+        </p:txBody>
+      </p:sp>
+      <p:sp>
+        <p:nvSpPr>
+          <p:cNvPr id="5" name="Rectangle 4"/>
+          <p:cNvSpPr/>
+          <p:nvPr/>
+        </p:nvSpPr>
+        <p:spPr>
+          <a:xfrm>
+            <a:off x="731520" y="1828800"/>
+            <a:ext cx="6400800" cy="347472"/>
+          </a:xfrm>
+          <a:prstGeom prst="rect">
+            <a:avLst/>
+          </a:prstGeom>
+          <a:solidFill>
+            <a:srgbClr val="2E86C1"/>
+          </a:solidFill>
+          <a:ln>
+            <a:noFill/>
+          </a:ln>
+        </p:spPr>
+        <p:style>
+          <a:lnRef idx="1">
+            <a:schemeClr val="accent1"/>
+          </a:lnRef>
+          <a:fillRef idx="3">
+            <a:schemeClr val="accent1"/>
+          </a:fillRef>
+          <a:effectRef idx="2">
+            <a:schemeClr val="accent1"/>
+          </a:effectRef>
+          <a:fontRef idx="minor">
+            <a:schemeClr val="lt1"/>
+          </a:fontRef>
+        </p:style>
+        <p:txBody>
+          <a:bodyPr rtlCol="0" anchor="ctr"/>
+          <a:lstStyle/>
+          <a:p>
+            <a:pPr algn="ctr"/>
           </a:p>
         </p:txBody>
       </p:sp>
@@ -17893,7 +17742,6 @@
           <a:lstStyle/>
           <a:p>
             <a:pPr algn="ctr"/>
-            <a:endParaRPr/>
           </a:p>
         </p:txBody>
       </p:sp>
@@ -18009,7 +17857,6 @@
           <a:lstStyle/>
           <a:p>
             <a:pPr algn="ctr"/>
-            <a:endParaRPr/>
           </a:p>
         </p:txBody>
       </p:sp>
@@ -18125,7 +17972,6 @@
           <a:lstStyle/>
           <a:p>
             <a:pPr algn="ctr"/>
-            <a:endParaRPr/>
           </a:p>
         </p:txBody>
       </p:sp>
@@ -18241,7 +18087,6 @@
           <a:lstStyle/>
           <a:p>
             <a:pPr algn="ctr"/>
-            <a:endParaRPr/>
           </a:p>
         </p:txBody>
       </p:sp>
@@ -18357,7 +18202,6 @@
           <a:lstStyle/>
           <a:p>
             <a:pPr algn="ctr"/>
-            <a:endParaRPr/>
           </a:p>
         </p:txBody>
       </p:sp>
@@ -18473,7 +18317,6 @@
           <a:lstStyle/>
           <a:p>
             <a:pPr algn="ctr"/>
-            <a:endParaRPr/>
           </a:p>
         </p:txBody>
       </p:sp>
@@ -18589,7 +18432,6 @@
           <a:lstStyle/>
           <a:p>
             <a:pPr algn="ctr"/>
-            <a:endParaRPr/>
           </a:p>
         </p:txBody>
       </p:sp>
@@ -18705,7 +18547,6 @@
           <a:lstStyle/>
           <a:p>
             <a:pPr algn="ctr"/>
-            <a:endParaRPr/>
           </a:p>
         </p:txBody>
       </p:sp>
@@ -18821,7 +18662,6 @@
           <a:lstStyle/>
           <a:p>
             <a:pPr algn="ctr"/>
-            <a:endParaRPr/>
           </a:p>
         </p:txBody>
       </p:sp>

--- a/RFP/IoTeye - Arc Mercer Pitch.pptx
+++ b/RFP/IoTeye - Arc Mercer Pitch.pptx
@@ -8024,57 +8024,21 @@
               </a:defRPr>
             </a:pPr>
             <a:r>
-              <a:t>Pricing — Option B: IoTeye-Hosted SaaS</a:t>
-            </a:r>
-          </a:p>
-        </p:txBody>
-      </p:sp>
-      <p:sp>
-        <p:nvSpPr>
-          <p:cNvPr id="4" name="TextBox 3"/>
-          <p:cNvSpPr txBox="1"/>
-          <p:nvPr/>
-        </p:nvSpPr>
-        <p:spPr>
-          <a:xfrm>
-            <a:off x="731520" y="1188720"/>
-            <a:ext cx="10058400" cy="457200"/>
-          </a:xfrm>
-          <a:prstGeom prst="rect">
-            <a:avLst/>
-          </a:prstGeom>
-          <a:noFill/>
-        </p:spPr>
-        <p:txBody>
-          <a:bodyPr wrap="square">
-            <a:spAutoFit/>
-          </a:bodyPr>
-          <a:lstStyle/>
-          <a:p>
-            <a:pPr algn="l">
-              <a:defRPr sz="1800" b="1">
-                <a:solidFill>
-                  <a:srgbClr val="27AE60"/>
-                </a:solidFill>
-                <a:latin typeface="Calibri"/>
-              </a:defRPr>
-            </a:pPr>
-            <a:r>
-              <a:t>No upfront cost — IoTeye retains platform ownership &amp; offers managed service</a:t>
-            </a:r>
-          </a:p>
-        </p:txBody>
-      </p:sp>
-      <p:sp>
-        <p:nvSpPr>
-          <p:cNvPr id="5" name="Rectangle 4"/>
+              <a:t>Pricing — Option B (SaaS) &amp; Option C (Shared Ownership)</a:t>
+            </a:r>
+          </a:p>
+        </p:txBody>
+      </p:sp>
+      <p:sp>
+        <p:nvSpPr>
+          <p:cNvPr id="4" name="Rectangle 3"/>
           <p:cNvSpPr/>
           <p:nvPr/>
         </p:nvSpPr>
         <p:spPr>
           <a:xfrm>
-            <a:off x="1371600" y="1828800"/>
-            <a:ext cx="4114800" cy="2286000"/>
+            <a:off x="365760" y="1188720"/>
+            <a:ext cx="5394960" cy="2743200"/>
           </a:xfrm>
           <a:prstGeom prst="rect">
             <a:avLst/>
@@ -8110,50 +8074,50 @@
       </p:sp>
       <p:sp>
         <p:nvSpPr>
+          <p:cNvPr id="5" name="TextBox 4"/>
+          <p:cNvSpPr txBox="1"/>
+          <p:nvPr/>
+        </p:nvSpPr>
+        <p:spPr>
+          <a:xfrm>
+            <a:off x="548640" y="1234440"/>
+            <a:ext cx="5029200" cy="411480"/>
+          </a:xfrm>
+          <a:prstGeom prst="rect">
+            <a:avLst/>
+          </a:prstGeom>
+          <a:noFill/>
+        </p:spPr>
+        <p:txBody>
+          <a:bodyPr wrap="square">
+            <a:spAutoFit/>
+          </a:bodyPr>
+          <a:lstStyle/>
+          <a:p>
+            <a:pPr algn="l">
+              <a:defRPr sz="2000" b="1">
+                <a:solidFill>
+                  <a:srgbClr val="1B2A4A"/>
+                </a:solidFill>
+                <a:latin typeface="Calibri"/>
+              </a:defRPr>
+            </a:pPr>
+            <a:r>
+              <a:t>Option B: IoTeye-Hosted SaaS</a:t>
+            </a:r>
+          </a:p>
+        </p:txBody>
+      </p:sp>
+      <p:sp>
+        <p:nvSpPr>
           <p:cNvPr id="6" name="TextBox 5"/>
           <p:cNvSpPr txBox="1"/>
           <p:nvPr/>
         </p:nvSpPr>
         <p:spPr>
           <a:xfrm>
-            <a:off x="1554480" y="1920240"/>
-            <a:ext cx="3657600" cy="457200"/>
-          </a:xfrm>
-          <a:prstGeom prst="rect">
-            <a:avLst/>
-          </a:prstGeom>
-          <a:noFill/>
-        </p:spPr>
-        <p:txBody>
-          <a:bodyPr wrap="square">
-            <a:spAutoFit/>
-          </a:bodyPr>
-          <a:lstStyle/>
-          <a:p>
-            <a:pPr algn="l">
-              <a:defRPr sz="2200" b="1">
-                <a:solidFill>
-                  <a:srgbClr val="1B2A4A"/>
-                </a:solidFill>
-                <a:latin typeface="Calibri"/>
-              </a:defRPr>
-            </a:pPr>
-            <a:r>
-              <a:t>Pricing</a:t>
-            </a:r>
-          </a:p>
-        </p:txBody>
-      </p:sp>
-      <p:sp>
-        <p:nvSpPr>
-          <p:cNvPr id="7" name="TextBox 6"/>
-          <p:cNvSpPr txBox="1"/>
-          <p:nvPr/>
-        </p:nvSpPr>
-        <p:spPr>
-          <a:xfrm>
-            <a:off x="1554480" y="2468880"/>
-            <a:ext cx="3657600" cy="1645920"/>
+            <a:off x="548640" y="1691640"/>
+            <a:ext cx="5029200" cy="2103120"/>
           </a:xfrm>
           <a:prstGeom prst="rect">
             <a:avLst/>
@@ -8168,9 +8132,9 @@
           <a:p>
             <a:pPr algn="l">
               <a:spcAft>
-                <a:spcPts val="1000"/>
+                <a:spcPts val="700"/>
               </a:spcAft>
-              <a:defRPr sz="1600" b="0">
+              <a:defRPr sz="1400" b="0">
                 <a:solidFill>
                   <a:srgbClr val="333333"/>
                 </a:solidFill>
@@ -8184,63 +8148,79 @@
           <a:p>
             <a:pPr>
               <a:spcAft>
-                <a:spcPts val="1000"/>
+                <a:spcPts val="700"/>
               </a:spcAft>
-              <a:defRPr sz="1600">
-                <a:solidFill>
-                  <a:srgbClr val="333333"/>
-                </a:solidFill>
-                <a:latin typeface="Calibri"/>
-              </a:defRPr>
-            </a:pPr>
-            <a:r>
-              <a:t>• Monthly subscription: $2,500/month</a:t>
+              <a:defRPr sz="1400">
+                <a:solidFill>
+                  <a:srgbClr val="333333"/>
+                </a:solidFill>
+                <a:latin typeface="Calibri"/>
+              </a:defRPr>
+            </a:pPr>
+            <a:r>
+              <a:t>• Subscription: $2,500/month ($30,000/year)</a:t>
             </a:r>
           </a:p>
           <a:p>
             <a:pPr>
               <a:spcAft>
-                <a:spcPts val="1000"/>
+                <a:spcPts val="700"/>
               </a:spcAft>
-              <a:defRPr sz="1600">
-                <a:solidFill>
-                  <a:srgbClr val="333333"/>
-                </a:solidFill>
-                <a:latin typeface="Calibri"/>
-              </a:defRPr>
-            </a:pPr>
-            <a:r>
-              <a:t>• Annual total: $30,000/year</a:t>
+              <a:defRPr sz="1400">
+                <a:solidFill>
+                  <a:srgbClr val="333333"/>
+                </a:solidFill>
+                <a:latin typeface="Calibri"/>
+              </a:defRPr>
+            </a:pPr>
+            <a:r>
+              <a:t>• 3-year minimum commitment</a:t>
             </a:r>
           </a:p>
           <a:p>
             <a:pPr>
               <a:spcAft>
-                <a:spcPts val="1000"/>
+                <a:spcPts val="700"/>
               </a:spcAft>
-              <a:defRPr sz="1600">
-                <a:solidFill>
-                  <a:srgbClr val="333333"/>
-                </a:solidFill>
-                <a:latin typeface="Calibri"/>
-              </a:defRPr>
-            </a:pPr>
-            <a:r>
-              <a:t>• Minimum commitment: 3-year term</a:t>
-            </a:r>
-          </a:p>
-        </p:txBody>
-      </p:sp>
-      <p:sp>
-        <p:nvSpPr>
-          <p:cNvPr id="8" name="Rectangle 7"/>
+              <a:defRPr sz="1400">
+                <a:solidFill>
+                  <a:srgbClr val="333333"/>
+                </a:solidFill>
+                <a:latin typeface="Calibri"/>
+              </a:defRPr>
+            </a:pPr>
+            <a:r>
+              <a:t>• IoTeye retains all source code ownership</a:t>
+            </a:r>
+          </a:p>
+          <a:p>
+            <a:pPr>
+              <a:spcAft>
+                <a:spcPts val="700"/>
+              </a:spcAft>
+              <a:defRPr sz="1400">
+                <a:solidFill>
+                  <a:srgbClr val="333333"/>
+                </a:solidFill>
+                <a:latin typeface="Calibri"/>
+              </a:defRPr>
+            </a:pPr>
+            <a:r>
+              <a:t>• Hosting, maintenance, updates all included</a:t>
+            </a:r>
+          </a:p>
+        </p:txBody>
+      </p:sp>
+      <p:sp>
+        <p:nvSpPr>
+          <p:cNvPr id="7" name="Rectangle 6"/>
           <p:cNvSpPr/>
           <p:nvPr/>
         </p:nvSpPr>
         <p:spPr>
           <a:xfrm>
-            <a:off x="6400800" y="1828800"/>
-            <a:ext cx="4572000" cy="2286000"/>
+            <a:off x="6400800" y="1188720"/>
+            <a:ext cx="5394960" cy="2743200"/>
           </a:xfrm>
           <a:prstGeom prst="rect">
             <a:avLst/>
@@ -8276,50 +8256,50 @@
       </p:sp>
       <p:sp>
         <p:nvSpPr>
+          <p:cNvPr id="8" name="TextBox 7"/>
+          <p:cNvSpPr txBox="1"/>
+          <p:nvPr/>
+        </p:nvSpPr>
+        <p:spPr>
+          <a:xfrm>
+            <a:off x="6583680" y="1234440"/>
+            <a:ext cx="5029200" cy="411480"/>
+          </a:xfrm>
+          <a:prstGeom prst="rect">
+            <a:avLst/>
+          </a:prstGeom>
+          <a:noFill/>
+        </p:spPr>
+        <p:txBody>
+          <a:bodyPr wrap="square">
+            <a:spAutoFit/>
+          </a:bodyPr>
+          <a:lstStyle/>
+          <a:p>
+            <a:pPr algn="l">
+              <a:defRPr sz="2000" b="1">
+                <a:solidFill>
+                  <a:srgbClr val="1B2A4A"/>
+                </a:solidFill>
+                <a:latin typeface="Calibri"/>
+              </a:defRPr>
+            </a:pPr>
+            <a:r>
+              <a:t>Option C: Shared Ownership (Hybrid)</a:t>
+            </a:r>
+          </a:p>
+        </p:txBody>
+      </p:sp>
+      <p:sp>
+        <p:nvSpPr>
           <p:cNvPr id="9" name="TextBox 8"/>
           <p:cNvSpPr txBox="1"/>
           <p:nvPr/>
         </p:nvSpPr>
         <p:spPr>
           <a:xfrm>
-            <a:off x="6583680" y="1920240"/>
-            <a:ext cx="4114800" cy="457200"/>
-          </a:xfrm>
-          <a:prstGeom prst="rect">
-            <a:avLst/>
-          </a:prstGeom>
-          <a:noFill/>
-        </p:spPr>
-        <p:txBody>
-          <a:bodyPr wrap="square">
-            <a:spAutoFit/>
-          </a:bodyPr>
-          <a:lstStyle/>
-          <a:p>
-            <a:pPr algn="l">
-              <a:defRPr sz="2200" b="1">
-                <a:solidFill>
-                  <a:srgbClr val="1B2A4A"/>
-                </a:solidFill>
-                <a:latin typeface="Calibri"/>
-              </a:defRPr>
-            </a:pPr>
-            <a:r>
-              <a:t>What's Included</a:t>
-            </a:r>
-          </a:p>
-        </p:txBody>
-      </p:sp>
-      <p:sp>
-        <p:nvSpPr>
-          <p:cNvPr id="10" name="TextBox 9"/>
-          <p:cNvSpPr txBox="1"/>
-          <p:nvPr/>
-        </p:nvSpPr>
-        <p:spPr>
-          <a:xfrm>
-            <a:off x="6583680" y="2468880"/>
-            <a:ext cx="4114800" cy="1645920"/>
+            <a:off x="6583680" y="1691640"/>
+            <a:ext cx="5029200" cy="2103120"/>
           </a:xfrm>
           <a:prstGeom prst="rect">
             <a:avLst/>
@@ -8334,95 +8314,95 @@
           <a:p>
             <a:pPr algn="l">
               <a:spcAft>
-                <a:spcPts val="800"/>
+                <a:spcPts val="700"/>
               </a:spcAft>
-              <a:defRPr sz="1500" b="0">
-                <a:solidFill>
-                  <a:srgbClr val="333333"/>
-                </a:solidFill>
-                <a:latin typeface="Calibri"/>
-              </a:defRPr>
-            </a:pPr>
-            <a:r>
-              <a:t>• All 3 phases (same 36-week timeline)</a:t>
+              <a:defRPr sz="1400" b="0">
+                <a:solidFill>
+                  <a:srgbClr val="333333"/>
+                </a:solidFill>
+                <a:latin typeface="Calibri"/>
+              </a:defRPr>
+            </a:pPr>
+            <a:r>
+              <a:t>• Implementation fee: $55,000 (50% of full build)</a:t>
             </a:r>
           </a:p>
           <a:p>
             <a:pPr>
               <a:spcAft>
-                <a:spcPts val="800"/>
+                <a:spcPts val="700"/>
               </a:spcAft>
-              <a:defRPr sz="1500">
-                <a:solidFill>
-                  <a:srgbClr val="333333"/>
-                </a:solidFill>
-                <a:latin typeface="Calibri"/>
-              </a:defRPr>
-            </a:pPr>
-            <a:r>
-              <a:t>• Hosting, maintenance, security updates</a:t>
+              <a:defRPr sz="1400">
+                <a:solidFill>
+                  <a:srgbClr val="333333"/>
+                </a:solidFill>
+                <a:latin typeface="Calibri"/>
+              </a:defRPr>
+            </a:pPr>
+            <a:r>
+              <a:t>• Annual platform fee: $30,000/year (managed service)</a:t>
             </a:r>
           </a:p>
           <a:p>
             <a:pPr>
               <a:spcAft>
-                <a:spcPts val="800"/>
+                <a:spcPts val="700"/>
               </a:spcAft>
-              <a:defRPr sz="1500">
-                <a:solidFill>
-                  <a:srgbClr val="333333"/>
-                </a:solidFill>
-                <a:latin typeface="Calibri"/>
-              </a:defRPr>
-            </a:pPr>
-            <a:r>
-              <a:t>• Ongoing support &amp; platform updates</a:t>
+              <a:defRPr sz="1400">
+                <a:solidFill>
+                  <a:srgbClr val="333333"/>
+                </a:solidFill>
+                <a:latin typeface="Calibri"/>
+              </a:defRPr>
+            </a:pPr>
+            <a:r>
+              <a:t>• Arc Mercer owns recognition platform code</a:t>
             </a:r>
           </a:p>
           <a:p>
             <a:pPr>
               <a:spcAft>
-                <a:spcPts val="800"/>
+                <a:spcPts val="700"/>
               </a:spcAft>
-              <a:defRPr sz="1500">
-                <a:solidFill>
-                  <a:srgbClr val="333333"/>
-                </a:solidFill>
-                <a:latin typeface="Calibri"/>
-              </a:defRPr>
-            </a:pPr>
-            <a:r>
-              <a:t>• No per-user fees</a:t>
+              <a:defRPr sz="1400">
+                <a:solidFill>
+                  <a:srgbClr val="333333"/>
+                </a:solidFill>
+                <a:latin typeface="Calibri"/>
+              </a:defRPr>
+            </a:pPr>
+            <a:r>
+              <a:t>• Excludes: BrainBook, SpringBoard, Guardian, BrainClaw</a:t>
             </a:r>
           </a:p>
           <a:p>
             <a:pPr>
               <a:spcAft>
-                <a:spcPts val="800"/>
+                <a:spcPts val="700"/>
               </a:spcAft>
-              <a:defRPr sz="1500">
-                <a:solidFill>
-                  <a:srgbClr val="333333"/>
-                </a:solidFill>
-                <a:latin typeface="Calibri"/>
-              </a:defRPr>
-            </a:pPr>
-            <a:r>
-              <a:t>• All add-ons: $0 (AI LLM usage only)</a:t>
-            </a:r>
-          </a:p>
-        </p:txBody>
-      </p:sp>
-      <p:sp>
-        <p:nvSpPr>
-          <p:cNvPr id="11" name="Rectangle 10"/>
+              <a:defRPr sz="1400">
+                <a:solidFill>
+                  <a:srgbClr val="333333"/>
+                </a:solidFill>
+                <a:latin typeface="Calibri"/>
+              </a:defRPr>
+            </a:pPr>
+            <a:r>
+              <a:t>• Reuse rights deferred to legal agreement</a:t>
+            </a:r>
+          </a:p>
+        </p:txBody>
+      </p:sp>
+      <p:sp>
+        <p:nvSpPr>
+          <p:cNvPr id="10" name="Rectangle 9"/>
           <p:cNvSpPr/>
           <p:nvPr/>
         </p:nvSpPr>
         <p:spPr>
           <a:xfrm>
-            <a:off x="6400800" y="4160520"/>
-            <a:ext cx="4572000" cy="457200"/>
+            <a:off x="365760" y="4023360"/>
+            <a:ext cx="11430000" cy="411480"/>
           </a:xfrm>
           <a:prstGeom prst="rect">
             <a:avLst/>
@@ -8458,50 +8438,50 @@
       </p:sp>
       <p:sp>
         <p:nvSpPr>
+          <p:cNvPr id="11" name="TextBox 10"/>
+          <p:cNvSpPr txBox="1"/>
+          <p:nvPr/>
+        </p:nvSpPr>
+        <p:spPr>
+          <a:xfrm>
+            <a:off x="548640" y="4050791"/>
+            <a:ext cx="10972800" cy="365760"/>
+          </a:xfrm>
+          <a:prstGeom prst="rect">
+            <a:avLst/>
+          </a:prstGeom>
+          <a:noFill/>
+        </p:spPr>
+        <p:txBody>
+          <a:bodyPr wrap="square">
+            <a:spAutoFit/>
+          </a:bodyPr>
+          <a:lstStyle/>
+          <a:p>
+            <a:pPr algn="ctr">
+              <a:defRPr sz="1300" b="1">
+                <a:solidFill>
+                  <a:srgbClr val="FFFFFF"/>
+                </a:solidFill>
+                <a:latin typeface="Calibri"/>
+              </a:defRPr>
+            </a:pPr>
+            <a:r>
+              <a:t>★  All add-ons INCLUDED at $0 — only AI LLM usage fee applies (billed at cost, pass-through)  ★</a:t>
+            </a:r>
+          </a:p>
+        </p:txBody>
+      </p:sp>
+      <p:sp>
+        <p:nvSpPr>
           <p:cNvPr id="12" name="TextBox 11"/>
           <p:cNvSpPr txBox="1"/>
           <p:nvPr/>
         </p:nvSpPr>
         <p:spPr>
           <a:xfrm>
-            <a:off x="6537960" y="4206240"/>
-            <a:ext cx="4297680" cy="365760"/>
-          </a:xfrm>
-          <a:prstGeom prst="rect">
-            <a:avLst/>
-          </a:prstGeom>
-          <a:noFill/>
-        </p:spPr>
-        <p:txBody>
-          <a:bodyPr wrap="square">
-            <a:spAutoFit/>
-          </a:bodyPr>
-          <a:lstStyle/>
-          <a:p>
-            <a:pPr algn="ctr">
-              <a:defRPr sz="1400" b="1">
-                <a:solidFill>
-                  <a:srgbClr val="FFFFFF"/>
-                </a:solidFill>
-                <a:latin typeface="Calibri"/>
-              </a:defRPr>
-            </a:pPr>
-            <a:r>
-              <a:t>★ AI Agents, Reports, Training — all at $0</a:t>
-            </a:r>
-          </a:p>
-        </p:txBody>
-      </p:sp>
-      <p:sp>
-        <p:nvSpPr>
-          <p:cNvPr id="13" name="TextBox 12"/>
-          <p:cNvSpPr txBox="1"/>
-          <p:nvPr/>
-        </p:nvSpPr>
-        <p:spPr>
-          <a:xfrm>
-            <a:off x="731520" y="4389120"/>
-            <a:ext cx="10058400" cy="457200"/>
+            <a:off x="365760" y="4572000"/>
+            <a:ext cx="10972800" cy="365760"/>
           </a:xfrm>
           <a:prstGeom prst="rect">
             <a:avLst/>
@@ -8515,7 +8495,7 @@
           <a:lstStyle/>
           <a:p>
             <a:pPr algn="l">
-              <a:defRPr sz="2000" b="1">
+              <a:defRPr sz="1800" b="1">
                 <a:solidFill>
                   <a:srgbClr val="1B2A4A"/>
                 </a:solidFill>
@@ -8523,21 +8503,21 @@
               </a:defRPr>
             </a:pPr>
             <a:r>
-              <a:t>Option A vs. Option B — Cost Comparison</a:t>
-            </a:r>
-          </a:p>
-        </p:txBody>
-      </p:sp>
-      <p:sp>
-        <p:nvSpPr>
-          <p:cNvPr id="14" name="Rectangle 13"/>
+              <a:t>Option A vs. B vs. C — Cost Comparison</a:t>
+            </a:r>
+          </a:p>
+        </p:txBody>
+      </p:sp>
+      <p:sp>
+        <p:nvSpPr>
+          <p:cNvPr id="13" name="Rectangle 12"/>
           <p:cNvSpPr/>
           <p:nvPr/>
         </p:nvSpPr>
         <p:spPr>
           <a:xfrm>
-            <a:off x="1645920" y="4846320"/>
-            <a:ext cx="2286000" cy="365760"/>
+            <a:off x="1097280" y="4937760"/>
+            <a:ext cx="2011680" cy="320040"/>
           </a:xfrm>
           <a:prstGeom prst="rect">
             <a:avLst/>
@@ -8573,14 +8553,14 @@
       </p:sp>
       <p:sp>
         <p:nvSpPr>
-          <p:cNvPr id="15" name="TextBox 14"/>
-          <p:cNvSpPr txBox="1"/>
-          <p:nvPr/>
-        </p:nvSpPr>
-        <p:spPr>
-          <a:xfrm>
-            <a:off x="1737360" y="4864608"/>
-            <a:ext cx="2103120" cy="320040"/>
+          <p:cNvPr id="14" name="TextBox 13"/>
+          <p:cNvSpPr txBox="1"/>
+          <p:nvPr/>
+        </p:nvSpPr>
+        <p:spPr>
+          <a:xfrm>
+            <a:off x="1170432" y="4946904"/>
+            <a:ext cx="1865376" cy="292608"/>
           </a:xfrm>
           <a:prstGeom prst="rect">
             <a:avLst/>
@@ -8594,7 +8574,7 @@
           <a:lstStyle/>
           <a:p>
             <a:pPr algn="l">
-              <a:defRPr sz="1300" b="1">
+              <a:defRPr sz="1200" b="1">
                 <a:solidFill>
                   <a:srgbClr val="FFFFFF"/>
                 </a:solidFill>
@@ -8606,14 +8586,14 @@
       </p:sp>
       <p:sp>
         <p:nvSpPr>
-          <p:cNvPr id="16" name="Rectangle 15"/>
+          <p:cNvPr id="15" name="Rectangle 14"/>
           <p:cNvSpPr/>
           <p:nvPr/>
         </p:nvSpPr>
         <p:spPr>
           <a:xfrm>
-            <a:off x="3931920" y="4846320"/>
-            <a:ext cx="3200400" cy="365760"/>
+            <a:off x="3108960" y="4937760"/>
+            <a:ext cx="2377440" cy="320040"/>
           </a:xfrm>
           <a:prstGeom prst="rect">
             <a:avLst/>
@@ -8649,14 +8629,14 @@
       </p:sp>
       <p:sp>
         <p:nvSpPr>
-          <p:cNvPr id="17" name="TextBox 16"/>
-          <p:cNvSpPr txBox="1"/>
-          <p:nvPr/>
-        </p:nvSpPr>
-        <p:spPr>
-          <a:xfrm>
-            <a:off x="4023360" y="4864608"/>
-            <a:ext cx="3017520" cy="320040"/>
+          <p:cNvPr id="16" name="TextBox 15"/>
+          <p:cNvSpPr txBox="1"/>
+          <p:nvPr/>
+        </p:nvSpPr>
+        <p:spPr>
+          <a:xfrm>
+            <a:off x="3182112" y="4946904"/>
+            <a:ext cx="2231136" cy="292608"/>
           </a:xfrm>
           <a:prstGeom prst="rect">
             <a:avLst/>
@@ -8670,7 +8650,7 @@
           <a:lstStyle/>
           <a:p>
             <a:pPr algn="l">
-              <a:defRPr sz="1300" b="1">
+              <a:defRPr sz="1200" b="1">
                 <a:solidFill>
                   <a:srgbClr val="FFFFFF"/>
                 </a:solidFill>
@@ -8678,21 +8658,21 @@
               </a:defRPr>
             </a:pPr>
             <a:r>
-              <a:t>Option A (Own Code)</a:t>
-            </a:r>
-          </a:p>
-        </p:txBody>
-      </p:sp>
-      <p:sp>
-        <p:nvSpPr>
-          <p:cNvPr id="18" name="Rectangle 17"/>
+              <a:t>A: Own Code</a:t>
+            </a:r>
+          </a:p>
+        </p:txBody>
+      </p:sp>
+      <p:sp>
+        <p:nvSpPr>
+          <p:cNvPr id="17" name="Rectangle 16"/>
           <p:cNvSpPr/>
           <p:nvPr/>
         </p:nvSpPr>
         <p:spPr>
           <a:xfrm>
-            <a:off x="7132320" y="4846320"/>
-            <a:ext cx="3200400" cy="365760"/>
+            <a:off x="5486400" y="4937760"/>
+            <a:ext cx="2377440" cy="320040"/>
           </a:xfrm>
           <a:prstGeom prst="rect">
             <a:avLst/>
@@ -8728,14 +8708,14 @@
       </p:sp>
       <p:sp>
         <p:nvSpPr>
-          <p:cNvPr id="19" name="TextBox 18"/>
-          <p:cNvSpPr txBox="1"/>
-          <p:nvPr/>
-        </p:nvSpPr>
-        <p:spPr>
-          <a:xfrm>
-            <a:off x="7223760" y="4864608"/>
-            <a:ext cx="3017520" cy="320040"/>
+          <p:cNvPr id="18" name="TextBox 17"/>
+          <p:cNvSpPr txBox="1"/>
+          <p:nvPr/>
+        </p:nvSpPr>
+        <p:spPr>
+          <a:xfrm>
+            <a:off x="5559552" y="4946904"/>
+            <a:ext cx="2231136" cy="292608"/>
           </a:xfrm>
           <a:prstGeom prst="rect">
             <a:avLst/>
@@ -8749,7 +8729,7 @@
           <a:lstStyle/>
           <a:p>
             <a:pPr algn="l">
-              <a:defRPr sz="1300" b="1">
+              <a:defRPr sz="1200" b="1">
                 <a:solidFill>
                   <a:srgbClr val="FFFFFF"/>
                 </a:solidFill>
@@ -8757,21 +8737,100 @@
               </a:defRPr>
             </a:pPr>
             <a:r>
-              <a:t>Option B (SaaS)</a:t>
-            </a:r>
-          </a:p>
-        </p:txBody>
-      </p:sp>
-      <p:sp>
-        <p:nvSpPr>
-          <p:cNvPr id="20" name="Rectangle 19"/>
+              <a:t>B: SaaS</a:t>
+            </a:r>
+          </a:p>
+        </p:txBody>
+      </p:sp>
+      <p:sp>
+        <p:nvSpPr>
+          <p:cNvPr id="19" name="Rectangle 18"/>
           <p:cNvSpPr/>
           <p:nvPr/>
         </p:nvSpPr>
         <p:spPr>
           <a:xfrm>
-            <a:off x="1645920" y="5212080"/>
-            <a:ext cx="2286000" cy="320040"/>
+            <a:off x="7863840" y="4937760"/>
+            <a:ext cx="2377440" cy="320040"/>
+          </a:xfrm>
+          <a:prstGeom prst="rect">
+            <a:avLst/>
+          </a:prstGeom>
+          <a:solidFill>
+            <a:srgbClr val="2E86C1"/>
+          </a:solidFill>
+          <a:ln>
+            <a:noFill/>
+          </a:ln>
+        </p:spPr>
+        <p:style>
+          <a:lnRef idx="1">
+            <a:schemeClr val="accent1"/>
+          </a:lnRef>
+          <a:fillRef idx="3">
+            <a:schemeClr val="accent1"/>
+          </a:fillRef>
+          <a:effectRef idx="2">
+            <a:schemeClr val="accent1"/>
+          </a:effectRef>
+          <a:fontRef idx="minor">
+            <a:schemeClr val="lt1"/>
+          </a:fontRef>
+        </p:style>
+        <p:txBody>
+          <a:bodyPr rtlCol="0" anchor="ctr"/>
+          <a:lstStyle/>
+          <a:p>
+            <a:pPr algn="ctr"/>
+          </a:p>
+        </p:txBody>
+      </p:sp>
+      <p:sp>
+        <p:nvSpPr>
+          <p:cNvPr id="20" name="TextBox 19"/>
+          <p:cNvSpPr txBox="1"/>
+          <p:nvPr/>
+        </p:nvSpPr>
+        <p:spPr>
+          <a:xfrm>
+            <a:off x="7936992" y="4946904"/>
+            <a:ext cx="2231136" cy="292608"/>
+          </a:xfrm>
+          <a:prstGeom prst="rect">
+            <a:avLst/>
+          </a:prstGeom>
+          <a:noFill/>
+        </p:spPr>
+        <p:txBody>
+          <a:bodyPr wrap="square">
+            <a:spAutoFit/>
+          </a:bodyPr>
+          <a:lstStyle/>
+          <a:p>
+            <a:pPr algn="l">
+              <a:defRPr sz="1200" b="1">
+                <a:solidFill>
+                  <a:srgbClr val="FFFFFF"/>
+                </a:solidFill>
+                <a:latin typeface="Calibri"/>
+              </a:defRPr>
+            </a:pPr>
+            <a:r>
+              <a:t>C: Shared</a:t>
+            </a:r>
+          </a:p>
+        </p:txBody>
+      </p:sp>
+      <p:sp>
+        <p:nvSpPr>
+          <p:cNvPr id="21" name="Rectangle 20"/>
+          <p:cNvSpPr/>
+          <p:nvPr/>
+        </p:nvSpPr>
+        <p:spPr>
+          <a:xfrm>
+            <a:off x="1097280" y="5257800"/>
+            <a:ext cx="2011680" cy="292608"/>
           </a:xfrm>
           <a:prstGeom prst="rect">
             <a:avLst/>
@@ -8807,14 +8866,14 @@
       </p:sp>
       <p:sp>
         <p:nvSpPr>
-          <p:cNvPr id="21" name="TextBox 20"/>
-          <p:cNvSpPr txBox="1"/>
-          <p:nvPr/>
-        </p:nvSpPr>
-        <p:spPr>
-          <a:xfrm>
-            <a:off x="1737360" y="5221224"/>
-            <a:ext cx="2103120" cy="274320"/>
+          <p:cNvPr id="22" name="TextBox 21"/>
+          <p:cNvSpPr txBox="1"/>
+          <p:nvPr/>
+        </p:nvSpPr>
+        <p:spPr>
+          <a:xfrm>
+            <a:off x="1170432" y="5266944"/>
+            <a:ext cx="1865376" cy="256032"/>
           </a:xfrm>
           <a:prstGeom prst="rect">
             <a:avLst/>
@@ -8828,7 +8887,7 @@
           <a:lstStyle/>
           <a:p>
             <a:pPr algn="l">
-              <a:defRPr sz="1200" b="1">
+              <a:defRPr sz="1100" b="1">
                 <a:solidFill>
                   <a:srgbClr val="333333"/>
                 </a:solidFill>
@@ -8843,14 +8902,14 @@
       </p:sp>
       <p:sp>
         <p:nvSpPr>
-          <p:cNvPr id="22" name="Rectangle 21"/>
+          <p:cNvPr id="23" name="Rectangle 22"/>
           <p:cNvSpPr/>
           <p:nvPr/>
         </p:nvSpPr>
         <p:spPr>
           <a:xfrm>
-            <a:off x="3931920" y="5212080"/>
-            <a:ext cx="3200400" cy="320040"/>
+            <a:off x="3108960" y="5257800"/>
+            <a:ext cx="2377440" cy="292608"/>
           </a:xfrm>
           <a:prstGeom prst="rect">
             <a:avLst/>
@@ -8886,14 +8945,14 @@
       </p:sp>
       <p:sp>
         <p:nvSpPr>
-          <p:cNvPr id="23" name="TextBox 22"/>
-          <p:cNvSpPr txBox="1"/>
-          <p:nvPr/>
-        </p:nvSpPr>
-        <p:spPr>
-          <a:xfrm>
-            <a:off x="4023360" y="5221224"/>
-            <a:ext cx="3017520" cy="274320"/>
+          <p:cNvPr id="24" name="TextBox 23"/>
+          <p:cNvSpPr txBox="1"/>
+          <p:nvPr/>
+        </p:nvSpPr>
+        <p:spPr>
+          <a:xfrm>
+            <a:off x="3182112" y="5266944"/>
+            <a:ext cx="2231136" cy="256032"/>
           </a:xfrm>
           <a:prstGeom prst="rect">
             <a:avLst/>
@@ -8907,7 +8966,7 @@
           <a:lstStyle/>
           <a:p>
             <a:pPr algn="l">
-              <a:defRPr sz="1200" b="0">
+              <a:defRPr sz="1100" b="0">
                 <a:solidFill>
                   <a:srgbClr val="333333"/>
                 </a:solidFill>
@@ -8922,14 +8981,14 @@
       </p:sp>
       <p:sp>
         <p:nvSpPr>
-          <p:cNvPr id="24" name="Rectangle 23"/>
+          <p:cNvPr id="25" name="Rectangle 24"/>
           <p:cNvSpPr/>
           <p:nvPr/>
         </p:nvSpPr>
         <p:spPr>
           <a:xfrm>
-            <a:off x="7132320" y="5212080"/>
-            <a:ext cx="3200400" cy="320040"/>
+            <a:off x="5486400" y="5257800"/>
+            <a:ext cx="2377440" cy="292608"/>
           </a:xfrm>
           <a:prstGeom prst="rect">
             <a:avLst/>
@@ -8965,14 +9024,14 @@
       </p:sp>
       <p:sp>
         <p:nvSpPr>
-          <p:cNvPr id="25" name="TextBox 24"/>
-          <p:cNvSpPr txBox="1"/>
-          <p:nvPr/>
-        </p:nvSpPr>
-        <p:spPr>
-          <a:xfrm>
-            <a:off x="7223760" y="5221224"/>
-            <a:ext cx="3017520" cy="274320"/>
+          <p:cNvPr id="26" name="TextBox 25"/>
+          <p:cNvSpPr txBox="1"/>
+          <p:nvPr/>
+        </p:nvSpPr>
+        <p:spPr>
+          <a:xfrm>
+            <a:off x="5559552" y="5266944"/>
+            <a:ext cx="2231136" cy="256032"/>
           </a:xfrm>
           <a:prstGeom prst="rect">
             <a:avLst/>
@@ -8986,7 +9045,7 @@
           <a:lstStyle/>
           <a:p>
             <a:pPr algn="l">
-              <a:defRPr sz="1200" b="0">
+              <a:defRPr sz="1100" b="0">
                 <a:solidFill>
                   <a:srgbClr val="333333"/>
                 </a:solidFill>
@@ -9001,14 +9060,93 @@
       </p:sp>
       <p:sp>
         <p:nvSpPr>
-          <p:cNvPr id="26" name="Rectangle 25"/>
+          <p:cNvPr id="27" name="Rectangle 26"/>
           <p:cNvSpPr/>
           <p:nvPr/>
         </p:nvSpPr>
         <p:spPr>
           <a:xfrm>
-            <a:off x="1645920" y="5532120"/>
-            <a:ext cx="2286000" cy="320040"/>
+            <a:off x="7863840" y="5257800"/>
+            <a:ext cx="2377440" cy="292608"/>
+          </a:xfrm>
+          <a:prstGeom prst="rect">
+            <a:avLst/>
+          </a:prstGeom>
+          <a:solidFill>
+            <a:srgbClr val="F2F2F2"/>
+          </a:solidFill>
+          <a:ln>
+            <a:noFill/>
+          </a:ln>
+        </p:spPr>
+        <p:style>
+          <a:lnRef idx="1">
+            <a:schemeClr val="accent1"/>
+          </a:lnRef>
+          <a:fillRef idx="3">
+            <a:schemeClr val="accent1"/>
+          </a:fillRef>
+          <a:effectRef idx="2">
+            <a:schemeClr val="accent1"/>
+          </a:effectRef>
+          <a:fontRef idx="minor">
+            <a:schemeClr val="lt1"/>
+          </a:fontRef>
+        </p:style>
+        <p:txBody>
+          <a:bodyPr rtlCol="0" anchor="ctr"/>
+          <a:lstStyle/>
+          <a:p>
+            <a:pPr algn="ctr"/>
+          </a:p>
+        </p:txBody>
+      </p:sp>
+      <p:sp>
+        <p:nvSpPr>
+          <p:cNvPr id="28" name="TextBox 27"/>
+          <p:cNvSpPr txBox="1"/>
+          <p:nvPr/>
+        </p:nvSpPr>
+        <p:spPr>
+          <a:xfrm>
+            <a:off x="7936992" y="5266944"/>
+            <a:ext cx="2231136" cy="256032"/>
+          </a:xfrm>
+          <a:prstGeom prst="rect">
+            <a:avLst/>
+          </a:prstGeom>
+          <a:noFill/>
+        </p:spPr>
+        <p:txBody>
+          <a:bodyPr wrap="square">
+            <a:spAutoFit/>
+          </a:bodyPr>
+          <a:lstStyle/>
+          <a:p>
+            <a:pPr algn="l">
+              <a:defRPr sz="1100" b="0">
+                <a:solidFill>
+                  <a:srgbClr val="333333"/>
+                </a:solidFill>
+                <a:latin typeface="Calibri"/>
+              </a:defRPr>
+            </a:pPr>
+            <a:r>
+              <a:t>$55,000</a:t>
+            </a:r>
+          </a:p>
+        </p:txBody>
+      </p:sp>
+      <p:sp>
+        <p:nvSpPr>
+          <p:cNvPr id="29" name="Rectangle 28"/>
+          <p:cNvSpPr/>
+          <p:nvPr/>
+        </p:nvSpPr>
+        <p:spPr>
+          <a:xfrm>
+            <a:off x="1097280" y="5550408"/>
+            <a:ext cx="2011680" cy="292608"/>
           </a:xfrm>
           <a:prstGeom prst="rect">
             <a:avLst/>
@@ -9044,14 +9182,14 @@
       </p:sp>
       <p:sp>
         <p:nvSpPr>
-          <p:cNvPr id="27" name="TextBox 26"/>
-          <p:cNvSpPr txBox="1"/>
-          <p:nvPr/>
-        </p:nvSpPr>
-        <p:spPr>
-          <a:xfrm>
-            <a:off x="1737360" y="5541264"/>
-            <a:ext cx="2103120" cy="274320"/>
+          <p:cNvPr id="30" name="TextBox 29"/>
+          <p:cNvSpPr txBox="1"/>
+          <p:nvPr/>
+        </p:nvSpPr>
+        <p:spPr>
+          <a:xfrm>
+            <a:off x="1170432" y="5559552"/>
+            <a:ext cx="1865376" cy="256032"/>
           </a:xfrm>
           <a:prstGeom prst="rect">
             <a:avLst/>
@@ -9065,7 +9203,7 @@
           <a:lstStyle/>
           <a:p>
             <a:pPr algn="l">
-              <a:defRPr sz="1200" b="1">
+              <a:defRPr sz="1100" b="1">
                 <a:solidFill>
                   <a:srgbClr val="333333"/>
                 </a:solidFill>
@@ -9080,14 +9218,14 @@
       </p:sp>
       <p:sp>
         <p:nvSpPr>
-          <p:cNvPr id="28" name="Rectangle 27"/>
+          <p:cNvPr id="31" name="Rectangle 30"/>
           <p:cNvSpPr/>
           <p:nvPr/>
         </p:nvSpPr>
         <p:spPr>
           <a:xfrm>
-            <a:off x="3931920" y="5532120"/>
-            <a:ext cx="3200400" cy="320040"/>
+            <a:off x="3108960" y="5550408"/>
+            <a:ext cx="2377440" cy="292608"/>
           </a:xfrm>
           <a:prstGeom prst="rect">
             <a:avLst/>
@@ -9123,14 +9261,14 @@
       </p:sp>
       <p:sp>
         <p:nvSpPr>
-          <p:cNvPr id="29" name="TextBox 28"/>
-          <p:cNvSpPr txBox="1"/>
-          <p:nvPr/>
-        </p:nvSpPr>
-        <p:spPr>
-          <a:xfrm>
-            <a:off x="4023360" y="5541264"/>
-            <a:ext cx="3017520" cy="274320"/>
+          <p:cNvPr id="32" name="TextBox 31"/>
+          <p:cNvSpPr txBox="1"/>
+          <p:nvPr/>
+        </p:nvSpPr>
+        <p:spPr>
+          <a:xfrm>
+            <a:off x="3182112" y="5559552"/>
+            <a:ext cx="2231136" cy="256032"/>
           </a:xfrm>
           <a:prstGeom prst="rect">
             <a:avLst/>
@@ -9144,29 +9282,29 @@
           <a:lstStyle/>
           <a:p>
             <a:pPr algn="l">
-              <a:defRPr sz="1200" b="0">
-                <a:solidFill>
-                  <a:srgbClr val="333333"/>
-                </a:solidFill>
-                <a:latin typeface="Calibri"/>
-              </a:defRPr>
-            </a:pPr>
-            <a:r>
-              <a:t>$21,200/year</a:t>
-            </a:r>
-          </a:p>
-        </p:txBody>
-      </p:sp>
-      <p:sp>
-        <p:nvSpPr>
-          <p:cNvPr id="30" name="Rectangle 29"/>
+              <a:defRPr sz="1100" b="0">
+                <a:solidFill>
+                  <a:srgbClr val="333333"/>
+                </a:solidFill>
+                <a:latin typeface="Calibri"/>
+              </a:defRPr>
+            </a:pPr>
+            <a:r>
+              <a:t>$21,200/yr</a:t>
+            </a:r>
+          </a:p>
+        </p:txBody>
+      </p:sp>
+      <p:sp>
+        <p:nvSpPr>
+          <p:cNvPr id="33" name="Rectangle 32"/>
           <p:cNvSpPr/>
           <p:nvPr/>
         </p:nvSpPr>
         <p:spPr>
           <a:xfrm>
-            <a:off x="7132320" y="5532120"/>
-            <a:ext cx="3200400" cy="320040"/>
+            <a:off x="5486400" y="5550408"/>
+            <a:ext cx="2377440" cy="292608"/>
           </a:xfrm>
           <a:prstGeom prst="rect">
             <a:avLst/>
@@ -9202,14 +9340,14 @@
       </p:sp>
       <p:sp>
         <p:nvSpPr>
-          <p:cNvPr id="31" name="TextBox 30"/>
-          <p:cNvSpPr txBox="1"/>
-          <p:nvPr/>
-        </p:nvSpPr>
-        <p:spPr>
-          <a:xfrm>
-            <a:off x="7223760" y="5541264"/>
-            <a:ext cx="3017520" cy="274320"/>
+          <p:cNvPr id="34" name="TextBox 33"/>
+          <p:cNvSpPr txBox="1"/>
+          <p:nvPr/>
+        </p:nvSpPr>
+        <p:spPr>
+          <a:xfrm>
+            <a:off x="5559552" y="5559552"/>
+            <a:ext cx="2231136" cy="256032"/>
           </a:xfrm>
           <a:prstGeom prst="rect">
             <a:avLst/>
@@ -9223,29 +9361,108 @@
           <a:lstStyle/>
           <a:p>
             <a:pPr algn="l">
-              <a:defRPr sz="1200" b="0">
-                <a:solidFill>
-                  <a:srgbClr val="333333"/>
-                </a:solidFill>
-                <a:latin typeface="Calibri"/>
-              </a:defRPr>
-            </a:pPr>
-            <a:r>
-              <a:t>$30,000/year</a:t>
-            </a:r>
-          </a:p>
-        </p:txBody>
-      </p:sp>
-      <p:sp>
-        <p:nvSpPr>
-          <p:cNvPr id="32" name="Rectangle 31"/>
+              <a:defRPr sz="1100" b="0">
+                <a:solidFill>
+                  <a:srgbClr val="333333"/>
+                </a:solidFill>
+                <a:latin typeface="Calibri"/>
+              </a:defRPr>
+            </a:pPr>
+            <a:r>
+              <a:t>$30,000/yr</a:t>
+            </a:r>
+          </a:p>
+        </p:txBody>
+      </p:sp>
+      <p:sp>
+        <p:nvSpPr>
+          <p:cNvPr id="35" name="Rectangle 34"/>
           <p:cNvSpPr/>
           <p:nvPr/>
         </p:nvSpPr>
         <p:spPr>
           <a:xfrm>
-            <a:off x="1645920" y="5852160"/>
-            <a:ext cx="2286000" cy="320040"/>
+            <a:off x="7863840" y="5550408"/>
+            <a:ext cx="2377440" cy="292608"/>
+          </a:xfrm>
+          <a:prstGeom prst="rect">
+            <a:avLst/>
+          </a:prstGeom>
+          <a:solidFill>
+            <a:srgbClr val="FFFFFF"/>
+          </a:solidFill>
+          <a:ln>
+            <a:noFill/>
+          </a:ln>
+        </p:spPr>
+        <p:style>
+          <a:lnRef idx="1">
+            <a:schemeClr val="accent1"/>
+          </a:lnRef>
+          <a:fillRef idx="3">
+            <a:schemeClr val="accent1"/>
+          </a:fillRef>
+          <a:effectRef idx="2">
+            <a:schemeClr val="accent1"/>
+          </a:effectRef>
+          <a:fontRef idx="minor">
+            <a:schemeClr val="lt1"/>
+          </a:fontRef>
+        </p:style>
+        <p:txBody>
+          <a:bodyPr rtlCol="0" anchor="ctr"/>
+          <a:lstStyle/>
+          <a:p>
+            <a:pPr algn="ctr"/>
+          </a:p>
+        </p:txBody>
+      </p:sp>
+      <p:sp>
+        <p:nvSpPr>
+          <p:cNvPr id="36" name="TextBox 35"/>
+          <p:cNvSpPr txBox="1"/>
+          <p:nvPr/>
+        </p:nvSpPr>
+        <p:spPr>
+          <a:xfrm>
+            <a:off x="7936992" y="5559552"/>
+            <a:ext cx="2231136" cy="256032"/>
+          </a:xfrm>
+          <a:prstGeom prst="rect">
+            <a:avLst/>
+          </a:prstGeom>
+          <a:noFill/>
+        </p:spPr>
+        <p:txBody>
+          <a:bodyPr wrap="square">
+            <a:spAutoFit/>
+          </a:bodyPr>
+          <a:lstStyle/>
+          <a:p>
+            <a:pPr algn="l">
+              <a:defRPr sz="1100" b="0">
+                <a:solidFill>
+                  <a:srgbClr val="333333"/>
+                </a:solidFill>
+                <a:latin typeface="Calibri"/>
+              </a:defRPr>
+            </a:pPr>
+            <a:r>
+              <a:t>$30,000/yr</a:t>
+            </a:r>
+          </a:p>
+        </p:txBody>
+      </p:sp>
+      <p:sp>
+        <p:nvSpPr>
+          <p:cNvPr id="37" name="Rectangle 36"/>
+          <p:cNvSpPr/>
+          <p:nvPr/>
+        </p:nvSpPr>
+        <p:spPr>
+          <a:xfrm>
+            <a:off x="1097280" y="5843016"/>
+            <a:ext cx="2011680" cy="292608"/>
           </a:xfrm>
           <a:prstGeom prst="rect">
             <a:avLst/>
@@ -9281,14 +9498,14 @@
       </p:sp>
       <p:sp>
         <p:nvSpPr>
-          <p:cNvPr id="33" name="TextBox 32"/>
-          <p:cNvSpPr txBox="1"/>
-          <p:nvPr/>
-        </p:nvSpPr>
-        <p:spPr>
-          <a:xfrm>
-            <a:off x="1737360" y="5861304"/>
-            <a:ext cx="2103120" cy="274320"/>
+          <p:cNvPr id="38" name="TextBox 37"/>
+          <p:cNvSpPr txBox="1"/>
+          <p:nvPr/>
+        </p:nvSpPr>
+        <p:spPr>
+          <a:xfrm>
+            <a:off x="1170432" y="5852160"/>
+            <a:ext cx="1865376" cy="256032"/>
           </a:xfrm>
           <a:prstGeom prst="rect">
             <a:avLst/>
@@ -9302,7 +9519,7 @@
           <a:lstStyle/>
           <a:p>
             <a:pPr algn="l">
-              <a:defRPr sz="1200" b="1">
+              <a:defRPr sz="1100" b="1">
                 <a:solidFill>
                   <a:srgbClr val="333333"/>
                 </a:solidFill>
@@ -9317,14 +9534,14 @@
       </p:sp>
       <p:sp>
         <p:nvSpPr>
-          <p:cNvPr id="34" name="Rectangle 33"/>
+          <p:cNvPr id="39" name="Rectangle 38"/>
           <p:cNvSpPr/>
           <p:nvPr/>
         </p:nvSpPr>
         <p:spPr>
           <a:xfrm>
-            <a:off x="3931920" y="5852160"/>
-            <a:ext cx="3200400" cy="320040"/>
+            <a:off x="3108960" y="5843016"/>
+            <a:ext cx="2377440" cy="292608"/>
           </a:xfrm>
           <a:prstGeom prst="rect">
             <a:avLst/>
@@ -9360,14 +9577,14 @@
       </p:sp>
       <p:sp>
         <p:nvSpPr>
-          <p:cNvPr id="35" name="TextBox 34"/>
-          <p:cNvSpPr txBox="1"/>
-          <p:nvPr/>
-        </p:nvSpPr>
-        <p:spPr>
-          <a:xfrm>
-            <a:off x="4023360" y="5861304"/>
-            <a:ext cx="3017520" cy="274320"/>
+          <p:cNvPr id="40" name="TextBox 39"/>
+          <p:cNvSpPr txBox="1"/>
+          <p:nvPr/>
+        </p:nvSpPr>
+        <p:spPr>
+          <a:xfrm>
+            <a:off x="3182112" y="5852160"/>
+            <a:ext cx="2231136" cy="256032"/>
           </a:xfrm>
           <a:prstGeom prst="rect">
             <a:avLst/>
@@ -9381,7 +9598,7 @@
           <a:lstStyle/>
           <a:p>
             <a:pPr algn="l">
-              <a:defRPr sz="1200" b="0">
+              <a:defRPr sz="1100" b="0">
                 <a:solidFill>
                   <a:srgbClr val="333333"/>
                 </a:solidFill>
@@ -9396,14 +9613,14 @@
       </p:sp>
       <p:sp>
         <p:nvSpPr>
-          <p:cNvPr id="36" name="Rectangle 35"/>
+          <p:cNvPr id="41" name="Rectangle 40"/>
           <p:cNvSpPr/>
           <p:nvPr/>
         </p:nvSpPr>
         <p:spPr>
           <a:xfrm>
-            <a:off x="7132320" y="5852160"/>
-            <a:ext cx="3200400" cy="320040"/>
+            <a:off x="5486400" y="5843016"/>
+            <a:ext cx="2377440" cy="292608"/>
           </a:xfrm>
           <a:prstGeom prst="rect">
             <a:avLst/>
@@ -9439,14 +9656,14 @@
       </p:sp>
       <p:sp>
         <p:nvSpPr>
-          <p:cNvPr id="37" name="TextBox 36"/>
-          <p:cNvSpPr txBox="1"/>
-          <p:nvPr/>
-        </p:nvSpPr>
-        <p:spPr>
-          <a:xfrm>
-            <a:off x="7223760" y="5861304"/>
-            <a:ext cx="3017520" cy="274320"/>
+          <p:cNvPr id="42" name="TextBox 41"/>
+          <p:cNvSpPr txBox="1"/>
+          <p:nvPr/>
+        </p:nvSpPr>
+        <p:spPr>
+          <a:xfrm>
+            <a:off x="5559552" y="5852160"/>
+            <a:ext cx="2231136" cy="256032"/>
           </a:xfrm>
           <a:prstGeom prst="rect">
             <a:avLst/>
@@ -9460,7 +9677,7 @@
           <a:lstStyle/>
           <a:p>
             <a:pPr algn="l">
-              <a:defRPr sz="1200" b="0">
+              <a:defRPr sz="1100" b="0">
                 <a:solidFill>
                   <a:srgbClr val="333333"/>
                 </a:solidFill>
@@ -9475,14 +9692,93 @@
       </p:sp>
       <p:sp>
         <p:nvSpPr>
-          <p:cNvPr id="38" name="Rectangle 37"/>
+          <p:cNvPr id="43" name="Rectangle 42"/>
           <p:cNvSpPr/>
           <p:nvPr/>
         </p:nvSpPr>
         <p:spPr>
           <a:xfrm>
-            <a:off x="1645920" y="6172200"/>
-            <a:ext cx="2286000" cy="320040"/>
+            <a:off x="7863840" y="5843016"/>
+            <a:ext cx="2377440" cy="292608"/>
+          </a:xfrm>
+          <a:prstGeom prst="rect">
+            <a:avLst/>
+          </a:prstGeom>
+          <a:solidFill>
+            <a:srgbClr val="F2F2F2"/>
+          </a:solidFill>
+          <a:ln>
+            <a:noFill/>
+          </a:ln>
+        </p:spPr>
+        <p:style>
+          <a:lnRef idx="1">
+            <a:schemeClr val="accent1"/>
+          </a:lnRef>
+          <a:fillRef idx="3">
+            <a:schemeClr val="accent1"/>
+          </a:fillRef>
+          <a:effectRef idx="2">
+            <a:schemeClr val="accent1"/>
+          </a:effectRef>
+          <a:fontRef idx="minor">
+            <a:schemeClr val="lt1"/>
+          </a:fontRef>
+        </p:style>
+        <p:txBody>
+          <a:bodyPr rtlCol="0" anchor="ctr"/>
+          <a:lstStyle/>
+          <a:p>
+            <a:pPr algn="ctr"/>
+          </a:p>
+        </p:txBody>
+      </p:sp>
+      <p:sp>
+        <p:nvSpPr>
+          <p:cNvPr id="44" name="TextBox 43"/>
+          <p:cNvSpPr txBox="1"/>
+          <p:nvPr/>
+        </p:nvSpPr>
+        <p:spPr>
+          <a:xfrm>
+            <a:off x="7936992" y="5852160"/>
+            <a:ext cx="2231136" cy="256032"/>
+          </a:xfrm>
+          <a:prstGeom prst="rect">
+            <a:avLst/>
+          </a:prstGeom>
+          <a:noFill/>
+        </p:spPr>
+        <p:txBody>
+          <a:bodyPr wrap="square">
+            <a:spAutoFit/>
+          </a:bodyPr>
+          <a:lstStyle/>
+          <a:p>
+            <a:pPr algn="l">
+              <a:defRPr sz="1100" b="0">
+                <a:solidFill>
+                  <a:srgbClr val="333333"/>
+                </a:solidFill>
+                <a:latin typeface="Calibri"/>
+              </a:defRPr>
+            </a:pPr>
+            <a:r>
+              <a:t>$145,000</a:t>
+            </a:r>
+          </a:p>
+        </p:txBody>
+      </p:sp>
+      <p:sp>
+        <p:nvSpPr>
+          <p:cNvPr id="45" name="Rectangle 44"/>
+          <p:cNvSpPr/>
+          <p:nvPr/>
+        </p:nvSpPr>
+        <p:spPr>
+          <a:xfrm>
+            <a:off x="1097280" y="6135624"/>
+            <a:ext cx="2011680" cy="292608"/>
           </a:xfrm>
           <a:prstGeom prst="rect">
             <a:avLst/>
@@ -9518,14 +9814,14 @@
       </p:sp>
       <p:sp>
         <p:nvSpPr>
-          <p:cNvPr id="39" name="TextBox 38"/>
-          <p:cNvSpPr txBox="1"/>
-          <p:nvPr/>
-        </p:nvSpPr>
-        <p:spPr>
-          <a:xfrm>
-            <a:off x="1737360" y="6181344"/>
-            <a:ext cx="2103120" cy="274320"/>
+          <p:cNvPr id="46" name="TextBox 45"/>
+          <p:cNvSpPr txBox="1"/>
+          <p:nvPr/>
+        </p:nvSpPr>
+        <p:spPr>
+          <a:xfrm>
+            <a:off x="1170432" y="6144768"/>
+            <a:ext cx="1865376" cy="256032"/>
           </a:xfrm>
           <a:prstGeom prst="rect">
             <a:avLst/>
@@ -9539,7 +9835,7 @@
           <a:lstStyle/>
           <a:p>
             <a:pPr algn="l">
-              <a:defRPr sz="1200" b="1">
+              <a:defRPr sz="1100" b="1">
                 <a:solidFill>
                   <a:srgbClr val="333333"/>
                 </a:solidFill>
@@ -9554,14 +9850,14 @@
       </p:sp>
       <p:sp>
         <p:nvSpPr>
-          <p:cNvPr id="40" name="Rectangle 39"/>
+          <p:cNvPr id="47" name="Rectangle 46"/>
           <p:cNvSpPr/>
           <p:nvPr/>
         </p:nvSpPr>
         <p:spPr>
           <a:xfrm>
-            <a:off x="3931920" y="6172200"/>
-            <a:ext cx="3200400" cy="320040"/>
+            <a:off x="3108960" y="6135624"/>
+            <a:ext cx="2377440" cy="292608"/>
           </a:xfrm>
           <a:prstGeom prst="rect">
             <a:avLst/>
@@ -9597,14 +9893,14 @@
       </p:sp>
       <p:sp>
         <p:nvSpPr>
-          <p:cNvPr id="41" name="TextBox 40"/>
-          <p:cNvSpPr txBox="1"/>
-          <p:nvPr/>
-        </p:nvSpPr>
-        <p:spPr>
-          <a:xfrm>
-            <a:off x="4023360" y="6181344"/>
-            <a:ext cx="3017520" cy="274320"/>
+          <p:cNvPr id="48" name="TextBox 47"/>
+          <p:cNvSpPr txBox="1"/>
+          <p:nvPr/>
+        </p:nvSpPr>
+        <p:spPr>
+          <a:xfrm>
+            <a:off x="3182112" y="6144768"/>
+            <a:ext cx="2231136" cy="256032"/>
           </a:xfrm>
           <a:prstGeom prst="rect">
             <a:avLst/>
@@ -9618,7 +9914,7 @@
           <a:lstStyle/>
           <a:p>
             <a:pPr algn="l">
-              <a:defRPr sz="1200" b="0">
+              <a:defRPr sz="1100" b="0">
                 <a:solidFill>
                   <a:srgbClr val="333333"/>
                 </a:solidFill>
@@ -9633,14 +9929,14 @@
       </p:sp>
       <p:sp>
         <p:nvSpPr>
-          <p:cNvPr id="42" name="Rectangle 41"/>
+          <p:cNvPr id="49" name="Rectangle 48"/>
           <p:cNvSpPr/>
           <p:nvPr/>
         </p:nvSpPr>
         <p:spPr>
           <a:xfrm>
-            <a:off x="7132320" y="6172200"/>
-            <a:ext cx="3200400" cy="320040"/>
+            <a:off x="5486400" y="6135624"/>
+            <a:ext cx="2377440" cy="292608"/>
           </a:xfrm>
           <a:prstGeom prst="rect">
             <a:avLst/>
@@ -9676,14 +9972,14 @@
       </p:sp>
       <p:sp>
         <p:nvSpPr>
-          <p:cNvPr id="43" name="TextBox 42"/>
-          <p:cNvSpPr txBox="1"/>
-          <p:nvPr/>
-        </p:nvSpPr>
-        <p:spPr>
-          <a:xfrm>
-            <a:off x="7223760" y="6181344"/>
-            <a:ext cx="3017520" cy="274320"/>
+          <p:cNvPr id="50" name="TextBox 49"/>
+          <p:cNvSpPr txBox="1"/>
+          <p:nvPr/>
+        </p:nvSpPr>
+        <p:spPr>
+          <a:xfrm>
+            <a:off x="5559552" y="6144768"/>
+            <a:ext cx="2231136" cy="256032"/>
           </a:xfrm>
           <a:prstGeom prst="rect">
             <a:avLst/>
@@ -9697,7 +9993,7 @@
           <a:lstStyle/>
           <a:p>
             <a:pPr algn="l">
-              <a:defRPr sz="1200" b="0">
+              <a:defRPr sz="1100" b="0">
                 <a:solidFill>
                   <a:srgbClr val="333333"/>
                 </a:solidFill>
@@ -9712,14 +10008,93 @@
       </p:sp>
       <p:sp>
         <p:nvSpPr>
-          <p:cNvPr id="44" name="Rectangle 43"/>
+          <p:cNvPr id="51" name="Rectangle 50"/>
           <p:cNvSpPr/>
           <p:nvPr/>
         </p:nvSpPr>
         <p:spPr>
           <a:xfrm>
-            <a:off x="1645920" y="6492240"/>
-            <a:ext cx="2286000" cy="320040"/>
+            <a:off x="7863840" y="6135624"/>
+            <a:ext cx="2377440" cy="292608"/>
+          </a:xfrm>
+          <a:prstGeom prst="rect">
+            <a:avLst/>
+          </a:prstGeom>
+          <a:solidFill>
+            <a:srgbClr val="FFFFFF"/>
+          </a:solidFill>
+          <a:ln>
+            <a:noFill/>
+          </a:ln>
+        </p:spPr>
+        <p:style>
+          <a:lnRef idx="1">
+            <a:schemeClr val="accent1"/>
+          </a:lnRef>
+          <a:fillRef idx="3">
+            <a:schemeClr val="accent1"/>
+          </a:fillRef>
+          <a:effectRef idx="2">
+            <a:schemeClr val="accent1"/>
+          </a:effectRef>
+          <a:fontRef idx="minor">
+            <a:schemeClr val="lt1"/>
+          </a:fontRef>
+        </p:style>
+        <p:txBody>
+          <a:bodyPr rtlCol="0" anchor="ctr"/>
+          <a:lstStyle/>
+          <a:p>
+            <a:pPr algn="ctr"/>
+          </a:p>
+        </p:txBody>
+      </p:sp>
+      <p:sp>
+        <p:nvSpPr>
+          <p:cNvPr id="52" name="TextBox 51"/>
+          <p:cNvSpPr txBox="1"/>
+          <p:nvPr/>
+        </p:nvSpPr>
+        <p:spPr>
+          <a:xfrm>
+            <a:off x="7936992" y="6144768"/>
+            <a:ext cx="2231136" cy="256032"/>
+          </a:xfrm>
+          <a:prstGeom prst="rect">
+            <a:avLst/>
+          </a:prstGeom>
+          <a:noFill/>
+        </p:spPr>
+        <p:txBody>
+          <a:bodyPr wrap="square">
+            <a:spAutoFit/>
+          </a:bodyPr>
+          <a:lstStyle/>
+          <a:p>
+            <a:pPr algn="l">
+              <a:defRPr sz="1100" b="0">
+                <a:solidFill>
+                  <a:srgbClr val="333333"/>
+                </a:solidFill>
+                <a:latin typeface="Calibri"/>
+              </a:defRPr>
+            </a:pPr>
+            <a:r>
+              <a:t>$205,000</a:t>
+            </a:r>
+          </a:p>
+        </p:txBody>
+      </p:sp>
+      <p:sp>
+        <p:nvSpPr>
+          <p:cNvPr id="53" name="Rectangle 52"/>
+          <p:cNvSpPr/>
+          <p:nvPr/>
+        </p:nvSpPr>
+        <p:spPr>
+          <a:xfrm>
+            <a:off x="1097280" y="6428232"/>
+            <a:ext cx="2011680" cy="292608"/>
           </a:xfrm>
           <a:prstGeom prst="rect">
             <a:avLst/>
@@ -9755,14 +10130,14 @@
       </p:sp>
       <p:sp>
         <p:nvSpPr>
-          <p:cNvPr id="45" name="TextBox 44"/>
-          <p:cNvSpPr txBox="1"/>
-          <p:nvPr/>
-        </p:nvSpPr>
-        <p:spPr>
-          <a:xfrm>
-            <a:off x="1737360" y="6501384"/>
-            <a:ext cx="2103120" cy="274320"/>
+          <p:cNvPr id="54" name="TextBox 53"/>
+          <p:cNvSpPr txBox="1"/>
+          <p:nvPr/>
+        </p:nvSpPr>
+        <p:spPr>
+          <a:xfrm>
+            <a:off x="1170432" y="6437376"/>
+            <a:ext cx="1865376" cy="256032"/>
           </a:xfrm>
           <a:prstGeom prst="rect">
             <a:avLst/>
@@ -9776,7 +10151,7 @@
           <a:lstStyle/>
           <a:p>
             <a:pPr algn="l">
-              <a:defRPr sz="1200" b="1">
+              <a:defRPr sz="1100" b="1">
                 <a:solidFill>
                   <a:srgbClr val="333333"/>
                 </a:solidFill>
@@ -9791,14 +10166,14 @@
       </p:sp>
       <p:sp>
         <p:nvSpPr>
-          <p:cNvPr id="46" name="Rectangle 45"/>
+          <p:cNvPr id="55" name="Rectangle 54"/>
           <p:cNvSpPr/>
           <p:nvPr/>
         </p:nvSpPr>
         <p:spPr>
           <a:xfrm>
-            <a:off x="3931920" y="6492240"/>
-            <a:ext cx="3200400" cy="320040"/>
+            <a:off x="3108960" y="6428232"/>
+            <a:ext cx="2377440" cy="292608"/>
           </a:xfrm>
           <a:prstGeom prst="rect">
             <a:avLst/>
@@ -9834,14 +10209,14 @@
       </p:sp>
       <p:sp>
         <p:nvSpPr>
-          <p:cNvPr id="47" name="TextBox 46"/>
-          <p:cNvSpPr txBox="1"/>
-          <p:nvPr/>
-        </p:nvSpPr>
-        <p:spPr>
-          <a:xfrm>
-            <a:off x="4023360" y="6501384"/>
-            <a:ext cx="3017520" cy="274320"/>
+          <p:cNvPr id="56" name="TextBox 55"/>
+          <p:cNvSpPr txBox="1"/>
+          <p:nvPr/>
+        </p:nvSpPr>
+        <p:spPr>
+          <a:xfrm>
+            <a:off x="3182112" y="6437376"/>
+            <a:ext cx="2231136" cy="256032"/>
           </a:xfrm>
           <a:prstGeom prst="rect">
             <a:avLst/>
@@ -9855,29 +10230,29 @@
           <a:lstStyle/>
           <a:p>
             <a:pPr algn="l">
-              <a:defRPr sz="1200" b="0">
-                <a:solidFill>
-                  <a:srgbClr val="333333"/>
-                </a:solidFill>
-                <a:latin typeface="Calibri"/>
-              </a:defRPr>
-            </a:pPr>
-            <a:r>
-              <a:t>Yes — you own it</a:t>
-            </a:r>
-          </a:p>
-        </p:txBody>
-      </p:sp>
-      <p:sp>
-        <p:nvSpPr>
-          <p:cNvPr id="48" name="Rectangle 47"/>
+              <a:defRPr sz="1100" b="0">
+                <a:solidFill>
+                  <a:srgbClr val="333333"/>
+                </a:solidFill>
+                <a:latin typeface="Calibri"/>
+              </a:defRPr>
+            </a:pPr>
+            <a:r>
+              <a:t>Full</a:t>
+            </a:r>
+          </a:p>
+        </p:txBody>
+      </p:sp>
+      <p:sp>
+        <p:nvSpPr>
+          <p:cNvPr id="57" name="Rectangle 56"/>
           <p:cNvSpPr/>
           <p:nvPr/>
         </p:nvSpPr>
         <p:spPr>
           <a:xfrm>
-            <a:off x="7132320" y="6492240"/>
-            <a:ext cx="3200400" cy="320040"/>
+            <a:off x="5486400" y="6428232"/>
+            <a:ext cx="2377440" cy="292608"/>
           </a:xfrm>
           <a:prstGeom prst="rect">
             <a:avLst/>
@@ -9913,14 +10288,14 @@
       </p:sp>
       <p:sp>
         <p:nvSpPr>
-          <p:cNvPr id="49" name="TextBox 48"/>
-          <p:cNvSpPr txBox="1"/>
-          <p:nvPr/>
-        </p:nvSpPr>
-        <p:spPr>
-          <a:xfrm>
-            <a:off x="7223760" y="6501384"/>
-            <a:ext cx="3017520" cy="274320"/>
+          <p:cNvPr id="58" name="TextBox 57"/>
+          <p:cNvSpPr txBox="1"/>
+          <p:nvPr/>
+        </p:nvSpPr>
+        <p:spPr>
+          <a:xfrm>
+            <a:off x="5559552" y="6437376"/>
+            <a:ext cx="2231136" cy="256032"/>
           </a:xfrm>
           <a:prstGeom prst="rect">
             <a:avLst/>
@@ -9934,15 +10309,94 @@
           <a:lstStyle/>
           <a:p>
             <a:pPr algn="l">
-              <a:defRPr sz="1200" b="0">
-                <a:solidFill>
-                  <a:srgbClr val="333333"/>
-                </a:solidFill>
-                <a:latin typeface="Calibri"/>
-              </a:defRPr>
-            </a:pPr>
-            <a:r>
-              <a:t>No — IoTeye retains</a:t>
+              <a:defRPr sz="1100" b="0">
+                <a:solidFill>
+                  <a:srgbClr val="333333"/>
+                </a:solidFill>
+                <a:latin typeface="Calibri"/>
+              </a:defRPr>
+            </a:pPr>
+            <a:r>
+              <a:t>None</a:t>
+            </a:r>
+          </a:p>
+        </p:txBody>
+      </p:sp>
+      <p:sp>
+        <p:nvSpPr>
+          <p:cNvPr id="59" name="Rectangle 58"/>
+          <p:cNvSpPr/>
+          <p:nvPr/>
+        </p:nvSpPr>
+        <p:spPr>
+          <a:xfrm>
+            <a:off x="7863840" y="6428232"/>
+            <a:ext cx="2377440" cy="292608"/>
+          </a:xfrm>
+          <a:prstGeom prst="rect">
+            <a:avLst/>
+          </a:prstGeom>
+          <a:solidFill>
+            <a:srgbClr val="F2F2F2"/>
+          </a:solidFill>
+          <a:ln>
+            <a:noFill/>
+          </a:ln>
+        </p:spPr>
+        <p:style>
+          <a:lnRef idx="1">
+            <a:schemeClr val="accent1"/>
+          </a:lnRef>
+          <a:fillRef idx="3">
+            <a:schemeClr val="accent1"/>
+          </a:fillRef>
+          <a:effectRef idx="2">
+            <a:schemeClr val="accent1"/>
+          </a:effectRef>
+          <a:fontRef idx="minor">
+            <a:schemeClr val="lt1"/>
+          </a:fontRef>
+        </p:style>
+        <p:txBody>
+          <a:bodyPr rtlCol="0" anchor="ctr"/>
+          <a:lstStyle/>
+          <a:p>
+            <a:pPr algn="ctr"/>
+          </a:p>
+        </p:txBody>
+      </p:sp>
+      <p:sp>
+        <p:nvSpPr>
+          <p:cNvPr id="60" name="TextBox 59"/>
+          <p:cNvSpPr txBox="1"/>
+          <p:nvPr/>
+        </p:nvSpPr>
+        <p:spPr>
+          <a:xfrm>
+            <a:off x="7936992" y="6437376"/>
+            <a:ext cx="2231136" cy="256032"/>
+          </a:xfrm>
+          <a:prstGeom prst="rect">
+            <a:avLst/>
+          </a:prstGeom>
+          <a:noFill/>
+        </p:spPr>
+        <p:txBody>
+          <a:bodyPr wrap="square">
+            <a:spAutoFit/>
+          </a:bodyPr>
+          <a:lstStyle/>
+          <a:p>
+            <a:pPr algn="l">
+              <a:defRPr sz="1100" b="0">
+                <a:solidFill>
+                  <a:srgbClr val="333333"/>
+                </a:solidFill>
+                <a:latin typeface="Calibri"/>
+              </a:defRPr>
+            </a:pPr>
+            <a:r>
+              <a:t>Recognition only</a:t>
             </a:r>
           </a:p>
         </p:txBody>

--- a/RFP/IoTeye - Arc Mercer Pitch.pptx
+++ b/RFP/IoTeye - Arc Mercer Pitch.pptx
@@ -8356,7 +8356,7 @@
               </a:defRPr>
             </a:pPr>
             <a:r>
-              <a:t>• Arc Mercer owns recognition platform code</a:t>
+              <a:t>• Arc Mercer &amp; IoTeye share recognition platform code (50/50)</a:t>
             </a:r>
           </a:p>
           <a:p>
@@ -10396,7 +10396,7 @@
               </a:defRPr>
             </a:pPr>
             <a:r>
-              <a:t>Recognition only</a:t>
+              <a:t>50/50 recognition</a:t>
             </a:r>
           </a:p>
         </p:txBody>

--- a/RFP/IoTeye - Arc Mercer Pitch.pptx
+++ b/RFP/IoTeye - Arc Mercer Pitch.pptx
@@ -8467,7 +8467,7 @@
               </a:defRPr>
             </a:pPr>
             <a:r>
-              <a:t>★  All add-ons INCLUDED at $0 — only AI LLM usage fee applies (billed at cost, pass-through)  ★</a:t>
+              <a:t>★  AI-assisted add-ons INCLUDED — LLM usage fee only (pass-through)  |  Major redesigns quoted separately  ★</a:t>
             </a:r>
           </a:p>
         </p:txBody>

--- a/RFP/IoTeye - Arc Mercer Pitch.pptx
+++ b/RFP/IoTeye - Arc Mercer Pitch.pptx
@@ -7919,7 +7919,7 @@
               </a:defRPr>
             </a:pPr>
             <a:r>
-              <a:t>★  All add-ons INCLUDED at $0  —  only AI LLM usage fee applies (billed at cost, pass-through)</a:t>
+              <a:t>★  AI-assisted add-ons INCLUDED — LLM usage fee only (pass-through)  |  Major redesigns not covered  ★</a:t>
             </a:r>
           </a:p>
         </p:txBody>
@@ -8467,7 +8467,7 @@
               </a:defRPr>
             </a:pPr>
             <a:r>
-              <a:t>★  AI-assisted add-ons INCLUDED — LLM usage fee only (pass-through)  |  Major redesigns quoted separately  ★</a:t>
+              <a:t>★  AI-assisted add-ons INCLUDED — LLM usage fee only (pass-through)  |  Major redesigns not covered  ★</a:t>
             </a:r>
           </a:p>
         </p:txBody>
@@ -14014,7 +14014,7 @@
               </a:defRPr>
             </a:pPr>
             <a:r>
-              <a:t>• All add-ons FREE — pay only AI LLM usage (pass-through)</a:t>
+              <a:t>• AI-assisted add-ons FREE — pay only AI LLM usage (pass-through)</a:t>
             </a:r>
           </a:p>
         </p:txBody>

--- a/RFP/IoTeye - Arc Mercer Pitch.pptx
+++ b/RFP/IoTeye - Arc Mercer Pitch.pptx
@@ -13690,7 +13690,7 @@
               </a:defRPr>
             </a:pPr>
             <a:r>
-              <a:t>★  IoTeye covers 36 of 37 features — 10 added after competitive analysis, all within the original $110K budget</a:t>
+              <a:t>★  36 of 37 features — Magic Link excluded (Badge ID + PIN better serves frontline staff)  |  10 features added, all within $110K budget  ★</a:t>
             </a:r>
           </a:p>
         </p:txBody>

--- a/RFP/IoTeye - Arc Mercer Pitch.pptx
+++ b/RFP/IoTeye - Arc Mercer Pitch.pptx
@@ -8388,7 +8388,7 @@
               </a:defRPr>
             </a:pPr>
             <a:r>
-              <a:t>• Reuse rights deferred to legal agreement</a:t>
+              <a:t>• Reuse rights deferred to agreement</a:t>
             </a:r>
           </a:p>
         </p:txBody>
@@ -14089,7 +14089,7 @@
               </a:defRPr>
             </a:pPr>
             <a:r>
-              <a:t>• Select pricing option (A or B)</a:t>
+              <a:t>• Select pricing option (A, B, or C)</a:t>
             </a:r>
           </a:p>
           <a:p>

--- a/RFP/IoTeye - Arc Mercer Pitch.pptx
+++ b/RFP/IoTeye - Arc Mercer Pitch.pptx
@@ -4469,7 +4469,7 @@
         <p:spPr>
           <a:xfrm>
             <a:off x="6400800" y="4434840"/>
-            <a:ext cx="5029200" cy="640080"/>
+            <a:ext cx="5029200" cy="822960"/>
           </a:xfrm>
           <a:prstGeom prst="rect">
             <a:avLst/>
@@ -4548,7 +4548,7 @@
         <p:spPr>
           <a:xfrm>
             <a:off x="6537960" y="4800600"/>
-            <a:ext cx="4754880" cy="274320"/>
+            <a:ext cx="4754880" cy="457200"/>
           </a:xfrm>
           <a:prstGeom prst="rect">
             <a:avLst/>
@@ -4562,6 +4562,9 @@
           <a:lstStyle/>
           <a:p>
             <a:pPr algn="l">
+              <a:spcAft>
+                <a:spcPts val="400"/>
+              </a:spcAft>
               <a:defRPr sz="1300" b="0">
                 <a:solidFill>
                   <a:srgbClr val="333333"/>
@@ -4570,7 +4573,23 @@
               </a:defRPr>
             </a:pPr>
             <a:r>
-              <a:t>For part-time or seasonal staff with email but not on SSO</a:t>
+              <a:t>• For part-time or seasonal staff with email but not on SSO</a:t>
+            </a:r>
+          </a:p>
+          <a:p>
+            <a:pPr>
+              <a:spcAft>
+                <a:spcPts val="400"/>
+              </a:spcAft>
+              <a:defRPr sz="1300">
+                <a:solidFill>
+                  <a:srgbClr val="333333"/>
+                </a:solidFill>
+                <a:latin typeface="Calibri"/>
+              </a:defRPr>
+            </a:pPr>
+            <a:r>
+              <a:t>• Guardian authentication</a:t>
             </a:r>
           </a:p>
         </p:txBody>

--- a/RFP/IoTeye - Arc Mercer Pitch.pptx
+++ b/RFP/IoTeye - Arc Mercer Pitch.pptx
@@ -13427,7 +13427,7 @@
           <a:p>
             <a:pPr algn="l">
               <a:spcAft>
-                <a:spcPts val="700"/>
+                <a:spcPts val="1000"/>
               </a:spcAft>
               <a:defRPr sz="1400" b="0">
                 <a:solidFill>
@@ -13443,7 +13443,7 @@
           <a:p>
             <a:pPr>
               <a:spcAft>
-                <a:spcPts val="700"/>
+                <a:spcPts val="1000"/>
               </a:spcAft>
               <a:defRPr sz="1400">
                 <a:solidFill>
@@ -13453,13 +13453,13 @@
               </a:defRPr>
             </a:pPr>
             <a:r>
-              <a:t>• Arc Mercer is an existing SpringBoard &amp; Guardian customer</a:t>
+              <a:t>• Arc Mercer is an existing IoTeye customer (SpringBoard &amp; Guardian)</a:t>
             </a:r>
           </a:p>
           <a:p>
             <a:pPr>
               <a:spcAft>
-                <a:spcPts val="700"/>
+                <a:spcPts val="1000"/>
               </a:spcAft>
               <a:defRPr sz="1400">
                 <a:solidFill>
@@ -13469,13 +13469,13 @@
               </a:defRPr>
             </a:pPr>
             <a:r>
-              <a:t>• BrainClaw AI agents already running at Arc Mercer (37+57 tools)</a:t>
+              <a:t>• BrainClaw AI agents already in production at Arc Mercer (37+57 tools)</a:t>
             </a:r>
           </a:p>
           <a:p>
             <a:pPr>
               <a:spcAft>
-                <a:spcPts val="700"/>
+                <a:spcPts val="1000"/>
               </a:spcAft>
               <a:defRPr sz="1400">
                 <a:solidFill>
@@ -13485,13 +13485,13 @@
               </a:defRPr>
             </a:pPr>
             <a:r>
-              <a:t>• Badge ID + PIN login for frontline staff without email</a:t>
+              <a:t>• Unified vendor — one partner for operations, engagement</a:t>
             </a:r>
           </a:p>
           <a:p>
             <a:pPr>
               <a:spcAft>
-                <a:spcPts val="700"/>
+                <a:spcPts val="1000"/>
               </a:spcAft>
               <a:defRPr sz="1400">
                 <a:solidFill>
@@ -13501,77 +13501,13 @@
               </a:defRPr>
             </a:pPr>
             <a:r>
-              <a:t>• Ranked-choice committee voting — matching your current process</a:t>
+              <a:t>• Three flexible pricing options: full ownership, SaaS, or shared (50/50)</a:t>
             </a:r>
           </a:p>
           <a:p>
             <a:pPr>
               <a:spcAft>
-                <a:spcPts val="700"/>
-              </a:spcAft>
-              <a:defRPr sz="1400">
-                <a:solidFill>
-                  <a:srgbClr val="333333"/>
-                </a:solidFill>
-                <a:latin typeface="Calibri"/>
-              </a:defRPr>
-            </a:pPr>
-            <a:r>
-              <a:t>• Full engagement suite: TAC RSVP, culture groups, volunteering</a:t>
-            </a:r>
-          </a:p>
-          <a:p>
-            <a:pPr>
-              <a:spcAft>
-                <a:spcPts val="700"/>
-              </a:spcAft>
-              <a:defRPr sz="1400">
-                <a:solidFill>
-                  <a:srgbClr val="333333"/>
-                </a:solidFill>
-                <a:latin typeface="Calibri"/>
-              </a:defRPr>
-            </a:pPr>
-            <a:r>
-              <a:t>• Café cashier screen + in-person store QR redemption</a:t>
-            </a:r>
-          </a:p>
-          <a:p>
-            <a:pPr>
-              <a:spcAft>
-                <a:spcPts val="700"/>
-              </a:spcAft>
-              <a:defRPr sz="1400">
-                <a:solidFill>
-                  <a:srgbClr val="333333"/>
-                </a:solidFill>
-                <a:latin typeface="Calibri"/>
-              </a:defRPr>
-            </a:pPr>
-            <a:r>
-              <a:t>• Dark mode for night-shift staff at group homes</a:t>
-            </a:r>
-          </a:p>
-          <a:p>
-            <a:pPr>
-              <a:spcAft>
-                <a:spcPts val="700"/>
-              </a:spcAft>
-              <a:defRPr sz="1400">
-                <a:solidFill>
-                  <a:srgbClr val="333333"/>
-                </a:solidFill>
-                <a:latin typeface="Calibri"/>
-              </a:defRPr>
-            </a:pPr>
-            <a:r>
-              <a:t>• WCAG AAA accessibility — 7:1 contrast, screen reader tested</a:t>
-            </a:r>
-          </a:p>
-          <a:p>
-            <a:pPr>
-              <a:spcAft>
-                <a:spcPts val="700"/>
+                <a:spcPts val="1000"/>
               </a:spcAft>
               <a:defRPr sz="1400">
                 <a:solidFill>

--- a/RFP/IoTeye - Arc Mercer Pitch.pptx
+++ b/RFP/IoTeye - Arc Mercer Pitch.pptx
@@ -12962,7 +12962,7 @@
         <p:spPr>
           <a:xfrm>
             <a:off x="7863840" y="1645920"/>
-            <a:ext cx="4023360" cy="4114800"/>
+            <a:ext cx="4023360" cy="3456432"/>
           </a:xfrm>
           <a:prstGeom prst="rect">
             <a:avLst/>
@@ -13041,7 +13041,7 @@
         <p:spPr>
           <a:xfrm>
             <a:off x="8046720" y="2194560"/>
-            <a:ext cx="3657600" cy="3383280"/>
+            <a:ext cx="3657600" cy="2724912"/>
           </a:xfrm>
           <a:prstGeom prst="rect">
             <a:avLst/>
@@ -13191,8 +13191,8 @@
         </p:nvSpPr>
         <p:spPr>
           <a:xfrm>
-            <a:off x="0" y="5943600"/>
-            <a:ext cx="12191695" cy="640080"/>
+            <a:off x="0" y="5669280"/>
+            <a:ext cx="12191695" cy="914400"/>
           </a:xfrm>
           <a:prstGeom prst="rect">
             <a:avLst/>
@@ -13234,8 +13234,8 @@
         </p:nvSpPr>
         <p:spPr>
           <a:xfrm>
-            <a:off x="457200" y="5989320"/>
-            <a:ext cx="10972800" cy="548640"/>
+            <a:off x="457200" y="5760720"/>
+            <a:ext cx="10972800" cy="731520"/>
           </a:xfrm>
           <a:prstGeom prst="rect">
             <a:avLst/>
@@ -13249,7 +13249,7 @@
           <a:lstStyle/>
           <a:p>
             <a:pPr algn="ctr">
-              <a:defRPr sz="1600" b="1">
+              <a:defRPr sz="2000" b="1">
                 <a:solidFill>
                   <a:srgbClr val="FFFFFF"/>
                 </a:solidFill>

--- a/RFP/IoTeye - Arc Mercer Pitch.pptx
+++ b/RFP/IoTeye - Arc Mercer Pitch.pptx
@@ -14458,7 +14458,7 @@
               </a:defRPr>
             </a:pPr>
             <a:r>
-              <a:t>• Guardian: Notification system — SMS, push notifications, reply tracking, iOS &amp; Android</a:t>
+              <a:t>• Guardian: Notification &amp; authentication system — SMS, push notifications, reply tracking, iOS &amp; Android</a:t>
             </a:r>
           </a:p>
           <a:p>

--- a/RFP/IoTeye - Arc Mercer Pitch.pptx
+++ b/RFP/IoTeye - Arc Mercer Pitch.pptx
@@ -7486,7 +7486,7 @@
               </a:defRPr>
             </a:pPr>
             <a:r>
-              <a:t>★  AI-assisted add-ons INCLUDED — LLM usage fee only (pass-through)  |  Major redesigns not covered  ★</a:t>
+              <a:t>★  AI-assisted add-ons INCLUDED — LLM usage fee only (pass-through)  |  Custom development available upon request  ★</a:t>
             </a:r>
           </a:p>
         </p:txBody>
@@ -8034,7 +8034,7 @@
               </a:defRPr>
             </a:pPr>
             <a:r>
-              <a:t>★  AI-assisted add-ons INCLUDED — LLM usage fee only (pass-through)  |  Major redesigns not covered  ★</a:t>
+              <a:t>★  AI-assisted add-ons INCLUDED — LLM usage fee only (pass-through)  |  Custom development available upon request  ★</a:t>
             </a:r>
           </a:p>
         </p:txBody>

--- a/RFP/IoTeye - Arc Mercer Pitch.pptx
+++ b/RFP/IoTeye - Arc Mercer Pitch.pptx
@@ -13485,7 +13485,7 @@
               </a:defRPr>
             </a:pPr>
             <a:r>
-              <a:t>• Unified vendor — one partner for operations, engagement</a:t>
+              <a:t>• In-house Paycom &amp; Guardian integration — already live at Arc Mercer, not a cold start</a:t>
             </a:r>
           </a:p>
           <a:p>

--- a/RFP/IoTeye - Arc Mercer Pitch.pptx
+++ b/RFP/IoTeye - Arc Mercer Pitch.pptx
@@ -13485,7 +13485,7 @@
               </a:defRPr>
             </a:pPr>
             <a:r>
-              <a:t>• In-house Paycom &amp; Guardian integration — already live at Arc Mercer, not a cold start</a:t>
+              <a:t>• In-house Paycom &amp; Guardian integration experience at Arc Mercer, not a cold start</a:t>
             </a:r>
           </a:p>
           <a:p>

--- a/RFP/IoTeye - Arc Mercer Pitch.pptx
+++ b/RFP/IoTeye - Arc Mercer Pitch.pptx
@@ -15016,7 +15016,7 @@
               </a:defRPr>
             </a:pPr>
             <a:r>
-              <a:t>Notifications — SMS, push, reply tracking</a:t>
+              <a:t>Notifications &amp; authentication — SMS, push, reply tracking</a:t>
             </a:r>
           </a:p>
         </p:txBody>

--- a/RFP/IoTeye - Arc Mercer Pitch.pptx
+++ b/RFP/IoTeye - Arc Mercer Pitch.pptx
@@ -7725,7 +7725,7 @@
               </a:defRPr>
             </a:pPr>
             <a:r>
-              <a:t>• Subscription: $2,500/month ($30,000/year)</a:t>
+              <a:t>• Subscription: $3,000/month ($36,000/year)</a:t>
             </a:r>
           </a:p>
           <a:p>
@@ -7907,7 +7907,7 @@
               </a:defRPr>
             </a:pPr>
             <a:r>
-              <a:t>• Annual platform fee: $30,000/year (managed service)</a:t>
+              <a:t>• Annual platform fee: $36,000/year (managed service)</a:t>
             </a:r>
           </a:p>
           <a:p>
@@ -8936,7 +8936,7 @@
               </a:defRPr>
             </a:pPr>
             <a:r>
-              <a:t>$30,000/yr</a:t>
+              <a:t>$36,000/yr</a:t>
             </a:r>
           </a:p>
         </p:txBody>
@@ -9015,7 +9015,7 @@
               </a:defRPr>
             </a:pPr>
             <a:r>
-              <a:t>$30,000/yr</a:t>
+              <a:t>$36,000/yr</a:t>
             </a:r>
           </a:p>
         </p:txBody>
@@ -9252,7 +9252,7 @@
               </a:defRPr>
             </a:pPr>
             <a:r>
-              <a:t>$90,000</a:t>
+              <a:t>$108,000</a:t>
             </a:r>
           </a:p>
         </p:txBody>
@@ -9331,7 +9331,7 @@
               </a:defRPr>
             </a:pPr>
             <a:r>
-              <a:t>$145,000</a:t>
+              <a:t>$163,000</a:t>
             </a:r>
           </a:p>
         </p:txBody>
@@ -9568,7 +9568,7 @@
               </a:defRPr>
             </a:pPr>
             <a:r>
-              <a:t>$150,000</a:t>
+              <a:t>$180,000</a:t>
             </a:r>
           </a:p>
         </p:txBody>
@@ -9647,7 +9647,7 @@
               </a:defRPr>
             </a:pPr>
             <a:r>
-              <a:t>$205,000</a:t>
+              <a:t>$235,000</a:t>
             </a:r>
           </a:p>
         </p:txBody>

--- a/RFP/IoTeye - Arc Mercer Pitch.pptx
+++ b/RFP/IoTeye - Arc Mercer Pitch.pptx
@@ -5,25 +5,25 @@
     <p:sldMasterId id="2147483648" r:id="rId1"/>
   </p:sldMasterIdLst>
   <p:sldIdLst>
-    <p:sldId id="256" r:id="rId7"/>
-    <p:sldId id="257" r:id="rId8"/>
-    <p:sldId id="258" r:id="rId9"/>
-    <p:sldId id="259" r:id="rId10"/>
-    <p:sldId id="260" r:id="rId11"/>
-    <p:sldId id="261" r:id="rId12"/>
-    <p:sldId id="262" r:id="rId13"/>
-    <p:sldId id="263" r:id="rId14"/>
-    <p:sldId id="264" r:id="rId15"/>
-    <p:sldId id="265" r:id="rId16"/>
-    <p:sldId id="266" r:id="rId17"/>
-    <p:sldId id="267" r:id="rId18"/>
-    <p:sldId id="268" r:id="rId19"/>
-    <p:sldId id="269" r:id="rId20"/>
-    <p:sldId id="270" r:id="rId21"/>
-    <p:sldId id="271" r:id="rId22"/>
-    <p:sldId id="272" r:id="rId23"/>
+    <p:sldId id="256" r:id="rId2"/>
+    <p:sldId id="257" r:id="rId3"/>
+    <p:sldId id="258" r:id="rId4"/>
+    <p:sldId id="259" r:id="rId5"/>
+    <p:sldId id="260" r:id="rId6"/>
+    <p:sldId id="261" r:id="rId7"/>
+    <p:sldId id="262" r:id="rId8"/>
+    <p:sldId id="263" r:id="rId9"/>
+    <p:sldId id="264" r:id="rId10"/>
+    <p:sldId id="265" r:id="rId11"/>
+    <p:sldId id="266" r:id="rId12"/>
+    <p:sldId id="267" r:id="rId13"/>
+    <p:sldId id="268" r:id="rId14"/>
+    <p:sldId id="269" r:id="rId15"/>
+    <p:sldId id="270" r:id="rId16"/>
+    <p:sldId id="271" r:id="rId17"/>
+    <p:sldId id="272" r:id="rId18"/>
   </p:sldIdLst>
-  <p:sldSz cx="12191695" cy="6858000" type="screen4x3"/>
+  <p:sldSz cx="12192000" cy="6858000"/>
   <p:notesSz cx="6858000" cy="9144000"/>
   <p:defaultTextStyle>
     <a:defPPr>
@@ -120,6 +120,22 @@
       </a:defRPr>
     </a:lvl9pPr>
   </p:defaultTextStyle>
+  <p:extLst>
+    <p:ext uri="{EFAFB233-063F-42B5-8137-9DF3F51BA10A}">
+      <p15:sldGuideLst xmlns:p15="http://schemas.microsoft.com/office/powerpoint/2012/main">
+        <p15:guide id="1" orient="horz" pos="2160">
+          <p15:clr>
+            <a:srgbClr val="A4A3A4"/>
+          </p15:clr>
+        </p15:guide>
+        <p15:guide id="2" pos="2880">
+          <p15:clr>
+            <a:srgbClr val="A4A3A4"/>
+          </p15:clr>
+        </p15:guide>
+      </p15:sldGuideLst>
+    </p:ext>
+  </p:extLst>
 </p:presentation>
 </file>
 
@@ -161,10 +177,9 @@
           <a:lstStyle/>
           <a:p>
             <a:r>
-              <a:rPr lang="en-US" smtClean="0"/>
+              <a:rPr lang="en-US"/>
               <a:t>Click to edit Master title style</a:t>
             </a:r>
-            <a:endParaRPr lang="en-US"/>
           </a:p>
         </p:txBody>
       </p:sp>
@@ -280,10 +295,9 @@
           </a:lstStyle>
           <a:p>
             <a:r>
-              <a:rPr lang="en-US" smtClean="0"/>
+              <a:rPr lang="en-US"/>
               <a:t>Click to edit Master subtitle style</a:t>
             </a:r>
-            <a:endParaRPr lang="en-US"/>
           </a:p>
         </p:txBody>
       </p:sp>
@@ -304,7 +318,7 @@
           <a:p>
             <a:fld id="{5BCAD085-E8A6-8845-BD4E-CB4CCA059FC4}" type="datetimeFigureOut">
               <a:rPr lang="en-US" smtClean="0"/>
-              <a:t>1/27/13</a:t>
+              <a:t>4/17/2026</a:t>
             </a:fld>
             <a:endParaRPr lang="en-US"/>
           </a:p>
@@ -398,10 +412,9 @@
           <a:lstStyle/>
           <a:p>
             <a:r>
-              <a:rPr lang="en-US" smtClean="0"/>
+              <a:rPr lang="en-US"/>
               <a:t>Click to edit Master title style</a:t>
             </a:r>
-            <a:endParaRPr lang="en-US"/>
           </a:p>
         </p:txBody>
       </p:sp>
@@ -422,38 +435,37 @@
           <a:p>
             <a:pPr lvl="0"/>
             <a:r>
-              <a:rPr lang="en-US" smtClean="0"/>
+              <a:rPr lang="en-US"/>
               <a:t>Click to edit Master text styles</a:t>
             </a:r>
           </a:p>
           <a:p>
             <a:pPr lvl="1"/>
             <a:r>
-              <a:rPr lang="en-US" smtClean="0"/>
+              <a:rPr lang="en-US"/>
               <a:t>Second level</a:t>
             </a:r>
           </a:p>
           <a:p>
             <a:pPr lvl="2"/>
             <a:r>
-              <a:rPr lang="en-US" smtClean="0"/>
+              <a:rPr lang="en-US"/>
               <a:t>Third level</a:t>
             </a:r>
           </a:p>
           <a:p>
             <a:pPr lvl="3"/>
             <a:r>
-              <a:rPr lang="en-US" smtClean="0"/>
+              <a:rPr lang="en-US"/>
               <a:t>Fourth level</a:t>
             </a:r>
           </a:p>
           <a:p>
             <a:pPr lvl="4"/>
             <a:r>
-              <a:rPr lang="en-US" smtClean="0"/>
+              <a:rPr lang="en-US"/>
               <a:t>Fifth level</a:t>
             </a:r>
-            <a:endParaRPr lang="en-US"/>
           </a:p>
         </p:txBody>
       </p:sp>
@@ -474,7 +486,7 @@
           <a:p>
             <a:fld id="{5BCAD085-E8A6-8845-BD4E-CB4CCA059FC4}" type="datetimeFigureOut">
               <a:rPr lang="en-US" smtClean="0"/>
-              <a:t>1/27/13</a:t>
+              <a:t>4/17/2026</a:t>
             </a:fld>
             <a:endParaRPr lang="en-US"/>
           </a:p>
@@ -573,10 +585,9 @@
           <a:lstStyle/>
           <a:p>
             <a:r>
-              <a:rPr lang="en-US" smtClean="0"/>
+              <a:rPr lang="en-US"/>
               <a:t>Click to edit Master title style</a:t>
             </a:r>
-            <a:endParaRPr lang="en-US"/>
           </a:p>
         </p:txBody>
       </p:sp>
@@ -602,38 +613,37 @@
           <a:p>
             <a:pPr lvl="0"/>
             <a:r>
-              <a:rPr lang="en-US" smtClean="0"/>
+              <a:rPr lang="en-US"/>
               <a:t>Click to edit Master text styles</a:t>
             </a:r>
           </a:p>
           <a:p>
             <a:pPr lvl="1"/>
             <a:r>
-              <a:rPr lang="en-US" smtClean="0"/>
+              <a:rPr lang="en-US"/>
               <a:t>Second level</a:t>
             </a:r>
           </a:p>
           <a:p>
             <a:pPr lvl="2"/>
             <a:r>
-              <a:rPr lang="en-US" smtClean="0"/>
+              <a:rPr lang="en-US"/>
               <a:t>Third level</a:t>
             </a:r>
           </a:p>
           <a:p>
             <a:pPr lvl="3"/>
             <a:r>
-              <a:rPr lang="en-US" smtClean="0"/>
+              <a:rPr lang="en-US"/>
               <a:t>Fourth level</a:t>
             </a:r>
           </a:p>
           <a:p>
             <a:pPr lvl="4"/>
             <a:r>
-              <a:rPr lang="en-US" smtClean="0"/>
+              <a:rPr lang="en-US"/>
               <a:t>Fifth level</a:t>
             </a:r>
-            <a:endParaRPr lang="en-US"/>
           </a:p>
         </p:txBody>
       </p:sp>
@@ -654,7 +664,7 @@
           <a:p>
             <a:fld id="{5BCAD085-E8A6-8845-BD4E-CB4CCA059FC4}" type="datetimeFigureOut">
               <a:rPr lang="en-US" smtClean="0"/>
-              <a:t>1/27/13</a:t>
+              <a:t>4/17/2026</a:t>
             </a:fld>
             <a:endParaRPr lang="en-US"/>
           </a:p>
@@ -748,10 +758,9 @@
           <a:lstStyle/>
           <a:p>
             <a:r>
-              <a:rPr lang="en-US" smtClean="0"/>
+              <a:rPr lang="en-US"/>
               <a:t>Click to edit Master title style</a:t>
             </a:r>
-            <a:endParaRPr lang="en-US"/>
           </a:p>
         </p:txBody>
       </p:sp>
@@ -772,38 +781,37 @@
           <a:p>
             <a:pPr lvl="0"/>
             <a:r>
-              <a:rPr lang="en-US" smtClean="0"/>
+              <a:rPr lang="en-US"/>
               <a:t>Click to edit Master text styles</a:t>
             </a:r>
           </a:p>
           <a:p>
             <a:pPr lvl="1"/>
             <a:r>
-              <a:rPr lang="en-US" smtClean="0"/>
+              <a:rPr lang="en-US"/>
               <a:t>Second level</a:t>
             </a:r>
           </a:p>
           <a:p>
             <a:pPr lvl="2"/>
             <a:r>
-              <a:rPr lang="en-US" smtClean="0"/>
+              <a:rPr lang="en-US"/>
               <a:t>Third level</a:t>
             </a:r>
           </a:p>
           <a:p>
             <a:pPr lvl="3"/>
             <a:r>
-              <a:rPr lang="en-US" smtClean="0"/>
+              <a:rPr lang="en-US"/>
               <a:t>Fourth level</a:t>
             </a:r>
           </a:p>
           <a:p>
             <a:pPr lvl="4"/>
             <a:r>
-              <a:rPr lang="en-US" smtClean="0"/>
+              <a:rPr lang="en-US"/>
               <a:t>Fifth level</a:t>
             </a:r>
-            <a:endParaRPr lang="en-US"/>
           </a:p>
         </p:txBody>
       </p:sp>
@@ -824,7 +832,7 @@
           <a:p>
             <a:fld id="{5BCAD085-E8A6-8845-BD4E-CB4CCA059FC4}" type="datetimeFigureOut">
               <a:rPr lang="en-US" smtClean="0"/>
-              <a:t>1/27/13</a:t>
+              <a:t>4/17/2026</a:t>
             </a:fld>
             <a:endParaRPr lang="en-US"/>
           </a:p>
@@ -927,10 +935,9 @@
           </a:lstStyle>
           <a:p>
             <a:r>
-              <a:rPr lang="en-US" smtClean="0"/>
+              <a:rPr lang="en-US"/>
               <a:t>Click to edit Master title style</a:t>
             </a:r>
-            <a:endParaRPr lang="en-US"/>
           </a:p>
         </p:txBody>
       </p:sp>
@@ -1047,7 +1054,7 @@
           <a:p>
             <a:pPr lvl="0"/>
             <a:r>
-              <a:rPr lang="en-US" smtClean="0"/>
+              <a:rPr lang="en-US"/>
               <a:t>Click to edit Master text styles</a:t>
             </a:r>
           </a:p>
@@ -1070,7 +1077,7 @@
           <a:p>
             <a:fld id="{5BCAD085-E8A6-8845-BD4E-CB4CCA059FC4}" type="datetimeFigureOut">
               <a:rPr lang="en-US" smtClean="0"/>
-              <a:t>1/27/13</a:t>
+              <a:t>4/17/2026</a:t>
             </a:fld>
             <a:endParaRPr lang="en-US"/>
           </a:p>
@@ -1164,10 +1171,9 @@
           <a:lstStyle/>
           <a:p>
             <a:r>
-              <a:rPr lang="en-US" smtClean="0"/>
+              <a:rPr lang="en-US"/>
               <a:t>Click to edit Master title style</a:t>
             </a:r>
-            <a:endParaRPr lang="en-US"/>
           </a:p>
         </p:txBody>
       </p:sp>
@@ -1221,38 +1227,37 @@
           <a:p>
             <a:pPr lvl="0"/>
             <a:r>
-              <a:rPr lang="en-US" smtClean="0"/>
+              <a:rPr lang="en-US"/>
               <a:t>Click to edit Master text styles</a:t>
             </a:r>
           </a:p>
           <a:p>
             <a:pPr lvl="1"/>
             <a:r>
-              <a:rPr lang="en-US" smtClean="0"/>
+              <a:rPr lang="en-US"/>
               <a:t>Second level</a:t>
             </a:r>
           </a:p>
           <a:p>
             <a:pPr lvl="2"/>
             <a:r>
-              <a:rPr lang="en-US" smtClean="0"/>
+              <a:rPr lang="en-US"/>
               <a:t>Third level</a:t>
             </a:r>
           </a:p>
           <a:p>
             <a:pPr lvl="3"/>
             <a:r>
-              <a:rPr lang="en-US" smtClean="0"/>
+              <a:rPr lang="en-US"/>
               <a:t>Fourth level</a:t>
             </a:r>
           </a:p>
           <a:p>
             <a:pPr lvl="4"/>
             <a:r>
-              <a:rPr lang="en-US" smtClean="0"/>
+              <a:rPr lang="en-US"/>
               <a:t>Fifth level</a:t>
             </a:r>
-            <a:endParaRPr lang="en-US"/>
           </a:p>
         </p:txBody>
       </p:sp>
@@ -1306,38 +1311,37 @@
           <a:p>
             <a:pPr lvl="0"/>
             <a:r>
-              <a:rPr lang="en-US" smtClean="0"/>
+              <a:rPr lang="en-US"/>
               <a:t>Click to edit Master text styles</a:t>
             </a:r>
           </a:p>
           <a:p>
             <a:pPr lvl="1"/>
             <a:r>
-              <a:rPr lang="en-US" smtClean="0"/>
+              <a:rPr lang="en-US"/>
               <a:t>Second level</a:t>
             </a:r>
           </a:p>
           <a:p>
             <a:pPr lvl="2"/>
             <a:r>
-              <a:rPr lang="en-US" smtClean="0"/>
+              <a:rPr lang="en-US"/>
               <a:t>Third level</a:t>
             </a:r>
           </a:p>
           <a:p>
             <a:pPr lvl="3"/>
             <a:r>
-              <a:rPr lang="en-US" smtClean="0"/>
+              <a:rPr lang="en-US"/>
               <a:t>Fourth level</a:t>
             </a:r>
           </a:p>
           <a:p>
             <a:pPr lvl="4"/>
             <a:r>
-              <a:rPr lang="en-US" smtClean="0"/>
+              <a:rPr lang="en-US"/>
               <a:t>Fifth level</a:t>
             </a:r>
-            <a:endParaRPr lang="en-US"/>
           </a:p>
         </p:txBody>
       </p:sp>
@@ -1358,7 +1362,7 @@
           <a:p>
             <a:fld id="{5BCAD085-E8A6-8845-BD4E-CB4CCA059FC4}" type="datetimeFigureOut">
               <a:rPr lang="en-US" smtClean="0"/>
-              <a:t>1/27/13</a:t>
+              <a:t>4/17/2026</a:t>
             </a:fld>
             <a:endParaRPr lang="en-US"/>
           </a:p>
@@ -1456,10 +1460,9 @@
           </a:lstStyle>
           <a:p>
             <a:r>
-              <a:rPr lang="en-US" smtClean="0"/>
+              <a:rPr lang="en-US"/>
               <a:t>Click to edit Master title style</a:t>
             </a:r>
-            <a:endParaRPr lang="en-US"/>
           </a:p>
         </p:txBody>
       </p:sp>
@@ -1522,7 +1525,7 @@
           <a:p>
             <a:pPr lvl="0"/>
             <a:r>
-              <a:rPr lang="en-US" smtClean="0"/>
+              <a:rPr lang="en-US"/>
               <a:t>Click to edit Master text styles</a:t>
             </a:r>
           </a:p>
@@ -1578,38 +1581,37 @@
           <a:p>
             <a:pPr lvl="0"/>
             <a:r>
-              <a:rPr lang="en-US" smtClean="0"/>
+              <a:rPr lang="en-US"/>
               <a:t>Click to edit Master text styles</a:t>
             </a:r>
           </a:p>
           <a:p>
             <a:pPr lvl="1"/>
             <a:r>
-              <a:rPr lang="en-US" smtClean="0"/>
+              <a:rPr lang="en-US"/>
               <a:t>Second level</a:t>
             </a:r>
           </a:p>
           <a:p>
             <a:pPr lvl="2"/>
             <a:r>
-              <a:rPr lang="en-US" smtClean="0"/>
+              <a:rPr lang="en-US"/>
               <a:t>Third level</a:t>
             </a:r>
           </a:p>
           <a:p>
             <a:pPr lvl="3"/>
             <a:r>
-              <a:rPr lang="en-US" smtClean="0"/>
+              <a:rPr lang="en-US"/>
               <a:t>Fourth level</a:t>
             </a:r>
           </a:p>
           <a:p>
             <a:pPr lvl="4"/>
             <a:r>
-              <a:rPr lang="en-US" smtClean="0"/>
+              <a:rPr lang="en-US"/>
               <a:t>Fifth level</a:t>
             </a:r>
-            <a:endParaRPr lang="en-US"/>
           </a:p>
         </p:txBody>
       </p:sp>
@@ -1672,7 +1674,7 @@
           <a:p>
             <a:pPr lvl="0"/>
             <a:r>
-              <a:rPr lang="en-US" smtClean="0"/>
+              <a:rPr lang="en-US"/>
               <a:t>Click to edit Master text styles</a:t>
             </a:r>
           </a:p>
@@ -1728,38 +1730,37 @@
           <a:p>
             <a:pPr lvl="0"/>
             <a:r>
-              <a:rPr lang="en-US" smtClean="0"/>
+              <a:rPr lang="en-US"/>
               <a:t>Click to edit Master text styles</a:t>
             </a:r>
           </a:p>
           <a:p>
             <a:pPr lvl="1"/>
             <a:r>
-              <a:rPr lang="en-US" smtClean="0"/>
+              <a:rPr lang="en-US"/>
               <a:t>Second level</a:t>
             </a:r>
           </a:p>
           <a:p>
             <a:pPr lvl="2"/>
             <a:r>
-              <a:rPr lang="en-US" smtClean="0"/>
+              <a:rPr lang="en-US"/>
               <a:t>Third level</a:t>
             </a:r>
           </a:p>
           <a:p>
             <a:pPr lvl="3"/>
             <a:r>
-              <a:rPr lang="en-US" smtClean="0"/>
+              <a:rPr lang="en-US"/>
               <a:t>Fourth level</a:t>
             </a:r>
           </a:p>
           <a:p>
             <a:pPr lvl="4"/>
             <a:r>
-              <a:rPr lang="en-US" smtClean="0"/>
+              <a:rPr lang="en-US"/>
               <a:t>Fifth level</a:t>
             </a:r>
-            <a:endParaRPr lang="en-US"/>
           </a:p>
         </p:txBody>
       </p:sp>
@@ -1780,7 +1781,7 @@
           <a:p>
             <a:fld id="{5BCAD085-E8A6-8845-BD4E-CB4CCA059FC4}" type="datetimeFigureOut">
               <a:rPr lang="en-US" smtClean="0"/>
-              <a:t>1/27/13</a:t>
+              <a:t>4/17/2026</a:t>
             </a:fld>
             <a:endParaRPr lang="en-US"/>
           </a:p>
@@ -1874,10 +1875,9 @@
           <a:lstStyle/>
           <a:p>
             <a:r>
-              <a:rPr lang="en-US" smtClean="0"/>
+              <a:rPr lang="en-US"/>
               <a:t>Click to edit Master title style</a:t>
             </a:r>
-            <a:endParaRPr lang="en-US"/>
           </a:p>
         </p:txBody>
       </p:sp>
@@ -1898,7 +1898,7 @@
           <a:p>
             <a:fld id="{5BCAD085-E8A6-8845-BD4E-CB4CCA059FC4}" type="datetimeFigureOut">
               <a:rPr lang="en-US" smtClean="0"/>
-              <a:t>1/27/13</a:t>
+              <a:t>4/17/2026</a:t>
             </a:fld>
             <a:endParaRPr lang="en-US"/>
           </a:p>
@@ -1993,7 +1993,7 @@
           <a:p>
             <a:fld id="{5BCAD085-E8A6-8845-BD4E-CB4CCA059FC4}" type="datetimeFigureOut">
               <a:rPr lang="en-US" smtClean="0"/>
-              <a:t>1/27/13</a:t>
+              <a:t>4/17/2026</a:t>
             </a:fld>
             <a:endParaRPr lang="en-US"/>
           </a:p>
@@ -2096,10 +2096,9 @@
           </a:lstStyle>
           <a:p>
             <a:r>
-              <a:rPr lang="en-US" smtClean="0"/>
+              <a:rPr lang="en-US"/>
               <a:t>Click to edit Master title style</a:t>
             </a:r>
-            <a:endParaRPr lang="en-US"/>
           </a:p>
         </p:txBody>
       </p:sp>
@@ -2153,38 +2152,37 @@
           <a:p>
             <a:pPr lvl="0"/>
             <a:r>
-              <a:rPr lang="en-US" smtClean="0"/>
+              <a:rPr lang="en-US"/>
               <a:t>Click to edit Master text styles</a:t>
             </a:r>
           </a:p>
           <a:p>
             <a:pPr lvl="1"/>
             <a:r>
-              <a:rPr lang="en-US" smtClean="0"/>
+              <a:rPr lang="en-US"/>
               <a:t>Second level</a:t>
             </a:r>
           </a:p>
           <a:p>
             <a:pPr lvl="2"/>
             <a:r>
-              <a:rPr lang="en-US" smtClean="0"/>
+              <a:rPr lang="en-US"/>
               <a:t>Third level</a:t>
             </a:r>
           </a:p>
           <a:p>
             <a:pPr lvl="3"/>
             <a:r>
-              <a:rPr lang="en-US" smtClean="0"/>
+              <a:rPr lang="en-US"/>
               <a:t>Fourth level</a:t>
             </a:r>
           </a:p>
           <a:p>
             <a:pPr lvl="4"/>
             <a:r>
-              <a:rPr lang="en-US" smtClean="0"/>
+              <a:rPr lang="en-US"/>
               <a:t>Fifth level</a:t>
             </a:r>
-            <a:endParaRPr lang="en-US"/>
           </a:p>
         </p:txBody>
       </p:sp>
@@ -2247,7 +2245,7 @@
           <a:p>
             <a:pPr lvl="0"/>
             <a:r>
-              <a:rPr lang="en-US" smtClean="0"/>
+              <a:rPr lang="en-US"/>
               <a:t>Click to edit Master text styles</a:t>
             </a:r>
           </a:p>
@@ -2270,7 +2268,7 @@
           <a:p>
             <a:fld id="{5BCAD085-E8A6-8845-BD4E-CB4CCA059FC4}" type="datetimeFigureOut">
               <a:rPr lang="en-US" smtClean="0"/>
-              <a:t>1/27/13</a:t>
+              <a:t>4/17/2026</a:t>
             </a:fld>
             <a:endParaRPr lang="en-US"/>
           </a:p>
@@ -2373,10 +2371,9 @@
           </a:lstStyle>
           <a:p>
             <a:r>
-              <a:rPr lang="en-US" smtClean="0"/>
+              <a:rPr lang="en-US"/>
               <a:t>Click to edit Master title style</a:t>
             </a:r>
-            <a:endParaRPr lang="en-US"/>
           </a:p>
         </p:txBody>
       </p:sp>
@@ -2500,7 +2497,7 @@
           <a:p>
             <a:pPr lvl="0"/>
             <a:r>
-              <a:rPr lang="en-US" smtClean="0"/>
+              <a:rPr lang="en-US"/>
               <a:t>Click to edit Master text styles</a:t>
             </a:r>
           </a:p>
@@ -2523,7 +2520,7 @@
           <a:p>
             <a:fld id="{5BCAD085-E8A6-8845-BD4E-CB4CCA059FC4}" type="datetimeFigureOut">
               <a:rPr lang="en-US" smtClean="0"/>
-              <a:t>1/27/13</a:t>
+              <a:t>4/17/2026</a:t>
             </a:fld>
             <a:endParaRPr lang="en-US"/>
           </a:p>
@@ -2632,10 +2629,9 @@
           <a:lstStyle/>
           <a:p>
             <a:r>
-              <a:rPr lang="en-US" smtClean="0"/>
+              <a:rPr lang="en-US"/>
               <a:t>Click to edit Master title style</a:t>
             </a:r>
-            <a:endParaRPr lang="en-US"/>
           </a:p>
         </p:txBody>
       </p:sp>
@@ -2666,38 +2662,37 @@
           <a:p>
             <a:pPr lvl="0"/>
             <a:r>
-              <a:rPr lang="en-US" smtClean="0"/>
+              <a:rPr lang="en-US"/>
               <a:t>Click to edit Master text styles</a:t>
             </a:r>
           </a:p>
           <a:p>
             <a:pPr lvl="1"/>
             <a:r>
-              <a:rPr lang="en-US" smtClean="0"/>
+              <a:rPr lang="en-US"/>
               <a:t>Second level</a:t>
             </a:r>
           </a:p>
           <a:p>
             <a:pPr lvl="2"/>
             <a:r>
-              <a:rPr lang="en-US" smtClean="0"/>
+              <a:rPr lang="en-US"/>
               <a:t>Third level</a:t>
             </a:r>
           </a:p>
           <a:p>
             <a:pPr lvl="3"/>
             <a:r>
-              <a:rPr lang="en-US" smtClean="0"/>
+              <a:rPr lang="en-US"/>
               <a:t>Fourth level</a:t>
             </a:r>
           </a:p>
           <a:p>
             <a:pPr lvl="4"/>
             <a:r>
-              <a:rPr lang="en-US" smtClean="0"/>
+              <a:rPr lang="en-US"/>
               <a:t>Fifth level</a:t>
             </a:r>
-            <a:endParaRPr lang="en-US"/>
           </a:p>
         </p:txBody>
       </p:sp>
@@ -2736,7 +2731,7 @@
           <a:p>
             <a:fld id="{5BCAD085-E8A6-8845-BD4E-CB4CCA059FC4}" type="datetimeFigureOut">
               <a:rPr lang="en-US" smtClean="0"/>
-              <a:t>1/27/13</a:t>
+              <a:t>4/17/2026</a:t>
             </a:fld>
             <a:endParaRPr lang="en-US"/>
           </a:p>
@@ -3095,7 +3090,7 @@
 </file>
 
 <file path=ppt/slides/slide1.xml><?xml version="1.0" encoding="utf-8"?>
-<p:sld xmlns:a="http://schemas.openxmlformats.org/drawingml/2006/main" xmlns:p="http://schemas.openxmlformats.org/presentationml/2006/main" xmlns:r="http://schemas.openxmlformats.org/officeDocument/2006/relationships">
+<p:sld xmlns:a="http://schemas.openxmlformats.org/drawingml/2006/main" xmlns:r="http://schemas.openxmlformats.org/officeDocument/2006/relationships" xmlns:p="http://schemas.openxmlformats.org/presentationml/2006/main">
   <p:cSld>
     <p:bg>
       <p:bgPr>
@@ -3111,7 +3106,14 @@
         <p:cNvGrpSpPr/>
         <p:nvPr/>
       </p:nvGrpSpPr>
-      <p:grpSpPr/>
+      <p:grpSpPr>
+        <a:xfrm>
+          <a:off x="0" y="0"/>
+          <a:ext cx="0" cy="0"/>
+          <a:chOff x="0" y="0"/>
+          <a:chExt cx="0" cy="0"/>
+        </a:xfrm>
+      </p:grpSpPr>
       <p:sp>
         <p:nvSpPr>
           <p:cNvPr id="2" name="Rectangle 1"/>
@@ -3152,6 +3154,7 @@
           <a:lstStyle/>
           <a:p>
             <a:pPr algn="ctr"/>
+            <a:endParaRPr/>
           </a:p>
         </p:txBody>
       </p:sp>
@@ -3312,7 +3315,7 @@
 </file>
 
 <file path=ppt/slides/slide10.xml><?xml version="1.0" encoding="utf-8"?>
-<p:sld xmlns:a="http://schemas.openxmlformats.org/drawingml/2006/main" xmlns:p="http://schemas.openxmlformats.org/presentationml/2006/main" xmlns:r="http://schemas.openxmlformats.org/officeDocument/2006/relationships">
+<p:sld xmlns:a="http://schemas.openxmlformats.org/drawingml/2006/main" xmlns:r="http://schemas.openxmlformats.org/officeDocument/2006/relationships" xmlns:p="http://schemas.openxmlformats.org/presentationml/2006/main">
   <p:cSld>
     <p:bg>
       <p:bgPr>
@@ -3328,7 +3331,14 @@
         <p:cNvGrpSpPr/>
         <p:nvPr/>
       </p:nvGrpSpPr>
-      <p:grpSpPr/>
+      <p:grpSpPr>
+        <a:xfrm>
+          <a:off x="0" y="0"/>
+          <a:ext cx="0" cy="0"/>
+          <a:chOff x="0" y="0"/>
+          <a:chExt cx="0" cy="0"/>
+        </a:xfrm>
+      </p:grpSpPr>
       <p:sp>
         <p:nvSpPr>
           <p:cNvPr id="2" name="Rectangle 1"/>
@@ -3369,6 +3379,7 @@
           <a:lstStyle/>
           <a:p>
             <a:pPr algn="ctr"/>
+            <a:endParaRPr/>
           </a:p>
         </p:txBody>
       </p:sp>
@@ -3794,7 +3805,7 @@
 </file>
 
 <file path=ppt/slides/slide11.xml><?xml version="1.0" encoding="utf-8"?>
-<p:sld xmlns:a="http://schemas.openxmlformats.org/drawingml/2006/main" xmlns:p="http://schemas.openxmlformats.org/presentationml/2006/main" xmlns:r="http://schemas.openxmlformats.org/officeDocument/2006/relationships">
+<p:sld xmlns:a="http://schemas.openxmlformats.org/drawingml/2006/main" xmlns:r="http://schemas.openxmlformats.org/officeDocument/2006/relationships" xmlns:p="http://schemas.openxmlformats.org/presentationml/2006/main">
   <p:cSld>
     <p:bg>
       <p:bgPr>
@@ -3810,7 +3821,14 @@
         <p:cNvGrpSpPr/>
         <p:nvPr/>
       </p:nvGrpSpPr>
-      <p:grpSpPr/>
+      <p:grpSpPr>
+        <a:xfrm>
+          <a:off x="0" y="0"/>
+          <a:ext cx="0" cy="0"/>
+          <a:chOff x="0" y="0"/>
+          <a:chExt cx="0" cy="0"/>
+        </a:xfrm>
+      </p:grpSpPr>
       <p:sp>
         <p:nvSpPr>
           <p:cNvPr id="2" name="Rectangle 1"/>
@@ -3851,6 +3869,7 @@
           <a:lstStyle/>
           <a:p>
             <a:pPr algn="ctr"/>
+            <a:endParaRPr/>
           </a:p>
         </p:txBody>
       </p:sp>
@@ -4085,6 +4104,7 @@
           <a:lstStyle/>
           <a:p>
             <a:pPr algn="ctr"/>
+            <a:endParaRPr/>
           </a:p>
         </p:txBody>
       </p:sp>
@@ -4216,6 +4236,7 @@
           <a:lstStyle/>
           <a:p>
             <a:pPr algn="ctr"/>
+            <a:endParaRPr/>
           </a:p>
         </p:txBody>
       </p:sp>
@@ -4366,6 +4387,7 @@
           <a:lstStyle/>
           <a:p>
             <a:pPr algn="ctr"/>
+            <a:endParaRPr/>
           </a:p>
         </p:txBody>
       </p:sp>
@@ -4439,6 +4461,7 @@
               </a:defRPr>
             </a:pPr>
             <a:r>
+              <a:rPr dirty="0"/>
               <a:t>• Supabase Auth: SAML 2.0, OAuth 2.0, OIDC</a:t>
             </a:r>
           </a:p>
@@ -4455,6 +4478,7 @@
               </a:defRPr>
             </a:pPr>
             <a:r>
+              <a:rPr dirty="0"/>
               <a:t>• Future: Microsoft Entra ID — zero-downtime migration</a:t>
             </a:r>
           </a:p>
@@ -4500,6 +4524,7 @@
           <a:lstStyle/>
           <a:p>
             <a:pPr algn="ctr"/>
+            <a:endParaRPr/>
           </a:p>
         </p:txBody>
       </p:sp>
@@ -4634,6 +4659,7 @@
           <a:lstStyle/>
           <a:p>
             <a:pPr algn="ctr"/>
+            <a:endParaRPr/>
           </a:p>
         </p:txBody>
       </p:sp>
@@ -4686,7 +4712,7 @@
 </file>
 
 <file path=ppt/slides/slide12.xml><?xml version="1.0" encoding="utf-8"?>
-<p:sld xmlns:a="http://schemas.openxmlformats.org/drawingml/2006/main" xmlns:p="http://schemas.openxmlformats.org/presentationml/2006/main" xmlns:r="http://schemas.openxmlformats.org/officeDocument/2006/relationships">
+<p:sld xmlns:a="http://schemas.openxmlformats.org/drawingml/2006/main" xmlns:r="http://schemas.openxmlformats.org/officeDocument/2006/relationships" xmlns:p="http://schemas.openxmlformats.org/presentationml/2006/main">
   <p:cSld>
     <p:bg>
       <p:bgPr>
@@ -4702,7 +4728,14 @@
         <p:cNvGrpSpPr/>
         <p:nvPr/>
       </p:nvGrpSpPr>
-      <p:grpSpPr/>
+      <p:grpSpPr>
+        <a:xfrm>
+          <a:off x="0" y="0"/>
+          <a:ext cx="0" cy="0"/>
+          <a:chOff x="0" y="0"/>
+          <a:chExt cx="0" cy="0"/>
+        </a:xfrm>
+      </p:grpSpPr>
       <p:sp>
         <p:nvSpPr>
           <p:cNvPr id="2" name="Rectangle 1"/>
@@ -4743,6 +4776,7 @@
           <a:lstStyle/>
           <a:p>
             <a:pPr algn="ctr"/>
+            <a:endParaRPr/>
           </a:p>
         </p:txBody>
       </p:sp>
@@ -5014,6 +5048,7 @@
           <a:lstStyle/>
           <a:p>
             <a:pPr algn="ctr"/>
+            <a:endParaRPr/>
           </a:p>
         </p:txBody>
       </p:sp>
@@ -5062,7 +5097,7 @@
 </file>
 
 <file path=ppt/slides/slide13.xml><?xml version="1.0" encoding="utf-8"?>
-<p:sld xmlns:a="http://schemas.openxmlformats.org/drawingml/2006/main" xmlns:p="http://schemas.openxmlformats.org/presentationml/2006/main" xmlns:r="http://schemas.openxmlformats.org/officeDocument/2006/relationships">
+<p:sld xmlns:a="http://schemas.openxmlformats.org/drawingml/2006/main" xmlns:r="http://schemas.openxmlformats.org/officeDocument/2006/relationships" xmlns:p="http://schemas.openxmlformats.org/presentationml/2006/main">
   <p:cSld>
     <p:bg>
       <p:bgPr>
@@ -5078,7 +5113,14 @@
         <p:cNvGrpSpPr/>
         <p:nvPr/>
       </p:nvGrpSpPr>
-      <p:grpSpPr/>
+      <p:grpSpPr>
+        <a:xfrm>
+          <a:off x="0" y="0"/>
+          <a:ext cx="0" cy="0"/>
+          <a:chOff x="0" y="0"/>
+          <a:chExt cx="0" cy="0"/>
+        </a:xfrm>
+      </p:grpSpPr>
       <p:sp>
         <p:nvSpPr>
           <p:cNvPr id="2" name="Rectangle 1"/>
@@ -5119,6 +5161,7 @@
           <a:lstStyle/>
           <a:p>
             <a:pPr algn="ctr"/>
+            <a:endParaRPr/>
           </a:p>
         </p:txBody>
       </p:sp>
@@ -5198,6 +5241,7 @@
           <a:lstStyle/>
           <a:p>
             <a:pPr algn="ctr"/>
+            <a:endParaRPr/>
           </a:p>
         </p:txBody>
       </p:sp>
@@ -5277,6 +5321,7 @@
           <a:lstStyle/>
           <a:p>
             <a:pPr algn="ctr"/>
+            <a:endParaRPr/>
           </a:p>
         </p:txBody>
       </p:sp>
@@ -5356,6 +5401,7 @@
           <a:lstStyle/>
           <a:p>
             <a:pPr algn="ctr"/>
+            <a:endParaRPr/>
           </a:p>
         </p:txBody>
       </p:sp>
@@ -5805,7 +5851,7 @@
 </file>
 
 <file path=ppt/slides/slide14.xml><?xml version="1.0" encoding="utf-8"?>
-<p:sld xmlns:a="http://schemas.openxmlformats.org/drawingml/2006/main" xmlns:p="http://schemas.openxmlformats.org/presentationml/2006/main" xmlns:r="http://schemas.openxmlformats.org/officeDocument/2006/relationships">
+<p:sld xmlns:a="http://schemas.openxmlformats.org/drawingml/2006/main" xmlns:r="http://schemas.openxmlformats.org/officeDocument/2006/relationships" xmlns:p="http://schemas.openxmlformats.org/presentationml/2006/main">
   <p:cSld>
     <p:bg>
       <p:bgPr>
@@ -5821,7 +5867,14 @@
         <p:cNvGrpSpPr/>
         <p:nvPr/>
       </p:nvGrpSpPr>
-      <p:grpSpPr/>
+      <p:grpSpPr>
+        <a:xfrm>
+          <a:off x="0" y="0"/>
+          <a:ext cx="0" cy="0"/>
+          <a:chOff x="0" y="0"/>
+          <a:chExt cx="0" cy="0"/>
+        </a:xfrm>
+      </p:grpSpPr>
       <p:sp>
         <p:nvSpPr>
           <p:cNvPr id="2" name="Rectangle 1"/>
@@ -5862,6 +5915,7 @@
           <a:lstStyle/>
           <a:p>
             <a:pPr algn="ctr"/>
+            <a:endParaRPr/>
           </a:p>
         </p:txBody>
       </p:sp>
@@ -5977,6 +6031,7 @@
           <a:lstStyle/>
           <a:p>
             <a:pPr algn="ctr"/>
+            <a:endParaRPr/>
           </a:p>
         </p:txBody>
       </p:sp>
@@ -6056,6 +6111,7 @@
           <a:lstStyle/>
           <a:p>
             <a:pPr algn="ctr"/>
+            <a:endParaRPr/>
           </a:p>
         </p:txBody>
       </p:sp>
@@ -6135,6 +6191,7 @@
           <a:lstStyle/>
           <a:p>
             <a:pPr algn="ctr"/>
+            <a:endParaRPr/>
           </a:p>
         </p:txBody>
       </p:sp>
@@ -6214,6 +6271,7 @@
           <a:lstStyle/>
           <a:p>
             <a:pPr algn="ctr"/>
+            <a:endParaRPr/>
           </a:p>
         </p:txBody>
       </p:sp>
@@ -6293,6 +6351,7 @@
           <a:lstStyle/>
           <a:p>
             <a:pPr algn="ctr"/>
+            <a:endParaRPr/>
           </a:p>
         </p:txBody>
       </p:sp>
@@ -6372,6 +6431,7 @@
           <a:lstStyle/>
           <a:p>
             <a:pPr algn="ctr"/>
+            <a:endParaRPr/>
           </a:p>
         </p:txBody>
       </p:sp>
@@ -6451,6 +6511,7 @@
           <a:lstStyle/>
           <a:p>
             <a:pPr algn="ctr"/>
+            <a:endParaRPr/>
           </a:p>
         </p:txBody>
       </p:sp>
@@ -6530,6 +6591,7 @@
           <a:lstStyle/>
           <a:p>
             <a:pPr algn="ctr"/>
+            <a:endParaRPr/>
           </a:p>
         </p:txBody>
       </p:sp>
@@ -6609,6 +6671,7 @@
           <a:lstStyle/>
           <a:p>
             <a:pPr algn="ctr"/>
+            <a:endParaRPr/>
           </a:p>
         </p:txBody>
       </p:sp>
@@ -6688,6 +6751,7 @@
           <a:lstStyle/>
           <a:p>
             <a:pPr algn="ctr"/>
+            <a:endParaRPr/>
           </a:p>
         </p:txBody>
       </p:sp>
@@ -6767,6 +6831,7 @@
           <a:lstStyle/>
           <a:p>
             <a:pPr algn="ctr"/>
+            <a:endParaRPr/>
           </a:p>
         </p:txBody>
       </p:sp>
@@ -6846,6 +6911,7 @@
           <a:lstStyle/>
           <a:p>
             <a:pPr algn="ctr"/>
+            <a:endParaRPr/>
           </a:p>
         </p:txBody>
       </p:sp>
@@ -6925,6 +6991,7 @@
           <a:lstStyle/>
           <a:p>
             <a:pPr algn="ctr"/>
+            <a:endParaRPr/>
           </a:p>
         </p:txBody>
       </p:sp>
@@ -7004,6 +7071,7 @@
           <a:lstStyle/>
           <a:p>
             <a:pPr algn="ctr"/>
+            <a:endParaRPr/>
           </a:p>
         </p:txBody>
       </p:sp>
@@ -7083,6 +7151,7 @@
           <a:lstStyle/>
           <a:p>
             <a:pPr algn="ctr"/>
+            <a:endParaRPr/>
           </a:p>
         </p:txBody>
       </p:sp>
@@ -7337,6 +7406,7 @@
           <a:lstStyle/>
           <a:p>
             <a:pPr algn="ctr"/>
+            <a:endParaRPr/>
           </a:p>
         </p:txBody>
       </p:sp>
@@ -7452,6 +7522,7 @@
           <a:lstStyle/>
           <a:p>
             <a:pPr algn="ctr"/>
+            <a:endParaRPr/>
           </a:p>
         </p:txBody>
       </p:sp>
@@ -7500,7 +7571,7 @@
 </file>
 
 <file path=ppt/slides/slide15.xml><?xml version="1.0" encoding="utf-8"?>
-<p:sld xmlns:a="http://schemas.openxmlformats.org/drawingml/2006/main" xmlns:p="http://schemas.openxmlformats.org/presentationml/2006/main" xmlns:r="http://schemas.openxmlformats.org/officeDocument/2006/relationships">
+<p:sld xmlns:a="http://schemas.openxmlformats.org/drawingml/2006/main" xmlns:r="http://schemas.openxmlformats.org/officeDocument/2006/relationships" xmlns:p="http://schemas.openxmlformats.org/presentationml/2006/main">
   <p:cSld>
     <p:bg>
       <p:bgPr>
@@ -7516,7 +7587,14 @@
         <p:cNvGrpSpPr/>
         <p:nvPr/>
       </p:nvGrpSpPr>
-      <p:grpSpPr/>
+      <p:grpSpPr>
+        <a:xfrm>
+          <a:off x="0" y="0"/>
+          <a:ext cx="0" cy="0"/>
+          <a:chOff x="0" y="0"/>
+          <a:chExt cx="0" cy="0"/>
+        </a:xfrm>
+      </p:grpSpPr>
       <p:sp>
         <p:nvSpPr>
           <p:cNvPr id="2" name="Rectangle 1"/>
@@ -7557,6 +7635,7 @@
           <a:lstStyle/>
           <a:p>
             <a:pPr algn="ctr"/>
+            <a:endParaRPr/>
           </a:p>
         </p:txBody>
       </p:sp>
@@ -7636,6 +7715,7 @@
           <a:lstStyle/>
           <a:p>
             <a:pPr algn="ctr"/>
+            <a:endParaRPr/>
           </a:p>
         </p:txBody>
       </p:sp>
@@ -7818,6 +7898,7 @@
           <a:lstStyle/>
           <a:p>
             <a:pPr algn="ctr"/>
+            <a:endParaRPr/>
           </a:p>
         </p:txBody>
       </p:sp>
@@ -8000,6 +8081,7 @@
           <a:lstStyle/>
           <a:p>
             <a:pPr algn="ctr"/>
+            <a:endParaRPr/>
           </a:p>
         </p:txBody>
       </p:sp>
@@ -8115,6 +8197,7 @@
           <a:lstStyle/>
           <a:p>
             <a:pPr algn="ctr"/>
+            <a:endParaRPr/>
           </a:p>
         </p:txBody>
       </p:sp>
@@ -8148,6 +8231,7 @@
                 <a:latin typeface="Calibri"/>
               </a:defRPr>
             </a:pPr>
+            <a:endParaRPr/>
           </a:p>
         </p:txBody>
       </p:sp>
@@ -8191,6 +8275,7 @@
           <a:lstStyle/>
           <a:p>
             <a:pPr algn="ctr"/>
+            <a:endParaRPr/>
           </a:p>
         </p:txBody>
       </p:sp>
@@ -8270,6 +8355,7 @@
           <a:lstStyle/>
           <a:p>
             <a:pPr algn="ctr"/>
+            <a:endParaRPr/>
           </a:p>
         </p:txBody>
       </p:sp>
@@ -8349,6 +8435,7 @@
           <a:lstStyle/>
           <a:p>
             <a:pPr algn="ctr"/>
+            <a:endParaRPr/>
           </a:p>
         </p:txBody>
       </p:sp>
@@ -8428,6 +8515,7 @@
           <a:lstStyle/>
           <a:p>
             <a:pPr algn="ctr"/>
+            <a:endParaRPr/>
           </a:p>
         </p:txBody>
       </p:sp>
@@ -8507,6 +8595,7 @@
           <a:lstStyle/>
           <a:p>
             <a:pPr algn="ctr"/>
+            <a:endParaRPr/>
           </a:p>
         </p:txBody>
       </p:sp>
@@ -8586,6 +8675,7 @@
           <a:lstStyle/>
           <a:p>
             <a:pPr algn="ctr"/>
+            <a:endParaRPr/>
           </a:p>
         </p:txBody>
       </p:sp>
@@ -8665,6 +8755,7 @@
           <a:lstStyle/>
           <a:p>
             <a:pPr algn="ctr"/>
+            <a:endParaRPr/>
           </a:p>
         </p:txBody>
       </p:sp>
@@ -8744,6 +8835,7 @@
           <a:lstStyle/>
           <a:p>
             <a:pPr algn="ctr"/>
+            <a:endParaRPr/>
           </a:p>
         </p:txBody>
       </p:sp>
@@ -8823,6 +8915,7 @@
           <a:lstStyle/>
           <a:p>
             <a:pPr algn="ctr"/>
+            <a:endParaRPr/>
           </a:p>
         </p:txBody>
       </p:sp>
@@ -8902,6 +8995,7 @@
           <a:lstStyle/>
           <a:p>
             <a:pPr algn="ctr"/>
+            <a:endParaRPr/>
           </a:p>
         </p:txBody>
       </p:sp>
@@ -8981,6 +9075,7 @@
           <a:lstStyle/>
           <a:p>
             <a:pPr algn="ctr"/>
+            <a:endParaRPr/>
           </a:p>
         </p:txBody>
       </p:sp>
@@ -9060,6 +9155,7 @@
           <a:lstStyle/>
           <a:p>
             <a:pPr algn="ctr"/>
+            <a:endParaRPr/>
           </a:p>
         </p:txBody>
       </p:sp>
@@ -9139,6 +9235,7 @@
           <a:lstStyle/>
           <a:p>
             <a:pPr algn="ctr"/>
+            <a:endParaRPr/>
           </a:p>
         </p:txBody>
       </p:sp>
@@ -9218,6 +9315,7 @@
           <a:lstStyle/>
           <a:p>
             <a:pPr algn="ctr"/>
+            <a:endParaRPr/>
           </a:p>
         </p:txBody>
       </p:sp>
@@ -9297,6 +9395,7 @@
           <a:lstStyle/>
           <a:p>
             <a:pPr algn="ctr"/>
+            <a:endParaRPr/>
           </a:p>
         </p:txBody>
       </p:sp>
@@ -9376,6 +9475,7 @@
           <a:lstStyle/>
           <a:p>
             <a:pPr algn="ctr"/>
+            <a:endParaRPr/>
           </a:p>
         </p:txBody>
       </p:sp>
@@ -9455,6 +9555,7 @@
           <a:lstStyle/>
           <a:p>
             <a:pPr algn="ctr"/>
+            <a:endParaRPr/>
           </a:p>
         </p:txBody>
       </p:sp>
@@ -9534,6 +9635,7 @@
           <a:lstStyle/>
           <a:p>
             <a:pPr algn="ctr"/>
+            <a:endParaRPr/>
           </a:p>
         </p:txBody>
       </p:sp>
@@ -9613,6 +9715,7 @@
           <a:lstStyle/>
           <a:p>
             <a:pPr algn="ctr"/>
+            <a:endParaRPr/>
           </a:p>
         </p:txBody>
       </p:sp>
@@ -9692,6 +9795,7 @@
           <a:lstStyle/>
           <a:p>
             <a:pPr algn="ctr"/>
+            <a:endParaRPr/>
           </a:p>
         </p:txBody>
       </p:sp>
@@ -9771,6 +9875,7 @@
           <a:lstStyle/>
           <a:p>
             <a:pPr algn="ctr"/>
+            <a:endParaRPr/>
           </a:p>
         </p:txBody>
       </p:sp>
@@ -9850,6 +9955,7 @@
           <a:lstStyle/>
           <a:p>
             <a:pPr algn="ctr"/>
+            <a:endParaRPr/>
           </a:p>
         </p:txBody>
       </p:sp>
@@ -9929,6 +10035,7 @@
           <a:lstStyle/>
           <a:p>
             <a:pPr algn="ctr"/>
+            <a:endParaRPr/>
           </a:p>
         </p:txBody>
       </p:sp>
@@ -9977,7 +10084,7 @@
 </file>
 
 <file path=ppt/slides/slide16.xml><?xml version="1.0" encoding="utf-8"?>
-<p:sld xmlns:a="http://schemas.openxmlformats.org/drawingml/2006/main" xmlns:p="http://schemas.openxmlformats.org/presentationml/2006/main" xmlns:r="http://schemas.openxmlformats.org/officeDocument/2006/relationships">
+<p:sld xmlns:a="http://schemas.openxmlformats.org/drawingml/2006/main" xmlns:r="http://schemas.openxmlformats.org/officeDocument/2006/relationships" xmlns:p="http://schemas.openxmlformats.org/presentationml/2006/main">
   <p:cSld>
     <p:bg>
       <p:bgPr>
@@ -9993,7 +10100,14 @@
         <p:cNvGrpSpPr/>
         <p:nvPr/>
       </p:nvGrpSpPr>
-      <p:grpSpPr/>
+      <p:grpSpPr>
+        <a:xfrm>
+          <a:off x="0" y="0"/>
+          <a:ext cx="0" cy="0"/>
+          <a:chOff x="0" y="0"/>
+          <a:chExt cx="0" cy="0"/>
+        </a:xfrm>
+      </p:grpSpPr>
       <p:sp>
         <p:nvSpPr>
           <p:cNvPr id="2" name="Rectangle 1"/>
@@ -10034,6 +10148,7 @@
           <a:lstStyle/>
           <a:p>
             <a:pPr algn="ctr"/>
+            <a:endParaRPr/>
           </a:p>
         </p:txBody>
       </p:sp>
@@ -10149,6 +10264,7 @@
           <a:lstStyle/>
           <a:p>
             <a:pPr algn="ctr"/>
+            <a:endParaRPr/>
           </a:p>
         </p:txBody>
       </p:sp>
@@ -10228,6 +10344,7 @@
           <a:lstStyle/>
           <a:p>
             <a:pPr algn="ctr"/>
+            <a:endParaRPr/>
           </a:p>
         </p:txBody>
       </p:sp>
@@ -10307,6 +10424,7 @@
           <a:lstStyle/>
           <a:p>
             <a:pPr algn="ctr"/>
+            <a:endParaRPr/>
           </a:p>
         </p:txBody>
       </p:sp>
@@ -10386,6 +10504,7 @@
           <a:lstStyle/>
           <a:p>
             <a:pPr algn="ctr"/>
+            <a:endParaRPr/>
           </a:p>
         </p:txBody>
       </p:sp>
@@ -10465,6 +10584,7 @@
           <a:lstStyle/>
           <a:p>
             <a:pPr algn="ctr"/>
+            <a:endParaRPr/>
           </a:p>
         </p:txBody>
       </p:sp>
@@ -10544,6 +10664,7 @@
           <a:lstStyle/>
           <a:p>
             <a:pPr algn="ctr"/>
+            <a:endParaRPr/>
           </a:p>
         </p:txBody>
       </p:sp>
@@ -10623,6 +10744,7 @@
           <a:lstStyle/>
           <a:p>
             <a:pPr algn="ctr"/>
+            <a:endParaRPr/>
           </a:p>
         </p:txBody>
       </p:sp>
@@ -10702,6 +10824,7 @@
           <a:lstStyle/>
           <a:p>
             <a:pPr algn="ctr"/>
+            <a:endParaRPr/>
           </a:p>
         </p:txBody>
       </p:sp>
@@ -10781,6 +10904,7 @@
           <a:lstStyle/>
           <a:p>
             <a:pPr algn="ctr"/>
+            <a:endParaRPr/>
           </a:p>
         </p:txBody>
       </p:sp>
@@ -10860,6 +10984,7 @@
           <a:lstStyle/>
           <a:p>
             <a:pPr algn="ctr"/>
+            <a:endParaRPr/>
           </a:p>
         </p:txBody>
       </p:sp>
@@ -10939,6 +11064,7 @@
           <a:lstStyle/>
           <a:p>
             <a:pPr algn="ctr"/>
+            <a:endParaRPr/>
           </a:p>
         </p:txBody>
       </p:sp>
@@ -11018,6 +11144,7 @@
           <a:lstStyle/>
           <a:p>
             <a:pPr algn="ctr"/>
+            <a:endParaRPr/>
           </a:p>
         </p:txBody>
       </p:sp>
@@ -11097,6 +11224,7 @@
           <a:lstStyle/>
           <a:p>
             <a:pPr algn="ctr"/>
+            <a:endParaRPr/>
           </a:p>
         </p:txBody>
       </p:sp>
@@ -11176,6 +11304,7 @@
           <a:lstStyle/>
           <a:p>
             <a:pPr algn="ctr"/>
+            <a:endParaRPr/>
           </a:p>
         </p:txBody>
       </p:sp>
@@ -11255,6 +11384,7 @@
           <a:lstStyle/>
           <a:p>
             <a:pPr algn="ctr"/>
+            <a:endParaRPr/>
           </a:p>
         </p:txBody>
       </p:sp>
@@ -11334,6 +11464,7 @@
           <a:lstStyle/>
           <a:p>
             <a:pPr algn="ctr"/>
+            <a:endParaRPr/>
           </a:p>
         </p:txBody>
       </p:sp>
@@ -11413,6 +11544,7 @@
           <a:lstStyle/>
           <a:p>
             <a:pPr algn="ctr"/>
+            <a:endParaRPr/>
           </a:p>
         </p:txBody>
       </p:sp>
@@ -11492,6 +11624,7 @@
           <a:lstStyle/>
           <a:p>
             <a:pPr algn="ctr"/>
+            <a:endParaRPr/>
           </a:p>
         </p:txBody>
       </p:sp>
@@ -11571,6 +11704,7 @@
           <a:lstStyle/>
           <a:p>
             <a:pPr algn="ctr"/>
+            <a:endParaRPr/>
           </a:p>
         </p:txBody>
       </p:sp>
@@ -11650,6 +11784,7 @@
           <a:lstStyle/>
           <a:p>
             <a:pPr algn="ctr"/>
+            <a:endParaRPr/>
           </a:p>
         </p:txBody>
       </p:sp>
@@ -11729,6 +11864,7 @@
           <a:lstStyle/>
           <a:p>
             <a:pPr algn="ctr"/>
+            <a:endParaRPr/>
           </a:p>
         </p:txBody>
       </p:sp>
@@ -11808,6 +11944,7 @@
           <a:lstStyle/>
           <a:p>
             <a:pPr algn="ctr"/>
+            <a:endParaRPr/>
           </a:p>
         </p:txBody>
       </p:sp>
@@ -11887,6 +12024,7 @@
           <a:lstStyle/>
           <a:p>
             <a:pPr algn="ctr"/>
+            <a:endParaRPr/>
           </a:p>
         </p:txBody>
       </p:sp>
@@ -11966,6 +12104,7 @@
           <a:lstStyle/>
           <a:p>
             <a:pPr algn="ctr"/>
+            <a:endParaRPr/>
           </a:p>
         </p:txBody>
       </p:sp>
@@ -12045,6 +12184,7 @@
           <a:lstStyle/>
           <a:p>
             <a:pPr algn="ctr"/>
+            <a:endParaRPr/>
           </a:p>
         </p:txBody>
       </p:sp>
@@ -12124,6 +12264,7 @@
           <a:lstStyle/>
           <a:p>
             <a:pPr algn="ctr"/>
+            <a:endParaRPr/>
           </a:p>
         </p:txBody>
       </p:sp>
@@ -12203,6 +12344,7 @@
           <a:lstStyle/>
           <a:p>
             <a:pPr algn="ctr"/>
+            <a:endParaRPr/>
           </a:p>
         </p:txBody>
       </p:sp>
@@ -12282,6 +12424,7 @@
           <a:lstStyle/>
           <a:p>
             <a:pPr algn="ctr"/>
+            <a:endParaRPr/>
           </a:p>
         </p:txBody>
       </p:sp>
@@ -12361,6 +12504,7 @@
           <a:lstStyle/>
           <a:p>
             <a:pPr algn="ctr"/>
+            <a:endParaRPr/>
           </a:p>
         </p:txBody>
       </p:sp>
@@ -12440,6 +12584,7 @@
           <a:lstStyle/>
           <a:p>
             <a:pPr algn="ctr"/>
+            <a:endParaRPr/>
           </a:p>
         </p:txBody>
       </p:sp>
@@ -12519,6 +12664,7 @@
           <a:lstStyle/>
           <a:p>
             <a:pPr algn="ctr"/>
+            <a:endParaRPr/>
           </a:p>
         </p:txBody>
       </p:sp>
@@ -12598,6 +12744,7 @@
           <a:lstStyle/>
           <a:p>
             <a:pPr algn="ctr"/>
+            <a:endParaRPr/>
           </a:p>
         </p:txBody>
       </p:sp>
@@ -12677,6 +12824,7 @@
           <a:lstStyle/>
           <a:p>
             <a:pPr algn="ctr"/>
+            <a:endParaRPr/>
           </a:p>
         </p:txBody>
       </p:sp>
@@ -12756,6 +12904,7 @@
           <a:lstStyle/>
           <a:p>
             <a:pPr algn="ctr"/>
+            <a:endParaRPr/>
           </a:p>
         </p:txBody>
       </p:sp>
@@ -12835,6 +12984,7 @@
           <a:lstStyle/>
           <a:p>
             <a:pPr algn="ctr"/>
+            <a:endParaRPr/>
           </a:p>
         </p:txBody>
       </p:sp>
@@ -12914,6 +13064,7 @@
           <a:lstStyle/>
           <a:p>
             <a:pPr algn="ctr"/>
+            <a:endParaRPr/>
           </a:p>
         </p:txBody>
       </p:sp>
@@ -12993,6 +13144,7 @@
           <a:lstStyle/>
           <a:p>
             <a:pPr algn="ctr"/>
+            <a:endParaRPr/>
           </a:p>
         </p:txBody>
       </p:sp>
@@ -13223,6 +13375,7 @@
           <a:lstStyle/>
           <a:p>
             <a:pPr algn="ctr"/>
+            <a:endParaRPr/>
           </a:p>
         </p:txBody>
       </p:sp>
@@ -13271,7 +13424,7 @@
 </file>
 
 <file path=ppt/slides/slide17.xml><?xml version="1.0" encoding="utf-8"?>
-<p:sld xmlns:a="http://schemas.openxmlformats.org/drawingml/2006/main" xmlns:p="http://schemas.openxmlformats.org/presentationml/2006/main" xmlns:r="http://schemas.openxmlformats.org/officeDocument/2006/relationships">
+<p:sld xmlns:a="http://schemas.openxmlformats.org/drawingml/2006/main" xmlns:r="http://schemas.openxmlformats.org/officeDocument/2006/relationships" xmlns:p="http://schemas.openxmlformats.org/presentationml/2006/main">
   <p:cSld>
     <p:bg>
       <p:bgPr>
@@ -13287,7 +13440,14 @@
         <p:cNvGrpSpPr/>
         <p:nvPr/>
       </p:nvGrpSpPr>
-      <p:grpSpPr/>
+      <p:grpSpPr>
+        <a:xfrm>
+          <a:off x="0" y="0"/>
+          <a:ext cx="0" cy="0"/>
+          <a:chOff x="0" y="0"/>
+          <a:chExt cx="0" cy="0"/>
+        </a:xfrm>
+      </p:grpSpPr>
       <p:sp>
         <p:nvSpPr>
           <p:cNvPr id="2" name="Rectangle 1"/>
@@ -13328,6 +13488,7 @@
           <a:lstStyle/>
           <a:p>
             <a:pPr algn="ctr"/>
+            <a:endParaRPr/>
           </a:p>
         </p:txBody>
       </p:sp>
@@ -13412,7 +13573,7 @@
         <p:spPr>
           <a:xfrm>
             <a:off x="731520" y="1737360"/>
-            <a:ext cx="5029200" cy="4114800"/>
+            <a:ext cx="5029200" cy="2887970"/>
           </a:xfrm>
           <a:prstGeom prst="rect">
             <a:avLst/>
@@ -13437,6 +13598,7 @@
               </a:defRPr>
             </a:pPr>
             <a:r>
+              <a:rPr dirty="0"/>
               <a:t>• 5+ years in special care software — we know your workforce</a:t>
             </a:r>
           </a:p>
@@ -13453,7 +13615,24 @@
               </a:defRPr>
             </a:pPr>
             <a:r>
-              <a:t>• Arc Mercer is an existing IoTeye customer (SpringBoard &amp; Guardian)</a:t>
+              <a:rPr dirty="0"/>
+              <a:t>• Arc Mercer is an existing </a:t>
+            </a:r>
+            <a:r>
+              <a:rPr dirty="0" err="1"/>
+              <a:t>IoTeye</a:t>
+            </a:r>
+            <a:r>
+              <a:rPr dirty="0"/>
+              <a:t> customer (</a:t>
+            </a:r>
+            <a:r>
+              <a:rPr dirty="0" err="1"/>
+              <a:t>SpringBoard</a:t>
+            </a:r>
+            <a:r>
+              <a:rPr dirty="0"/>
+              <a:t> &amp; Guardian)</a:t>
             </a:r>
           </a:p>
           <a:p>
@@ -13469,7 +13648,24 @@
               </a:defRPr>
             </a:pPr>
             <a:r>
-              <a:t>• BrainClaw AI agents already in production at Arc Mercer (37+57 tools)</a:t>
+              <a:rPr dirty="0"/>
+              <a:t>• </a:t>
+            </a:r>
+            <a:r>
+              <a:rPr dirty="0" err="1"/>
+              <a:t>BrainClaw</a:t>
+            </a:r>
+            <a:r>
+              <a:rPr dirty="0"/>
+              <a:t> AI agents already in </a:t>
+            </a:r>
+            <a:r>
+              <a:rPr lang="en-US" dirty="0"/>
+              <a:t>trials</a:t>
+            </a:r>
+            <a:r>
+              <a:rPr dirty="0"/>
+              <a:t> at Arc Mercer (37+57 tools)</a:t>
             </a:r>
           </a:p>
           <a:p>
@@ -13485,6 +13681,7 @@
               </a:defRPr>
             </a:pPr>
             <a:r>
+              <a:rPr dirty="0"/>
               <a:t>• In-house Paycom &amp; Guardian integration experience at Arc Mercer, not a cold start</a:t>
             </a:r>
           </a:p>
@@ -13501,7 +13698,16 @@
               </a:defRPr>
             </a:pPr>
             <a:r>
-              <a:t>• Three flexible pricing options: full ownership, SaaS, or shared (50/50)</a:t>
+              <a:rPr dirty="0"/>
+              <a:t>• Three flexible pricing options: full ownership, SaaS, or </a:t>
+            </a:r>
+            <a:r>
+              <a:rPr lang="en-US" dirty="0"/>
+              <a:t>Shared Partner</a:t>
+            </a:r>
+            <a:r>
+              <a:rPr dirty="0"/>
+              <a:t> (50/50)</a:t>
             </a:r>
           </a:p>
           <a:p>
@@ -13517,6 +13723,7 @@
               </a:defRPr>
             </a:pPr>
             <a:r>
+              <a:rPr dirty="0"/>
               <a:t>• AI-assisted add-ons FREE — pay only AI LLM usage (pass-through)</a:t>
             </a:r>
           </a:p>
@@ -13701,6 +13908,7 @@
           <a:lstStyle/>
           <a:p>
             <a:pPr algn="ctr"/>
+            <a:endParaRPr/>
           </a:p>
         </p:txBody>
       </p:sp>
@@ -13833,7 +14041,7 @@
 </file>
 
 <file path=ppt/slides/slide2.xml><?xml version="1.0" encoding="utf-8"?>
-<p:sld xmlns:a="http://schemas.openxmlformats.org/drawingml/2006/main" xmlns:p="http://schemas.openxmlformats.org/presentationml/2006/main" xmlns:r="http://schemas.openxmlformats.org/officeDocument/2006/relationships">
+<p:sld xmlns:a="http://schemas.openxmlformats.org/drawingml/2006/main" xmlns:r="http://schemas.openxmlformats.org/officeDocument/2006/relationships" xmlns:p="http://schemas.openxmlformats.org/presentationml/2006/main">
   <p:cSld>
     <p:bg>
       <p:bgPr>
@@ -13849,7 +14057,14 @@
         <p:cNvGrpSpPr/>
         <p:nvPr/>
       </p:nvGrpSpPr>
-      <p:grpSpPr/>
+      <p:grpSpPr>
+        <a:xfrm>
+          <a:off x="0" y="0"/>
+          <a:ext cx="0" cy="0"/>
+          <a:chOff x="0" y="0"/>
+          <a:chExt cx="0" cy="0"/>
+        </a:xfrm>
+      </p:grpSpPr>
       <p:sp>
         <p:nvSpPr>
           <p:cNvPr id="2" name="Rectangle 1"/>
@@ -13890,6 +14105,7 @@
           <a:lstStyle/>
           <a:p>
             <a:pPr algn="ctr"/>
+            <a:endParaRPr/>
           </a:p>
         </p:txBody>
       </p:sp>
@@ -14121,7 +14337,7 @@
 </file>
 
 <file path=ppt/slides/slide3.xml><?xml version="1.0" encoding="utf-8"?>
-<p:sld xmlns:a="http://schemas.openxmlformats.org/drawingml/2006/main" xmlns:p="http://schemas.openxmlformats.org/presentationml/2006/main" xmlns:r="http://schemas.openxmlformats.org/officeDocument/2006/relationships">
+<p:sld xmlns:a="http://schemas.openxmlformats.org/drawingml/2006/main" xmlns:r="http://schemas.openxmlformats.org/officeDocument/2006/relationships" xmlns:p="http://schemas.openxmlformats.org/presentationml/2006/main">
   <p:cSld>
     <p:bg>
       <p:bgPr>
@@ -14137,7 +14353,14 @@
         <p:cNvGrpSpPr/>
         <p:nvPr/>
       </p:nvGrpSpPr>
-      <p:grpSpPr/>
+      <p:grpSpPr>
+        <a:xfrm>
+          <a:off x="0" y="0"/>
+          <a:ext cx="0" cy="0"/>
+          <a:chOff x="0" y="0"/>
+          <a:chExt cx="0" cy="0"/>
+        </a:xfrm>
+      </p:grpSpPr>
       <p:sp>
         <p:nvSpPr>
           <p:cNvPr id="2" name="Rectangle 1"/>
@@ -14178,6 +14401,7 @@
           <a:lstStyle/>
           <a:p>
             <a:pPr algn="ctr"/>
+            <a:endParaRPr/>
           </a:p>
         </p:txBody>
       </p:sp>
@@ -14488,7 +14712,7 @@
 </file>
 
 <file path=ppt/slides/slide4.xml><?xml version="1.0" encoding="utf-8"?>
-<p:sld xmlns:a="http://schemas.openxmlformats.org/drawingml/2006/main" xmlns:p="http://schemas.openxmlformats.org/presentationml/2006/main" xmlns:r="http://schemas.openxmlformats.org/officeDocument/2006/relationships">
+<p:sld xmlns:a="http://schemas.openxmlformats.org/drawingml/2006/main" xmlns:r="http://schemas.openxmlformats.org/officeDocument/2006/relationships" xmlns:p="http://schemas.openxmlformats.org/presentationml/2006/main">
   <p:cSld>
     <p:bg>
       <p:bgPr>
@@ -14504,7 +14728,14 @@
         <p:cNvGrpSpPr/>
         <p:nvPr/>
       </p:nvGrpSpPr>
-      <p:grpSpPr/>
+      <p:grpSpPr>
+        <a:xfrm>
+          <a:off x="0" y="0"/>
+          <a:ext cx="0" cy="0"/>
+          <a:chOff x="0" y="0"/>
+          <a:chExt cx="0" cy="0"/>
+        </a:xfrm>
+      </p:grpSpPr>
       <p:sp>
         <p:nvSpPr>
           <p:cNvPr id="2" name="Rectangle 1"/>
@@ -14545,6 +14776,7 @@
           <a:lstStyle/>
           <a:p>
             <a:pPr algn="ctr"/>
+            <a:endParaRPr/>
           </a:p>
         </p:txBody>
       </p:sp>
@@ -14624,6 +14856,7 @@
           <a:lstStyle/>
           <a:p>
             <a:pPr algn="ctr"/>
+            <a:endParaRPr/>
           </a:p>
         </p:txBody>
       </p:sp>
@@ -14838,6 +15071,7 @@
           <a:lstStyle/>
           <a:p>
             <a:pPr algn="ctr"/>
+            <a:endParaRPr/>
           </a:p>
         </p:txBody>
       </p:sp>
@@ -15138,7 +15372,7 @@
         <p:spPr>
           <a:xfrm>
             <a:off x="6629400" y="4480559"/>
-            <a:ext cx="4937760" cy="320040"/>
+            <a:ext cx="4937760" cy="292388"/>
           </a:xfrm>
           <a:prstGeom prst="rect">
             <a:avLst/>
@@ -15160,7 +15394,16 @@
               </a:defRPr>
             </a:pPr>
             <a:r>
-              <a:t>AI Agents — 94+ tools, GPT-4.1, Arc Mercer live</a:t>
+              <a:rPr dirty="0"/>
+              <a:t>AI Agents — 94+ tools, </a:t>
+            </a:r>
+            <a:r>
+              <a:rPr lang="en-US" dirty="0"/>
+              <a:t>Microsoft GitHub Copilot</a:t>
+            </a:r>
+            <a:r>
+              <a:rPr dirty="0"/>
+              <a:t>, Arc Mercer live</a:t>
             </a:r>
           </a:p>
         </p:txBody>
@@ -15174,7 +15417,7 @@
 </file>
 
 <file path=ppt/slides/slide5.xml><?xml version="1.0" encoding="utf-8"?>
-<p:sld xmlns:a="http://schemas.openxmlformats.org/drawingml/2006/main" xmlns:p="http://schemas.openxmlformats.org/presentationml/2006/main" xmlns:r="http://schemas.openxmlformats.org/officeDocument/2006/relationships">
+<p:sld xmlns:a="http://schemas.openxmlformats.org/drawingml/2006/main" xmlns:r="http://schemas.openxmlformats.org/officeDocument/2006/relationships" xmlns:p="http://schemas.openxmlformats.org/presentationml/2006/main">
   <p:cSld>
     <p:bg>
       <p:bgPr>
@@ -15190,7 +15433,14 @@
         <p:cNvGrpSpPr/>
         <p:nvPr/>
       </p:nvGrpSpPr>
-      <p:grpSpPr/>
+      <p:grpSpPr>
+        <a:xfrm>
+          <a:off x="0" y="0"/>
+          <a:ext cx="0" cy="0"/>
+          <a:chOff x="0" y="0"/>
+          <a:chExt cx="0" cy="0"/>
+        </a:xfrm>
+      </p:grpSpPr>
       <p:sp>
         <p:nvSpPr>
           <p:cNvPr id="2" name="Rectangle 1"/>
@@ -15231,6 +15481,7 @@
           <a:lstStyle/>
           <a:p>
             <a:pPr algn="ctr"/>
+            <a:endParaRPr/>
           </a:p>
         </p:txBody>
       </p:sp>
@@ -15337,7 +15588,24 @@
               </a:defRPr>
             </a:pPr>
             <a:r>
-              <a:t>Powered by BrainClaw + GPT-4.1 (GitHub Copilot)</a:t>
+              <a:rPr dirty="0"/>
+              <a:t>Powered by </a:t>
+            </a:r>
+            <a:r>
+              <a:rPr dirty="0" err="1"/>
+              <a:t>BrainClaw</a:t>
+            </a:r>
+            <a:r>
+              <a:rPr dirty="0"/>
+              <a:t> + </a:t>
+            </a:r>
+            <a:r>
+              <a:rPr lang="en-US" dirty="0"/>
+              <a:t>Microsoft </a:t>
+            </a:r>
+            <a:r>
+              <a:rPr dirty="0"/>
+              <a:t>GitHub Copilot</a:t>
             </a:r>
           </a:p>
         </p:txBody>
@@ -15376,7 +15644,16 @@
               </a:defRPr>
             </a:pPr>
             <a:r>
-              <a:t>• SpringBoard Agent — 37 tools</a:t>
+              <a:rPr dirty="0"/>
+              <a:t>• </a:t>
+            </a:r>
+            <a:r>
+              <a:rPr dirty="0" err="1"/>
+              <a:t>SpringBoard</a:t>
+            </a:r>
+            <a:r>
+              <a:rPr dirty="0"/>
+              <a:t> Agent — 37 tools</a:t>
             </a:r>
           </a:p>
           <a:p>
@@ -15392,6 +15669,7 @@
               </a:defRPr>
             </a:pPr>
             <a:r>
+              <a:rPr dirty="0"/>
               <a:t>•   Routes, fleet, consumers, optimization, SMS, GPS, SOS</a:t>
             </a:r>
           </a:p>
@@ -15408,6 +15686,7 @@
               </a:defRPr>
             </a:pPr>
             <a:r>
+              <a:rPr dirty="0"/>
               <a:t>• Samsara Agent — 57 tools</a:t>
             </a:r>
           </a:p>
@@ -15424,6 +15703,7 @@
               </a:defRPr>
             </a:pPr>
             <a:r>
+              <a:rPr dirty="0"/>
               <a:t>•   Vehicles, drivers, HOS, safety events, DVIRs, GPS</a:t>
             </a:r>
           </a:p>
@@ -15505,6 +15785,7 @@
           <a:lstStyle/>
           <a:p>
             <a:pPr algn="ctr"/>
+            <a:endParaRPr/>
           </a:p>
         </p:txBody>
       </p:sp>
@@ -15596,6 +15877,7 @@
           <a:lstStyle/>
           <a:p>
             <a:pPr algn="ctr"/>
+            <a:endParaRPr/>
           </a:p>
         </p:txBody>
       </p:sp>
@@ -15814,6 +16096,7 @@
           <a:lstStyle/>
           <a:p>
             <a:pPr algn="ctr"/>
+            <a:endParaRPr/>
           </a:p>
         </p:txBody>
       </p:sp>
@@ -15862,7 +16145,7 @@
 </file>
 
 <file path=ppt/slides/slide6.xml><?xml version="1.0" encoding="utf-8"?>
-<p:sld xmlns:a="http://schemas.openxmlformats.org/drawingml/2006/main" xmlns:p="http://schemas.openxmlformats.org/presentationml/2006/main" xmlns:r="http://schemas.openxmlformats.org/officeDocument/2006/relationships">
+<p:sld xmlns:a="http://schemas.openxmlformats.org/drawingml/2006/main" xmlns:r="http://schemas.openxmlformats.org/officeDocument/2006/relationships" xmlns:p="http://schemas.openxmlformats.org/presentationml/2006/main">
   <p:cSld>
     <p:bg>
       <p:bgPr>
@@ -15878,7 +16161,14 @@
         <p:cNvGrpSpPr/>
         <p:nvPr/>
       </p:nvGrpSpPr>
-      <p:grpSpPr/>
+      <p:grpSpPr>
+        <a:xfrm>
+          <a:off x="0" y="0"/>
+          <a:ext cx="0" cy="0"/>
+          <a:chOff x="0" y="0"/>
+          <a:chExt cx="0" cy="0"/>
+        </a:xfrm>
+      </p:grpSpPr>
       <p:sp>
         <p:nvSpPr>
           <p:cNvPr id="2" name="Rectangle 1"/>
@@ -15919,6 +16209,7 @@
           <a:lstStyle/>
           <a:p>
             <a:pPr algn="ctr"/>
+            <a:endParaRPr/>
           </a:p>
         </p:txBody>
       </p:sp>
@@ -16309,7 +16600,7 @@
 </file>
 
 <file path=ppt/slides/slide7.xml><?xml version="1.0" encoding="utf-8"?>
-<p:sld xmlns:a="http://schemas.openxmlformats.org/drawingml/2006/main" xmlns:p="http://schemas.openxmlformats.org/presentationml/2006/main" xmlns:r="http://schemas.openxmlformats.org/officeDocument/2006/relationships">
+<p:sld xmlns:a="http://schemas.openxmlformats.org/drawingml/2006/main" xmlns:r="http://schemas.openxmlformats.org/officeDocument/2006/relationships" xmlns:p="http://schemas.openxmlformats.org/presentationml/2006/main">
   <p:cSld>
     <p:bg>
       <p:bgPr>
@@ -16325,7 +16616,14 @@
         <p:cNvGrpSpPr/>
         <p:nvPr/>
       </p:nvGrpSpPr>
-      <p:grpSpPr/>
+      <p:grpSpPr>
+        <a:xfrm>
+          <a:off x="0" y="0"/>
+          <a:ext cx="0" cy="0"/>
+          <a:chOff x="0" y="0"/>
+          <a:chExt cx="0" cy="0"/>
+        </a:xfrm>
+      </p:grpSpPr>
       <p:sp>
         <p:nvSpPr>
           <p:cNvPr id="2" name="Rectangle 1"/>
@@ -16366,6 +16664,7 @@
           <a:lstStyle/>
           <a:p>
             <a:pPr algn="ctr"/>
+            <a:endParaRPr/>
           </a:p>
         </p:txBody>
       </p:sp>
@@ -16481,6 +16780,7 @@
           <a:lstStyle/>
           <a:p>
             <a:pPr algn="ctr"/>
+            <a:endParaRPr/>
           </a:p>
         </p:txBody>
       </p:sp>
@@ -16596,6 +16896,7 @@
           <a:lstStyle/>
           <a:p>
             <a:pPr algn="ctr"/>
+            <a:endParaRPr/>
           </a:p>
         </p:txBody>
       </p:sp>
@@ -16711,6 +17012,7 @@
           <a:lstStyle/>
           <a:p>
             <a:pPr algn="ctr"/>
+            <a:endParaRPr/>
           </a:p>
         </p:txBody>
       </p:sp>
@@ -16826,6 +17128,7 @@
           <a:lstStyle/>
           <a:p>
             <a:pPr algn="ctr"/>
+            <a:endParaRPr/>
           </a:p>
         </p:txBody>
       </p:sp>
@@ -16896,6 +17199,7 @@
               </a:defRPr>
             </a:pPr>
             <a:r>
+              <a:rPr dirty="0"/>
               <a:t>ECS Fargate, CloudFront, S3, WAF, CloudWatch</a:t>
             </a:r>
           </a:p>
@@ -16910,7 +17214,7 @@
         <p:spPr>
           <a:xfrm>
             <a:off x="731520" y="5943600"/>
-            <a:ext cx="10058400" cy="457200"/>
+            <a:ext cx="10058400" cy="307777"/>
           </a:xfrm>
           <a:prstGeom prst="rect">
             <a:avLst/>
@@ -16932,7 +17236,8 @@
               </a:defRPr>
             </a:pPr>
             <a:r>
-              <a:t>Security: AES-256 at rest  |  TLS 1.3 in transit  |  WCAG AAA  |  Full audit logging</a:t>
+              <a:rPr dirty="0"/>
+              <a:t>Security: AES-256 at rest  |  TLS 1.3 in transit  |  Full audit logging</a:t>
             </a:r>
           </a:p>
         </p:txBody>
@@ -16946,7 +17251,7 @@
 </file>
 
 <file path=ppt/slides/slide8.xml><?xml version="1.0" encoding="utf-8"?>
-<p:sld xmlns:a="http://schemas.openxmlformats.org/drawingml/2006/main" xmlns:p="http://schemas.openxmlformats.org/presentationml/2006/main" xmlns:r="http://schemas.openxmlformats.org/officeDocument/2006/relationships">
+<p:sld xmlns:a="http://schemas.openxmlformats.org/drawingml/2006/main" xmlns:r="http://schemas.openxmlformats.org/officeDocument/2006/relationships" xmlns:p="http://schemas.openxmlformats.org/presentationml/2006/main">
   <p:cSld>
     <p:bg>
       <p:bgPr>
@@ -16962,7 +17267,14 @@
         <p:cNvGrpSpPr/>
         <p:nvPr/>
       </p:nvGrpSpPr>
-      <p:grpSpPr/>
+      <p:grpSpPr>
+        <a:xfrm>
+          <a:off x="0" y="0"/>
+          <a:ext cx="0" cy="0"/>
+          <a:chOff x="0" y="0"/>
+          <a:chExt cx="0" cy="0"/>
+        </a:xfrm>
+      </p:grpSpPr>
       <p:sp>
         <p:nvSpPr>
           <p:cNvPr id="2" name="Rectangle 1"/>
@@ -17003,6 +17315,7 @@
           <a:lstStyle/>
           <a:p>
             <a:pPr algn="ctr"/>
+            <a:endParaRPr/>
           </a:p>
         </p:txBody>
       </p:sp>
@@ -17412,7 +17725,7 @@
 </file>
 
 <file path=ppt/slides/slide9.xml><?xml version="1.0" encoding="utf-8"?>
-<p:sld xmlns:a="http://schemas.openxmlformats.org/drawingml/2006/main" xmlns:p="http://schemas.openxmlformats.org/presentationml/2006/main" xmlns:r="http://schemas.openxmlformats.org/officeDocument/2006/relationships">
+<p:sld xmlns:a="http://schemas.openxmlformats.org/drawingml/2006/main" xmlns:r="http://schemas.openxmlformats.org/officeDocument/2006/relationships" xmlns:p="http://schemas.openxmlformats.org/presentationml/2006/main">
   <p:cSld>
     <p:bg>
       <p:bgPr>
@@ -17428,7 +17741,14 @@
         <p:cNvGrpSpPr/>
         <p:nvPr/>
       </p:nvGrpSpPr>
-      <p:grpSpPr/>
+      <p:grpSpPr>
+        <a:xfrm>
+          <a:off x="0" y="0"/>
+          <a:ext cx="0" cy="0"/>
+          <a:chOff x="0" y="0"/>
+          <a:chExt cx="0" cy="0"/>
+        </a:xfrm>
+      </p:grpSpPr>
       <p:sp>
         <p:nvSpPr>
           <p:cNvPr id="2" name="Rectangle 1"/>
@@ -17469,6 +17789,7 @@
           <a:lstStyle/>
           <a:p>
             <a:pPr algn="ctr"/>
+            <a:endParaRPr/>
           </a:p>
         </p:txBody>
       </p:sp>
@@ -17584,6 +17905,7 @@
           <a:lstStyle/>
           <a:p>
             <a:pPr algn="ctr"/>
+            <a:endParaRPr/>
           </a:p>
         </p:txBody>
       </p:sp>
@@ -17699,6 +18021,7 @@
           <a:lstStyle/>
           <a:p>
             <a:pPr algn="ctr"/>
+            <a:endParaRPr/>
           </a:p>
         </p:txBody>
       </p:sp>
@@ -17814,6 +18137,7 @@
           <a:lstStyle/>
           <a:p>
             <a:pPr algn="ctr"/>
+            <a:endParaRPr/>
           </a:p>
         </p:txBody>
       </p:sp>
@@ -17929,6 +18253,7 @@
           <a:lstStyle/>
           <a:p>
             <a:pPr algn="ctr"/>
+            <a:endParaRPr/>
           </a:p>
         </p:txBody>
       </p:sp>
@@ -18044,6 +18369,7 @@
           <a:lstStyle/>
           <a:p>
             <a:pPr algn="ctr"/>
+            <a:endParaRPr/>
           </a:p>
         </p:txBody>
       </p:sp>
@@ -18159,6 +18485,7 @@
           <a:lstStyle/>
           <a:p>
             <a:pPr algn="ctr"/>
+            <a:endParaRPr/>
           </a:p>
         </p:txBody>
       </p:sp>
@@ -18274,6 +18601,7 @@
           <a:lstStyle/>
           <a:p>
             <a:pPr algn="ctr"/>
+            <a:endParaRPr/>
           </a:p>
         </p:txBody>
       </p:sp>
@@ -18389,6 +18717,7 @@
           <a:lstStyle/>
           <a:p>
             <a:pPr algn="ctr"/>
+            <a:endParaRPr/>
           </a:p>
         </p:txBody>
       </p:sp>
@@ -18504,6 +18833,7 @@
           <a:lstStyle/>
           <a:p>
             <a:pPr algn="ctr"/>
+            <a:endParaRPr/>
           </a:p>
         </p:txBody>
       </p:sp>
@@ -18619,6 +18949,7 @@
           <a:lstStyle/>
           <a:p>
             <a:pPr algn="ctr"/>
+            <a:endParaRPr/>
           </a:p>
         </p:txBody>
       </p:sp>
